--- a/output/wordlabs-colour-3day.pptx
+++ b/output/wordlabs-colour-3day.pptx
@@ -4240,7 +4240,7 @@
                 <a:ea typeface="Calibri" pitchFamily="34" charset="-122"/>
                 <a:cs typeface="Calibri" pitchFamily="34" charset="-120"/>
               </a:rPr>
-              <a:t>"hue or shade of light"</a:t>
+              <a:t>"hue, tint, or shade"</a:t>
             </a:r>
             <a:endParaRPr lang="en-US" sz="2200" dirty="0"/>
           </a:p>
@@ -5288,7 +5288,7 @@
                 <a:ea typeface="Calibri" pitchFamily="34" charset="-122"/>
                 <a:cs typeface="Calibri" pitchFamily="34" charset="-120"/>
               </a:rPr>
-              <a:t>Word Labs  •  wordlabs.app  •  Root: 'colour' = hue or shade of light</a:t>
+              <a:t>Word Labs  •  wordlabs.app  •  Root: 'colour' = hue, tint, or shade</a:t>
             </a:r>
             <a:endParaRPr lang="en-US" sz="800" dirty="0"/>
           </a:p>
@@ -5928,7 +5928,7 @@
                 <a:ea typeface="Calibri" pitchFamily="34" charset="-122"/>
                 <a:cs typeface="Calibri" pitchFamily="34" charset="-120"/>
               </a:rPr>
-              <a:t>Word Labs  •  wordlabs.app  •  Root: 'colour' = hue or shade of light</a:t>
+              <a:t>Word Labs  •  wordlabs.app  •  Root: 'colour' = hue, tint, or shade</a:t>
             </a:r>
             <a:endParaRPr lang="en-US" sz="800" dirty="0"/>
           </a:p>
@@ -6057,7 +6057,7 @@
                 <a:ea typeface="Calibri" pitchFamily="34" charset="-122"/>
                 <a:cs typeface="Calibri" pitchFamily="34" charset="-120"/>
               </a:rPr>
-              <a:t>colouring</a:t>
+              <a:t>colourful</a:t>
             </a:r>
             <a:pPr algn="l" indent="0" marL="0">
               <a:buNone/>
@@ -6071,7 +6071,7 @@
                 <a:ea typeface="Calibri" pitchFamily="34" charset="-122"/>
                 <a:cs typeface="Calibri" pitchFamily="34" charset="-120"/>
               </a:rPr>
-              <a:t> book was full of </a:t>
+              <a:t> butterfly landed on a </a:t>
             </a:r>
             <a:pPr algn="l" indent="0" marL="0">
               <a:buNone/>
@@ -6088,7 +6088,7 @@
                 <a:ea typeface="Calibri" pitchFamily="34" charset="-122"/>
                 <a:cs typeface="Calibri" pitchFamily="34" charset="-120"/>
               </a:rPr>
-              <a:t>colourful</a:t>
+              <a:t>discoloured</a:t>
             </a:r>
             <a:pPr algn="l" indent="0" marL="0">
               <a:buNone/>
@@ -6102,7 +6102,7 @@
                 <a:ea typeface="Calibri" pitchFamily="34" charset="-122"/>
                 <a:cs typeface="Calibri" pitchFamily="34" charset="-120"/>
               </a:rPr>
-              <a:t> animals from around the world.</a:t>
+              <a:t> leaf near the pond.</a:t>
             </a:r>
             <a:endParaRPr lang="en-US" sz="1800" dirty="0"/>
           </a:p>
@@ -6257,7 +6257,7 @@
                 <a:ea typeface="Trebuchet MS" pitchFamily="34" charset="-122"/>
                 <a:cs typeface="Trebuchet MS" pitchFamily="34" charset="-120"/>
               </a:rPr>
-              <a:t>colouring</a:t>
+              <a:t>colourful</a:t>
             </a:r>
             <a:endParaRPr lang="en-US" sz="1400" dirty="0"/>
           </a:p>
@@ -6385,7 +6385,7 @@
                 <a:ea typeface="Trebuchet MS" pitchFamily="34" charset="-122"/>
                 <a:cs typeface="Trebuchet MS" pitchFamily="34" charset="-120"/>
               </a:rPr>
-              <a:t>colourful</a:t>
+              <a:t>discoloured</a:t>
             </a:r>
             <a:endParaRPr lang="en-US" sz="1400" dirty="0"/>
           </a:p>
@@ -6716,7 +6716,7 @@
                 <a:ea typeface="Calibri" pitchFamily="34" charset="-122"/>
                 <a:cs typeface="Calibri" pitchFamily="34" charset="-120"/>
               </a:rPr>
-              <a:t>Word Labs  •  wordlabs.app  •  Root: 'colour' = hue or shade of light</a:t>
+              <a:t>Word Labs  •  wordlabs.app  •  Root: 'colour' = hue, tint, or shade</a:t>
             </a:r>
             <a:endParaRPr lang="en-US" sz="800" dirty="0"/>
           </a:p>
@@ -6855,7 +6855,7 @@
                 <a:ea typeface="Trebuchet MS" pitchFamily="34" charset="-122"/>
                 <a:cs typeface="Trebuchet MS" pitchFamily="34" charset="-120"/>
               </a:rPr>
-              <a:t>colouring</a:t>
+              <a:t>colourful</a:t>
             </a:r>
             <a:endParaRPr lang="en-US" sz="2800" dirty="0"/>
           </a:p>
@@ -7543,7 +7543,7 @@
                 <a:ea typeface="Calibri" pitchFamily="34" charset="-122"/>
                 <a:cs typeface="Calibri" pitchFamily="34" charset="-120"/>
               </a:rPr>
-              <a:t>Word Labs  •  wordlabs.app  •  Root: 'colour' = hue or shade of light</a:t>
+              <a:t>Word Labs  •  wordlabs.app  •  Root: 'colour' = hue, tint, or shade</a:t>
             </a:r>
             <a:endParaRPr lang="en-US" sz="800" dirty="0"/>
           </a:p>
@@ -7682,7 +7682,7 @@
                 <a:ea typeface="Trebuchet MS" pitchFamily="34" charset="-122"/>
                 <a:cs typeface="Trebuchet MS" pitchFamily="34" charset="-120"/>
               </a:rPr>
-              <a:t>colouring</a:t>
+              <a:t>colourful</a:t>
             </a:r>
             <a:endParaRPr lang="en-US" sz="2800" dirty="0"/>
           </a:p>
@@ -7933,7 +7933,7 @@
                 <a:ea typeface="Trebuchet MS" pitchFamily="34" charset="-122"/>
                 <a:cs typeface="Trebuchet MS" pitchFamily="34" charset="-120"/>
               </a:rPr>
-              <a:t>ing</a:t>
+              <a:t>ful</a:t>
             </a:r>
             <a:endParaRPr lang="en-US" sz="1300" dirty="0"/>
           </a:p>
@@ -7972,7 +7972,7 @@
                 <a:ea typeface="Calibri" pitchFamily="34" charset="-122"/>
                 <a:cs typeface="Calibri" pitchFamily="34" charset="-120"/>
               </a:rPr>
-              <a:t>action or process</a:t>
+              <a:t>full of</a:t>
             </a:r>
             <a:endParaRPr lang="en-US" sz="850" dirty="0"/>
           </a:p>
@@ -8528,7 +8528,7 @@
                 <a:ea typeface="Calibri" pitchFamily="34" charset="-122"/>
                 <a:cs typeface="Calibri" pitchFamily="34" charset="-120"/>
               </a:rPr>
-              <a:t>Word Labs  •  wordlabs.app  •  Root: 'colour' = hue or shade of light</a:t>
+              <a:t>Word Labs  •  wordlabs.app  •  Root: 'colour' = hue, tint, or shade</a:t>
             </a:r>
             <a:endParaRPr lang="en-US" sz="800" dirty="0"/>
           </a:p>
@@ -8667,7 +8667,7 @@
                 <a:ea typeface="Trebuchet MS" pitchFamily="34" charset="-122"/>
                 <a:cs typeface="Trebuchet MS" pitchFamily="34" charset="-120"/>
               </a:rPr>
-              <a:t>colouring</a:t>
+              <a:t>colourful</a:t>
             </a:r>
             <a:endParaRPr lang="en-US" sz="2800" dirty="0"/>
           </a:p>
@@ -8918,7 +8918,7 @@
                 <a:ea typeface="Trebuchet MS" pitchFamily="34" charset="-122"/>
                 <a:cs typeface="Trebuchet MS" pitchFamily="34" charset="-120"/>
               </a:rPr>
-              <a:t>ing</a:t>
+              <a:t>ful</a:t>
             </a:r>
             <a:endParaRPr lang="en-US" sz="1300" dirty="0"/>
           </a:p>
@@ -8957,7 +8957,7 @@
                 <a:ea typeface="Calibri" pitchFamily="34" charset="-122"/>
                 <a:cs typeface="Calibri" pitchFamily="34" charset="-120"/>
               </a:rPr>
-              <a:t>action or process</a:t>
+              <a:t>full of</a:t>
             </a:r>
             <a:endParaRPr lang="en-US" sz="850" dirty="0"/>
           </a:p>
@@ -9326,7 +9326,7 @@
                 <a:ea typeface="Trebuchet MS" pitchFamily="34" charset="-122"/>
                 <a:cs typeface="Trebuchet MS" pitchFamily="34" charset="-120"/>
               </a:rPr>
-              <a:t>ing</a:t>
+              <a:t>ful</a:t>
             </a:r>
             <a:endParaRPr lang="en-US" sz="1400" dirty="0"/>
           </a:p>
@@ -9750,7 +9750,7 @@
                 <a:ea typeface="Calibri" pitchFamily="34" charset="-122"/>
                 <a:cs typeface="Calibri" pitchFamily="34" charset="-120"/>
               </a:rPr>
-              <a:t>Word Labs  •  wordlabs.app  •  Root: 'colour' = hue or shade of light</a:t>
+              <a:t>Word Labs  •  wordlabs.app  •  Root: 'colour' = hue, tint, or shade</a:t>
             </a:r>
             <a:endParaRPr lang="en-US" sz="800" dirty="0"/>
           </a:p>
@@ -9889,7 +9889,7 @@
                 <a:ea typeface="Trebuchet MS" pitchFamily="34" charset="-122"/>
                 <a:cs typeface="Trebuchet MS" pitchFamily="34" charset="-120"/>
               </a:rPr>
-              <a:t>colouring</a:t>
+              <a:t>colourful</a:t>
             </a:r>
             <a:endParaRPr lang="en-US" sz="2800" dirty="0"/>
           </a:p>
@@ -10140,7 +10140,7 @@
                 <a:ea typeface="Trebuchet MS" pitchFamily="34" charset="-122"/>
                 <a:cs typeface="Trebuchet MS" pitchFamily="34" charset="-120"/>
               </a:rPr>
-              <a:t>ing</a:t>
+              <a:t>ful</a:t>
             </a:r>
             <a:endParaRPr lang="en-US" sz="1300" dirty="0"/>
           </a:p>
@@ -10179,7 +10179,7 @@
                 <a:ea typeface="Calibri" pitchFamily="34" charset="-122"/>
                 <a:cs typeface="Calibri" pitchFamily="34" charset="-120"/>
               </a:rPr>
-              <a:t>action or process</a:t>
+              <a:t>full of</a:t>
             </a:r>
             <a:endParaRPr lang="en-US" sz="850" dirty="0"/>
           </a:p>
@@ -10548,7 +10548,7 @@
                 <a:ea typeface="Trebuchet MS" pitchFamily="34" charset="-122"/>
                 <a:cs typeface="Trebuchet MS" pitchFamily="34" charset="-120"/>
               </a:rPr>
-              <a:t>ing</a:t>
+              <a:t>ful</a:t>
             </a:r>
             <a:endParaRPr lang="en-US" sz="1400" dirty="0"/>
           </a:p>
@@ -10655,7 +10655,7 @@
         </p:nvSpPr>
         <p:spPr>
           <a:xfrm>
-            <a:off x="2124837" y="4169664"/>
+            <a:off x="2023872" y="4169664"/>
             <a:ext cx="685800" cy="384048"/>
           </a:xfrm>
           <a:prstGeom prst="rect">
@@ -10682,7 +10682,7 @@
         </p:nvSpPr>
         <p:spPr>
           <a:xfrm>
-            <a:off x="2124837" y="4169664"/>
+            <a:off x="2023872" y="4169664"/>
             <a:ext cx="685800" cy="384048"/>
           </a:xfrm>
           <a:prstGeom prst="rect">
@@ -10721,7 +10721,7 @@
         </p:nvSpPr>
         <p:spPr>
           <a:xfrm>
-            <a:off x="2124837" y="4572000"/>
+            <a:off x="2023872" y="4572000"/>
             <a:ext cx="685800" cy="219456"/>
           </a:xfrm>
           <a:prstGeom prst="rect">
@@ -10760,7 +10760,7 @@
         </p:nvSpPr>
         <p:spPr>
           <a:xfrm>
-            <a:off x="3033522" y="4169664"/>
+            <a:off x="2831592" y="4169664"/>
             <a:ext cx="685800" cy="384048"/>
           </a:xfrm>
           <a:prstGeom prst="rect">
@@ -10787,7 +10787,7 @@
         </p:nvSpPr>
         <p:spPr>
           <a:xfrm>
-            <a:off x="3033522" y="4169664"/>
+            <a:off x="2831592" y="4169664"/>
             <a:ext cx="685800" cy="384048"/>
           </a:xfrm>
           <a:prstGeom prst="rect">
@@ -10826,7 +10826,7 @@
         </p:nvSpPr>
         <p:spPr>
           <a:xfrm>
-            <a:off x="3942207" y="4169664"/>
+            <a:off x="3639312" y="4169664"/>
             <a:ext cx="685800" cy="384048"/>
           </a:xfrm>
           <a:prstGeom prst="rect">
@@ -10853,7 +10853,7 @@
         </p:nvSpPr>
         <p:spPr>
           <a:xfrm>
-            <a:off x="3942207" y="4169664"/>
+            <a:off x="3639312" y="4169664"/>
             <a:ext cx="685800" cy="384048"/>
           </a:xfrm>
           <a:prstGeom prst="rect">
@@ -10892,7 +10892,7 @@
         </p:nvSpPr>
         <p:spPr>
           <a:xfrm>
-            <a:off x="4850892" y="4169664"/>
+            <a:off x="4447032" y="4169664"/>
             <a:ext cx="685800" cy="384048"/>
           </a:xfrm>
           <a:prstGeom prst="rect">
@@ -10919,7 +10919,7 @@
         </p:nvSpPr>
         <p:spPr>
           <a:xfrm>
-            <a:off x="4850892" y="4169664"/>
+            <a:off x="4447032" y="4169664"/>
             <a:ext cx="685800" cy="384048"/>
           </a:xfrm>
           <a:prstGeom prst="rect">
@@ -10958,7 +10958,7 @@
         </p:nvSpPr>
         <p:spPr>
           <a:xfrm>
-            <a:off x="5759577" y="4169664"/>
+            <a:off x="5254752" y="4169664"/>
             <a:ext cx="685800" cy="384048"/>
           </a:xfrm>
           <a:prstGeom prst="rect">
@@ -10985,7 +10985,7 @@
         </p:nvSpPr>
         <p:spPr>
           <a:xfrm>
-            <a:off x="5759577" y="4169664"/>
+            <a:off x="5254752" y="4169664"/>
             <a:ext cx="685800" cy="384048"/>
           </a:xfrm>
           <a:prstGeom prst="rect">
@@ -11024,7 +11024,7 @@
         </p:nvSpPr>
         <p:spPr>
           <a:xfrm>
-            <a:off x="6668262" y="4169664"/>
+            <a:off x="6062472" y="4169664"/>
             <a:ext cx="685800" cy="384048"/>
           </a:xfrm>
           <a:prstGeom prst="rect">
@@ -11051,7 +11051,7 @@
         </p:nvSpPr>
         <p:spPr>
           <a:xfrm>
-            <a:off x="6668262" y="4169664"/>
+            <a:off x="6062472" y="4169664"/>
             <a:ext cx="685800" cy="384048"/>
           </a:xfrm>
           <a:prstGeom prst="rect">
@@ -11076,7 +11076,7 @@
                 <a:ea typeface="Trebuchet MS" pitchFamily="34" charset="-122"/>
                 <a:cs typeface="Trebuchet MS" pitchFamily="34" charset="-120"/>
               </a:rPr>
-              <a:t>i</a:t>
+              <a:t>f</a:t>
             </a:r>
             <a:endParaRPr lang="en-US" sz="900" dirty="0"/>
           </a:p>
@@ -11090,7 +11090,7 @@
         </p:nvSpPr>
         <p:spPr>
           <a:xfrm>
-            <a:off x="7576947" y="4169664"/>
+            <a:off x="6870192" y="4169664"/>
             <a:ext cx="685800" cy="384048"/>
           </a:xfrm>
           <a:prstGeom prst="rect">
@@ -11117,7 +11117,7 @@
         </p:nvSpPr>
         <p:spPr>
           <a:xfrm>
-            <a:off x="7576947" y="4169664"/>
+            <a:off x="6870192" y="4169664"/>
             <a:ext cx="685800" cy="384048"/>
           </a:xfrm>
           <a:prstGeom prst="rect">
@@ -11142,7 +11142,73 @@
                 <a:ea typeface="Trebuchet MS" pitchFamily="34" charset="-122"/>
                 <a:cs typeface="Trebuchet MS" pitchFamily="34" charset="-120"/>
               </a:rPr>
-              <a:t>ng</a:t>
+              <a:t>u</a:t>
+            </a:r>
+            <a:endParaRPr lang="en-US" sz="900" dirty="0"/>
+          </a:p>
+        </p:txBody>
+      </p:sp>
+      <p:sp>
+        <p:nvSpPr>
+          <p:cNvPr id="51" name="Shape 49"/>
+          <p:cNvSpPr/>
+          <p:nvPr/>
+        </p:nvSpPr>
+        <p:spPr>
+          <a:xfrm>
+            <a:off x="7677912" y="4169664"/>
+            <a:ext cx="685800" cy="384048"/>
+          </a:xfrm>
+          <a:prstGeom prst="rect">
+            <a:avLst>
+              <a:gd name="adj" fmla="val 9524"/>
+            </a:avLst>
+          </a:prstGeom>
+          <a:solidFill>
+            <a:srgbClr val="FFFFFF"/>
+          </a:solidFill>
+          <a:ln w="12700">
+            <a:solidFill>
+              <a:srgbClr val="DB2777"/>
+            </a:solidFill>
+            <a:prstDash val="solid"/>
+          </a:ln>
+        </p:spPr>
+      </p:sp>
+      <p:sp>
+        <p:nvSpPr>
+          <p:cNvPr id="52" name="Text 50"/>
+          <p:cNvSpPr/>
+          <p:nvPr/>
+        </p:nvSpPr>
+        <p:spPr>
+          <a:xfrm>
+            <a:off x="7677912" y="4169664"/>
+            <a:ext cx="685800" cy="384048"/>
+          </a:xfrm>
+          <a:prstGeom prst="rect">
+            <a:avLst/>
+          </a:prstGeom>
+          <a:noFill/>
+          <a:ln/>
+        </p:spPr>
+        <p:txBody>
+          <a:bodyPr wrap="square" lIns="0" tIns="0" rIns="0" bIns="0" rtlCol="0" anchor="ctr"/>
+          <a:lstStyle/>
+          <a:p>
+            <a:pPr algn="ctr" indent="0" marL="0">
+              <a:buNone/>
+            </a:pPr>
+            <a:r>
+              <a:rPr lang="en-US" sz="900" b="1" dirty="0">
+                <a:solidFill>
+                  <a:srgbClr val="9D174D"/>
+                </a:solidFill>
+                <a:latin typeface="Trebuchet MS" pitchFamily="34" charset="0"/>
+                <a:ea typeface="Trebuchet MS" pitchFamily="34" charset="-122"/>
+                <a:cs typeface="Trebuchet MS" pitchFamily="34" charset="-120"/>
+              </a:rPr>
+              <a:t>l</a:t>
             </a:r>
             <a:endParaRPr lang="en-US" sz="900" dirty="0"/>
           </a:p>
@@ -11434,7 +11500,7 @@
                 <a:ea typeface="Calibri" pitchFamily="34" charset="-122"/>
                 <a:cs typeface="Calibri" pitchFamily="34" charset="-120"/>
               </a:rPr>
-              <a:t>Word Labs  •  wordlabs.app  •  Root: 'colour' = hue or shade of light</a:t>
+              <a:t>Word Labs  •  wordlabs.app  •  Root: 'colour' = hue, tint, or shade</a:t>
             </a:r>
             <a:endParaRPr lang="en-US" sz="800" dirty="0"/>
           </a:p>
@@ -11573,7 +11639,7 @@
                 <a:ea typeface="Trebuchet MS" pitchFamily="34" charset="-122"/>
                 <a:cs typeface="Trebuchet MS" pitchFamily="34" charset="-120"/>
               </a:rPr>
-              <a:t>colourful</a:t>
+              <a:t>discoloured</a:t>
             </a:r>
             <a:endParaRPr lang="en-US" sz="2800" dirty="0"/>
           </a:p>
@@ -12261,7 +12327,7 @@
                 <a:ea typeface="Calibri" pitchFamily="34" charset="-122"/>
                 <a:cs typeface="Calibri" pitchFamily="34" charset="-120"/>
               </a:rPr>
-              <a:t>Word Labs  •  wordlabs.app  •  Root: 'colour' = hue or shade of light</a:t>
+              <a:t>Word Labs  •  wordlabs.app  •  Root: 'colour' = hue, tint, or shade</a:t>
             </a:r>
             <a:endParaRPr lang="en-US" sz="800" dirty="0"/>
           </a:p>
@@ -12400,7 +12466,7 @@
                 <a:ea typeface="Trebuchet MS" pitchFamily="34" charset="-122"/>
                 <a:cs typeface="Trebuchet MS" pitchFamily="34" charset="-120"/>
               </a:rPr>
-              <a:t>colourful</a:t>
+              <a:t>discoloured</a:t>
             </a:r>
             <a:endParaRPr lang="en-US" sz="2800" dirty="0"/>
           </a:p>
@@ -12480,7 +12546,7 @@
         </p:nvSpPr>
         <p:spPr>
           <a:xfrm>
-            <a:off x="2938272" y="2258568"/>
+            <a:off x="2221992" y="2258568"/>
             <a:ext cx="1828800" cy="292608"/>
           </a:xfrm>
           <a:prstGeom prst="rect">
@@ -12489,11 +12555,11 @@
             </a:avLst>
           </a:prstGeom>
           <a:solidFill>
-            <a:srgbClr val="CCFBF1"/>
+            <a:srgbClr val="DDD6FE"/>
           </a:solidFill>
           <a:ln w="19050">
             <a:solidFill>
-              <a:srgbClr val="0D9488"/>
+              <a:srgbClr val="7C3AED"/>
             </a:solidFill>
             <a:prstDash val="solid"/>
           </a:ln>
@@ -12514,7 +12580,7 @@
         </p:nvSpPr>
         <p:spPr>
           <a:xfrm>
-            <a:off x="2938272" y="2258568"/>
+            <a:off x="2221992" y="2258568"/>
             <a:ext cx="1828800" cy="292608"/>
           </a:xfrm>
           <a:prstGeom prst="rect">
@@ -12533,13 +12599,13 @@
             <a:r>
               <a:rPr lang="en-US" sz="1300" b="1" dirty="0">
                 <a:solidFill>
-                  <a:srgbClr val="0F766E"/>
+                  <a:srgbClr val="4C1D95"/>
                 </a:solidFill>
                 <a:latin typeface="Trebuchet MS" pitchFamily="34" charset="0"/>
                 <a:ea typeface="Trebuchet MS" pitchFamily="34" charset="-122"/>
                 <a:cs typeface="Trebuchet MS" pitchFamily="34" charset="-120"/>
               </a:rPr>
-              <a:t>colour</a:t>
+              <a:t>dis</a:t>
             </a:r>
             <a:endParaRPr lang="en-US" sz="1300" dirty="0"/>
           </a:p>
@@ -12553,7 +12619,7 @@
         </p:nvSpPr>
         <p:spPr>
           <a:xfrm>
-            <a:off x="2938272" y="2569464"/>
+            <a:off x="2221992" y="2569464"/>
             <a:ext cx="1828800" cy="201168"/>
           </a:xfrm>
           <a:prstGeom prst="rect">
@@ -12578,7 +12644,7 @@
                 <a:ea typeface="Calibri" pitchFamily="34" charset="-122"/>
                 <a:cs typeface="Calibri" pitchFamily="34" charset="-120"/>
               </a:rPr>
-              <a:t>hue or shade</a:t>
+              <a:t>not or reverse</a:t>
             </a:r>
             <a:endParaRPr lang="en-US" sz="850" dirty="0"/>
           </a:p>
@@ -12592,7 +12658,7 @@
         </p:nvSpPr>
         <p:spPr>
           <a:xfrm>
-            <a:off x="5803392" y="2258568"/>
+            <a:off x="4370832" y="2258568"/>
             <a:ext cx="1828800" cy="292608"/>
           </a:xfrm>
           <a:prstGeom prst="rect">
@@ -12601,11 +12667,11 @@
             </a:avLst>
           </a:prstGeom>
           <a:solidFill>
-            <a:srgbClr val="FCE7F3"/>
+            <a:srgbClr val="CCFBF1"/>
           </a:solidFill>
           <a:ln w="19050">
             <a:solidFill>
-              <a:srgbClr val="DB2777"/>
+              <a:srgbClr val="0D9488"/>
             </a:solidFill>
             <a:prstDash val="solid"/>
           </a:ln>
@@ -12626,7 +12692,7 @@
         </p:nvSpPr>
         <p:spPr>
           <a:xfrm>
-            <a:off x="5803392" y="2258568"/>
+            <a:off x="4370832" y="2258568"/>
             <a:ext cx="1828800" cy="292608"/>
           </a:xfrm>
           <a:prstGeom prst="rect">
@@ -12645,13 +12711,13 @@
             <a:r>
               <a:rPr lang="en-US" sz="1300" b="1" dirty="0">
                 <a:solidFill>
-                  <a:srgbClr val="9D174D"/>
+                  <a:srgbClr val="0F766E"/>
                 </a:solidFill>
                 <a:latin typeface="Trebuchet MS" pitchFamily="34" charset="0"/>
                 <a:ea typeface="Trebuchet MS" pitchFamily="34" charset="-122"/>
                 <a:cs typeface="Trebuchet MS" pitchFamily="34" charset="-120"/>
               </a:rPr>
-              <a:t>ful</a:t>
+              <a:t>colour</a:t>
             </a:r>
             <a:endParaRPr lang="en-US" sz="1300" dirty="0"/>
           </a:p>
@@ -12665,7 +12731,7 @@
         </p:nvSpPr>
         <p:spPr>
           <a:xfrm>
-            <a:off x="5803392" y="2569464"/>
+            <a:off x="4370832" y="2569464"/>
             <a:ext cx="1828800" cy="201168"/>
           </a:xfrm>
           <a:prstGeom prst="rect">
@@ -12690,7 +12756,7 @@
                 <a:ea typeface="Calibri" pitchFamily="34" charset="-122"/>
                 <a:cs typeface="Calibri" pitchFamily="34" charset="-120"/>
               </a:rPr>
-              <a:t>full of</a:t>
+              <a:t>hue or shade</a:t>
             </a:r>
             <a:endParaRPr lang="en-US" sz="850" dirty="0"/>
           </a:p>
@@ -12699,6 +12765,118 @@
       <p:sp>
         <p:nvSpPr>
           <p:cNvPr id="22" name="Shape 20"/>
+          <p:cNvSpPr/>
+          <p:nvPr/>
+        </p:nvSpPr>
+        <p:spPr>
+          <a:xfrm>
+            <a:off x="6519672" y="2258568"/>
+            <a:ext cx="1828800" cy="292608"/>
+          </a:xfrm>
+          <a:prstGeom prst="rect">
+            <a:avLst>
+              <a:gd name="adj" fmla="val 25000"/>
+            </a:avLst>
+          </a:prstGeom>
+          <a:solidFill>
+            <a:srgbClr val="FCE7F3"/>
+          </a:solidFill>
+          <a:ln w="19050">
+            <a:solidFill>
+              <a:srgbClr val="DB2777"/>
+            </a:solidFill>
+            <a:prstDash val="solid"/>
+          </a:ln>
+          <a:effectLst>
+            <a:outerShdw sx="100000" sy="100000" kx="0" ky="0" algn="bl" rotWithShape="0" blurRad="101600" dist="38100" dir="8100000">
+              <a:srgbClr val="000000">
+                <a:alpha val="12000"/>
+              </a:srgbClr>
+            </a:outerShdw>
+          </a:effectLst>
+        </p:spPr>
+      </p:sp>
+      <p:sp>
+        <p:nvSpPr>
+          <p:cNvPr id="23" name="Text 21"/>
+          <p:cNvSpPr/>
+          <p:nvPr/>
+        </p:nvSpPr>
+        <p:spPr>
+          <a:xfrm>
+            <a:off x="6519672" y="2258568"/>
+            <a:ext cx="1828800" cy="292608"/>
+          </a:xfrm>
+          <a:prstGeom prst="rect">
+            <a:avLst/>
+          </a:prstGeom>
+          <a:noFill/>
+          <a:ln/>
+        </p:spPr>
+        <p:txBody>
+          <a:bodyPr wrap="square" lIns="0" tIns="0" rIns="0" bIns="0" rtlCol="0" anchor="ctr"/>
+          <a:lstStyle/>
+          <a:p>
+            <a:pPr algn="ctr" indent="0" marL="0">
+              <a:buNone/>
+            </a:pPr>
+            <a:r>
+              <a:rPr lang="en-US" sz="1300" b="1" dirty="0">
+                <a:solidFill>
+                  <a:srgbClr val="9D174D"/>
+                </a:solidFill>
+                <a:latin typeface="Trebuchet MS" pitchFamily="34" charset="0"/>
+                <a:ea typeface="Trebuchet MS" pitchFamily="34" charset="-122"/>
+                <a:cs typeface="Trebuchet MS" pitchFamily="34" charset="-120"/>
+              </a:rPr>
+              <a:t>ed</a:t>
+            </a:r>
+            <a:endParaRPr lang="en-US" sz="1300" dirty="0"/>
+          </a:p>
+        </p:txBody>
+      </p:sp>
+      <p:sp>
+        <p:nvSpPr>
+          <p:cNvPr id="24" name="Text 22"/>
+          <p:cNvSpPr/>
+          <p:nvPr/>
+        </p:nvSpPr>
+        <p:spPr>
+          <a:xfrm>
+            <a:off x="6519672" y="2569464"/>
+            <a:ext cx="1828800" cy="201168"/>
+          </a:xfrm>
+          <a:prstGeom prst="rect">
+            <a:avLst/>
+          </a:prstGeom>
+          <a:noFill/>
+          <a:ln/>
+        </p:spPr>
+        <p:txBody>
+          <a:bodyPr wrap="square" lIns="0" tIns="0" rIns="0" bIns="0" rtlCol="0" anchor="t"/>
+          <a:lstStyle/>
+          <a:p>
+            <a:pPr algn="ctr" indent="0" marL="0">
+              <a:buNone/>
+            </a:pPr>
+            <a:r>
+              <a:rPr lang="en-US" sz="850" dirty="0">
+                <a:solidFill>
+                  <a:srgbClr val="475569"/>
+                </a:solidFill>
+                <a:latin typeface="Calibri" pitchFamily="34" charset="0"/>
+                <a:ea typeface="Calibri" pitchFamily="34" charset="-122"/>
+                <a:cs typeface="Calibri" pitchFamily="34" charset="-120"/>
+              </a:rPr>
+              <a:t>past tense</a:t>
+            </a:r>
+            <a:endParaRPr lang="en-US" sz="850" dirty="0"/>
+          </a:p>
+        </p:txBody>
+      </p:sp>
+      <p:sp>
+        <p:nvSpPr>
+          <p:cNvPr id="25" name="Shape 23"/>
           <p:cNvSpPr/>
           <p:nvPr/>
         </p:nvSpPr>
@@ -12725,7 +12903,7 @@
       </p:sp>
       <p:sp>
         <p:nvSpPr>
-          <p:cNvPr id="23" name="Text 21"/>
+          <p:cNvPr id="26" name="Text 24"/>
           <p:cNvSpPr/>
           <p:nvPr/>
         </p:nvSpPr>
@@ -12764,7 +12942,7 @@
       </p:sp>
       <p:sp>
         <p:nvSpPr>
-          <p:cNvPr id="24" name="Shape 22"/>
+          <p:cNvPr id="27" name="Shape 25"/>
           <p:cNvSpPr/>
           <p:nvPr/>
         </p:nvSpPr>
@@ -12791,7 +12969,7 @@
       </p:sp>
       <p:sp>
         <p:nvSpPr>
-          <p:cNvPr id="25" name="Text 23"/>
+          <p:cNvPr id="28" name="Text 26"/>
           <p:cNvSpPr/>
           <p:nvPr/>
         </p:nvSpPr>
@@ -12830,7 +13008,7 @@
       </p:sp>
       <p:sp>
         <p:nvSpPr>
-          <p:cNvPr id="26" name="Shape 24"/>
+          <p:cNvPr id="29" name="Shape 27"/>
           <p:cNvSpPr/>
           <p:nvPr/>
         </p:nvSpPr>
@@ -12857,7 +13035,7 @@
       </p:sp>
       <p:sp>
         <p:nvSpPr>
-          <p:cNvPr id="27" name="Text 25"/>
+          <p:cNvPr id="30" name="Text 28"/>
           <p:cNvSpPr/>
           <p:nvPr/>
         </p:nvSpPr>
@@ -12896,7 +13074,7 @@
       </p:sp>
       <p:sp>
         <p:nvSpPr>
-          <p:cNvPr id="28" name="Shape 26"/>
+          <p:cNvPr id="31" name="Shape 29"/>
           <p:cNvSpPr/>
           <p:nvPr/>
         </p:nvSpPr>
@@ -12923,7 +13101,7 @@
       </p:sp>
       <p:sp>
         <p:nvSpPr>
-          <p:cNvPr id="29" name="Text 27"/>
+          <p:cNvPr id="32" name="Text 30"/>
           <p:cNvSpPr/>
           <p:nvPr/>
         </p:nvSpPr>
@@ -13246,7 +13424,7 @@
                 <a:ea typeface="Calibri" pitchFamily="34" charset="-122"/>
                 <a:cs typeface="Calibri" pitchFamily="34" charset="-120"/>
               </a:rPr>
-              <a:t>Word Labs  •  wordlabs.app  •  Root: 'colour' = hue or shade of light</a:t>
+              <a:t>Word Labs  •  wordlabs.app  •  Root: 'colour' = hue, tint, or shade</a:t>
             </a:r>
             <a:endParaRPr lang="en-US" sz="800" dirty="0"/>
           </a:p>
@@ -13385,7 +13563,7 @@
                 <a:ea typeface="Trebuchet MS" pitchFamily="34" charset="-122"/>
                 <a:cs typeface="Trebuchet MS" pitchFamily="34" charset="-120"/>
               </a:rPr>
-              <a:t>colourful</a:t>
+              <a:t>discoloured</a:t>
             </a:r>
             <a:endParaRPr lang="en-US" sz="2800" dirty="0"/>
           </a:p>
@@ -13465,7 +13643,7 @@
         </p:nvSpPr>
         <p:spPr>
           <a:xfrm>
-            <a:off x="2938272" y="2258568"/>
+            <a:off x="2221992" y="2258568"/>
             <a:ext cx="1828800" cy="292608"/>
           </a:xfrm>
           <a:prstGeom prst="rect">
@@ -13474,11 +13652,11 @@
             </a:avLst>
           </a:prstGeom>
           <a:solidFill>
-            <a:srgbClr val="CCFBF1"/>
+            <a:srgbClr val="DDD6FE"/>
           </a:solidFill>
           <a:ln w="19050">
             <a:solidFill>
-              <a:srgbClr val="0D9488"/>
+              <a:srgbClr val="7C3AED"/>
             </a:solidFill>
             <a:prstDash val="solid"/>
           </a:ln>
@@ -13499,7 +13677,7 @@
         </p:nvSpPr>
         <p:spPr>
           <a:xfrm>
-            <a:off x="2938272" y="2258568"/>
+            <a:off x="2221992" y="2258568"/>
             <a:ext cx="1828800" cy="292608"/>
           </a:xfrm>
           <a:prstGeom prst="rect">
@@ -13518,13 +13696,13 @@
             <a:r>
               <a:rPr lang="en-US" sz="1300" b="1" dirty="0">
                 <a:solidFill>
-                  <a:srgbClr val="0F766E"/>
+                  <a:srgbClr val="4C1D95"/>
                 </a:solidFill>
                 <a:latin typeface="Trebuchet MS" pitchFamily="34" charset="0"/>
                 <a:ea typeface="Trebuchet MS" pitchFamily="34" charset="-122"/>
                 <a:cs typeface="Trebuchet MS" pitchFamily="34" charset="-120"/>
               </a:rPr>
-              <a:t>colour</a:t>
+              <a:t>dis</a:t>
             </a:r>
             <a:endParaRPr lang="en-US" sz="1300" dirty="0"/>
           </a:p>
@@ -13538,7 +13716,7 @@
         </p:nvSpPr>
         <p:spPr>
           <a:xfrm>
-            <a:off x="2938272" y="2569464"/>
+            <a:off x="2221992" y="2569464"/>
             <a:ext cx="1828800" cy="201168"/>
           </a:xfrm>
           <a:prstGeom prst="rect">
@@ -13563,7 +13741,7 @@
                 <a:ea typeface="Calibri" pitchFamily="34" charset="-122"/>
                 <a:cs typeface="Calibri" pitchFamily="34" charset="-120"/>
               </a:rPr>
-              <a:t>hue or shade</a:t>
+              <a:t>not or reverse</a:t>
             </a:r>
             <a:endParaRPr lang="en-US" sz="850" dirty="0"/>
           </a:p>
@@ -13577,7 +13755,7 @@
         </p:nvSpPr>
         <p:spPr>
           <a:xfrm>
-            <a:off x="5803392" y="2258568"/>
+            <a:off x="4370832" y="2258568"/>
             <a:ext cx="1828800" cy="292608"/>
           </a:xfrm>
           <a:prstGeom prst="rect">
@@ -13586,11 +13764,11 @@
             </a:avLst>
           </a:prstGeom>
           <a:solidFill>
-            <a:srgbClr val="FCE7F3"/>
+            <a:srgbClr val="CCFBF1"/>
           </a:solidFill>
           <a:ln w="19050">
             <a:solidFill>
-              <a:srgbClr val="DB2777"/>
+              <a:srgbClr val="0D9488"/>
             </a:solidFill>
             <a:prstDash val="solid"/>
           </a:ln>
@@ -13611,7 +13789,7 @@
         </p:nvSpPr>
         <p:spPr>
           <a:xfrm>
-            <a:off x="5803392" y="2258568"/>
+            <a:off x="4370832" y="2258568"/>
             <a:ext cx="1828800" cy="292608"/>
           </a:xfrm>
           <a:prstGeom prst="rect">
@@ -13630,13 +13808,13 @@
             <a:r>
               <a:rPr lang="en-US" sz="1300" b="1" dirty="0">
                 <a:solidFill>
-                  <a:srgbClr val="9D174D"/>
+                  <a:srgbClr val="0F766E"/>
                 </a:solidFill>
                 <a:latin typeface="Trebuchet MS" pitchFamily="34" charset="0"/>
                 <a:ea typeface="Trebuchet MS" pitchFamily="34" charset="-122"/>
                 <a:cs typeface="Trebuchet MS" pitchFamily="34" charset="-120"/>
               </a:rPr>
-              <a:t>ful</a:t>
+              <a:t>colour</a:t>
             </a:r>
             <a:endParaRPr lang="en-US" sz="1300" dirty="0"/>
           </a:p>
@@ -13650,7 +13828,7 @@
         </p:nvSpPr>
         <p:spPr>
           <a:xfrm>
-            <a:off x="5803392" y="2569464"/>
+            <a:off x="4370832" y="2569464"/>
             <a:ext cx="1828800" cy="201168"/>
           </a:xfrm>
           <a:prstGeom prst="rect">
@@ -13675,7 +13853,7 @@
                 <a:ea typeface="Calibri" pitchFamily="34" charset="-122"/>
                 <a:cs typeface="Calibri" pitchFamily="34" charset="-120"/>
               </a:rPr>
-              <a:t>full of</a:t>
+              <a:t>hue or shade</a:t>
             </a:r>
             <a:endParaRPr lang="en-US" sz="850" dirty="0"/>
           </a:p>
@@ -13684,6 +13862,118 @@
       <p:sp>
         <p:nvSpPr>
           <p:cNvPr id="22" name="Shape 20"/>
+          <p:cNvSpPr/>
+          <p:nvPr/>
+        </p:nvSpPr>
+        <p:spPr>
+          <a:xfrm>
+            <a:off x="6519672" y="2258568"/>
+            <a:ext cx="1828800" cy="292608"/>
+          </a:xfrm>
+          <a:prstGeom prst="rect">
+            <a:avLst>
+              <a:gd name="adj" fmla="val 25000"/>
+            </a:avLst>
+          </a:prstGeom>
+          <a:solidFill>
+            <a:srgbClr val="FCE7F3"/>
+          </a:solidFill>
+          <a:ln w="19050">
+            <a:solidFill>
+              <a:srgbClr val="DB2777"/>
+            </a:solidFill>
+            <a:prstDash val="solid"/>
+          </a:ln>
+          <a:effectLst>
+            <a:outerShdw sx="100000" sy="100000" kx="0" ky="0" algn="bl" rotWithShape="0" blurRad="101600" dist="38100" dir="8100000">
+              <a:srgbClr val="000000">
+                <a:alpha val="12000"/>
+              </a:srgbClr>
+            </a:outerShdw>
+          </a:effectLst>
+        </p:spPr>
+      </p:sp>
+      <p:sp>
+        <p:nvSpPr>
+          <p:cNvPr id="23" name="Text 21"/>
+          <p:cNvSpPr/>
+          <p:nvPr/>
+        </p:nvSpPr>
+        <p:spPr>
+          <a:xfrm>
+            <a:off x="6519672" y="2258568"/>
+            <a:ext cx="1828800" cy="292608"/>
+          </a:xfrm>
+          <a:prstGeom prst="rect">
+            <a:avLst/>
+          </a:prstGeom>
+          <a:noFill/>
+          <a:ln/>
+        </p:spPr>
+        <p:txBody>
+          <a:bodyPr wrap="square" lIns="0" tIns="0" rIns="0" bIns="0" rtlCol="0" anchor="ctr"/>
+          <a:lstStyle/>
+          <a:p>
+            <a:pPr algn="ctr" indent="0" marL="0">
+              <a:buNone/>
+            </a:pPr>
+            <a:r>
+              <a:rPr lang="en-US" sz="1300" b="1" dirty="0">
+                <a:solidFill>
+                  <a:srgbClr val="9D174D"/>
+                </a:solidFill>
+                <a:latin typeface="Trebuchet MS" pitchFamily="34" charset="0"/>
+                <a:ea typeface="Trebuchet MS" pitchFamily="34" charset="-122"/>
+                <a:cs typeface="Trebuchet MS" pitchFamily="34" charset="-120"/>
+              </a:rPr>
+              <a:t>ed</a:t>
+            </a:r>
+            <a:endParaRPr lang="en-US" sz="1300" dirty="0"/>
+          </a:p>
+        </p:txBody>
+      </p:sp>
+      <p:sp>
+        <p:nvSpPr>
+          <p:cNvPr id="24" name="Text 22"/>
+          <p:cNvSpPr/>
+          <p:nvPr/>
+        </p:nvSpPr>
+        <p:spPr>
+          <a:xfrm>
+            <a:off x="6519672" y="2569464"/>
+            <a:ext cx="1828800" cy="201168"/>
+          </a:xfrm>
+          <a:prstGeom prst="rect">
+            <a:avLst/>
+          </a:prstGeom>
+          <a:noFill/>
+          <a:ln/>
+        </p:spPr>
+        <p:txBody>
+          <a:bodyPr wrap="square" lIns="0" tIns="0" rIns="0" bIns="0" rtlCol="0" anchor="t"/>
+          <a:lstStyle/>
+          <a:p>
+            <a:pPr algn="ctr" indent="0" marL="0">
+              <a:buNone/>
+            </a:pPr>
+            <a:r>
+              <a:rPr lang="en-US" sz="850" dirty="0">
+                <a:solidFill>
+                  <a:srgbClr val="475569"/>
+                </a:solidFill>
+                <a:latin typeface="Calibri" pitchFamily="34" charset="0"/>
+                <a:ea typeface="Calibri" pitchFamily="34" charset="-122"/>
+                <a:cs typeface="Calibri" pitchFamily="34" charset="-120"/>
+              </a:rPr>
+              <a:t>past tense</a:t>
+            </a:r>
+            <a:endParaRPr lang="en-US" sz="850" dirty="0"/>
+          </a:p>
+        </p:txBody>
+      </p:sp>
+      <p:sp>
+        <p:nvSpPr>
+          <p:cNvPr id="25" name="Shape 23"/>
           <p:cNvSpPr/>
           <p:nvPr/>
         </p:nvSpPr>
@@ -13710,7 +14000,7 @@
       </p:sp>
       <p:sp>
         <p:nvSpPr>
-          <p:cNvPr id="23" name="Text 21"/>
+          <p:cNvPr id="26" name="Text 24"/>
           <p:cNvSpPr/>
           <p:nvPr/>
         </p:nvSpPr>
@@ -13749,7 +14039,7 @@
       </p:sp>
       <p:sp>
         <p:nvSpPr>
-          <p:cNvPr id="24" name="Shape 22"/>
+          <p:cNvPr id="27" name="Shape 25"/>
           <p:cNvSpPr/>
           <p:nvPr/>
         </p:nvSpPr>
@@ -13776,7 +14066,7 @@
       </p:sp>
       <p:sp>
         <p:nvSpPr>
-          <p:cNvPr id="25" name="Shape 23"/>
+          <p:cNvPr id="28" name="Shape 26"/>
           <p:cNvSpPr/>
           <p:nvPr/>
         </p:nvSpPr>
@@ -13803,7 +14093,7 @@
       </p:sp>
       <p:sp>
         <p:nvSpPr>
-          <p:cNvPr id="26" name="Text 24"/>
+          <p:cNvPr id="29" name="Text 27"/>
           <p:cNvSpPr/>
           <p:nvPr/>
         </p:nvSpPr>
@@ -13834,7 +14124,7 @@
                 <a:ea typeface="Trebuchet MS" pitchFamily="34" charset="-122"/>
                 <a:cs typeface="Trebuchet MS" pitchFamily="34" charset="-120"/>
               </a:rPr>
-              <a:t>col</a:t>
+              <a:t>dis</a:t>
             </a:r>
             <a:endParaRPr lang="en-US" sz="1400" dirty="0"/>
           </a:p>
@@ -13842,7 +14132,7 @@
       </p:sp>
       <p:sp>
         <p:nvSpPr>
-          <p:cNvPr id="27" name="Text 25"/>
+          <p:cNvPr id="30" name="Text 28"/>
           <p:cNvSpPr/>
           <p:nvPr/>
         </p:nvSpPr>
@@ -13881,7 +14171,7 @@
       </p:sp>
       <p:sp>
         <p:nvSpPr>
-          <p:cNvPr id="28" name="Shape 26"/>
+          <p:cNvPr id="31" name="Shape 29"/>
           <p:cNvSpPr/>
           <p:nvPr/>
         </p:nvSpPr>
@@ -13908,7 +14198,7 @@
       </p:sp>
       <p:sp>
         <p:nvSpPr>
-          <p:cNvPr id="29" name="Text 27"/>
+          <p:cNvPr id="32" name="Text 30"/>
           <p:cNvSpPr/>
           <p:nvPr/>
         </p:nvSpPr>
@@ -13939,7 +14229,7 @@
                 <a:ea typeface="Trebuchet MS" pitchFamily="34" charset="-122"/>
                 <a:cs typeface="Trebuchet MS" pitchFamily="34" charset="-120"/>
               </a:rPr>
-              <a:t>our</a:t>
+              <a:t>col</a:t>
             </a:r>
             <a:endParaRPr lang="en-US" sz="1400" dirty="0"/>
           </a:p>
@@ -13947,7 +14237,7 @@
       </p:sp>
       <p:sp>
         <p:nvSpPr>
-          <p:cNvPr id="30" name="Text 28"/>
+          <p:cNvPr id="33" name="Text 31"/>
           <p:cNvSpPr/>
           <p:nvPr/>
         </p:nvSpPr>
@@ -13986,7 +14276,7 @@
       </p:sp>
       <p:sp>
         <p:nvSpPr>
-          <p:cNvPr id="31" name="Shape 29"/>
+          <p:cNvPr id="34" name="Shape 32"/>
           <p:cNvSpPr/>
           <p:nvPr/>
         </p:nvSpPr>
@@ -14013,7 +14303,7 @@
       </p:sp>
       <p:sp>
         <p:nvSpPr>
-          <p:cNvPr id="32" name="Text 30"/>
+          <p:cNvPr id="35" name="Text 33"/>
           <p:cNvSpPr/>
           <p:nvPr/>
         </p:nvSpPr>
@@ -14044,7 +14334,7 @@
                 <a:ea typeface="Trebuchet MS" pitchFamily="34" charset="-122"/>
                 <a:cs typeface="Trebuchet MS" pitchFamily="34" charset="-120"/>
               </a:rPr>
-              <a:t>ful</a:t>
+              <a:t>oured</a:t>
             </a:r>
             <a:endParaRPr lang="en-US" sz="1400" dirty="0"/>
           </a:p>
@@ -14052,7 +14342,7 @@
       </p:sp>
       <p:sp>
         <p:nvSpPr>
-          <p:cNvPr id="33" name="Shape 31"/>
+          <p:cNvPr id="36" name="Shape 34"/>
           <p:cNvSpPr/>
           <p:nvPr/>
         </p:nvSpPr>
@@ -14079,7 +14369,7 @@
       </p:sp>
       <p:sp>
         <p:nvSpPr>
-          <p:cNvPr id="34" name="Text 32"/>
+          <p:cNvPr id="37" name="Text 35"/>
           <p:cNvSpPr/>
           <p:nvPr/>
         </p:nvSpPr>
@@ -14118,7 +14408,7 @@
       </p:sp>
       <p:sp>
         <p:nvSpPr>
-          <p:cNvPr id="35" name="Shape 33"/>
+          <p:cNvPr id="38" name="Shape 36"/>
           <p:cNvSpPr/>
           <p:nvPr/>
         </p:nvSpPr>
@@ -14145,7 +14435,7 @@
       </p:sp>
       <p:sp>
         <p:nvSpPr>
-          <p:cNvPr id="36" name="Text 34"/>
+          <p:cNvPr id="39" name="Text 37"/>
           <p:cNvSpPr/>
           <p:nvPr/>
         </p:nvSpPr>
@@ -14377,7 +14667,7 @@
                 <a:ea typeface="Calibri" pitchFamily="34" charset="-122"/>
                 <a:cs typeface="Calibri" pitchFamily="34" charset="-120"/>
               </a:rPr>
-              <a:t>Root 'colour' — hue or shade of light</a:t>
+              <a:t>Root 'colour' — hue, tint, or shade</a:t>
             </a:r>
             <a:endParaRPr lang="en-US" sz="1600" dirty="0"/>
           </a:p>
@@ -14733,7 +15023,7 @@
                 <a:ea typeface="Calibri" pitchFamily="34" charset="-122"/>
                 <a:cs typeface="Calibri" pitchFamily="34" charset="-120"/>
               </a:rPr>
-              <a:t>Word Labs  •  wordlabs.app  •  Root: 'colour' = hue or shade of light</a:t>
+              <a:t>Word Labs  •  wordlabs.app  •  Root: 'colour' = hue, tint, or shade</a:t>
             </a:r>
             <a:endParaRPr lang="en-US" sz="800" dirty="0"/>
           </a:p>
@@ -14872,7 +15162,7 @@
                 <a:ea typeface="Trebuchet MS" pitchFamily="34" charset="-122"/>
                 <a:cs typeface="Trebuchet MS" pitchFamily="34" charset="-120"/>
               </a:rPr>
-              <a:t>colourful</a:t>
+              <a:t>discoloured</a:t>
             </a:r>
             <a:endParaRPr lang="en-US" sz="2800" dirty="0"/>
           </a:p>
@@ -14952,7 +15242,7 @@
         </p:nvSpPr>
         <p:spPr>
           <a:xfrm>
-            <a:off x="2938272" y="2258568"/>
+            <a:off x="2221992" y="2258568"/>
             <a:ext cx="1828800" cy="292608"/>
           </a:xfrm>
           <a:prstGeom prst="rect">
@@ -14961,11 +15251,11 @@
             </a:avLst>
           </a:prstGeom>
           <a:solidFill>
-            <a:srgbClr val="CCFBF1"/>
+            <a:srgbClr val="DDD6FE"/>
           </a:solidFill>
           <a:ln w="19050">
             <a:solidFill>
-              <a:srgbClr val="0D9488"/>
+              <a:srgbClr val="7C3AED"/>
             </a:solidFill>
             <a:prstDash val="solid"/>
           </a:ln>
@@ -14986,7 +15276,7 @@
         </p:nvSpPr>
         <p:spPr>
           <a:xfrm>
-            <a:off x="2938272" y="2258568"/>
+            <a:off x="2221992" y="2258568"/>
             <a:ext cx="1828800" cy="292608"/>
           </a:xfrm>
           <a:prstGeom prst="rect">
@@ -15005,13 +15295,13 @@
             <a:r>
               <a:rPr lang="en-US" sz="1300" b="1" dirty="0">
                 <a:solidFill>
-                  <a:srgbClr val="0F766E"/>
+                  <a:srgbClr val="4C1D95"/>
                 </a:solidFill>
                 <a:latin typeface="Trebuchet MS" pitchFamily="34" charset="0"/>
                 <a:ea typeface="Trebuchet MS" pitchFamily="34" charset="-122"/>
                 <a:cs typeface="Trebuchet MS" pitchFamily="34" charset="-120"/>
               </a:rPr>
-              <a:t>colour</a:t>
+              <a:t>dis</a:t>
             </a:r>
             <a:endParaRPr lang="en-US" sz="1300" dirty="0"/>
           </a:p>
@@ -15025,7 +15315,7 @@
         </p:nvSpPr>
         <p:spPr>
           <a:xfrm>
-            <a:off x="2938272" y="2569464"/>
+            <a:off x="2221992" y="2569464"/>
             <a:ext cx="1828800" cy="201168"/>
           </a:xfrm>
           <a:prstGeom prst="rect">
@@ -15050,7 +15340,7 @@
                 <a:ea typeface="Calibri" pitchFamily="34" charset="-122"/>
                 <a:cs typeface="Calibri" pitchFamily="34" charset="-120"/>
               </a:rPr>
-              <a:t>hue or shade</a:t>
+              <a:t>not or reverse</a:t>
             </a:r>
             <a:endParaRPr lang="en-US" sz="850" dirty="0"/>
           </a:p>
@@ -15064,7 +15354,7 @@
         </p:nvSpPr>
         <p:spPr>
           <a:xfrm>
-            <a:off x="5803392" y="2258568"/>
+            <a:off x="4370832" y="2258568"/>
             <a:ext cx="1828800" cy="292608"/>
           </a:xfrm>
           <a:prstGeom prst="rect">
@@ -15073,11 +15363,11 @@
             </a:avLst>
           </a:prstGeom>
           <a:solidFill>
-            <a:srgbClr val="FCE7F3"/>
+            <a:srgbClr val="CCFBF1"/>
           </a:solidFill>
           <a:ln w="19050">
             <a:solidFill>
-              <a:srgbClr val="DB2777"/>
+              <a:srgbClr val="0D9488"/>
             </a:solidFill>
             <a:prstDash val="solid"/>
           </a:ln>
@@ -15098,7 +15388,7 @@
         </p:nvSpPr>
         <p:spPr>
           <a:xfrm>
-            <a:off x="5803392" y="2258568"/>
+            <a:off x="4370832" y="2258568"/>
             <a:ext cx="1828800" cy="292608"/>
           </a:xfrm>
           <a:prstGeom prst="rect">
@@ -15117,13 +15407,13 @@
             <a:r>
               <a:rPr lang="en-US" sz="1300" b="1" dirty="0">
                 <a:solidFill>
-                  <a:srgbClr val="9D174D"/>
+                  <a:srgbClr val="0F766E"/>
                 </a:solidFill>
                 <a:latin typeface="Trebuchet MS" pitchFamily="34" charset="0"/>
                 <a:ea typeface="Trebuchet MS" pitchFamily="34" charset="-122"/>
                 <a:cs typeface="Trebuchet MS" pitchFamily="34" charset="-120"/>
               </a:rPr>
-              <a:t>ful</a:t>
+              <a:t>colour</a:t>
             </a:r>
             <a:endParaRPr lang="en-US" sz="1300" dirty="0"/>
           </a:p>
@@ -15137,7 +15427,7 @@
         </p:nvSpPr>
         <p:spPr>
           <a:xfrm>
-            <a:off x="5803392" y="2569464"/>
+            <a:off x="4370832" y="2569464"/>
             <a:ext cx="1828800" cy="201168"/>
           </a:xfrm>
           <a:prstGeom prst="rect">
@@ -15162,7 +15452,7 @@
                 <a:ea typeface="Calibri" pitchFamily="34" charset="-122"/>
                 <a:cs typeface="Calibri" pitchFamily="34" charset="-120"/>
               </a:rPr>
-              <a:t>full of</a:t>
+              <a:t>hue or shade</a:t>
             </a:r>
             <a:endParaRPr lang="en-US" sz="850" dirty="0"/>
           </a:p>
@@ -15171,6 +15461,118 @@
       <p:sp>
         <p:nvSpPr>
           <p:cNvPr id="22" name="Shape 20"/>
+          <p:cNvSpPr/>
+          <p:nvPr/>
+        </p:nvSpPr>
+        <p:spPr>
+          <a:xfrm>
+            <a:off x="6519672" y="2258568"/>
+            <a:ext cx="1828800" cy="292608"/>
+          </a:xfrm>
+          <a:prstGeom prst="rect">
+            <a:avLst>
+              <a:gd name="adj" fmla="val 25000"/>
+            </a:avLst>
+          </a:prstGeom>
+          <a:solidFill>
+            <a:srgbClr val="FCE7F3"/>
+          </a:solidFill>
+          <a:ln w="19050">
+            <a:solidFill>
+              <a:srgbClr val="DB2777"/>
+            </a:solidFill>
+            <a:prstDash val="solid"/>
+          </a:ln>
+          <a:effectLst>
+            <a:outerShdw sx="100000" sy="100000" kx="0" ky="0" algn="bl" rotWithShape="0" blurRad="101600" dist="38100" dir="8100000">
+              <a:srgbClr val="000000">
+                <a:alpha val="12000"/>
+              </a:srgbClr>
+            </a:outerShdw>
+          </a:effectLst>
+        </p:spPr>
+      </p:sp>
+      <p:sp>
+        <p:nvSpPr>
+          <p:cNvPr id="23" name="Text 21"/>
+          <p:cNvSpPr/>
+          <p:nvPr/>
+        </p:nvSpPr>
+        <p:spPr>
+          <a:xfrm>
+            <a:off x="6519672" y="2258568"/>
+            <a:ext cx="1828800" cy="292608"/>
+          </a:xfrm>
+          <a:prstGeom prst="rect">
+            <a:avLst/>
+          </a:prstGeom>
+          <a:noFill/>
+          <a:ln/>
+        </p:spPr>
+        <p:txBody>
+          <a:bodyPr wrap="square" lIns="0" tIns="0" rIns="0" bIns="0" rtlCol="0" anchor="ctr"/>
+          <a:lstStyle/>
+          <a:p>
+            <a:pPr algn="ctr" indent="0" marL="0">
+              <a:buNone/>
+            </a:pPr>
+            <a:r>
+              <a:rPr lang="en-US" sz="1300" b="1" dirty="0">
+                <a:solidFill>
+                  <a:srgbClr val="9D174D"/>
+                </a:solidFill>
+                <a:latin typeface="Trebuchet MS" pitchFamily="34" charset="0"/>
+                <a:ea typeface="Trebuchet MS" pitchFamily="34" charset="-122"/>
+                <a:cs typeface="Trebuchet MS" pitchFamily="34" charset="-120"/>
+              </a:rPr>
+              <a:t>ed</a:t>
+            </a:r>
+            <a:endParaRPr lang="en-US" sz="1300" dirty="0"/>
+          </a:p>
+        </p:txBody>
+      </p:sp>
+      <p:sp>
+        <p:nvSpPr>
+          <p:cNvPr id="24" name="Text 22"/>
+          <p:cNvSpPr/>
+          <p:nvPr/>
+        </p:nvSpPr>
+        <p:spPr>
+          <a:xfrm>
+            <a:off x="6519672" y="2569464"/>
+            <a:ext cx="1828800" cy="201168"/>
+          </a:xfrm>
+          <a:prstGeom prst="rect">
+            <a:avLst/>
+          </a:prstGeom>
+          <a:noFill/>
+          <a:ln/>
+        </p:spPr>
+        <p:txBody>
+          <a:bodyPr wrap="square" lIns="0" tIns="0" rIns="0" bIns="0" rtlCol="0" anchor="t"/>
+          <a:lstStyle/>
+          <a:p>
+            <a:pPr algn="ctr" indent="0" marL="0">
+              <a:buNone/>
+            </a:pPr>
+            <a:r>
+              <a:rPr lang="en-US" sz="850" dirty="0">
+                <a:solidFill>
+                  <a:srgbClr val="475569"/>
+                </a:solidFill>
+                <a:latin typeface="Calibri" pitchFamily="34" charset="0"/>
+                <a:ea typeface="Calibri" pitchFamily="34" charset="-122"/>
+                <a:cs typeface="Calibri" pitchFamily="34" charset="-120"/>
+              </a:rPr>
+              <a:t>past tense</a:t>
+            </a:r>
+            <a:endParaRPr lang="en-US" sz="850" dirty="0"/>
+          </a:p>
+        </p:txBody>
+      </p:sp>
+      <p:sp>
+        <p:nvSpPr>
+          <p:cNvPr id="25" name="Shape 23"/>
           <p:cNvSpPr/>
           <p:nvPr/>
         </p:nvSpPr>
@@ -15197,7 +15599,7 @@
       </p:sp>
       <p:sp>
         <p:nvSpPr>
-          <p:cNvPr id="23" name="Text 21"/>
+          <p:cNvPr id="26" name="Text 24"/>
           <p:cNvSpPr/>
           <p:nvPr/>
         </p:nvSpPr>
@@ -15236,7 +15638,7 @@
       </p:sp>
       <p:sp>
         <p:nvSpPr>
-          <p:cNvPr id="24" name="Shape 22"/>
+          <p:cNvPr id="27" name="Shape 25"/>
           <p:cNvSpPr/>
           <p:nvPr/>
         </p:nvSpPr>
@@ -15263,7 +15665,7 @@
       </p:sp>
       <p:sp>
         <p:nvSpPr>
-          <p:cNvPr id="25" name="Shape 23"/>
+          <p:cNvPr id="28" name="Shape 26"/>
           <p:cNvSpPr/>
           <p:nvPr/>
         </p:nvSpPr>
@@ -15290,7 +15692,7 @@
       </p:sp>
       <p:sp>
         <p:nvSpPr>
-          <p:cNvPr id="26" name="Text 24"/>
+          <p:cNvPr id="29" name="Text 27"/>
           <p:cNvSpPr/>
           <p:nvPr/>
         </p:nvSpPr>
@@ -15321,7 +15723,7 @@
                 <a:ea typeface="Trebuchet MS" pitchFamily="34" charset="-122"/>
                 <a:cs typeface="Trebuchet MS" pitchFamily="34" charset="-120"/>
               </a:rPr>
-              <a:t>col</a:t>
+              <a:t>dis</a:t>
             </a:r>
             <a:endParaRPr lang="en-US" sz="1400" dirty="0"/>
           </a:p>
@@ -15329,7 +15731,7 @@
       </p:sp>
       <p:sp>
         <p:nvSpPr>
-          <p:cNvPr id="27" name="Text 25"/>
+          <p:cNvPr id="30" name="Text 28"/>
           <p:cNvSpPr/>
           <p:nvPr/>
         </p:nvSpPr>
@@ -15368,7 +15770,7 @@
       </p:sp>
       <p:sp>
         <p:nvSpPr>
-          <p:cNvPr id="28" name="Shape 26"/>
+          <p:cNvPr id="31" name="Shape 29"/>
           <p:cNvSpPr/>
           <p:nvPr/>
         </p:nvSpPr>
@@ -15395,7 +15797,7 @@
       </p:sp>
       <p:sp>
         <p:nvSpPr>
-          <p:cNvPr id="29" name="Text 27"/>
+          <p:cNvPr id="32" name="Text 30"/>
           <p:cNvSpPr/>
           <p:nvPr/>
         </p:nvSpPr>
@@ -15426,7 +15828,7 @@
                 <a:ea typeface="Trebuchet MS" pitchFamily="34" charset="-122"/>
                 <a:cs typeface="Trebuchet MS" pitchFamily="34" charset="-120"/>
               </a:rPr>
-              <a:t>our</a:t>
+              <a:t>col</a:t>
             </a:r>
             <a:endParaRPr lang="en-US" sz="1400" dirty="0"/>
           </a:p>
@@ -15434,7 +15836,7 @@
       </p:sp>
       <p:sp>
         <p:nvSpPr>
-          <p:cNvPr id="30" name="Text 28"/>
+          <p:cNvPr id="33" name="Text 31"/>
           <p:cNvSpPr/>
           <p:nvPr/>
         </p:nvSpPr>
@@ -15473,7 +15875,7 @@
       </p:sp>
       <p:sp>
         <p:nvSpPr>
-          <p:cNvPr id="31" name="Shape 29"/>
+          <p:cNvPr id="34" name="Shape 32"/>
           <p:cNvSpPr/>
           <p:nvPr/>
         </p:nvSpPr>
@@ -15500,7 +15902,7 @@
       </p:sp>
       <p:sp>
         <p:nvSpPr>
-          <p:cNvPr id="32" name="Text 30"/>
+          <p:cNvPr id="35" name="Text 33"/>
           <p:cNvSpPr/>
           <p:nvPr/>
         </p:nvSpPr>
@@ -15531,7 +15933,7 @@
                 <a:ea typeface="Trebuchet MS" pitchFamily="34" charset="-122"/>
                 <a:cs typeface="Trebuchet MS" pitchFamily="34" charset="-120"/>
               </a:rPr>
-              <a:t>ful</a:t>
+              <a:t>oured</a:t>
             </a:r>
             <a:endParaRPr lang="en-US" sz="1400" dirty="0"/>
           </a:p>
@@ -15539,7 +15941,7 @@
       </p:sp>
       <p:sp>
         <p:nvSpPr>
-          <p:cNvPr id="33" name="Shape 31"/>
+          <p:cNvPr id="36" name="Shape 34"/>
           <p:cNvSpPr/>
           <p:nvPr/>
         </p:nvSpPr>
@@ -15566,7 +15968,7 @@
       </p:sp>
       <p:sp>
         <p:nvSpPr>
-          <p:cNvPr id="34" name="Text 32"/>
+          <p:cNvPr id="37" name="Text 35"/>
           <p:cNvSpPr/>
           <p:nvPr/>
         </p:nvSpPr>
@@ -15605,7 +16007,7 @@
       </p:sp>
       <p:sp>
         <p:nvSpPr>
-          <p:cNvPr id="35" name="Shape 33"/>
+          <p:cNvPr id="38" name="Shape 36"/>
           <p:cNvSpPr/>
           <p:nvPr/>
         </p:nvSpPr>
@@ -15632,14 +16034,14 @@
       </p:sp>
       <p:sp>
         <p:nvSpPr>
-          <p:cNvPr id="36" name="Shape 34"/>
-          <p:cNvSpPr/>
-          <p:nvPr/>
-        </p:nvSpPr>
-        <p:spPr>
-          <a:xfrm>
-            <a:off x="2023872" y="4169664"/>
-            <a:ext cx="685800" cy="384048"/>
+          <p:cNvPr id="39" name="Shape 37"/>
+          <p:cNvSpPr/>
+          <p:nvPr/>
+        </p:nvSpPr>
+        <p:spPr>
+          <a:xfrm>
+            <a:off x="1951330" y="4169664"/>
+            <a:ext cx="676656" cy="384048"/>
           </a:xfrm>
           <a:prstGeom prst="rect">
             <a:avLst>
@@ -15659,14 +16061,14 @@
       </p:sp>
       <p:sp>
         <p:nvSpPr>
-          <p:cNvPr id="37" name="Text 35"/>
-          <p:cNvSpPr/>
-          <p:nvPr/>
-        </p:nvSpPr>
-        <p:spPr>
-          <a:xfrm>
-            <a:off x="2023872" y="4169664"/>
-            <a:ext cx="685800" cy="384048"/>
+          <p:cNvPr id="40" name="Text 38"/>
+          <p:cNvSpPr/>
+          <p:nvPr/>
+        </p:nvSpPr>
+        <p:spPr>
+          <a:xfrm>
+            <a:off x="1951330" y="4169664"/>
+            <a:ext cx="676656" cy="384048"/>
           </a:xfrm>
           <a:prstGeom prst="rect">
             <a:avLst/>
@@ -15690,7 +16092,7 @@
                 <a:ea typeface="Trebuchet MS" pitchFamily="34" charset="-122"/>
                 <a:cs typeface="Trebuchet MS" pitchFamily="34" charset="-120"/>
               </a:rPr>
-              <a:t>c</a:t>
+              <a:t>d</a:t>
             </a:r>
             <a:endParaRPr lang="en-US" sz="900" dirty="0"/>
           </a:p>
@@ -15698,14 +16100,146 @@
       </p:sp>
       <p:sp>
         <p:nvSpPr>
-          <p:cNvPr id="38" name="Text 36"/>
-          <p:cNvSpPr/>
-          <p:nvPr/>
-        </p:nvSpPr>
-        <p:spPr>
-          <a:xfrm>
-            <a:off x="2023872" y="4572000"/>
-            <a:ext cx="685800" cy="219456"/>
+          <p:cNvPr id="41" name="Shape 39"/>
+          <p:cNvSpPr/>
+          <p:nvPr/>
+        </p:nvSpPr>
+        <p:spPr>
+          <a:xfrm>
+            <a:off x="2677363" y="4169664"/>
+            <a:ext cx="676656" cy="384048"/>
+          </a:xfrm>
+          <a:prstGeom prst="rect">
+            <a:avLst>
+              <a:gd name="adj" fmla="val 9524"/>
+            </a:avLst>
+          </a:prstGeom>
+          <a:solidFill>
+            <a:srgbClr val="FFFFFF"/>
+          </a:solidFill>
+          <a:ln w="12700">
+            <a:solidFill>
+              <a:srgbClr val="DB2777"/>
+            </a:solidFill>
+            <a:prstDash val="solid"/>
+          </a:ln>
+        </p:spPr>
+      </p:sp>
+      <p:sp>
+        <p:nvSpPr>
+          <p:cNvPr id="42" name="Text 40"/>
+          <p:cNvSpPr/>
+          <p:nvPr/>
+        </p:nvSpPr>
+        <p:spPr>
+          <a:xfrm>
+            <a:off x="2677363" y="4169664"/>
+            <a:ext cx="676656" cy="384048"/>
+          </a:xfrm>
+          <a:prstGeom prst="rect">
+            <a:avLst/>
+          </a:prstGeom>
+          <a:noFill/>
+          <a:ln/>
+        </p:spPr>
+        <p:txBody>
+          <a:bodyPr wrap="square" lIns="0" tIns="0" rIns="0" bIns="0" rtlCol="0" anchor="ctr"/>
+          <a:lstStyle/>
+          <a:p>
+            <a:pPr algn="ctr" indent="0" marL="0">
+              <a:buNone/>
+            </a:pPr>
+            <a:r>
+              <a:rPr lang="en-US" sz="900" b="1" dirty="0">
+                <a:solidFill>
+                  <a:srgbClr val="9D174D"/>
+                </a:solidFill>
+                <a:latin typeface="Trebuchet MS" pitchFamily="34" charset="0"/>
+                <a:ea typeface="Trebuchet MS" pitchFamily="34" charset="-122"/>
+                <a:cs typeface="Trebuchet MS" pitchFamily="34" charset="-120"/>
+              </a:rPr>
+              <a:t>i</a:t>
+            </a:r>
+            <a:endParaRPr lang="en-US" sz="900" dirty="0"/>
+          </a:p>
+        </p:txBody>
+      </p:sp>
+      <p:sp>
+        <p:nvSpPr>
+          <p:cNvPr id="43" name="Shape 41"/>
+          <p:cNvSpPr/>
+          <p:nvPr/>
+        </p:nvSpPr>
+        <p:spPr>
+          <a:xfrm>
+            <a:off x="3403397" y="4169664"/>
+            <a:ext cx="676656" cy="384048"/>
+          </a:xfrm>
+          <a:prstGeom prst="rect">
+            <a:avLst>
+              <a:gd name="adj" fmla="val 9524"/>
+            </a:avLst>
+          </a:prstGeom>
+          <a:solidFill>
+            <a:srgbClr val="FFFFFF"/>
+          </a:solidFill>
+          <a:ln w="12700">
+            <a:solidFill>
+              <a:srgbClr val="DB2777"/>
+            </a:solidFill>
+            <a:prstDash val="solid"/>
+          </a:ln>
+        </p:spPr>
+      </p:sp>
+      <p:sp>
+        <p:nvSpPr>
+          <p:cNvPr id="44" name="Text 42"/>
+          <p:cNvSpPr/>
+          <p:nvPr/>
+        </p:nvSpPr>
+        <p:spPr>
+          <a:xfrm>
+            <a:off x="3403397" y="4169664"/>
+            <a:ext cx="676656" cy="384048"/>
+          </a:xfrm>
+          <a:prstGeom prst="rect">
+            <a:avLst/>
+          </a:prstGeom>
+          <a:noFill/>
+          <a:ln/>
+        </p:spPr>
+        <p:txBody>
+          <a:bodyPr wrap="square" lIns="0" tIns="0" rIns="0" bIns="0" rtlCol="0" anchor="ctr"/>
+          <a:lstStyle/>
+          <a:p>
+            <a:pPr algn="ctr" indent="0" marL="0">
+              <a:buNone/>
+            </a:pPr>
+            <a:r>
+              <a:rPr lang="en-US" sz="900" b="1" dirty="0">
+                <a:solidFill>
+                  <a:srgbClr val="9D174D"/>
+                </a:solidFill>
+                <a:latin typeface="Trebuchet MS" pitchFamily="34" charset="0"/>
+                <a:ea typeface="Trebuchet MS" pitchFamily="34" charset="-122"/>
+                <a:cs typeface="Trebuchet MS" pitchFamily="34" charset="-120"/>
+              </a:rPr>
+              <a:t>s</a:t>
+            </a:r>
+            <a:endParaRPr lang="en-US" sz="900" dirty="0"/>
+          </a:p>
+        </p:txBody>
+      </p:sp>
+      <p:sp>
+        <p:nvSpPr>
+          <p:cNvPr id="45" name="Text 43"/>
+          <p:cNvSpPr/>
+          <p:nvPr/>
+        </p:nvSpPr>
+        <p:spPr>
+          <a:xfrm>
+            <a:off x="3403397" y="4572000"/>
+            <a:ext cx="676656" cy="219456"/>
           </a:xfrm>
           <a:prstGeom prst="rect">
             <a:avLst/>
@@ -15729,7 +16263,7 @@
                 <a:ea typeface="Calibri" pitchFamily="34" charset="-122"/>
                 <a:cs typeface="Calibri" pitchFamily="34" charset="-120"/>
               </a:rPr>
-              <a:t>/k/</a:t>
+              <a:t>/z/</a:t>
             </a:r>
             <a:endParaRPr lang="en-US" sz="750" dirty="0"/>
           </a:p>
@@ -15737,14 +16271,14 @@
       </p:sp>
       <p:sp>
         <p:nvSpPr>
-          <p:cNvPr id="39" name="Shape 37"/>
-          <p:cNvSpPr/>
-          <p:nvPr/>
-        </p:nvSpPr>
-        <p:spPr>
-          <a:xfrm>
-            <a:off x="2831592" y="4169664"/>
-            <a:ext cx="685800" cy="384048"/>
+          <p:cNvPr id="46" name="Shape 44"/>
+          <p:cNvSpPr/>
+          <p:nvPr/>
+        </p:nvSpPr>
+        <p:spPr>
+          <a:xfrm>
+            <a:off x="4129430" y="4169664"/>
+            <a:ext cx="676656" cy="384048"/>
           </a:xfrm>
           <a:prstGeom prst="rect">
             <a:avLst>
@@ -15764,14 +16298,14 @@
       </p:sp>
       <p:sp>
         <p:nvSpPr>
-          <p:cNvPr id="40" name="Text 38"/>
-          <p:cNvSpPr/>
-          <p:nvPr/>
-        </p:nvSpPr>
-        <p:spPr>
-          <a:xfrm>
-            <a:off x="2831592" y="4169664"/>
-            <a:ext cx="685800" cy="384048"/>
+          <p:cNvPr id="47" name="Text 45"/>
+          <p:cNvSpPr/>
+          <p:nvPr/>
+        </p:nvSpPr>
+        <p:spPr>
+          <a:xfrm>
+            <a:off x="4129430" y="4169664"/>
+            <a:ext cx="676656" cy="384048"/>
           </a:xfrm>
           <a:prstGeom prst="rect">
             <a:avLst/>
@@ -15795,7 +16329,7 @@
                 <a:ea typeface="Trebuchet MS" pitchFamily="34" charset="-122"/>
                 <a:cs typeface="Trebuchet MS" pitchFamily="34" charset="-120"/>
               </a:rPr>
-              <a:t>o</a:t>
+              <a:t>c</a:t>
             </a:r>
             <a:endParaRPr lang="en-US" sz="900" dirty="0"/>
           </a:p>
@@ -15803,14 +16337,53 @@
       </p:sp>
       <p:sp>
         <p:nvSpPr>
-          <p:cNvPr id="41" name="Shape 39"/>
-          <p:cNvSpPr/>
-          <p:nvPr/>
-        </p:nvSpPr>
-        <p:spPr>
-          <a:xfrm>
-            <a:off x="3639312" y="4169664"/>
-            <a:ext cx="685800" cy="384048"/>
+          <p:cNvPr id="48" name="Text 46"/>
+          <p:cNvSpPr/>
+          <p:nvPr/>
+        </p:nvSpPr>
+        <p:spPr>
+          <a:xfrm>
+            <a:off x="4129430" y="4572000"/>
+            <a:ext cx="676656" cy="219456"/>
+          </a:xfrm>
+          <a:prstGeom prst="rect">
+            <a:avLst/>
+          </a:prstGeom>
+          <a:noFill/>
+          <a:ln/>
+        </p:spPr>
+        <p:txBody>
+          <a:bodyPr wrap="square" lIns="0" tIns="0" rIns="0" bIns="0" rtlCol="0" anchor="t"/>
+          <a:lstStyle/>
+          <a:p>
+            <a:pPr algn="ctr" indent="0" marL="0">
+              <a:buNone/>
+            </a:pPr>
+            <a:r>
+              <a:rPr lang="en-US" sz="750" i="1" dirty="0">
+                <a:solidFill>
+                  <a:srgbClr val="94A3B8"/>
+                </a:solidFill>
+                <a:latin typeface="Calibri" pitchFamily="34" charset="0"/>
+                <a:ea typeface="Calibri" pitchFamily="34" charset="-122"/>
+                <a:cs typeface="Calibri" pitchFamily="34" charset="-120"/>
+              </a:rPr>
+              <a:t>/k/</a:t>
+            </a:r>
+            <a:endParaRPr lang="en-US" sz="750" dirty="0"/>
+          </a:p>
+        </p:txBody>
+      </p:sp>
+      <p:sp>
+        <p:nvSpPr>
+          <p:cNvPr id="49" name="Shape 47"/>
+          <p:cNvSpPr/>
+          <p:nvPr/>
+        </p:nvSpPr>
+        <p:spPr>
+          <a:xfrm>
+            <a:off x="4855464" y="4169664"/>
+            <a:ext cx="676656" cy="384048"/>
           </a:xfrm>
           <a:prstGeom prst="rect">
             <a:avLst>
@@ -15830,14 +16403,14 @@
       </p:sp>
       <p:sp>
         <p:nvSpPr>
-          <p:cNvPr id="42" name="Text 40"/>
-          <p:cNvSpPr/>
-          <p:nvPr/>
-        </p:nvSpPr>
-        <p:spPr>
-          <a:xfrm>
-            <a:off x="3639312" y="4169664"/>
-            <a:ext cx="685800" cy="384048"/>
+          <p:cNvPr id="50" name="Text 48"/>
+          <p:cNvSpPr/>
+          <p:nvPr/>
+        </p:nvSpPr>
+        <p:spPr>
+          <a:xfrm>
+            <a:off x="4855464" y="4169664"/>
+            <a:ext cx="676656" cy="384048"/>
           </a:xfrm>
           <a:prstGeom prst="rect">
             <a:avLst/>
@@ -15861,7 +16434,7 @@
                 <a:ea typeface="Trebuchet MS" pitchFamily="34" charset="-122"/>
                 <a:cs typeface="Trebuchet MS" pitchFamily="34" charset="-120"/>
               </a:rPr>
-              <a:t>l</a:t>
+              <a:t>o</a:t>
             </a:r>
             <a:endParaRPr lang="en-US" sz="900" dirty="0"/>
           </a:p>
@@ -15869,14 +16442,14 @@
       </p:sp>
       <p:sp>
         <p:nvSpPr>
-          <p:cNvPr id="43" name="Shape 41"/>
-          <p:cNvSpPr/>
-          <p:nvPr/>
-        </p:nvSpPr>
-        <p:spPr>
-          <a:xfrm>
-            <a:off x="4447032" y="4169664"/>
-            <a:ext cx="685800" cy="384048"/>
+          <p:cNvPr id="51" name="Shape 49"/>
+          <p:cNvSpPr/>
+          <p:nvPr/>
+        </p:nvSpPr>
+        <p:spPr>
+          <a:xfrm>
+            <a:off x="5581498" y="4169664"/>
+            <a:ext cx="676656" cy="384048"/>
           </a:xfrm>
           <a:prstGeom prst="rect">
             <a:avLst>
@@ -15896,14 +16469,14 @@
       </p:sp>
       <p:sp>
         <p:nvSpPr>
-          <p:cNvPr id="44" name="Text 42"/>
-          <p:cNvSpPr/>
-          <p:nvPr/>
-        </p:nvSpPr>
-        <p:spPr>
-          <a:xfrm>
-            <a:off x="4447032" y="4169664"/>
-            <a:ext cx="685800" cy="384048"/>
+          <p:cNvPr id="52" name="Text 50"/>
+          <p:cNvSpPr/>
+          <p:nvPr/>
+        </p:nvSpPr>
+        <p:spPr>
+          <a:xfrm>
+            <a:off x="5581498" y="4169664"/>
+            <a:ext cx="676656" cy="384048"/>
           </a:xfrm>
           <a:prstGeom prst="rect">
             <a:avLst/>
@@ -15927,7 +16500,7 @@
                 <a:ea typeface="Trebuchet MS" pitchFamily="34" charset="-122"/>
                 <a:cs typeface="Trebuchet MS" pitchFamily="34" charset="-120"/>
               </a:rPr>
-              <a:t>ou</a:t>
+              <a:t>l</a:t>
             </a:r>
             <a:endParaRPr lang="en-US" sz="900" dirty="0"/>
           </a:p>
@@ -15935,14 +16508,14 @@
       </p:sp>
       <p:sp>
         <p:nvSpPr>
-          <p:cNvPr id="45" name="Shape 43"/>
-          <p:cNvSpPr/>
-          <p:nvPr/>
-        </p:nvSpPr>
-        <p:spPr>
-          <a:xfrm>
-            <a:off x="5254752" y="4169664"/>
-            <a:ext cx="685800" cy="384048"/>
+          <p:cNvPr id="53" name="Shape 51"/>
+          <p:cNvSpPr/>
+          <p:nvPr/>
+        </p:nvSpPr>
+        <p:spPr>
+          <a:xfrm>
+            <a:off x="6307531" y="4169664"/>
+            <a:ext cx="676656" cy="384048"/>
           </a:xfrm>
           <a:prstGeom prst="rect">
             <a:avLst>
@@ -15962,14 +16535,14 @@
       </p:sp>
       <p:sp>
         <p:nvSpPr>
-          <p:cNvPr id="46" name="Text 44"/>
-          <p:cNvSpPr/>
-          <p:nvPr/>
-        </p:nvSpPr>
-        <p:spPr>
-          <a:xfrm>
-            <a:off x="5254752" y="4169664"/>
-            <a:ext cx="685800" cy="384048"/>
+          <p:cNvPr id="54" name="Text 52"/>
+          <p:cNvSpPr/>
+          <p:nvPr/>
+        </p:nvSpPr>
+        <p:spPr>
+          <a:xfrm>
+            <a:off x="6307531" y="4169664"/>
+            <a:ext cx="676656" cy="384048"/>
           </a:xfrm>
           <a:prstGeom prst="rect">
             <a:avLst/>
@@ -15993,7 +16566,7 @@
                 <a:ea typeface="Trebuchet MS" pitchFamily="34" charset="-122"/>
                 <a:cs typeface="Trebuchet MS" pitchFamily="34" charset="-120"/>
               </a:rPr>
-              <a:t>r</a:t>
+              <a:t>ou</a:t>
             </a:r>
             <a:endParaRPr lang="en-US" sz="900" dirty="0"/>
           </a:p>
@@ -16001,14 +16574,14 @@
       </p:sp>
       <p:sp>
         <p:nvSpPr>
-          <p:cNvPr id="47" name="Shape 45"/>
-          <p:cNvSpPr/>
-          <p:nvPr/>
-        </p:nvSpPr>
-        <p:spPr>
-          <a:xfrm>
-            <a:off x="6062472" y="4169664"/>
-            <a:ext cx="685800" cy="384048"/>
+          <p:cNvPr id="55" name="Shape 53"/>
+          <p:cNvSpPr/>
+          <p:nvPr/>
+        </p:nvSpPr>
+        <p:spPr>
+          <a:xfrm>
+            <a:off x="7033565" y="4169664"/>
+            <a:ext cx="676656" cy="384048"/>
           </a:xfrm>
           <a:prstGeom prst="rect">
             <a:avLst>
@@ -16028,14 +16601,14 @@
       </p:sp>
       <p:sp>
         <p:nvSpPr>
-          <p:cNvPr id="48" name="Text 46"/>
-          <p:cNvSpPr/>
-          <p:nvPr/>
-        </p:nvSpPr>
-        <p:spPr>
-          <a:xfrm>
-            <a:off x="6062472" y="4169664"/>
-            <a:ext cx="685800" cy="384048"/>
+          <p:cNvPr id="56" name="Text 54"/>
+          <p:cNvSpPr/>
+          <p:nvPr/>
+        </p:nvSpPr>
+        <p:spPr>
+          <a:xfrm>
+            <a:off x="7033565" y="4169664"/>
+            <a:ext cx="676656" cy="384048"/>
           </a:xfrm>
           <a:prstGeom prst="rect">
             <a:avLst/>
@@ -16059,7 +16632,7 @@
                 <a:ea typeface="Trebuchet MS" pitchFamily="34" charset="-122"/>
                 <a:cs typeface="Trebuchet MS" pitchFamily="34" charset="-120"/>
               </a:rPr>
-              <a:t>f</a:t>
+              <a:t>r</a:t>
             </a:r>
             <a:endParaRPr lang="en-US" sz="900" dirty="0"/>
           </a:p>
@@ -16067,14 +16640,14 @@
       </p:sp>
       <p:sp>
         <p:nvSpPr>
-          <p:cNvPr id="49" name="Shape 47"/>
-          <p:cNvSpPr/>
-          <p:nvPr/>
-        </p:nvSpPr>
-        <p:spPr>
-          <a:xfrm>
-            <a:off x="6870192" y="4169664"/>
-            <a:ext cx="685800" cy="384048"/>
+          <p:cNvPr id="57" name="Shape 55"/>
+          <p:cNvSpPr/>
+          <p:nvPr/>
+        </p:nvSpPr>
+        <p:spPr>
+          <a:xfrm>
+            <a:off x="7759598" y="4169664"/>
+            <a:ext cx="676656" cy="384048"/>
           </a:xfrm>
           <a:prstGeom prst="rect">
             <a:avLst>
@@ -16094,14 +16667,14 @@
       </p:sp>
       <p:sp>
         <p:nvSpPr>
-          <p:cNvPr id="50" name="Text 48"/>
-          <p:cNvSpPr/>
-          <p:nvPr/>
-        </p:nvSpPr>
-        <p:spPr>
-          <a:xfrm>
-            <a:off x="6870192" y="4169664"/>
-            <a:ext cx="685800" cy="384048"/>
+          <p:cNvPr id="58" name="Text 56"/>
+          <p:cNvSpPr/>
+          <p:nvPr/>
+        </p:nvSpPr>
+        <p:spPr>
+          <a:xfrm>
+            <a:off x="7759598" y="4169664"/>
+            <a:ext cx="676656" cy="384048"/>
           </a:xfrm>
           <a:prstGeom prst="rect">
             <a:avLst/>
@@ -16125,73 +16698,7 @@
                 <a:ea typeface="Trebuchet MS" pitchFamily="34" charset="-122"/>
                 <a:cs typeface="Trebuchet MS" pitchFamily="34" charset="-120"/>
               </a:rPr>
-              <a:t>u</a:t>
-            </a:r>
-            <a:endParaRPr lang="en-US" sz="900" dirty="0"/>
-          </a:p>
-        </p:txBody>
-      </p:sp>
-      <p:sp>
-        <p:nvSpPr>
-          <p:cNvPr id="51" name="Shape 49"/>
-          <p:cNvSpPr/>
-          <p:nvPr/>
-        </p:nvSpPr>
-        <p:spPr>
-          <a:xfrm>
-            <a:off x="7677912" y="4169664"/>
-            <a:ext cx="685800" cy="384048"/>
-          </a:xfrm>
-          <a:prstGeom prst="rect">
-            <a:avLst>
-              <a:gd name="adj" fmla="val 9524"/>
-            </a:avLst>
-          </a:prstGeom>
-          <a:solidFill>
-            <a:srgbClr val="FFFFFF"/>
-          </a:solidFill>
-          <a:ln w="12700">
-            <a:solidFill>
-              <a:srgbClr val="DB2777"/>
-            </a:solidFill>
-            <a:prstDash val="solid"/>
-          </a:ln>
-        </p:spPr>
-      </p:sp>
-      <p:sp>
-        <p:nvSpPr>
-          <p:cNvPr id="52" name="Text 50"/>
-          <p:cNvSpPr/>
-          <p:nvPr/>
-        </p:nvSpPr>
-        <p:spPr>
-          <a:xfrm>
-            <a:off x="7677912" y="4169664"/>
-            <a:ext cx="685800" cy="384048"/>
-          </a:xfrm>
-          <a:prstGeom prst="rect">
-            <a:avLst/>
-          </a:prstGeom>
-          <a:noFill/>
-          <a:ln/>
-        </p:spPr>
-        <p:txBody>
-          <a:bodyPr wrap="square" lIns="0" tIns="0" rIns="0" bIns="0" rtlCol="0" anchor="ctr"/>
-          <a:lstStyle/>
-          <a:p>
-            <a:pPr algn="ctr" indent="0" marL="0">
-              <a:buNone/>
-            </a:pPr>
-            <a:r>
-              <a:rPr lang="en-US" sz="900" b="1" dirty="0">
-                <a:solidFill>
-                  <a:srgbClr val="9D174D"/>
-                </a:solidFill>
-                <a:latin typeface="Trebuchet MS" pitchFamily="34" charset="0"/>
-                <a:ea typeface="Trebuchet MS" pitchFamily="34" charset="-122"/>
-                <a:cs typeface="Trebuchet MS" pitchFamily="34" charset="-120"/>
-              </a:rPr>
-              <a:t>l</a:t>
+              <a:t>ed</a:t>
             </a:r>
             <a:endParaRPr lang="en-US" sz="900" dirty="0"/>
           </a:p>
@@ -16765,7 +17272,7 @@
                 <a:ea typeface="Calibri" pitchFamily="34" charset="-122"/>
                 <a:cs typeface="Calibri" pitchFamily="34" charset="-120"/>
               </a:rPr>
-              <a:t>Word Labs  •  wordlabs.app  •  Root: 'colour' = hue or shade of light</a:t>
+              <a:t>Word Labs  •  wordlabs.app  •  Root: 'colour' = hue, tint, or shade</a:t>
             </a:r>
             <a:endParaRPr lang="en-US" sz="800" dirty="0"/>
           </a:p>
@@ -17405,7 +17912,7 @@
                 <a:ea typeface="Calibri" pitchFamily="34" charset="-122"/>
                 <a:cs typeface="Calibri" pitchFamily="34" charset="-120"/>
               </a:rPr>
-              <a:t>Word Labs  •  wordlabs.app  •  Root: 'colour' = hue or shade of light</a:t>
+              <a:t>Word Labs  •  wordlabs.app  •  Root: 'colour' = hue, tint, or shade</a:t>
             </a:r>
             <a:endParaRPr lang="en-US" sz="800" dirty="0"/>
           </a:p>
@@ -17534,7 +18041,7 @@
                 <a:ea typeface="Calibri" pitchFamily="34" charset="-122"/>
                 <a:cs typeface="Calibri" pitchFamily="34" charset="-120"/>
               </a:rPr>
-              <a:t>discolouration</a:t>
+              <a:t>multicoloured</a:t>
             </a:r>
             <a:pPr algn="l" indent="0" marL="0">
               <a:buNone/>
@@ -17548,7 +18055,7 @@
                 <a:ea typeface="Calibri" pitchFamily="34" charset="-122"/>
                 <a:cs typeface="Calibri" pitchFamily="34" charset="-120"/>
               </a:rPr>
-              <a:t> on the wall was </a:t>
+              <a:t> kite flew high above the park, but its </a:t>
             </a:r>
             <a:pPr algn="l" indent="0" marL="0">
               <a:buNone/>
@@ -17565,7 +18072,7 @@
                 <a:ea typeface="Calibri" pitchFamily="34" charset="-122"/>
                 <a:cs typeface="Calibri" pitchFamily="34" charset="-120"/>
               </a:rPr>
-              <a:t>colourless</a:t>
+              <a:t>colouring</a:t>
             </a:r>
             <a:pPr algn="l" indent="0" marL="0">
               <a:buNone/>
@@ -17579,7 +18086,7 @@
                 <a:ea typeface="Calibri" pitchFamily="34" charset="-122"/>
                 <a:cs typeface="Calibri" pitchFamily="34" charset="-120"/>
               </a:rPr>
-              <a:t> at first, but soon the </a:t>
+              <a:t> had faded, leaving it looking </a:t>
             </a:r>
             <a:pPr algn="l" indent="0" marL="0">
               <a:buNone/>
@@ -17596,7 +18103,7 @@
                 <a:ea typeface="Calibri" pitchFamily="34" charset="-122"/>
                 <a:cs typeface="Calibri" pitchFamily="34" charset="-120"/>
               </a:rPr>
-              <a:t>multicoloured</a:t>
+              <a:t>colourless</a:t>
             </a:r>
             <a:pPr algn="l" indent="0" marL="0">
               <a:buNone/>
@@ -17610,7 +18117,7 @@
                 <a:ea typeface="Calibri" pitchFamily="34" charset="-122"/>
                 <a:cs typeface="Calibri" pitchFamily="34" charset="-120"/>
               </a:rPr>
-              <a:t> stain spread everywhere.</a:t>
+              <a:t> against the bright sky.</a:t>
             </a:r>
             <a:endParaRPr lang="en-US" sz="1800" dirty="0"/>
           </a:p>
@@ -17765,7 +18272,7 @@
                 <a:ea typeface="Trebuchet MS" pitchFamily="34" charset="-122"/>
                 <a:cs typeface="Trebuchet MS" pitchFamily="34" charset="-120"/>
               </a:rPr>
-              <a:t>discolouration</a:t>
+              <a:t>multicoloured</a:t>
             </a:r>
             <a:endParaRPr lang="en-US" sz="1400" dirty="0"/>
           </a:p>
@@ -17893,7 +18400,7 @@
                 <a:ea typeface="Trebuchet MS" pitchFamily="34" charset="-122"/>
                 <a:cs typeface="Trebuchet MS" pitchFamily="34" charset="-120"/>
               </a:rPr>
-              <a:t>colourless</a:t>
+              <a:t>colouring</a:t>
             </a:r>
             <a:endParaRPr lang="en-US" sz="1400" dirty="0"/>
           </a:p>
@@ -18021,7 +18528,7 @@
                 <a:ea typeface="Trebuchet MS" pitchFamily="34" charset="-122"/>
                 <a:cs typeface="Trebuchet MS" pitchFamily="34" charset="-120"/>
               </a:rPr>
-              <a:t>multicoloured</a:t>
+              <a:t>colourless</a:t>
             </a:r>
             <a:endParaRPr lang="en-US" sz="1400" dirty="0"/>
           </a:p>
@@ -18352,7 +18859,7 @@
                 <a:ea typeface="Calibri" pitchFamily="34" charset="-122"/>
                 <a:cs typeface="Calibri" pitchFamily="34" charset="-120"/>
               </a:rPr>
-              <a:t>Word Labs  •  wordlabs.app  •  Root: 'colour' = hue or shade of light</a:t>
+              <a:t>Word Labs  •  wordlabs.app  •  Root: 'colour' = hue, tint, or shade</a:t>
             </a:r>
             <a:endParaRPr lang="en-US" sz="800" dirty="0"/>
           </a:p>
@@ -18491,7 +18998,7 @@
                 <a:ea typeface="Trebuchet MS" pitchFamily="34" charset="-122"/>
                 <a:cs typeface="Trebuchet MS" pitchFamily="34" charset="-120"/>
               </a:rPr>
-              <a:t>discolouration</a:t>
+              <a:t>multicoloured</a:t>
             </a:r>
             <a:endParaRPr lang="en-US" sz="2800" dirty="0"/>
           </a:p>
@@ -19179,7 +19686,7 @@
                 <a:ea typeface="Calibri" pitchFamily="34" charset="-122"/>
                 <a:cs typeface="Calibri" pitchFamily="34" charset="-120"/>
               </a:rPr>
-              <a:t>Word Labs  •  wordlabs.app  •  Root: 'colour' = hue or shade of light</a:t>
+              <a:t>Word Labs  •  wordlabs.app  •  Root: 'colour' = hue, tint, or shade</a:t>
             </a:r>
             <a:endParaRPr lang="en-US" sz="800" dirty="0"/>
           </a:p>
@@ -19318,7 +19825,7 @@
                 <a:ea typeface="Trebuchet MS" pitchFamily="34" charset="-122"/>
                 <a:cs typeface="Trebuchet MS" pitchFamily="34" charset="-120"/>
               </a:rPr>
-              <a:t>discolouration</a:t>
+              <a:t>multicoloured</a:t>
             </a:r>
             <a:endParaRPr lang="en-US" sz="2800" dirty="0"/>
           </a:p>
@@ -19457,7 +19964,7 @@
                 <a:ea typeface="Trebuchet MS" pitchFamily="34" charset="-122"/>
                 <a:cs typeface="Trebuchet MS" pitchFamily="34" charset="-120"/>
               </a:rPr>
-              <a:t>dis</a:t>
+              <a:t>multi</a:t>
             </a:r>
             <a:endParaRPr lang="en-US" sz="1300" dirty="0"/>
           </a:p>
@@ -19496,7 +20003,7 @@
                 <a:ea typeface="Calibri" pitchFamily="34" charset="-122"/>
                 <a:cs typeface="Calibri" pitchFamily="34" charset="-120"/>
               </a:rPr>
-              <a:t>not or away</a:t>
+              <a:t>many</a:t>
             </a:r>
             <a:endParaRPr lang="en-US" sz="850" dirty="0"/>
           </a:p>
@@ -19681,7 +20188,7 @@
                 <a:ea typeface="Trebuchet MS" pitchFamily="34" charset="-122"/>
                 <a:cs typeface="Trebuchet MS" pitchFamily="34" charset="-120"/>
               </a:rPr>
-              <a:t>ation</a:t>
+              <a:t>ed</a:t>
             </a:r>
             <a:endParaRPr lang="en-US" sz="1300" dirty="0"/>
           </a:p>
@@ -19720,7 +20227,7 @@
                 <a:ea typeface="Calibri" pitchFamily="34" charset="-122"/>
                 <a:cs typeface="Calibri" pitchFamily="34" charset="-120"/>
               </a:rPr>
-              <a:t>state or process</a:t>
+              <a:t>made or having</a:t>
             </a:r>
             <a:endParaRPr lang="en-US" sz="850" dirty="0"/>
           </a:p>
@@ -20276,7 +20783,7 @@
                 <a:ea typeface="Calibri" pitchFamily="34" charset="-122"/>
                 <a:cs typeface="Calibri" pitchFamily="34" charset="-120"/>
               </a:rPr>
-              <a:t>Word Labs  •  wordlabs.app  •  Root: 'colour' = hue or shade of light</a:t>
+              <a:t>Word Labs  •  wordlabs.app  •  Root: 'colour' = hue, tint, or shade</a:t>
             </a:r>
             <a:endParaRPr lang="en-US" sz="800" dirty="0"/>
           </a:p>
@@ -20415,7 +20922,7 @@
                 <a:ea typeface="Trebuchet MS" pitchFamily="34" charset="-122"/>
                 <a:cs typeface="Trebuchet MS" pitchFamily="34" charset="-120"/>
               </a:rPr>
-              <a:t>discolouration</a:t>
+              <a:t>multicoloured</a:t>
             </a:r>
             <a:endParaRPr lang="en-US" sz="2800" dirty="0"/>
           </a:p>
@@ -20554,7 +21061,7 @@
                 <a:ea typeface="Trebuchet MS" pitchFamily="34" charset="-122"/>
                 <a:cs typeface="Trebuchet MS" pitchFamily="34" charset="-120"/>
               </a:rPr>
-              <a:t>dis</a:t>
+              <a:t>multi</a:t>
             </a:r>
             <a:endParaRPr lang="en-US" sz="1300" dirty="0"/>
           </a:p>
@@ -20593,7 +21100,7 @@
                 <a:ea typeface="Calibri" pitchFamily="34" charset="-122"/>
                 <a:cs typeface="Calibri" pitchFamily="34" charset="-120"/>
               </a:rPr>
-              <a:t>not or away</a:t>
+              <a:t>many</a:t>
             </a:r>
             <a:endParaRPr lang="en-US" sz="850" dirty="0"/>
           </a:p>
@@ -20778,7 +21285,7 @@
                 <a:ea typeface="Trebuchet MS" pitchFamily="34" charset="-122"/>
                 <a:cs typeface="Trebuchet MS" pitchFamily="34" charset="-120"/>
               </a:rPr>
-              <a:t>ation</a:t>
+              <a:t>ed</a:t>
             </a:r>
             <a:endParaRPr lang="en-US" sz="1300" dirty="0"/>
           </a:p>
@@ -20817,7 +21324,7 @@
                 <a:ea typeface="Calibri" pitchFamily="34" charset="-122"/>
                 <a:cs typeface="Calibri" pitchFamily="34" charset="-120"/>
               </a:rPr>
-              <a:t>state or process</a:t>
+              <a:t>made or having</a:t>
             </a:r>
             <a:endParaRPr lang="en-US" sz="850" dirty="0"/>
           </a:p>
@@ -20924,8 +21431,8 @@
         </p:nvSpPr>
         <p:spPr>
           <a:xfrm>
-            <a:off x="1978152" y="3364992"/>
-            <a:ext cx="1225296" cy="475488"/>
+            <a:off x="1975104" y="3364992"/>
+            <a:ext cx="1554480" cy="475488"/>
           </a:xfrm>
           <a:prstGeom prst="rect">
             <a:avLst>
@@ -20951,8 +21458,8 @@
         </p:nvSpPr>
         <p:spPr>
           <a:xfrm>
-            <a:off x="1978152" y="3364992"/>
-            <a:ext cx="1225296" cy="475488"/>
+            <a:off x="1975104" y="3364992"/>
+            <a:ext cx="1554480" cy="475488"/>
           </a:xfrm>
           <a:prstGeom prst="rect">
             <a:avLst/>
@@ -20976,7 +21483,7 @@
                 <a:ea typeface="Trebuchet MS" pitchFamily="34" charset="-122"/>
                 <a:cs typeface="Trebuchet MS" pitchFamily="34" charset="-120"/>
               </a:rPr>
-              <a:t>dis</a:t>
+              <a:t>mul</a:t>
             </a:r>
             <a:endParaRPr lang="en-US" sz="1400" dirty="0"/>
           </a:p>
@@ -20990,8 +21497,8 @@
         </p:nvSpPr>
         <p:spPr>
           <a:xfrm>
-            <a:off x="3203448" y="3364992"/>
-            <a:ext cx="76200" cy="475488"/>
+            <a:off x="3529584" y="3364992"/>
+            <a:ext cx="73152" cy="475488"/>
           </a:xfrm>
           <a:prstGeom prst="rect">
             <a:avLst/>
@@ -21029,8 +21536,8 @@
         </p:nvSpPr>
         <p:spPr>
           <a:xfrm>
-            <a:off x="3279648" y="3364992"/>
-            <a:ext cx="1225296" cy="475488"/>
+            <a:off x="3602736" y="3364992"/>
+            <a:ext cx="1554480" cy="475488"/>
           </a:xfrm>
           <a:prstGeom prst="rect">
             <a:avLst>
@@ -21056,8 +21563,8 @@
         </p:nvSpPr>
         <p:spPr>
           <a:xfrm>
-            <a:off x="3279648" y="3364992"/>
-            <a:ext cx="1225296" cy="475488"/>
+            <a:off x="3602736" y="3364992"/>
+            <a:ext cx="1554480" cy="475488"/>
           </a:xfrm>
           <a:prstGeom prst="rect">
             <a:avLst/>
@@ -21081,7 +21588,7 @@
                 <a:ea typeface="Trebuchet MS" pitchFamily="34" charset="-122"/>
                 <a:cs typeface="Trebuchet MS" pitchFamily="34" charset="-120"/>
               </a:rPr>
-              <a:t>col</a:t>
+              <a:t>ti</a:t>
             </a:r>
             <a:endParaRPr lang="en-US" sz="1400" dirty="0"/>
           </a:p>
@@ -21095,8 +21602,8 @@
         </p:nvSpPr>
         <p:spPr>
           <a:xfrm>
-            <a:off x="4504944" y="3364992"/>
-            <a:ext cx="76200" cy="475488"/>
+            <a:off x="5157216" y="3364992"/>
+            <a:ext cx="73152" cy="475488"/>
           </a:xfrm>
           <a:prstGeom prst="rect">
             <a:avLst/>
@@ -21134,8 +21641,8 @@
         </p:nvSpPr>
         <p:spPr>
           <a:xfrm>
-            <a:off x="4581144" y="3364992"/>
-            <a:ext cx="1225296" cy="475488"/>
+            <a:off x="5230368" y="3364992"/>
+            <a:ext cx="1554480" cy="475488"/>
           </a:xfrm>
           <a:prstGeom prst="rect">
             <a:avLst>
@@ -21161,8 +21668,8 @@
         </p:nvSpPr>
         <p:spPr>
           <a:xfrm>
-            <a:off x="4581144" y="3364992"/>
-            <a:ext cx="1225296" cy="475488"/>
+            <a:off x="5230368" y="3364992"/>
+            <a:ext cx="1554480" cy="475488"/>
           </a:xfrm>
           <a:prstGeom prst="rect">
             <a:avLst/>
@@ -21186,7 +21693,7 @@
                 <a:ea typeface="Trebuchet MS" pitchFamily="34" charset="-122"/>
                 <a:cs typeface="Trebuchet MS" pitchFamily="34" charset="-120"/>
               </a:rPr>
-              <a:t>our</a:t>
+              <a:t>col</a:t>
             </a:r>
             <a:endParaRPr lang="en-US" sz="1400" dirty="0"/>
           </a:p>
@@ -21200,8 +21707,8 @@
         </p:nvSpPr>
         <p:spPr>
           <a:xfrm>
-            <a:off x="5806440" y="3364992"/>
-            <a:ext cx="76200" cy="475488"/>
+            <a:off x="6784848" y="3364992"/>
+            <a:ext cx="73152" cy="475488"/>
           </a:xfrm>
           <a:prstGeom prst="rect">
             <a:avLst/>
@@ -21239,8 +21746,8 @@
         </p:nvSpPr>
         <p:spPr>
           <a:xfrm>
-            <a:off x="5882640" y="3364992"/>
-            <a:ext cx="1225296" cy="475488"/>
+            <a:off x="6858000" y="3364992"/>
+            <a:ext cx="1554480" cy="475488"/>
           </a:xfrm>
           <a:prstGeom prst="rect">
             <a:avLst>
@@ -21266,8 +21773,8 @@
         </p:nvSpPr>
         <p:spPr>
           <a:xfrm>
-            <a:off x="5882640" y="3364992"/>
-            <a:ext cx="1225296" cy="475488"/>
+            <a:off x="6858000" y="3364992"/>
+            <a:ext cx="1554480" cy="475488"/>
           </a:xfrm>
           <a:prstGeom prst="rect">
             <a:avLst/>
@@ -21291,7 +21798,7 @@
                 <a:ea typeface="Trebuchet MS" pitchFamily="34" charset="-122"/>
                 <a:cs typeface="Trebuchet MS" pitchFamily="34" charset="-120"/>
               </a:rPr>
-              <a:t>a</a:t>
+              <a:t>oured</a:t>
             </a:r>
             <a:endParaRPr lang="en-US" sz="1400" dirty="0"/>
           </a:p>
@@ -21299,119 +21806,80 @@
       </p:sp>
       <p:sp>
         <p:nvSpPr>
-          <p:cNvPr id="39" name="Text 37"/>
-          <p:cNvSpPr/>
-          <p:nvPr/>
-        </p:nvSpPr>
-        <p:spPr>
-          <a:xfrm>
-            <a:off x="7107936" y="3364992"/>
-            <a:ext cx="76200" cy="475488"/>
-          </a:xfrm>
-          <a:prstGeom prst="rect">
-            <a:avLst/>
-          </a:prstGeom>
-          <a:noFill/>
-          <a:ln/>
-        </p:spPr>
-        <p:txBody>
-          <a:bodyPr wrap="square" lIns="0" tIns="0" rIns="0" bIns="0" rtlCol="0" anchor="ctr"/>
-          <a:lstStyle/>
-          <a:p>
-            <a:pPr algn="ctr" indent="0" marL="0">
-              <a:buNone/>
-            </a:pPr>
-            <a:r>
-              <a:rPr lang="en-US" sz="1600" b="1" dirty="0">
-                <a:solidFill>
-                  <a:srgbClr val="0D9488"/>
+          <p:cNvPr id="39" name="Shape 37"/>
+          <p:cNvSpPr/>
+          <p:nvPr/>
+        </p:nvSpPr>
+        <p:spPr>
+          <a:xfrm>
+            <a:off x="365760" y="4096512"/>
+            <a:ext cx="1371600" cy="804672"/>
+          </a:xfrm>
+          <a:prstGeom prst="rect">
+            <a:avLst>
+              <a:gd name="adj" fmla="val 6818"/>
+            </a:avLst>
+          </a:prstGeom>
+          <a:solidFill>
+            <a:srgbClr val="E2E8F0"/>
+          </a:solidFill>
+          <a:ln w="12700">
+            <a:solidFill>
+              <a:srgbClr val="E2E8F0"/>
+            </a:solidFill>
+            <a:prstDash val="solid"/>
+          </a:ln>
+        </p:spPr>
+      </p:sp>
+      <p:sp>
+        <p:nvSpPr>
+          <p:cNvPr id="40" name="Text 38"/>
+          <p:cNvSpPr/>
+          <p:nvPr/>
+        </p:nvSpPr>
+        <p:spPr>
+          <a:xfrm>
+            <a:off x="365760" y="4096512"/>
+            <a:ext cx="1371600" cy="804672"/>
+          </a:xfrm>
+          <a:prstGeom prst="rect">
+            <a:avLst/>
+          </a:prstGeom>
+          <a:noFill/>
+          <a:ln/>
+        </p:spPr>
+        <p:txBody>
+          <a:bodyPr wrap="square" lIns="0" tIns="0" rIns="0" bIns="0" rtlCol="0" anchor="ctr"/>
+          <a:lstStyle/>
+          <a:p>
+            <a:pPr algn="ctr" indent="0" marL="0">
+              <a:buNone/>
+            </a:pPr>
+            <a:r>
+              <a:rPr lang="en-US" sz="1100" b="1" dirty="0">
+                <a:solidFill>
+                  <a:srgbClr val="475569"/>
                 </a:solidFill>
                 <a:latin typeface="Trebuchet MS" pitchFamily="34" charset="0"/>
                 <a:ea typeface="Trebuchet MS" pitchFamily="34" charset="-122"/>
                 <a:cs typeface="Trebuchet MS" pitchFamily="34" charset="-120"/>
               </a:rPr>
-              <a:t>·</a:t>
-            </a:r>
-            <a:endParaRPr lang="en-US" sz="1600" dirty="0"/>
-          </a:p>
-        </p:txBody>
-      </p:sp>
-      <p:sp>
-        <p:nvSpPr>
-          <p:cNvPr id="40" name="Shape 38"/>
-          <p:cNvSpPr/>
-          <p:nvPr/>
-        </p:nvSpPr>
-        <p:spPr>
-          <a:xfrm>
-            <a:off x="7184136" y="3364992"/>
-            <a:ext cx="1225296" cy="475488"/>
-          </a:xfrm>
-          <a:prstGeom prst="rect">
-            <a:avLst>
-              <a:gd name="adj" fmla="val 9615"/>
-            </a:avLst>
-          </a:prstGeom>
-          <a:solidFill>
-            <a:srgbClr val="FFFFFF"/>
-          </a:solidFill>
-          <a:ln w="12700">
-            <a:solidFill>
-              <a:srgbClr val="0D9488"/>
-            </a:solidFill>
-            <a:prstDash val="solid"/>
-          </a:ln>
-        </p:spPr>
-      </p:sp>
-      <p:sp>
-        <p:nvSpPr>
-          <p:cNvPr id="41" name="Text 39"/>
-          <p:cNvSpPr/>
-          <p:nvPr/>
-        </p:nvSpPr>
-        <p:spPr>
-          <a:xfrm>
-            <a:off x="7184136" y="3364992"/>
-            <a:ext cx="1225296" cy="475488"/>
-          </a:xfrm>
-          <a:prstGeom prst="rect">
-            <a:avLst/>
-          </a:prstGeom>
-          <a:noFill/>
-          <a:ln/>
-        </p:spPr>
-        <p:txBody>
-          <a:bodyPr wrap="square" lIns="0" tIns="0" rIns="0" bIns="0" rtlCol="0" anchor="ctr"/>
-          <a:lstStyle/>
-          <a:p>
-            <a:pPr algn="ctr" indent="0" marL="0">
-              <a:buNone/>
-            </a:pPr>
-            <a:r>
-              <a:rPr lang="en-US" sz="1400" b="1" dirty="0">
-                <a:solidFill>
-                  <a:srgbClr val="0D9488"/>
-                </a:solidFill>
-                <a:latin typeface="Trebuchet MS" pitchFamily="34" charset="0"/>
-                <a:ea typeface="Trebuchet MS" pitchFamily="34" charset="-122"/>
-                <a:cs typeface="Trebuchet MS" pitchFamily="34" charset="-120"/>
-              </a:rPr>
-              <a:t>tion</a:t>
-            </a:r>
-            <a:endParaRPr lang="en-US" sz="1400" dirty="0"/>
-          </a:p>
-        </p:txBody>
-      </p:sp>
-      <p:sp>
-        <p:nvSpPr>
-          <p:cNvPr id="42" name="Shape 40"/>
-          <p:cNvSpPr/>
-          <p:nvPr/>
-        </p:nvSpPr>
-        <p:spPr>
-          <a:xfrm>
-            <a:off x="365760" y="4096512"/>
-            <a:ext cx="1371600" cy="804672"/>
+              <a:t>Phonemes</a:t>
+            </a:r>
+            <a:endParaRPr lang="en-US" sz="1100" dirty="0"/>
+          </a:p>
+        </p:txBody>
+      </p:sp>
+      <p:sp>
+        <p:nvSpPr>
+          <p:cNvPr id="41" name="Shape 39"/>
+          <p:cNvSpPr/>
+          <p:nvPr/>
+        </p:nvSpPr>
+        <p:spPr>
+          <a:xfrm>
+            <a:off x="1874520" y="4096512"/>
+            <a:ext cx="6903720" cy="804672"/>
           </a:xfrm>
           <a:prstGeom prst="rect">
             <a:avLst>
@@ -21419,85 +21887,19 @@
             </a:avLst>
           </a:prstGeom>
           <a:solidFill>
-            <a:srgbClr val="E2E8F0"/>
+            <a:srgbClr val="F8FAFC"/>
           </a:solidFill>
           <a:ln w="12700">
             <a:solidFill>
               <a:srgbClr val="E2E8F0"/>
             </a:solidFill>
-            <a:prstDash val="solid"/>
-          </a:ln>
-        </p:spPr>
-      </p:sp>
-      <p:sp>
-        <p:nvSpPr>
-          <p:cNvPr id="43" name="Text 41"/>
-          <p:cNvSpPr/>
-          <p:nvPr/>
-        </p:nvSpPr>
-        <p:spPr>
-          <a:xfrm>
-            <a:off x="365760" y="4096512"/>
-            <a:ext cx="1371600" cy="804672"/>
-          </a:xfrm>
-          <a:prstGeom prst="rect">
-            <a:avLst/>
-          </a:prstGeom>
-          <a:noFill/>
-          <a:ln/>
-        </p:spPr>
-        <p:txBody>
-          <a:bodyPr wrap="square" lIns="0" tIns="0" rIns="0" bIns="0" rtlCol="0" anchor="ctr"/>
-          <a:lstStyle/>
-          <a:p>
-            <a:pPr algn="ctr" indent="0" marL="0">
-              <a:buNone/>
-            </a:pPr>
-            <a:r>
-              <a:rPr lang="en-US" sz="1100" b="1" dirty="0">
-                <a:solidFill>
-                  <a:srgbClr val="475569"/>
-                </a:solidFill>
-                <a:latin typeface="Trebuchet MS" pitchFamily="34" charset="0"/>
-                <a:ea typeface="Trebuchet MS" pitchFamily="34" charset="-122"/>
-                <a:cs typeface="Trebuchet MS" pitchFamily="34" charset="-120"/>
-              </a:rPr>
-              <a:t>Phonemes</a:t>
-            </a:r>
-            <a:endParaRPr lang="en-US" sz="1100" dirty="0"/>
-          </a:p>
-        </p:txBody>
-      </p:sp>
-      <p:sp>
-        <p:nvSpPr>
-          <p:cNvPr id="44" name="Shape 42"/>
-          <p:cNvSpPr/>
-          <p:nvPr/>
-        </p:nvSpPr>
-        <p:spPr>
-          <a:xfrm>
-            <a:off x="1874520" y="4096512"/>
-            <a:ext cx="6903720" cy="804672"/>
-          </a:xfrm>
-          <a:prstGeom prst="rect">
-            <a:avLst>
-              <a:gd name="adj" fmla="val 6818"/>
-            </a:avLst>
-          </a:prstGeom>
-          <a:solidFill>
-            <a:srgbClr val="F8FAFC"/>
-          </a:solidFill>
-          <a:ln w="12700">
-            <a:solidFill>
-              <a:srgbClr val="E2E8F0"/>
-            </a:solidFill>
             <a:prstDash val="dash"/>
           </a:ln>
         </p:spPr>
       </p:sp>
       <p:sp>
         <p:nvSpPr>
-          <p:cNvPr id="45" name="Text 43"/>
+          <p:cNvPr id="42" name="Text 40"/>
           <p:cNvSpPr/>
           <p:nvPr/>
         </p:nvSpPr>
@@ -21820,7 +22222,7 @@
                 <a:ea typeface="Calibri" pitchFamily="34" charset="-122"/>
                 <a:cs typeface="Calibri" pitchFamily="34" charset="-120"/>
               </a:rPr>
-              <a:t>Word Labs  •  wordlabs.app  •  Root: 'colour' = hue or shade of light</a:t>
+              <a:t>Word Labs  •  wordlabs.app  •  Root: 'colour' = hue, tint, or shade</a:t>
             </a:r>
             <a:endParaRPr lang="en-US" sz="800" dirty="0"/>
           </a:p>
@@ -21959,7 +22361,7 @@
                 <a:ea typeface="Trebuchet MS" pitchFamily="34" charset="-122"/>
                 <a:cs typeface="Trebuchet MS" pitchFamily="34" charset="-120"/>
               </a:rPr>
-              <a:t>discolouration</a:t>
+              <a:t>multicoloured</a:t>
             </a:r>
             <a:endParaRPr lang="en-US" sz="2800" dirty="0"/>
           </a:p>
@@ -22098,7 +22500,7 @@
                 <a:ea typeface="Trebuchet MS" pitchFamily="34" charset="-122"/>
                 <a:cs typeface="Trebuchet MS" pitchFamily="34" charset="-120"/>
               </a:rPr>
-              <a:t>dis</a:t>
+              <a:t>multi</a:t>
             </a:r>
             <a:endParaRPr lang="en-US" sz="1300" dirty="0"/>
           </a:p>
@@ -22137,7 +22539,7 @@
                 <a:ea typeface="Calibri" pitchFamily="34" charset="-122"/>
                 <a:cs typeface="Calibri" pitchFamily="34" charset="-120"/>
               </a:rPr>
-              <a:t>not or away</a:t>
+              <a:t>many</a:t>
             </a:r>
             <a:endParaRPr lang="en-US" sz="850" dirty="0"/>
           </a:p>
@@ -22322,7 +22724,7 @@
                 <a:ea typeface="Trebuchet MS" pitchFamily="34" charset="-122"/>
                 <a:cs typeface="Trebuchet MS" pitchFamily="34" charset="-120"/>
               </a:rPr>
-              <a:t>ation</a:t>
+              <a:t>ed</a:t>
             </a:r>
             <a:endParaRPr lang="en-US" sz="1300" dirty="0"/>
           </a:p>
@@ -22361,7 +22763,7 @@
                 <a:ea typeface="Calibri" pitchFamily="34" charset="-122"/>
                 <a:cs typeface="Calibri" pitchFamily="34" charset="-120"/>
               </a:rPr>
-              <a:t>state or process</a:t>
+              <a:t>made or having</a:t>
             </a:r>
             <a:endParaRPr lang="en-US" sz="850" dirty="0"/>
           </a:p>
@@ -22468,8 +22870,8 @@
         </p:nvSpPr>
         <p:spPr>
           <a:xfrm>
-            <a:off x="1978152" y="3364992"/>
-            <a:ext cx="1225296" cy="475488"/>
+            <a:off x="1975104" y="3364992"/>
+            <a:ext cx="1554480" cy="475488"/>
           </a:xfrm>
           <a:prstGeom prst="rect">
             <a:avLst>
@@ -22495,8 +22897,8 @@
         </p:nvSpPr>
         <p:spPr>
           <a:xfrm>
-            <a:off x="1978152" y="3364992"/>
-            <a:ext cx="1225296" cy="475488"/>
+            <a:off x="1975104" y="3364992"/>
+            <a:ext cx="1554480" cy="475488"/>
           </a:xfrm>
           <a:prstGeom prst="rect">
             <a:avLst/>
@@ -22520,7 +22922,7 @@
                 <a:ea typeface="Trebuchet MS" pitchFamily="34" charset="-122"/>
                 <a:cs typeface="Trebuchet MS" pitchFamily="34" charset="-120"/>
               </a:rPr>
-              <a:t>dis</a:t>
+              <a:t>mul</a:t>
             </a:r>
             <a:endParaRPr lang="en-US" sz="1400" dirty="0"/>
           </a:p>
@@ -22534,8 +22936,8 @@
         </p:nvSpPr>
         <p:spPr>
           <a:xfrm>
-            <a:off x="3203448" y="3364992"/>
-            <a:ext cx="76200" cy="475488"/>
+            <a:off x="3529584" y="3364992"/>
+            <a:ext cx="73152" cy="475488"/>
           </a:xfrm>
           <a:prstGeom prst="rect">
             <a:avLst/>
@@ -22573,8 +22975,8 @@
         </p:nvSpPr>
         <p:spPr>
           <a:xfrm>
-            <a:off x="3279648" y="3364992"/>
-            <a:ext cx="1225296" cy="475488"/>
+            <a:off x="3602736" y="3364992"/>
+            <a:ext cx="1554480" cy="475488"/>
           </a:xfrm>
           <a:prstGeom prst="rect">
             <a:avLst>
@@ -22600,8 +23002,8 @@
         </p:nvSpPr>
         <p:spPr>
           <a:xfrm>
-            <a:off x="3279648" y="3364992"/>
-            <a:ext cx="1225296" cy="475488"/>
+            <a:off x="3602736" y="3364992"/>
+            <a:ext cx="1554480" cy="475488"/>
           </a:xfrm>
           <a:prstGeom prst="rect">
             <a:avLst/>
@@ -22625,7 +23027,7 @@
                 <a:ea typeface="Trebuchet MS" pitchFamily="34" charset="-122"/>
                 <a:cs typeface="Trebuchet MS" pitchFamily="34" charset="-120"/>
               </a:rPr>
-              <a:t>col</a:t>
+              <a:t>ti</a:t>
             </a:r>
             <a:endParaRPr lang="en-US" sz="1400" dirty="0"/>
           </a:p>
@@ -22639,8 +23041,8 @@
         </p:nvSpPr>
         <p:spPr>
           <a:xfrm>
-            <a:off x="4504944" y="3364992"/>
-            <a:ext cx="76200" cy="475488"/>
+            <a:off x="5157216" y="3364992"/>
+            <a:ext cx="73152" cy="475488"/>
           </a:xfrm>
           <a:prstGeom prst="rect">
             <a:avLst/>
@@ -22678,8 +23080,8 @@
         </p:nvSpPr>
         <p:spPr>
           <a:xfrm>
-            <a:off x="4581144" y="3364992"/>
-            <a:ext cx="1225296" cy="475488"/>
+            <a:off x="5230368" y="3364992"/>
+            <a:ext cx="1554480" cy="475488"/>
           </a:xfrm>
           <a:prstGeom prst="rect">
             <a:avLst>
@@ -22705,8 +23107,8 @@
         </p:nvSpPr>
         <p:spPr>
           <a:xfrm>
-            <a:off x="4581144" y="3364992"/>
-            <a:ext cx="1225296" cy="475488"/>
+            <a:off x="5230368" y="3364992"/>
+            <a:ext cx="1554480" cy="475488"/>
           </a:xfrm>
           <a:prstGeom prst="rect">
             <a:avLst/>
@@ -22730,7 +23132,7 @@
                 <a:ea typeface="Trebuchet MS" pitchFamily="34" charset="-122"/>
                 <a:cs typeface="Trebuchet MS" pitchFamily="34" charset="-120"/>
               </a:rPr>
-              <a:t>our</a:t>
+              <a:t>col</a:t>
             </a:r>
             <a:endParaRPr lang="en-US" sz="1400" dirty="0"/>
           </a:p>
@@ -22744,8 +23146,8 @@
         </p:nvSpPr>
         <p:spPr>
           <a:xfrm>
-            <a:off x="5806440" y="3364992"/>
-            <a:ext cx="76200" cy="475488"/>
+            <a:off x="6784848" y="3364992"/>
+            <a:ext cx="73152" cy="475488"/>
           </a:xfrm>
           <a:prstGeom prst="rect">
             <a:avLst/>
@@ -22783,8 +23185,8 @@
         </p:nvSpPr>
         <p:spPr>
           <a:xfrm>
-            <a:off x="5882640" y="3364992"/>
-            <a:ext cx="1225296" cy="475488"/>
+            <a:off x="6858000" y="3364992"/>
+            <a:ext cx="1554480" cy="475488"/>
           </a:xfrm>
           <a:prstGeom prst="rect">
             <a:avLst>
@@ -22810,8 +23212,8 @@
         </p:nvSpPr>
         <p:spPr>
           <a:xfrm>
-            <a:off x="5882640" y="3364992"/>
-            <a:ext cx="1225296" cy="475488"/>
+            <a:off x="6858000" y="3364992"/>
+            <a:ext cx="1554480" cy="475488"/>
           </a:xfrm>
           <a:prstGeom prst="rect">
             <a:avLst/>
@@ -22835,7 +23237,7 @@
                 <a:ea typeface="Trebuchet MS" pitchFamily="34" charset="-122"/>
                 <a:cs typeface="Trebuchet MS" pitchFamily="34" charset="-120"/>
               </a:rPr>
-              <a:t>a</a:t>
+              <a:t>oured</a:t>
             </a:r>
             <a:endParaRPr lang="en-US" sz="1400" dirty="0"/>
           </a:p>
@@ -22843,212 +23245,239 @@
       </p:sp>
       <p:sp>
         <p:nvSpPr>
-          <p:cNvPr id="39" name="Text 37"/>
-          <p:cNvSpPr/>
-          <p:nvPr/>
-        </p:nvSpPr>
-        <p:spPr>
-          <a:xfrm>
-            <a:off x="7107936" y="3364992"/>
-            <a:ext cx="76200" cy="475488"/>
-          </a:xfrm>
-          <a:prstGeom prst="rect">
-            <a:avLst/>
-          </a:prstGeom>
-          <a:noFill/>
-          <a:ln/>
-        </p:spPr>
-        <p:txBody>
-          <a:bodyPr wrap="square" lIns="0" tIns="0" rIns="0" bIns="0" rtlCol="0" anchor="ctr"/>
-          <a:lstStyle/>
-          <a:p>
-            <a:pPr algn="ctr" indent="0" marL="0">
-              <a:buNone/>
-            </a:pPr>
-            <a:r>
-              <a:rPr lang="en-US" sz="1600" b="1" dirty="0">
-                <a:solidFill>
-                  <a:srgbClr val="0D9488"/>
+          <p:cNvPr id="39" name="Shape 37"/>
+          <p:cNvSpPr/>
+          <p:nvPr/>
+        </p:nvSpPr>
+        <p:spPr>
+          <a:xfrm>
+            <a:off x="365760" y="4096512"/>
+            <a:ext cx="1371600" cy="804672"/>
+          </a:xfrm>
+          <a:prstGeom prst="rect">
+            <a:avLst>
+              <a:gd name="adj" fmla="val 6818"/>
+            </a:avLst>
+          </a:prstGeom>
+          <a:solidFill>
+            <a:srgbClr val="E2E8F0"/>
+          </a:solidFill>
+          <a:ln w="12700">
+            <a:solidFill>
+              <a:srgbClr val="E2E8F0"/>
+            </a:solidFill>
+            <a:prstDash val="solid"/>
+          </a:ln>
+        </p:spPr>
+      </p:sp>
+      <p:sp>
+        <p:nvSpPr>
+          <p:cNvPr id="40" name="Text 38"/>
+          <p:cNvSpPr/>
+          <p:nvPr/>
+        </p:nvSpPr>
+        <p:spPr>
+          <a:xfrm>
+            <a:off x="365760" y="4096512"/>
+            <a:ext cx="1371600" cy="804672"/>
+          </a:xfrm>
+          <a:prstGeom prst="rect">
+            <a:avLst/>
+          </a:prstGeom>
+          <a:noFill/>
+          <a:ln/>
+        </p:spPr>
+        <p:txBody>
+          <a:bodyPr wrap="square" lIns="0" tIns="0" rIns="0" bIns="0" rtlCol="0" anchor="ctr"/>
+          <a:lstStyle/>
+          <a:p>
+            <a:pPr algn="ctr" indent="0" marL="0">
+              <a:buNone/>
+            </a:pPr>
+            <a:r>
+              <a:rPr lang="en-US" sz="1100" b="1" dirty="0">
+                <a:solidFill>
+                  <a:srgbClr val="475569"/>
                 </a:solidFill>
                 <a:latin typeface="Trebuchet MS" pitchFamily="34" charset="0"/>
                 <a:ea typeface="Trebuchet MS" pitchFamily="34" charset="-122"/>
                 <a:cs typeface="Trebuchet MS" pitchFamily="34" charset="-120"/>
               </a:rPr>
-              <a:t>·</a:t>
-            </a:r>
-            <a:endParaRPr lang="en-US" sz="1600" dirty="0"/>
-          </a:p>
-        </p:txBody>
-      </p:sp>
-      <p:sp>
-        <p:nvSpPr>
-          <p:cNvPr id="40" name="Shape 38"/>
-          <p:cNvSpPr/>
-          <p:nvPr/>
-        </p:nvSpPr>
-        <p:spPr>
-          <a:xfrm>
-            <a:off x="7184136" y="3364992"/>
-            <a:ext cx="1225296" cy="475488"/>
+              <a:t>Phonemes</a:t>
+            </a:r>
+            <a:endParaRPr lang="en-US" sz="1100" dirty="0"/>
+          </a:p>
+        </p:txBody>
+      </p:sp>
+      <p:sp>
+        <p:nvSpPr>
+          <p:cNvPr id="41" name="Shape 39"/>
+          <p:cNvSpPr/>
+          <p:nvPr/>
+        </p:nvSpPr>
+        <p:spPr>
+          <a:xfrm>
+            <a:off x="1874520" y="4096512"/>
+            <a:ext cx="6903720" cy="804672"/>
           </a:xfrm>
           <a:prstGeom prst="rect">
             <a:avLst>
-              <a:gd name="adj" fmla="val 9615"/>
+              <a:gd name="adj" fmla="val 6818"/>
             </a:avLst>
           </a:prstGeom>
           <a:solidFill>
+            <a:srgbClr val="FCE7F3"/>
+          </a:solidFill>
+          <a:ln w="12700">
+            <a:solidFill>
+              <a:srgbClr val="DB2777"/>
+            </a:solidFill>
+            <a:prstDash val="solid"/>
+          </a:ln>
+        </p:spPr>
+      </p:sp>
+      <p:sp>
+        <p:nvSpPr>
+          <p:cNvPr id="42" name="Shape 40"/>
+          <p:cNvSpPr/>
+          <p:nvPr/>
+        </p:nvSpPr>
+        <p:spPr>
+          <a:xfrm>
+            <a:off x="1952244" y="4169664"/>
+            <a:ext cx="543652" cy="384048"/>
+          </a:xfrm>
+          <a:prstGeom prst="rect">
+            <a:avLst>
+              <a:gd name="adj" fmla="val 9524"/>
+            </a:avLst>
+          </a:prstGeom>
+          <a:solidFill>
             <a:srgbClr val="FFFFFF"/>
           </a:solidFill>
           <a:ln w="12700">
             <a:solidFill>
-              <a:srgbClr val="0D9488"/>
-            </a:solidFill>
-            <a:prstDash val="solid"/>
-          </a:ln>
-        </p:spPr>
-      </p:sp>
-      <p:sp>
-        <p:nvSpPr>
-          <p:cNvPr id="41" name="Text 39"/>
-          <p:cNvSpPr/>
-          <p:nvPr/>
-        </p:nvSpPr>
-        <p:spPr>
-          <a:xfrm>
-            <a:off x="7184136" y="3364992"/>
-            <a:ext cx="1225296" cy="475488"/>
-          </a:xfrm>
-          <a:prstGeom prst="rect">
-            <a:avLst/>
-          </a:prstGeom>
-          <a:noFill/>
-          <a:ln/>
-        </p:spPr>
-        <p:txBody>
-          <a:bodyPr wrap="square" lIns="0" tIns="0" rIns="0" bIns="0" rtlCol="0" anchor="ctr"/>
-          <a:lstStyle/>
-          <a:p>
-            <a:pPr algn="ctr" indent="0" marL="0">
-              <a:buNone/>
-            </a:pPr>
-            <a:r>
-              <a:rPr lang="en-US" sz="1400" b="1" dirty="0">
-                <a:solidFill>
-                  <a:srgbClr val="0D9488"/>
+              <a:srgbClr val="DB2777"/>
+            </a:solidFill>
+            <a:prstDash val="solid"/>
+          </a:ln>
+        </p:spPr>
+      </p:sp>
+      <p:sp>
+        <p:nvSpPr>
+          <p:cNvPr id="43" name="Text 41"/>
+          <p:cNvSpPr/>
+          <p:nvPr/>
+        </p:nvSpPr>
+        <p:spPr>
+          <a:xfrm>
+            <a:off x="1952244" y="4169664"/>
+            <a:ext cx="543652" cy="384048"/>
+          </a:xfrm>
+          <a:prstGeom prst="rect">
+            <a:avLst/>
+          </a:prstGeom>
+          <a:noFill/>
+          <a:ln/>
+        </p:spPr>
+        <p:txBody>
+          <a:bodyPr wrap="square" lIns="0" tIns="0" rIns="0" bIns="0" rtlCol="0" anchor="ctr"/>
+          <a:lstStyle/>
+          <a:p>
+            <a:pPr algn="ctr" indent="0" marL="0">
+              <a:buNone/>
+            </a:pPr>
+            <a:r>
+              <a:rPr lang="en-US" sz="900" b="1" dirty="0">
+                <a:solidFill>
+                  <a:srgbClr val="9D174D"/>
                 </a:solidFill>
                 <a:latin typeface="Trebuchet MS" pitchFamily="34" charset="0"/>
                 <a:ea typeface="Trebuchet MS" pitchFamily="34" charset="-122"/>
                 <a:cs typeface="Trebuchet MS" pitchFamily="34" charset="-120"/>
               </a:rPr>
-              <a:t>tion</a:t>
-            </a:r>
-            <a:endParaRPr lang="en-US" sz="1400" dirty="0"/>
-          </a:p>
-        </p:txBody>
-      </p:sp>
-      <p:sp>
-        <p:nvSpPr>
-          <p:cNvPr id="42" name="Shape 40"/>
-          <p:cNvSpPr/>
-          <p:nvPr/>
-        </p:nvSpPr>
-        <p:spPr>
-          <a:xfrm>
-            <a:off x="365760" y="4096512"/>
-            <a:ext cx="1371600" cy="804672"/>
+              <a:t>m</a:t>
+            </a:r>
+            <a:endParaRPr lang="en-US" sz="900" dirty="0"/>
+          </a:p>
+        </p:txBody>
+      </p:sp>
+      <p:sp>
+        <p:nvSpPr>
+          <p:cNvPr id="44" name="Shape 42"/>
+          <p:cNvSpPr/>
+          <p:nvPr/>
+        </p:nvSpPr>
+        <p:spPr>
+          <a:xfrm>
+            <a:off x="2546188" y="4169664"/>
+            <a:ext cx="543652" cy="384048"/>
           </a:xfrm>
           <a:prstGeom prst="rect">
             <a:avLst>
-              <a:gd name="adj" fmla="val 6818"/>
+              <a:gd name="adj" fmla="val 9524"/>
             </a:avLst>
           </a:prstGeom>
           <a:solidFill>
-            <a:srgbClr val="E2E8F0"/>
-          </a:solidFill>
-          <a:ln w="12700">
-            <a:solidFill>
-              <a:srgbClr val="E2E8F0"/>
-            </a:solidFill>
-            <a:prstDash val="solid"/>
-          </a:ln>
-        </p:spPr>
-      </p:sp>
-      <p:sp>
-        <p:nvSpPr>
-          <p:cNvPr id="43" name="Text 41"/>
-          <p:cNvSpPr/>
-          <p:nvPr/>
-        </p:nvSpPr>
-        <p:spPr>
-          <a:xfrm>
-            <a:off x="365760" y="4096512"/>
-            <a:ext cx="1371600" cy="804672"/>
-          </a:xfrm>
-          <a:prstGeom prst="rect">
-            <a:avLst/>
-          </a:prstGeom>
-          <a:noFill/>
-          <a:ln/>
-        </p:spPr>
-        <p:txBody>
-          <a:bodyPr wrap="square" lIns="0" tIns="0" rIns="0" bIns="0" rtlCol="0" anchor="ctr"/>
-          <a:lstStyle/>
-          <a:p>
-            <a:pPr algn="ctr" indent="0" marL="0">
-              <a:buNone/>
-            </a:pPr>
-            <a:r>
-              <a:rPr lang="en-US" sz="1100" b="1" dirty="0">
-                <a:solidFill>
-                  <a:srgbClr val="475569"/>
+            <a:srgbClr val="FFFFFF"/>
+          </a:solidFill>
+          <a:ln w="12700">
+            <a:solidFill>
+              <a:srgbClr val="DB2777"/>
+            </a:solidFill>
+            <a:prstDash val="solid"/>
+          </a:ln>
+        </p:spPr>
+      </p:sp>
+      <p:sp>
+        <p:nvSpPr>
+          <p:cNvPr id="45" name="Text 43"/>
+          <p:cNvSpPr/>
+          <p:nvPr/>
+        </p:nvSpPr>
+        <p:spPr>
+          <a:xfrm>
+            <a:off x="2546188" y="4169664"/>
+            <a:ext cx="543652" cy="384048"/>
+          </a:xfrm>
+          <a:prstGeom prst="rect">
+            <a:avLst/>
+          </a:prstGeom>
+          <a:noFill/>
+          <a:ln/>
+        </p:spPr>
+        <p:txBody>
+          <a:bodyPr wrap="square" lIns="0" tIns="0" rIns="0" bIns="0" rtlCol="0" anchor="ctr"/>
+          <a:lstStyle/>
+          <a:p>
+            <a:pPr algn="ctr" indent="0" marL="0">
+              <a:buNone/>
+            </a:pPr>
+            <a:r>
+              <a:rPr lang="en-US" sz="900" b="1" dirty="0">
+                <a:solidFill>
+                  <a:srgbClr val="9D174D"/>
                 </a:solidFill>
                 <a:latin typeface="Trebuchet MS" pitchFamily="34" charset="0"/>
                 <a:ea typeface="Trebuchet MS" pitchFamily="34" charset="-122"/>
                 <a:cs typeface="Trebuchet MS" pitchFamily="34" charset="-120"/>
               </a:rPr>
-              <a:t>Phonemes</a:t>
-            </a:r>
-            <a:endParaRPr lang="en-US" sz="1100" dirty="0"/>
-          </a:p>
-        </p:txBody>
-      </p:sp>
-      <p:sp>
-        <p:nvSpPr>
-          <p:cNvPr id="44" name="Shape 42"/>
-          <p:cNvSpPr/>
-          <p:nvPr/>
-        </p:nvSpPr>
-        <p:spPr>
-          <a:xfrm>
-            <a:off x="1874520" y="4096512"/>
-            <a:ext cx="6903720" cy="804672"/>
-          </a:xfrm>
-          <a:prstGeom prst="rect">
-            <a:avLst>
-              <a:gd name="adj" fmla="val 6818"/>
-            </a:avLst>
-          </a:prstGeom>
-          <a:solidFill>
-            <a:srgbClr val="FCE7F3"/>
-          </a:solidFill>
-          <a:ln w="12700">
-            <a:solidFill>
-              <a:srgbClr val="DB2777"/>
-            </a:solidFill>
-            <a:prstDash val="solid"/>
-          </a:ln>
-        </p:spPr>
-      </p:sp>
-      <p:sp>
-        <p:nvSpPr>
-          <p:cNvPr id="45" name="Shape 43"/>
-          <p:cNvSpPr/>
-          <p:nvPr/>
-        </p:nvSpPr>
-        <p:spPr>
-          <a:xfrm>
-            <a:off x="1952596" y="4169664"/>
-            <a:ext cx="493776" cy="384048"/>
+              <a:t>u</a:t>
+            </a:r>
+            <a:endParaRPr lang="en-US" sz="900" dirty="0"/>
+          </a:p>
+        </p:txBody>
+      </p:sp>
+      <p:sp>
+        <p:nvSpPr>
+          <p:cNvPr id="46" name="Shape 44"/>
+          <p:cNvSpPr/>
+          <p:nvPr/>
+        </p:nvSpPr>
+        <p:spPr>
+          <a:xfrm>
+            <a:off x="3140133" y="4169664"/>
+            <a:ext cx="543652" cy="384048"/>
           </a:xfrm>
           <a:prstGeom prst="rect">
             <a:avLst>
@@ -23068,14 +23497,14 @@
       </p:sp>
       <p:sp>
         <p:nvSpPr>
-          <p:cNvPr id="46" name="Text 44"/>
-          <p:cNvSpPr/>
-          <p:nvPr/>
-        </p:nvSpPr>
-        <p:spPr>
-          <a:xfrm>
-            <a:off x="1952596" y="4169664"/>
-            <a:ext cx="493776" cy="384048"/>
+          <p:cNvPr id="47" name="Text 45"/>
+          <p:cNvSpPr/>
+          <p:nvPr/>
+        </p:nvSpPr>
+        <p:spPr>
+          <a:xfrm>
+            <a:off x="3140133" y="4169664"/>
+            <a:ext cx="543652" cy="384048"/>
           </a:xfrm>
           <a:prstGeom prst="rect">
             <a:avLst/>
@@ -23099,7 +23528,7 @@
                 <a:ea typeface="Trebuchet MS" pitchFamily="34" charset="-122"/>
                 <a:cs typeface="Trebuchet MS" pitchFamily="34" charset="-120"/>
               </a:rPr>
-              <a:t>d</a:t>
+              <a:t>l</a:t>
             </a:r>
             <a:endParaRPr lang="en-US" sz="900" dirty="0"/>
           </a:p>
@@ -23107,14 +23536,14 @@
       </p:sp>
       <p:sp>
         <p:nvSpPr>
-          <p:cNvPr id="47" name="Shape 45"/>
-          <p:cNvSpPr/>
-          <p:nvPr/>
-        </p:nvSpPr>
-        <p:spPr>
-          <a:xfrm>
-            <a:off x="2497015" y="4169664"/>
-            <a:ext cx="493776" cy="384048"/>
+          <p:cNvPr id="48" name="Shape 46"/>
+          <p:cNvSpPr/>
+          <p:nvPr/>
+        </p:nvSpPr>
+        <p:spPr>
+          <a:xfrm>
+            <a:off x="3734077" y="4169664"/>
+            <a:ext cx="543652" cy="384048"/>
           </a:xfrm>
           <a:prstGeom prst="rect">
             <a:avLst>
@@ -23134,14 +23563,14 @@
       </p:sp>
       <p:sp>
         <p:nvSpPr>
-          <p:cNvPr id="48" name="Text 46"/>
-          <p:cNvSpPr/>
-          <p:nvPr/>
-        </p:nvSpPr>
-        <p:spPr>
-          <a:xfrm>
-            <a:off x="2497015" y="4169664"/>
-            <a:ext cx="493776" cy="384048"/>
+          <p:cNvPr id="49" name="Text 47"/>
+          <p:cNvSpPr/>
+          <p:nvPr/>
+        </p:nvSpPr>
+        <p:spPr>
+          <a:xfrm>
+            <a:off x="3734077" y="4169664"/>
+            <a:ext cx="543652" cy="384048"/>
           </a:xfrm>
           <a:prstGeom prst="rect">
             <a:avLst/>
@@ -23165,7 +23594,7 @@
                 <a:ea typeface="Trebuchet MS" pitchFamily="34" charset="-122"/>
                 <a:cs typeface="Trebuchet MS" pitchFamily="34" charset="-120"/>
               </a:rPr>
-              <a:t>i</a:t>
+              <a:t>t</a:t>
             </a:r>
             <a:endParaRPr lang="en-US" sz="900" dirty="0"/>
           </a:p>
@@ -23173,14 +23602,14 @@
       </p:sp>
       <p:sp>
         <p:nvSpPr>
-          <p:cNvPr id="49" name="Shape 47"/>
-          <p:cNvSpPr/>
-          <p:nvPr/>
-        </p:nvSpPr>
-        <p:spPr>
-          <a:xfrm>
-            <a:off x="3041435" y="4169664"/>
-            <a:ext cx="493776" cy="384048"/>
+          <p:cNvPr id="50" name="Shape 48"/>
+          <p:cNvSpPr/>
+          <p:nvPr/>
+        </p:nvSpPr>
+        <p:spPr>
+          <a:xfrm>
+            <a:off x="4328021" y="4169664"/>
+            <a:ext cx="543652" cy="384048"/>
           </a:xfrm>
           <a:prstGeom prst="rect">
             <a:avLst>
@@ -23200,14 +23629,14 @@
       </p:sp>
       <p:sp>
         <p:nvSpPr>
-          <p:cNvPr id="50" name="Text 48"/>
-          <p:cNvSpPr/>
-          <p:nvPr/>
-        </p:nvSpPr>
-        <p:spPr>
-          <a:xfrm>
-            <a:off x="3041435" y="4169664"/>
-            <a:ext cx="493776" cy="384048"/>
+          <p:cNvPr id="51" name="Text 49"/>
+          <p:cNvSpPr/>
+          <p:nvPr/>
+        </p:nvSpPr>
+        <p:spPr>
+          <a:xfrm>
+            <a:off x="4328021" y="4169664"/>
+            <a:ext cx="543652" cy="384048"/>
           </a:xfrm>
           <a:prstGeom prst="rect">
             <a:avLst/>
@@ -23231,7 +23660,7 @@
                 <a:ea typeface="Trebuchet MS" pitchFamily="34" charset="-122"/>
                 <a:cs typeface="Trebuchet MS" pitchFamily="34" charset="-120"/>
               </a:rPr>
-              <a:t>s</a:t>
+              <a:t>i</a:t>
             </a:r>
             <a:endParaRPr lang="en-US" sz="900" dirty="0"/>
           </a:p>
@@ -23239,14 +23668,14 @@
       </p:sp>
       <p:sp>
         <p:nvSpPr>
-          <p:cNvPr id="51" name="Shape 49"/>
-          <p:cNvSpPr/>
-          <p:nvPr/>
-        </p:nvSpPr>
-        <p:spPr>
-          <a:xfrm>
-            <a:off x="3585855" y="4169664"/>
-            <a:ext cx="493776" cy="384048"/>
+          <p:cNvPr id="52" name="Shape 50"/>
+          <p:cNvSpPr/>
+          <p:nvPr/>
+        </p:nvSpPr>
+        <p:spPr>
+          <a:xfrm>
+            <a:off x="4921966" y="4169664"/>
+            <a:ext cx="543652" cy="384048"/>
           </a:xfrm>
           <a:prstGeom prst="rect">
             <a:avLst>
@@ -23266,14 +23695,14 @@
       </p:sp>
       <p:sp>
         <p:nvSpPr>
-          <p:cNvPr id="52" name="Text 50"/>
-          <p:cNvSpPr/>
-          <p:nvPr/>
-        </p:nvSpPr>
-        <p:spPr>
-          <a:xfrm>
-            <a:off x="3585855" y="4169664"/>
-            <a:ext cx="493776" cy="384048"/>
+          <p:cNvPr id="53" name="Text 51"/>
+          <p:cNvSpPr/>
+          <p:nvPr/>
+        </p:nvSpPr>
+        <p:spPr>
+          <a:xfrm>
+            <a:off x="4921966" y="4169664"/>
+            <a:ext cx="543652" cy="384048"/>
           </a:xfrm>
           <a:prstGeom prst="rect">
             <a:avLst/>
@@ -23305,14 +23734,14 @@
       </p:sp>
       <p:sp>
         <p:nvSpPr>
-          <p:cNvPr id="53" name="Text 51"/>
-          <p:cNvSpPr/>
-          <p:nvPr/>
-        </p:nvSpPr>
-        <p:spPr>
-          <a:xfrm>
-            <a:off x="3585855" y="4572000"/>
-            <a:ext cx="493776" cy="219456"/>
+          <p:cNvPr id="54" name="Text 52"/>
+          <p:cNvSpPr/>
+          <p:nvPr/>
+        </p:nvSpPr>
+        <p:spPr>
+          <a:xfrm>
+            <a:off x="4921966" y="4572000"/>
+            <a:ext cx="543652" cy="219456"/>
           </a:xfrm>
           <a:prstGeom prst="rect">
             <a:avLst/>
@@ -23344,14 +23773,14 @@
       </p:sp>
       <p:sp>
         <p:nvSpPr>
-          <p:cNvPr id="54" name="Shape 52"/>
-          <p:cNvSpPr/>
-          <p:nvPr/>
-        </p:nvSpPr>
-        <p:spPr>
-          <a:xfrm>
-            <a:off x="4130274" y="4169664"/>
-            <a:ext cx="493776" cy="384048"/>
+          <p:cNvPr id="55" name="Shape 53"/>
+          <p:cNvSpPr/>
+          <p:nvPr/>
+        </p:nvSpPr>
+        <p:spPr>
+          <a:xfrm>
+            <a:off x="5515910" y="4169664"/>
+            <a:ext cx="543652" cy="384048"/>
           </a:xfrm>
           <a:prstGeom prst="rect">
             <a:avLst>
@@ -23371,14 +23800,14 @@
       </p:sp>
       <p:sp>
         <p:nvSpPr>
-          <p:cNvPr id="55" name="Text 53"/>
-          <p:cNvSpPr/>
-          <p:nvPr/>
-        </p:nvSpPr>
-        <p:spPr>
-          <a:xfrm>
-            <a:off x="4130274" y="4169664"/>
-            <a:ext cx="493776" cy="384048"/>
+          <p:cNvPr id="56" name="Text 54"/>
+          <p:cNvSpPr/>
+          <p:nvPr/>
+        </p:nvSpPr>
+        <p:spPr>
+          <a:xfrm>
+            <a:off x="5515910" y="4169664"/>
+            <a:ext cx="543652" cy="384048"/>
           </a:xfrm>
           <a:prstGeom prst="rect">
             <a:avLst/>
@@ -23410,14 +23839,14 @@
       </p:sp>
       <p:sp>
         <p:nvSpPr>
-          <p:cNvPr id="56" name="Shape 54"/>
-          <p:cNvSpPr/>
-          <p:nvPr/>
-        </p:nvSpPr>
-        <p:spPr>
-          <a:xfrm>
-            <a:off x="4674694" y="4169664"/>
-            <a:ext cx="493776" cy="384048"/>
+          <p:cNvPr id="57" name="Shape 55"/>
+          <p:cNvSpPr/>
+          <p:nvPr/>
+        </p:nvSpPr>
+        <p:spPr>
+          <a:xfrm>
+            <a:off x="6109855" y="4169664"/>
+            <a:ext cx="543652" cy="384048"/>
           </a:xfrm>
           <a:prstGeom prst="rect">
             <a:avLst>
@@ -23437,14 +23866,14 @@
       </p:sp>
       <p:sp>
         <p:nvSpPr>
-          <p:cNvPr id="57" name="Text 55"/>
-          <p:cNvSpPr/>
-          <p:nvPr/>
-        </p:nvSpPr>
-        <p:spPr>
-          <a:xfrm>
-            <a:off x="4674694" y="4169664"/>
-            <a:ext cx="493776" cy="384048"/>
+          <p:cNvPr id="58" name="Text 56"/>
+          <p:cNvSpPr/>
+          <p:nvPr/>
+        </p:nvSpPr>
+        <p:spPr>
+          <a:xfrm>
+            <a:off x="6109855" y="4169664"/>
+            <a:ext cx="543652" cy="384048"/>
           </a:xfrm>
           <a:prstGeom prst="rect">
             <a:avLst/>
@@ -23476,14 +23905,14 @@
       </p:sp>
       <p:sp>
         <p:nvSpPr>
-          <p:cNvPr id="58" name="Shape 56"/>
-          <p:cNvSpPr/>
-          <p:nvPr/>
-        </p:nvSpPr>
-        <p:spPr>
-          <a:xfrm>
-            <a:off x="5219114" y="4169664"/>
-            <a:ext cx="493776" cy="384048"/>
+          <p:cNvPr id="59" name="Shape 57"/>
+          <p:cNvSpPr/>
+          <p:nvPr/>
+        </p:nvSpPr>
+        <p:spPr>
+          <a:xfrm>
+            <a:off x="6703799" y="4169664"/>
+            <a:ext cx="543652" cy="384048"/>
           </a:xfrm>
           <a:prstGeom prst="rect">
             <a:avLst>
@@ -23503,14 +23932,14 @@
       </p:sp>
       <p:sp>
         <p:nvSpPr>
-          <p:cNvPr id="59" name="Text 57"/>
-          <p:cNvSpPr/>
-          <p:nvPr/>
-        </p:nvSpPr>
-        <p:spPr>
-          <a:xfrm>
-            <a:off x="5219114" y="4169664"/>
-            <a:ext cx="493776" cy="384048"/>
+          <p:cNvPr id="60" name="Text 58"/>
+          <p:cNvSpPr/>
+          <p:nvPr/>
+        </p:nvSpPr>
+        <p:spPr>
+          <a:xfrm>
+            <a:off x="6703799" y="4169664"/>
+            <a:ext cx="543652" cy="384048"/>
           </a:xfrm>
           <a:prstGeom prst="rect">
             <a:avLst/>
@@ -23542,14 +23971,14 @@
       </p:sp>
       <p:sp>
         <p:nvSpPr>
-          <p:cNvPr id="60" name="Shape 58"/>
-          <p:cNvSpPr/>
-          <p:nvPr/>
-        </p:nvSpPr>
-        <p:spPr>
-          <a:xfrm>
-            <a:off x="5763534" y="4169664"/>
-            <a:ext cx="493776" cy="384048"/>
+          <p:cNvPr id="61" name="Shape 59"/>
+          <p:cNvSpPr/>
+          <p:nvPr/>
+        </p:nvSpPr>
+        <p:spPr>
+          <a:xfrm>
+            <a:off x="7297743" y="4169664"/>
+            <a:ext cx="543652" cy="384048"/>
           </a:xfrm>
           <a:prstGeom prst="rect">
             <a:avLst>
@@ -23569,14 +23998,14 @@
       </p:sp>
       <p:sp>
         <p:nvSpPr>
-          <p:cNvPr id="61" name="Text 59"/>
-          <p:cNvSpPr/>
-          <p:nvPr/>
-        </p:nvSpPr>
-        <p:spPr>
-          <a:xfrm>
-            <a:off x="5763534" y="4169664"/>
-            <a:ext cx="493776" cy="384048"/>
+          <p:cNvPr id="62" name="Text 60"/>
+          <p:cNvSpPr/>
+          <p:nvPr/>
+        </p:nvSpPr>
+        <p:spPr>
+          <a:xfrm>
+            <a:off x="7297743" y="4169664"/>
+            <a:ext cx="543652" cy="384048"/>
           </a:xfrm>
           <a:prstGeom prst="rect">
             <a:avLst/>
@@ -23608,14 +24037,14 @@
       </p:sp>
       <p:sp>
         <p:nvSpPr>
-          <p:cNvPr id="62" name="Shape 60"/>
-          <p:cNvSpPr/>
-          <p:nvPr/>
-        </p:nvSpPr>
-        <p:spPr>
-          <a:xfrm>
-            <a:off x="6307953" y="4169664"/>
-            <a:ext cx="493776" cy="384048"/>
+          <p:cNvPr id="63" name="Shape 61"/>
+          <p:cNvSpPr/>
+          <p:nvPr/>
+        </p:nvSpPr>
+        <p:spPr>
+          <a:xfrm>
+            <a:off x="7891688" y="4169664"/>
+            <a:ext cx="543652" cy="384048"/>
           </a:xfrm>
           <a:prstGeom prst="rect">
             <a:avLst>
@@ -23635,14 +24064,14 @@
       </p:sp>
       <p:sp>
         <p:nvSpPr>
-          <p:cNvPr id="63" name="Text 61"/>
-          <p:cNvSpPr/>
-          <p:nvPr/>
-        </p:nvSpPr>
-        <p:spPr>
-          <a:xfrm>
-            <a:off x="6307953" y="4169664"/>
-            <a:ext cx="493776" cy="384048"/>
+          <p:cNvPr id="64" name="Text 62"/>
+          <p:cNvSpPr/>
+          <p:nvPr/>
+        </p:nvSpPr>
+        <p:spPr>
+          <a:xfrm>
+            <a:off x="7891688" y="4169664"/>
+            <a:ext cx="543652" cy="384048"/>
           </a:xfrm>
           <a:prstGeom prst="rect">
             <a:avLst/>
@@ -23666,244 +24095,7 @@
                 <a:ea typeface="Trebuchet MS" pitchFamily="34" charset="-122"/>
                 <a:cs typeface="Trebuchet MS" pitchFamily="34" charset="-120"/>
               </a:rPr>
-              <a:t>a</a:t>
-            </a:r>
-            <a:endParaRPr lang="en-US" sz="900" dirty="0"/>
-          </a:p>
-        </p:txBody>
-      </p:sp>
-      <p:sp>
-        <p:nvSpPr>
-          <p:cNvPr id="64" name="Shape 62"/>
-          <p:cNvSpPr/>
-          <p:nvPr/>
-        </p:nvSpPr>
-        <p:spPr>
-          <a:xfrm>
-            <a:off x="6852373" y="4169664"/>
-            <a:ext cx="493776" cy="384048"/>
-          </a:xfrm>
-          <a:prstGeom prst="rect">
-            <a:avLst>
-              <a:gd name="adj" fmla="val 9524"/>
-            </a:avLst>
-          </a:prstGeom>
-          <a:solidFill>
-            <a:srgbClr val="FFFFFF"/>
-          </a:solidFill>
-          <a:ln w="12700">
-            <a:solidFill>
-              <a:srgbClr val="DB2777"/>
-            </a:solidFill>
-            <a:prstDash val="solid"/>
-          </a:ln>
-        </p:spPr>
-      </p:sp>
-      <p:sp>
-        <p:nvSpPr>
-          <p:cNvPr id="65" name="Text 63"/>
-          <p:cNvSpPr/>
-          <p:nvPr/>
-        </p:nvSpPr>
-        <p:spPr>
-          <a:xfrm>
-            <a:off x="6852373" y="4169664"/>
-            <a:ext cx="493776" cy="384048"/>
-          </a:xfrm>
-          <a:prstGeom prst="rect">
-            <a:avLst/>
-          </a:prstGeom>
-          <a:noFill/>
-          <a:ln/>
-        </p:spPr>
-        <p:txBody>
-          <a:bodyPr wrap="square" lIns="0" tIns="0" rIns="0" bIns="0" rtlCol="0" anchor="ctr"/>
-          <a:lstStyle/>
-          <a:p>
-            <a:pPr algn="ctr" indent="0" marL="0">
-              <a:buNone/>
-            </a:pPr>
-            <a:r>
-              <a:rPr lang="en-US" sz="900" b="1" dirty="0">
-                <a:solidFill>
-                  <a:srgbClr val="9D174D"/>
-                </a:solidFill>
-                <a:latin typeface="Trebuchet MS" pitchFamily="34" charset="0"/>
-                <a:ea typeface="Trebuchet MS" pitchFamily="34" charset="-122"/>
-                <a:cs typeface="Trebuchet MS" pitchFamily="34" charset="-120"/>
-              </a:rPr>
-              <a:t>t</a:t>
-            </a:r>
-            <a:endParaRPr lang="en-US" sz="900" dirty="0"/>
-          </a:p>
-        </p:txBody>
-      </p:sp>
-      <p:sp>
-        <p:nvSpPr>
-          <p:cNvPr id="66" name="Text 64"/>
-          <p:cNvSpPr/>
-          <p:nvPr/>
-        </p:nvSpPr>
-        <p:spPr>
-          <a:xfrm>
-            <a:off x="6852373" y="4572000"/>
-            <a:ext cx="493776" cy="219456"/>
-          </a:xfrm>
-          <a:prstGeom prst="rect">
-            <a:avLst/>
-          </a:prstGeom>
-          <a:noFill/>
-          <a:ln/>
-        </p:spPr>
-        <p:txBody>
-          <a:bodyPr wrap="square" lIns="0" tIns="0" rIns="0" bIns="0" rtlCol="0" anchor="t"/>
-          <a:lstStyle/>
-          <a:p>
-            <a:pPr algn="ctr" indent="0" marL="0">
-              <a:buNone/>
-            </a:pPr>
-            <a:r>
-              <a:rPr lang="en-US" sz="750" i="1" dirty="0">
-                <a:solidFill>
-                  <a:srgbClr val="94A3B8"/>
-                </a:solidFill>
-                <a:latin typeface="Calibri" pitchFamily="34" charset="0"/>
-                <a:ea typeface="Calibri" pitchFamily="34" charset="-122"/>
-                <a:cs typeface="Calibri" pitchFamily="34" charset="-120"/>
-              </a:rPr>
-              <a:t>/sh/</a:t>
-            </a:r>
-            <a:endParaRPr lang="en-US" sz="750" dirty="0"/>
-          </a:p>
-        </p:txBody>
-      </p:sp>
-      <p:sp>
-        <p:nvSpPr>
-          <p:cNvPr id="67" name="Shape 65"/>
-          <p:cNvSpPr/>
-          <p:nvPr/>
-        </p:nvSpPr>
-        <p:spPr>
-          <a:xfrm>
-            <a:off x="7396793" y="4169664"/>
-            <a:ext cx="493776" cy="384048"/>
-          </a:xfrm>
-          <a:prstGeom prst="rect">
-            <a:avLst>
-              <a:gd name="adj" fmla="val 9524"/>
-            </a:avLst>
-          </a:prstGeom>
-          <a:solidFill>
-            <a:srgbClr val="FFFFFF"/>
-          </a:solidFill>
-          <a:ln w="12700">
-            <a:solidFill>
-              <a:srgbClr val="DB2777"/>
-            </a:solidFill>
-            <a:prstDash val="solid"/>
-          </a:ln>
-        </p:spPr>
-      </p:sp>
-      <p:sp>
-        <p:nvSpPr>
-          <p:cNvPr id="68" name="Text 66"/>
-          <p:cNvSpPr/>
-          <p:nvPr/>
-        </p:nvSpPr>
-        <p:spPr>
-          <a:xfrm>
-            <a:off x="7396793" y="4169664"/>
-            <a:ext cx="493776" cy="384048"/>
-          </a:xfrm>
-          <a:prstGeom prst="rect">
-            <a:avLst/>
-          </a:prstGeom>
-          <a:noFill/>
-          <a:ln/>
-        </p:spPr>
-        <p:txBody>
-          <a:bodyPr wrap="square" lIns="0" tIns="0" rIns="0" bIns="0" rtlCol="0" anchor="ctr"/>
-          <a:lstStyle/>
-          <a:p>
-            <a:pPr algn="ctr" indent="0" marL="0">
-              <a:buNone/>
-            </a:pPr>
-            <a:r>
-              <a:rPr lang="en-US" sz="900" b="1" dirty="0">
-                <a:solidFill>
-                  <a:srgbClr val="9D174D"/>
-                </a:solidFill>
-                <a:latin typeface="Trebuchet MS" pitchFamily="34" charset="0"/>
-                <a:ea typeface="Trebuchet MS" pitchFamily="34" charset="-122"/>
-                <a:cs typeface="Trebuchet MS" pitchFamily="34" charset="-120"/>
-              </a:rPr>
-              <a:t>io</a:t>
-            </a:r>
-            <a:endParaRPr lang="en-US" sz="900" dirty="0"/>
-          </a:p>
-        </p:txBody>
-      </p:sp>
-      <p:sp>
-        <p:nvSpPr>
-          <p:cNvPr id="69" name="Shape 67"/>
-          <p:cNvSpPr/>
-          <p:nvPr/>
-        </p:nvSpPr>
-        <p:spPr>
-          <a:xfrm>
-            <a:off x="7941212" y="4169664"/>
-            <a:ext cx="493776" cy="384048"/>
-          </a:xfrm>
-          <a:prstGeom prst="rect">
-            <a:avLst>
-              <a:gd name="adj" fmla="val 9524"/>
-            </a:avLst>
-          </a:prstGeom>
-          <a:solidFill>
-            <a:srgbClr val="FFFFFF"/>
-          </a:solidFill>
-          <a:ln w="12700">
-            <a:solidFill>
-              <a:srgbClr val="DB2777"/>
-            </a:solidFill>
-            <a:prstDash val="solid"/>
-          </a:ln>
-        </p:spPr>
-      </p:sp>
-      <p:sp>
-        <p:nvSpPr>
-          <p:cNvPr id="70" name="Text 68"/>
-          <p:cNvSpPr/>
-          <p:nvPr/>
-        </p:nvSpPr>
-        <p:spPr>
-          <a:xfrm>
-            <a:off x="7941212" y="4169664"/>
-            <a:ext cx="493776" cy="384048"/>
-          </a:xfrm>
-          <a:prstGeom prst="rect">
-            <a:avLst/>
-          </a:prstGeom>
-          <a:noFill/>
-          <a:ln/>
-        </p:spPr>
-        <p:txBody>
-          <a:bodyPr wrap="square" lIns="0" tIns="0" rIns="0" bIns="0" rtlCol="0" anchor="ctr"/>
-          <a:lstStyle/>
-          <a:p>
-            <a:pPr algn="ctr" indent="0" marL="0">
-              <a:buNone/>
-            </a:pPr>
-            <a:r>
-              <a:rPr lang="en-US" sz="900" b="1" dirty="0">
-                <a:solidFill>
-                  <a:srgbClr val="9D174D"/>
-                </a:solidFill>
-                <a:latin typeface="Trebuchet MS" pitchFamily="34" charset="0"/>
-                <a:ea typeface="Trebuchet MS" pitchFamily="34" charset="-122"/>
-                <a:cs typeface="Trebuchet MS" pitchFamily="34" charset="-120"/>
-              </a:rPr>
-              <a:t>n</a:t>
+              <a:t>ed</a:t>
             </a:r>
             <a:endParaRPr lang="en-US" sz="900" dirty="0"/>
           </a:p>
@@ -24195,7 +24387,7 @@
                 <a:ea typeface="Calibri" pitchFamily="34" charset="-122"/>
                 <a:cs typeface="Calibri" pitchFamily="34" charset="-120"/>
               </a:rPr>
-              <a:t>Word Labs  •  wordlabs.app  •  Root: 'colour' = hue or shade of light</a:t>
+              <a:t>Word Labs  •  wordlabs.app  •  Root: 'colour' = hue, tint, or shade</a:t>
             </a:r>
             <a:endParaRPr lang="en-US" sz="800" dirty="0"/>
           </a:p>
@@ -24334,7 +24526,7 @@
                 <a:ea typeface="Trebuchet MS" pitchFamily="34" charset="-122"/>
                 <a:cs typeface="Trebuchet MS" pitchFamily="34" charset="-120"/>
               </a:rPr>
-              <a:t>colourless</a:t>
+              <a:t>colouring</a:t>
             </a:r>
             <a:endParaRPr lang="en-US" sz="2800" dirty="0"/>
           </a:p>
@@ -25022,7 +25214,7 @@
                 <a:ea typeface="Calibri" pitchFamily="34" charset="-122"/>
                 <a:cs typeface="Calibri" pitchFamily="34" charset="-120"/>
               </a:rPr>
-              <a:t>Word Labs  •  wordlabs.app  •  Root: 'colour' = hue or shade of light</a:t>
+              <a:t>Word Labs  •  wordlabs.app  •  Root: 'colour' = hue, tint, or shade</a:t>
             </a:r>
             <a:endParaRPr lang="en-US" sz="800" dirty="0"/>
           </a:p>
@@ -25161,7 +25353,7 @@
                 <a:ea typeface="Trebuchet MS" pitchFamily="34" charset="-122"/>
                 <a:cs typeface="Trebuchet MS" pitchFamily="34" charset="-120"/>
               </a:rPr>
-              <a:t>colourless</a:t>
+              <a:t>colouring</a:t>
             </a:r>
             <a:endParaRPr lang="en-US" sz="2800" dirty="0"/>
           </a:p>
@@ -25362,11 +25554,11 @@
             </a:avLst>
           </a:prstGeom>
           <a:solidFill>
-            <a:srgbClr val="DDD6FE"/>
+            <a:srgbClr val="FCE7F3"/>
           </a:solidFill>
           <a:ln w="19050">
             <a:solidFill>
-              <a:srgbClr val="7C3AED"/>
+              <a:srgbClr val="DB2777"/>
             </a:solidFill>
             <a:prstDash val="solid"/>
           </a:ln>
@@ -25406,13 +25598,13 @@
             <a:r>
               <a:rPr lang="en-US" sz="1300" b="1" dirty="0">
                 <a:solidFill>
-                  <a:srgbClr val="4C1D95"/>
+                  <a:srgbClr val="9D174D"/>
                 </a:solidFill>
                 <a:latin typeface="Trebuchet MS" pitchFamily="34" charset="0"/>
                 <a:ea typeface="Trebuchet MS" pitchFamily="34" charset="-122"/>
                 <a:cs typeface="Trebuchet MS" pitchFamily="34" charset="-120"/>
               </a:rPr>
-              <a:t>less</a:t>
+              <a:t>ing</a:t>
             </a:r>
             <a:endParaRPr lang="en-US" sz="1300" dirty="0"/>
           </a:p>
@@ -25451,7 +25643,7 @@
                 <a:ea typeface="Calibri" pitchFamily="34" charset="-122"/>
                 <a:cs typeface="Calibri" pitchFamily="34" charset="-120"/>
               </a:rPr>
-              <a:t>without</a:t>
+              <a:t>action or process</a:t>
             </a:r>
             <a:endParaRPr lang="en-US" sz="850" dirty="0"/>
           </a:p>
@@ -26007,7 +26199,7 @@
                 <a:ea typeface="Calibri" pitchFamily="34" charset="-122"/>
                 <a:cs typeface="Calibri" pitchFamily="34" charset="-120"/>
               </a:rPr>
-              <a:t>Word Labs  •  wordlabs.app  •  Root: 'colour' = hue or shade of light</a:t>
+              <a:t>Word Labs  •  wordlabs.app  •  Root: 'colour' = hue, tint, or shade</a:t>
             </a:r>
             <a:endParaRPr lang="en-US" sz="800" dirty="0"/>
           </a:p>
@@ -26080,7 +26272,7 @@
                 <a:ea typeface="Trebuchet MS" pitchFamily="34" charset="-122"/>
                 <a:cs typeface="Trebuchet MS" pitchFamily="34" charset="-120"/>
               </a:rPr>
-              <a:t>We are learning that the root 'colour' means 'hue or shade of light'.</a:t>
+              <a:t>We are learning that the root 'colour' means 'hue, tint, or shade'.</a:t>
             </a:r>
             <a:endParaRPr lang="en-US" sz="2000" dirty="0"/>
           </a:p>
@@ -26726,7 +26918,7 @@
                 <a:ea typeface="Calibri" pitchFamily="34" charset="-122"/>
                 <a:cs typeface="Calibri" pitchFamily="34" charset="-120"/>
               </a:rPr>
-              <a:t>Word Labs  •  wordlabs.app  •  Root: 'colour' = hue or shade of light</a:t>
+              <a:t>Word Labs  •  wordlabs.app  •  Root: 'colour' = hue, tint, or shade</a:t>
             </a:r>
             <a:endParaRPr lang="en-US" sz="800" dirty="0"/>
           </a:p>
@@ -26865,7 +27057,7 @@
                 <a:ea typeface="Trebuchet MS" pitchFamily="34" charset="-122"/>
                 <a:cs typeface="Trebuchet MS" pitchFamily="34" charset="-120"/>
               </a:rPr>
-              <a:t>colourless</a:t>
+              <a:t>colouring</a:t>
             </a:r>
             <a:endParaRPr lang="en-US" sz="2800" dirty="0"/>
           </a:p>
@@ -27066,11 +27258,11 @@
             </a:avLst>
           </a:prstGeom>
           <a:solidFill>
-            <a:srgbClr val="DDD6FE"/>
+            <a:srgbClr val="FCE7F3"/>
           </a:solidFill>
           <a:ln w="19050">
             <a:solidFill>
-              <a:srgbClr val="7C3AED"/>
+              <a:srgbClr val="DB2777"/>
             </a:solidFill>
             <a:prstDash val="solid"/>
           </a:ln>
@@ -27110,13 +27302,13 @@
             <a:r>
               <a:rPr lang="en-US" sz="1300" b="1" dirty="0">
                 <a:solidFill>
-                  <a:srgbClr val="4C1D95"/>
+                  <a:srgbClr val="9D174D"/>
                 </a:solidFill>
                 <a:latin typeface="Trebuchet MS" pitchFamily="34" charset="0"/>
                 <a:ea typeface="Trebuchet MS" pitchFamily="34" charset="-122"/>
                 <a:cs typeface="Trebuchet MS" pitchFamily="34" charset="-120"/>
               </a:rPr>
-              <a:t>less</a:t>
+              <a:t>ing</a:t>
             </a:r>
             <a:endParaRPr lang="en-US" sz="1300" dirty="0"/>
           </a:p>
@@ -27155,7 +27347,7 @@
                 <a:ea typeface="Calibri" pitchFamily="34" charset="-122"/>
                 <a:cs typeface="Calibri" pitchFamily="34" charset="-120"/>
               </a:rPr>
-              <a:t>without</a:t>
+              <a:t>action or process</a:t>
             </a:r>
             <a:endParaRPr lang="en-US" sz="850" dirty="0"/>
           </a:p>
@@ -27524,7 +27716,7 @@
                 <a:ea typeface="Trebuchet MS" pitchFamily="34" charset="-122"/>
                 <a:cs typeface="Trebuchet MS" pitchFamily="34" charset="-120"/>
               </a:rPr>
-              <a:t>less</a:t>
+              <a:t>ing</a:t>
             </a:r>
             <a:endParaRPr lang="en-US" sz="1400" dirty="0"/>
           </a:p>
@@ -27948,7 +28140,7 @@
                 <a:ea typeface="Calibri" pitchFamily="34" charset="-122"/>
                 <a:cs typeface="Calibri" pitchFamily="34" charset="-120"/>
               </a:rPr>
-              <a:t>Word Labs  •  wordlabs.app  •  Root: 'colour' = hue or shade of light</a:t>
+              <a:t>Word Labs  •  wordlabs.app  •  Root: 'colour' = hue, tint, or shade</a:t>
             </a:r>
             <a:endParaRPr lang="en-US" sz="800" dirty="0"/>
           </a:p>
@@ -28087,7 +28279,7 @@
                 <a:ea typeface="Trebuchet MS" pitchFamily="34" charset="-122"/>
                 <a:cs typeface="Trebuchet MS" pitchFamily="34" charset="-120"/>
               </a:rPr>
-              <a:t>colourless</a:t>
+              <a:t>colouring</a:t>
             </a:r>
             <a:endParaRPr lang="en-US" sz="2800" dirty="0"/>
           </a:p>
@@ -28288,11 +28480,11 @@
             </a:avLst>
           </a:prstGeom>
           <a:solidFill>
-            <a:srgbClr val="DDD6FE"/>
+            <a:srgbClr val="FCE7F3"/>
           </a:solidFill>
           <a:ln w="19050">
             <a:solidFill>
-              <a:srgbClr val="7C3AED"/>
+              <a:srgbClr val="DB2777"/>
             </a:solidFill>
             <a:prstDash val="solid"/>
           </a:ln>
@@ -28332,13 +28524,13 @@
             <a:r>
               <a:rPr lang="en-US" sz="1300" b="1" dirty="0">
                 <a:solidFill>
-                  <a:srgbClr val="4C1D95"/>
+                  <a:srgbClr val="9D174D"/>
                 </a:solidFill>
                 <a:latin typeface="Trebuchet MS" pitchFamily="34" charset="0"/>
                 <a:ea typeface="Trebuchet MS" pitchFamily="34" charset="-122"/>
                 <a:cs typeface="Trebuchet MS" pitchFamily="34" charset="-120"/>
               </a:rPr>
-              <a:t>less</a:t>
+              <a:t>ing</a:t>
             </a:r>
             <a:endParaRPr lang="en-US" sz="1300" dirty="0"/>
           </a:p>
@@ -28377,7 +28569,7 @@
                 <a:ea typeface="Calibri" pitchFamily="34" charset="-122"/>
                 <a:cs typeface="Calibri" pitchFamily="34" charset="-120"/>
               </a:rPr>
-              <a:t>without</a:t>
+              <a:t>action or process</a:t>
             </a:r>
             <a:endParaRPr lang="en-US" sz="850" dirty="0"/>
           </a:p>
@@ -28746,7 +28938,7 @@
                 <a:ea typeface="Trebuchet MS" pitchFamily="34" charset="-122"/>
                 <a:cs typeface="Trebuchet MS" pitchFamily="34" charset="-120"/>
               </a:rPr>
-              <a:t>less</a:t>
+              <a:t>ing</a:t>
             </a:r>
             <a:endParaRPr lang="en-US" sz="1400" dirty="0"/>
           </a:p>
@@ -28853,7 +29045,7 @@
         </p:nvSpPr>
         <p:spPr>
           <a:xfrm>
-            <a:off x="2023872" y="4169664"/>
+            <a:off x="2124837" y="4169664"/>
             <a:ext cx="685800" cy="384048"/>
           </a:xfrm>
           <a:prstGeom prst="rect">
@@ -28880,7 +29072,7 @@
         </p:nvSpPr>
         <p:spPr>
           <a:xfrm>
-            <a:off x="2023872" y="4169664"/>
+            <a:off x="2124837" y="4169664"/>
             <a:ext cx="685800" cy="384048"/>
           </a:xfrm>
           <a:prstGeom prst="rect">
@@ -28919,7 +29111,7 @@
         </p:nvSpPr>
         <p:spPr>
           <a:xfrm>
-            <a:off x="2023872" y="4572000"/>
+            <a:off x="2124837" y="4572000"/>
             <a:ext cx="685800" cy="219456"/>
           </a:xfrm>
           <a:prstGeom prst="rect">
@@ -28958,7 +29150,7 @@
         </p:nvSpPr>
         <p:spPr>
           <a:xfrm>
-            <a:off x="2831592" y="4169664"/>
+            <a:off x="3033522" y="4169664"/>
             <a:ext cx="685800" cy="384048"/>
           </a:xfrm>
           <a:prstGeom prst="rect">
@@ -28985,7 +29177,7 @@
         </p:nvSpPr>
         <p:spPr>
           <a:xfrm>
-            <a:off x="2831592" y="4169664"/>
+            <a:off x="3033522" y="4169664"/>
             <a:ext cx="685800" cy="384048"/>
           </a:xfrm>
           <a:prstGeom prst="rect">
@@ -29024,7 +29216,7 @@
         </p:nvSpPr>
         <p:spPr>
           <a:xfrm>
-            <a:off x="3639312" y="4169664"/>
+            <a:off x="3942207" y="4169664"/>
             <a:ext cx="685800" cy="384048"/>
           </a:xfrm>
           <a:prstGeom prst="rect">
@@ -29051,7 +29243,7 @@
         </p:nvSpPr>
         <p:spPr>
           <a:xfrm>
-            <a:off x="3639312" y="4169664"/>
+            <a:off x="3942207" y="4169664"/>
             <a:ext cx="685800" cy="384048"/>
           </a:xfrm>
           <a:prstGeom prst="rect">
@@ -29090,7 +29282,7 @@
         </p:nvSpPr>
         <p:spPr>
           <a:xfrm>
-            <a:off x="4447032" y="4169664"/>
+            <a:off x="4850892" y="4169664"/>
             <a:ext cx="685800" cy="384048"/>
           </a:xfrm>
           <a:prstGeom prst="rect">
@@ -29117,7 +29309,7 @@
         </p:nvSpPr>
         <p:spPr>
           <a:xfrm>
-            <a:off x="4447032" y="4169664"/>
+            <a:off x="4850892" y="4169664"/>
             <a:ext cx="685800" cy="384048"/>
           </a:xfrm>
           <a:prstGeom prst="rect">
@@ -29156,7 +29348,7 @@
         </p:nvSpPr>
         <p:spPr>
           <a:xfrm>
-            <a:off x="5254752" y="4169664"/>
+            <a:off x="5759577" y="4169664"/>
             <a:ext cx="685800" cy="384048"/>
           </a:xfrm>
           <a:prstGeom prst="rect">
@@ -29183,7 +29375,7 @@
         </p:nvSpPr>
         <p:spPr>
           <a:xfrm>
-            <a:off x="5254752" y="4169664"/>
+            <a:off x="5759577" y="4169664"/>
             <a:ext cx="685800" cy="384048"/>
           </a:xfrm>
           <a:prstGeom prst="rect">
@@ -29222,7 +29414,7 @@
         </p:nvSpPr>
         <p:spPr>
           <a:xfrm>
-            <a:off x="6062472" y="4169664"/>
+            <a:off x="6668262" y="4169664"/>
             <a:ext cx="685800" cy="384048"/>
           </a:xfrm>
           <a:prstGeom prst="rect">
@@ -29249,7 +29441,7 @@
         </p:nvSpPr>
         <p:spPr>
           <a:xfrm>
-            <a:off x="6062472" y="4169664"/>
+            <a:off x="6668262" y="4169664"/>
             <a:ext cx="685800" cy="384048"/>
           </a:xfrm>
           <a:prstGeom prst="rect">
@@ -29274,7 +29466,7 @@
                 <a:ea typeface="Trebuchet MS" pitchFamily="34" charset="-122"/>
                 <a:cs typeface="Trebuchet MS" pitchFamily="34" charset="-120"/>
               </a:rPr>
-              <a:t>l</a:t>
+              <a:t>i</a:t>
             </a:r>
             <a:endParaRPr lang="en-US" sz="900" dirty="0"/>
           </a:p>
@@ -29288,7 +29480,7 @@
         </p:nvSpPr>
         <p:spPr>
           <a:xfrm>
-            <a:off x="6870192" y="4169664"/>
+            <a:off x="7576947" y="4169664"/>
             <a:ext cx="685800" cy="384048"/>
           </a:xfrm>
           <a:prstGeom prst="rect">
@@ -29315,7 +29507,7 @@
         </p:nvSpPr>
         <p:spPr>
           <a:xfrm>
-            <a:off x="6870192" y="4169664"/>
+            <a:off x="7576947" y="4169664"/>
             <a:ext cx="685800" cy="384048"/>
           </a:xfrm>
           <a:prstGeom prst="rect">
@@ -29340,73 +29532,7 @@
                 <a:ea typeface="Trebuchet MS" pitchFamily="34" charset="-122"/>
                 <a:cs typeface="Trebuchet MS" pitchFamily="34" charset="-120"/>
               </a:rPr>
-              <a:t>e</a:t>
-            </a:r>
-            <a:endParaRPr lang="en-US" sz="900" dirty="0"/>
-          </a:p>
-        </p:txBody>
-      </p:sp>
-      <p:sp>
-        <p:nvSpPr>
-          <p:cNvPr id="51" name="Shape 49"/>
-          <p:cNvSpPr/>
-          <p:nvPr/>
-        </p:nvSpPr>
-        <p:spPr>
-          <a:xfrm>
-            <a:off x="7677912" y="4169664"/>
-            <a:ext cx="685800" cy="384048"/>
-          </a:xfrm>
-          <a:prstGeom prst="rect">
-            <a:avLst>
-              <a:gd name="adj" fmla="val 9524"/>
-            </a:avLst>
-          </a:prstGeom>
-          <a:solidFill>
-            <a:srgbClr val="FFFFFF"/>
-          </a:solidFill>
-          <a:ln w="12700">
-            <a:solidFill>
-              <a:srgbClr val="DB2777"/>
-            </a:solidFill>
-            <a:prstDash val="solid"/>
-          </a:ln>
-        </p:spPr>
-      </p:sp>
-      <p:sp>
-        <p:nvSpPr>
-          <p:cNvPr id="52" name="Text 50"/>
-          <p:cNvSpPr/>
-          <p:nvPr/>
-        </p:nvSpPr>
-        <p:spPr>
-          <a:xfrm>
-            <a:off x="7677912" y="4169664"/>
-            <a:ext cx="685800" cy="384048"/>
-          </a:xfrm>
-          <a:prstGeom prst="rect">
-            <a:avLst/>
-          </a:prstGeom>
-          <a:noFill/>
-          <a:ln/>
-        </p:spPr>
-        <p:txBody>
-          <a:bodyPr wrap="square" lIns="0" tIns="0" rIns="0" bIns="0" rtlCol="0" anchor="ctr"/>
-          <a:lstStyle/>
-          <a:p>
-            <a:pPr algn="ctr" indent="0" marL="0">
-              <a:buNone/>
-            </a:pPr>
-            <a:r>
-              <a:rPr lang="en-US" sz="900" b="1" dirty="0">
-                <a:solidFill>
-                  <a:srgbClr val="9D174D"/>
-                </a:solidFill>
-                <a:latin typeface="Trebuchet MS" pitchFamily="34" charset="0"/>
-                <a:ea typeface="Trebuchet MS" pitchFamily="34" charset="-122"/>
-                <a:cs typeface="Trebuchet MS" pitchFamily="34" charset="-120"/>
-              </a:rPr>
-              <a:t>ss</a:t>
+              <a:t>ng</a:t>
             </a:r>
             <a:endParaRPr lang="en-US" sz="900" dirty="0"/>
           </a:p>
@@ -29698,7 +29824,7 @@
                 <a:ea typeface="Calibri" pitchFamily="34" charset="-122"/>
                 <a:cs typeface="Calibri" pitchFamily="34" charset="-120"/>
               </a:rPr>
-              <a:t>Word Labs  •  wordlabs.app  •  Root: 'colour' = hue or shade of light</a:t>
+              <a:t>Word Labs  •  wordlabs.app  •  Root: 'colour' = hue, tint, or shade</a:t>
             </a:r>
             <a:endParaRPr lang="en-US" sz="800" dirty="0"/>
           </a:p>
@@ -29837,7 +29963,7 @@
                 <a:ea typeface="Trebuchet MS" pitchFamily="34" charset="-122"/>
                 <a:cs typeface="Trebuchet MS" pitchFamily="34" charset="-120"/>
               </a:rPr>
-              <a:t>multicoloured</a:t>
+              <a:t>colourless</a:t>
             </a:r>
             <a:endParaRPr lang="en-US" sz="2800" dirty="0"/>
           </a:p>
@@ -30525,7 +30651,7 @@
                 <a:ea typeface="Calibri" pitchFamily="34" charset="-122"/>
                 <a:cs typeface="Calibri" pitchFamily="34" charset="-120"/>
               </a:rPr>
-              <a:t>Word Labs  •  wordlabs.app  •  Root: 'colour' = hue or shade of light</a:t>
+              <a:t>Word Labs  •  wordlabs.app  •  Root: 'colour' = hue, tint, or shade</a:t>
             </a:r>
             <a:endParaRPr lang="en-US" sz="800" dirty="0"/>
           </a:p>
@@ -30664,7 +30790,7 @@
                 <a:ea typeface="Trebuchet MS" pitchFamily="34" charset="-122"/>
                 <a:cs typeface="Trebuchet MS" pitchFamily="34" charset="-120"/>
               </a:rPr>
-              <a:t>multicoloured</a:t>
+              <a:t>colourless</a:t>
             </a:r>
             <a:endParaRPr lang="en-US" sz="2800" dirty="0"/>
           </a:p>
@@ -30744,7 +30870,7 @@
         </p:nvSpPr>
         <p:spPr>
           <a:xfrm>
-            <a:off x="2221992" y="2258568"/>
+            <a:off x="2938272" y="2258568"/>
             <a:ext cx="1828800" cy="292608"/>
           </a:xfrm>
           <a:prstGeom prst="rect">
@@ -30753,11 +30879,11 @@
             </a:avLst>
           </a:prstGeom>
           <a:solidFill>
-            <a:srgbClr val="DDD6FE"/>
+            <a:srgbClr val="CCFBF1"/>
           </a:solidFill>
           <a:ln w="19050">
             <a:solidFill>
-              <a:srgbClr val="7C3AED"/>
+              <a:srgbClr val="0D9488"/>
             </a:solidFill>
             <a:prstDash val="solid"/>
           </a:ln>
@@ -30778,7 +30904,7 @@
         </p:nvSpPr>
         <p:spPr>
           <a:xfrm>
-            <a:off x="2221992" y="2258568"/>
+            <a:off x="2938272" y="2258568"/>
             <a:ext cx="1828800" cy="292608"/>
           </a:xfrm>
           <a:prstGeom prst="rect">
@@ -30797,13 +30923,13 @@
             <a:r>
               <a:rPr lang="en-US" sz="1300" b="1" dirty="0">
                 <a:solidFill>
-                  <a:srgbClr val="4C1D95"/>
+                  <a:srgbClr val="0F766E"/>
                 </a:solidFill>
                 <a:latin typeface="Trebuchet MS" pitchFamily="34" charset="0"/>
                 <a:ea typeface="Trebuchet MS" pitchFamily="34" charset="-122"/>
                 <a:cs typeface="Trebuchet MS" pitchFamily="34" charset="-120"/>
               </a:rPr>
-              <a:t>multi</a:t>
+              <a:t>colour</a:t>
             </a:r>
             <a:endParaRPr lang="en-US" sz="1300" dirty="0"/>
           </a:p>
@@ -30817,7 +30943,7 @@
         </p:nvSpPr>
         <p:spPr>
           <a:xfrm>
-            <a:off x="2221992" y="2569464"/>
+            <a:off x="2938272" y="2569464"/>
             <a:ext cx="1828800" cy="201168"/>
           </a:xfrm>
           <a:prstGeom prst="rect">
@@ -30842,7 +30968,7 @@
                 <a:ea typeface="Calibri" pitchFamily="34" charset="-122"/>
                 <a:cs typeface="Calibri" pitchFamily="34" charset="-120"/>
               </a:rPr>
-              <a:t>many</a:t>
+              <a:t>hue or shade</a:t>
             </a:r>
             <a:endParaRPr lang="en-US" sz="850" dirty="0"/>
           </a:p>
@@ -30856,7 +30982,7 @@
         </p:nvSpPr>
         <p:spPr>
           <a:xfrm>
-            <a:off x="4370832" y="2258568"/>
+            <a:off x="5803392" y="2258568"/>
             <a:ext cx="1828800" cy="292608"/>
           </a:xfrm>
           <a:prstGeom prst="rect">
@@ -30865,11 +30991,11 @@
             </a:avLst>
           </a:prstGeom>
           <a:solidFill>
-            <a:srgbClr val="CCFBF1"/>
+            <a:srgbClr val="DDD6FE"/>
           </a:solidFill>
           <a:ln w="19050">
             <a:solidFill>
-              <a:srgbClr val="0D9488"/>
+              <a:srgbClr val="7C3AED"/>
             </a:solidFill>
             <a:prstDash val="solid"/>
           </a:ln>
@@ -30890,7 +31016,7 @@
         </p:nvSpPr>
         <p:spPr>
           <a:xfrm>
-            <a:off x="4370832" y="2258568"/>
+            <a:off x="5803392" y="2258568"/>
             <a:ext cx="1828800" cy="292608"/>
           </a:xfrm>
           <a:prstGeom prst="rect">
@@ -30909,13 +31035,13 @@
             <a:r>
               <a:rPr lang="en-US" sz="1300" b="1" dirty="0">
                 <a:solidFill>
-                  <a:srgbClr val="0F766E"/>
+                  <a:srgbClr val="4C1D95"/>
                 </a:solidFill>
                 <a:latin typeface="Trebuchet MS" pitchFamily="34" charset="0"/>
                 <a:ea typeface="Trebuchet MS" pitchFamily="34" charset="-122"/>
                 <a:cs typeface="Trebuchet MS" pitchFamily="34" charset="-120"/>
               </a:rPr>
-              <a:t>colour</a:t>
+              <a:t>less</a:t>
             </a:r>
             <a:endParaRPr lang="en-US" sz="1300" dirty="0"/>
           </a:p>
@@ -30929,7 +31055,7 @@
         </p:nvSpPr>
         <p:spPr>
           <a:xfrm>
-            <a:off x="4370832" y="2569464"/>
+            <a:off x="5803392" y="2569464"/>
             <a:ext cx="1828800" cy="201168"/>
           </a:xfrm>
           <a:prstGeom prst="rect">
@@ -30954,7 +31080,7 @@
                 <a:ea typeface="Calibri" pitchFamily="34" charset="-122"/>
                 <a:cs typeface="Calibri" pitchFamily="34" charset="-120"/>
               </a:rPr>
-              <a:t>hue or shade</a:t>
+              <a:t>without</a:t>
             </a:r>
             <a:endParaRPr lang="en-US" sz="850" dirty="0"/>
           </a:p>
@@ -30968,30 +31094,23 @@
         </p:nvSpPr>
         <p:spPr>
           <a:xfrm>
-            <a:off x="6519672" y="2258568"/>
-            <a:ext cx="1828800" cy="292608"/>
+            <a:off x="365760" y="3273552"/>
+            <a:ext cx="1371600" cy="658368"/>
           </a:xfrm>
           <a:prstGeom prst="rect">
             <a:avLst>
-              <a:gd name="adj" fmla="val 25000"/>
+              <a:gd name="adj" fmla="val 8333"/>
             </a:avLst>
           </a:prstGeom>
           <a:solidFill>
-            <a:srgbClr val="FCE7F3"/>
-          </a:solidFill>
-          <a:ln w="19050">
-            <a:solidFill>
-              <a:srgbClr val="DB2777"/>
-            </a:solidFill>
-            <a:prstDash val="solid"/>
-          </a:ln>
-          <a:effectLst>
-            <a:outerShdw sx="100000" sy="100000" kx="0" ky="0" algn="bl" rotWithShape="0" blurRad="101600" dist="38100" dir="8100000">
-              <a:srgbClr val="000000">
-                <a:alpha val="12000"/>
-              </a:srgbClr>
-            </a:outerShdw>
-          </a:effectLst>
+            <a:srgbClr val="E2E8F0"/>
+          </a:solidFill>
+          <a:ln w="12700">
+            <a:solidFill>
+              <a:srgbClr val="E2E8F0"/>
+            </a:solidFill>
+            <a:prstDash val="solid"/>
+          </a:ln>
         </p:spPr>
       </p:sp>
       <p:sp>
@@ -31002,90 +31121,117 @@
         </p:nvSpPr>
         <p:spPr>
           <a:xfrm>
-            <a:off x="6519672" y="2258568"/>
-            <a:ext cx="1828800" cy="292608"/>
-          </a:xfrm>
-          <a:prstGeom prst="rect">
-            <a:avLst/>
-          </a:prstGeom>
-          <a:noFill/>
-          <a:ln/>
-        </p:spPr>
-        <p:txBody>
-          <a:bodyPr wrap="square" lIns="0" tIns="0" rIns="0" bIns="0" rtlCol="0" anchor="ctr"/>
-          <a:lstStyle/>
-          <a:p>
-            <a:pPr algn="ctr" indent="0" marL="0">
-              <a:buNone/>
-            </a:pPr>
-            <a:r>
-              <a:rPr lang="en-US" sz="1300" b="1" dirty="0">
-                <a:solidFill>
-                  <a:srgbClr val="9D174D"/>
+            <a:off x="365760" y="3273552"/>
+            <a:ext cx="1371600" cy="658368"/>
+          </a:xfrm>
+          <a:prstGeom prst="rect">
+            <a:avLst/>
+          </a:prstGeom>
+          <a:noFill/>
+          <a:ln/>
+        </p:spPr>
+        <p:txBody>
+          <a:bodyPr wrap="square" lIns="0" tIns="0" rIns="0" bIns="0" rtlCol="0" anchor="ctr"/>
+          <a:lstStyle/>
+          <a:p>
+            <a:pPr algn="ctr" indent="0" marL="0">
+              <a:buNone/>
+            </a:pPr>
+            <a:r>
+              <a:rPr lang="en-US" sz="1100" b="1" dirty="0">
+                <a:solidFill>
+                  <a:srgbClr val="475569"/>
                 </a:solidFill>
                 <a:latin typeface="Trebuchet MS" pitchFamily="34" charset="0"/>
                 <a:ea typeface="Trebuchet MS" pitchFamily="34" charset="-122"/>
                 <a:cs typeface="Trebuchet MS" pitchFamily="34" charset="-120"/>
               </a:rPr>
-              <a:t>ed</a:t>
-            </a:r>
-            <a:endParaRPr lang="en-US" sz="1300" dirty="0"/>
-          </a:p>
-        </p:txBody>
-      </p:sp>
-      <p:sp>
-        <p:nvSpPr>
-          <p:cNvPr id="24" name="Text 22"/>
-          <p:cNvSpPr/>
-          <p:nvPr/>
-        </p:nvSpPr>
-        <p:spPr>
-          <a:xfrm>
-            <a:off x="6519672" y="2569464"/>
-            <a:ext cx="1828800" cy="201168"/>
-          </a:xfrm>
-          <a:prstGeom prst="rect">
-            <a:avLst/>
-          </a:prstGeom>
-          <a:noFill/>
-          <a:ln/>
-        </p:spPr>
-        <p:txBody>
-          <a:bodyPr wrap="square" lIns="0" tIns="0" rIns="0" bIns="0" rtlCol="0" anchor="t"/>
-          <a:lstStyle/>
-          <a:p>
-            <a:pPr algn="ctr" indent="0" marL="0">
-              <a:buNone/>
-            </a:pPr>
-            <a:r>
-              <a:rPr lang="en-US" sz="850" dirty="0">
-                <a:solidFill>
-                  <a:srgbClr val="475569"/>
+              <a:t>Syllables</a:t>
+            </a:r>
+            <a:endParaRPr lang="en-US" sz="1100" dirty="0"/>
+          </a:p>
+        </p:txBody>
+      </p:sp>
+      <p:sp>
+        <p:nvSpPr>
+          <p:cNvPr id="24" name="Shape 22"/>
+          <p:cNvSpPr/>
+          <p:nvPr/>
+        </p:nvSpPr>
+        <p:spPr>
+          <a:xfrm>
+            <a:off x="1874520" y="3273552"/>
+            <a:ext cx="6903720" cy="658368"/>
+          </a:xfrm>
+          <a:prstGeom prst="rect">
+            <a:avLst>
+              <a:gd name="adj" fmla="val 8333"/>
+            </a:avLst>
+          </a:prstGeom>
+          <a:solidFill>
+            <a:srgbClr val="F8FAFC"/>
+          </a:solidFill>
+          <a:ln w="12700">
+            <a:solidFill>
+              <a:srgbClr val="E2E8F0"/>
+            </a:solidFill>
+            <a:prstDash val="dash"/>
+          </a:ln>
+        </p:spPr>
+      </p:sp>
+      <p:sp>
+        <p:nvSpPr>
+          <p:cNvPr id="25" name="Text 23"/>
+          <p:cNvSpPr/>
+          <p:nvPr/>
+        </p:nvSpPr>
+        <p:spPr>
+          <a:xfrm>
+            <a:off x="1874520" y="3273552"/>
+            <a:ext cx="6903720" cy="658368"/>
+          </a:xfrm>
+          <a:prstGeom prst="rect">
+            <a:avLst/>
+          </a:prstGeom>
+          <a:noFill/>
+          <a:ln/>
+        </p:spPr>
+        <p:txBody>
+          <a:bodyPr wrap="square" rtlCol="0" anchor="ctr"/>
+          <a:lstStyle/>
+          <a:p>
+            <a:pPr algn="ctr" indent="0" marL="0">
+              <a:buNone/>
+            </a:pPr>
+            <a:r>
+              <a:rPr lang="en-US" sz="1100" i="1" dirty="0">
+                <a:solidFill>
+                  <a:srgbClr val="CBD5E1"/>
                 </a:solidFill>
                 <a:latin typeface="Calibri" pitchFamily="34" charset="0"/>
                 <a:ea typeface="Calibri" pitchFamily="34" charset="-122"/>
                 <a:cs typeface="Calibri" pitchFamily="34" charset="-120"/>
               </a:rPr>
-              <a:t>having or done</a:t>
-            </a:r>
-            <a:endParaRPr lang="en-US" sz="850" dirty="0"/>
-          </a:p>
-        </p:txBody>
-      </p:sp>
-      <p:sp>
-        <p:nvSpPr>
-          <p:cNvPr id="25" name="Shape 23"/>
-          <p:cNvSpPr/>
-          <p:nvPr/>
-        </p:nvSpPr>
-        <p:spPr>
-          <a:xfrm>
-            <a:off x="365760" y="3273552"/>
-            <a:ext cx="1371600" cy="658368"/>
+              <a:t>Write here...</a:t>
+            </a:r>
+            <a:endParaRPr lang="en-US" sz="1100" dirty="0"/>
+          </a:p>
+        </p:txBody>
+      </p:sp>
+      <p:sp>
+        <p:nvSpPr>
+          <p:cNvPr id="26" name="Shape 24"/>
+          <p:cNvSpPr/>
+          <p:nvPr/>
+        </p:nvSpPr>
+        <p:spPr>
+          <a:xfrm>
+            <a:off x="365760" y="4096512"/>
+            <a:ext cx="1371600" cy="804672"/>
           </a:xfrm>
           <a:prstGeom prst="rect">
             <a:avLst>
-              <a:gd name="adj" fmla="val 8333"/>
+              <a:gd name="adj" fmla="val 6818"/>
             </a:avLst>
           </a:prstGeom>
           <a:solidFill>
@@ -31101,14 +31247,14 @@
       </p:sp>
       <p:sp>
         <p:nvSpPr>
-          <p:cNvPr id="26" name="Text 24"/>
-          <p:cNvSpPr/>
-          <p:nvPr/>
-        </p:nvSpPr>
-        <p:spPr>
-          <a:xfrm>
-            <a:off x="365760" y="3273552"/>
-            <a:ext cx="1371600" cy="658368"/>
+          <p:cNvPr id="27" name="Text 25"/>
+          <p:cNvSpPr/>
+          <p:nvPr/>
+        </p:nvSpPr>
+        <p:spPr>
+          <a:xfrm>
+            <a:off x="365760" y="4096512"/>
+            <a:ext cx="1371600" cy="804672"/>
           </a:xfrm>
           <a:prstGeom prst="rect">
             <a:avLst/>
@@ -31132,7 +31278,7 @@
                 <a:ea typeface="Trebuchet MS" pitchFamily="34" charset="-122"/>
                 <a:cs typeface="Trebuchet MS" pitchFamily="34" charset="-120"/>
               </a:rPr>
-              <a:t>Syllables</a:t>
+              <a:t>Phonemes</a:t>
             </a:r>
             <a:endParaRPr lang="en-US" sz="1100" dirty="0"/>
           </a:p>
@@ -31140,80 +31286,14 @@
       </p:sp>
       <p:sp>
         <p:nvSpPr>
-          <p:cNvPr id="27" name="Shape 25"/>
-          <p:cNvSpPr/>
-          <p:nvPr/>
-        </p:nvSpPr>
-        <p:spPr>
-          <a:xfrm>
-            <a:off x="1874520" y="3273552"/>
-            <a:ext cx="6903720" cy="658368"/>
-          </a:xfrm>
-          <a:prstGeom prst="rect">
-            <a:avLst>
-              <a:gd name="adj" fmla="val 8333"/>
-            </a:avLst>
-          </a:prstGeom>
-          <a:solidFill>
-            <a:srgbClr val="F8FAFC"/>
-          </a:solidFill>
-          <a:ln w="12700">
-            <a:solidFill>
-              <a:srgbClr val="E2E8F0"/>
-            </a:solidFill>
-            <a:prstDash val="dash"/>
-          </a:ln>
-        </p:spPr>
-      </p:sp>
-      <p:sp>
-        <p:nvSpPr>
-          <p:cNvPr id="28" name="Text 26"/>
-          <p:cNvSpPr/>
-          <p:nvPr/>
-        </p:nvSpPr>
-        <p:spPr>
-          <a:xfrm>
-            <a:off x="1874520" y="3273552"/>
-            <a:ext cx="6903720" cy="658368"/>
-          </a:xfrm>
-          <a:prstGeom prst="rect">
-            <a:avLst/>
-          </a:prstGeom>
-          <a:noFill/>
-          <a:ln/>
-        </p:spPr>
-        <p:txBody>
-          <a:bodyPr wrap="square" rtlCol="0" anchor="ctr"/>
-          <a:lstStyle/>
-          <a:p>
-            <a:pPr algn="ctr" indent="0" marL="0">
-              <a:buNone/>
-            </a:pPr>
-            <a:r>
-              <a:rPr lang="en-US" sz="1100" i="1" dirty="0">
-                <a:solidFill>
-                  <a:srgbClr val="CBD5E1"/>
-                </a:solidFill>
-                <a:latin typeface="Calibri" pitchFamily="34" charset="0"/>
-                <a:ea typeface="Calibri" pitchFamily="34" charset="-122"/>
-                <a:cs typeface="Calibri" pitchFamily="34" charset="-120"/>
-              </a:rPr>
-              <a:t>Write here...</a:t>
-            </a:r>
-            <a:endParaRPr lang="en-US" sz="1100" dirty="0"/>
-          </a:p>
-        </p:txBody>
-      </p:sp>
-      <p:sp>
-        <p:nvSpPr>
-          <p:cNvPr id="29" name="Shape 27"/>
-          <p:cNvSpPr/>
-          <p:nvPr/>
-        </p:nvSpPr>
-        <p:spPr>
-          <a:xfrm>
-            <a:off x="365760" y="4096512"/>
-            <a:ext cx="1371600" cy="804672"/>
+          <p:cNvPr id="28" name="Shape 26"/>
+          <p:cNvSpPr/>
+          <p:nvPr/>
+        </p:nvSpPr>
+        <p:spPr>
+          <a:xfrm>
+            <a:off x="1874520" y="4096512"/>
+            <a:ext cx="6903720" cy="804672"/>
           </a:xfrm>
           <a:prstGeom prst="rect">
             <a:avLst>
@@ -31221,85 +31301,19 @@
             </a:avLst>
           </a:prstGeom>
           <a:solidFill>
-            <a:srgbClr val="E2E8F0"/>
+            <a:srgbClr val="F8FAFC"/>
           </a:solidFill>
           <a:ln w="12700">
             <a:solidFill>
               <a:srgbClr val="E2E8F0"/>
             </a:solidFill>
-            <a:prstDash val="solid"/>
-          </a:ln>
-        </p:spPr>
-      </p:sp>
-      <p:sp>
-        <p:nvSpPr>
-          <p:cNvPr id="30" name="Text 28"/>
-          <p:cNvSpPr/>
-          <p:nvPr/>
-        </p:nvSpPr>
-        <p:spPr>
-          <a:xfrm>
-            <a:off x="365760" y="4096512"/>
-            <a:ext cx="1371600" cy="804672"/>
-          </a:xfrm>
-          <a:prstGeom prst="rect">
-            <a:avLst/>
-          </a:prstGeom>
-          <a:noFill/>
-          <a:ln/>
-        </p:spPr>
-        <p:txBody>
-          <a:bodyPr wrap="square" lIns="0" tIns="0" rIns="0" bIns="0" rtlCol="0" anchor="ctr"/>
-          <a:lstStyle/>
-          <a:p>
-            <a:pPr algn="ctr" indent="0" marL="0">
-              <a:buNone/>
-            </a:pPr>
-            <a:r>
-              <a:rPr lang="en-US" sz="1100" b="1" dirty="0">
-                <a:solidFill>
-                  <a:srgbClr val="475569"/>
-                </a:solidFill>
-                <a:latin typeface="Trebuchet MS" pitchFamily="34" charset="0"/>
-                <a:ea typeface="Trebuchet MS" pitchFamily="34" charset="-122"/>
-                <a:cs typeface="Trebuchet MS" pitchFamily="34" charset="-120"/>
-              </a:rPr>
-              <a:t>Phonemes</a:t>
-            </a:r>
-            <a:endParaRPr lang="en-US" sz="1100" dirty="0"/>
-          </a:p>
-        </p:txBody>
-      </p:sp>
-      <p:sp>
-        <p:nvSpPr>
-          <p:cNvPr id="31" name="Shape 29"/>
-          <p:cNvSpPr/>
-          <p:nvPr/>
-        </p:nvSpPr>
-        <p:spPr>
-          <a:xfrm>
-            <a:off x="1874520" y="4096512"/>
-            <a:ext cx="6903720" cy="804672"/>
-          </a:xfrm>
-          <a:prstGeom prst="rect">
-            <a:avLst>
-              <a:gd name="adj" fmla="val 6818"/>
-            </a:avLst>
-          </a:prstGeom>
-          <a:solidFill>
-            <a:srgbClr val="F8FAFC"/>
-          </a:solidFill>
-          <a:ln w="12700">
-            <a:solidFill>
-              <a:srgbClr val="E2E8F0"/>
-            </a:solidFill>
             <a:prstDash val="dash"/>
           </a:ln>
         </p:spPr>
       </p:sp>
       <p:sp>
         <p:nvSpPr>
-          <p:cNvPr id="32" name="Text 30"/>
+          <p:cNvPr id="29" name="Text 27"/>
           <p:cNvSpPr/>
           <p:nvPr/>
         </p:nvSpPr>
@@ -31622,7 +31636,7 @@
                 <a:ea typeface="Calibri" pitchFamily="34" charset="-122"/>
                 <a:cs typeface="Calibri" pitchFamily="34" charset="-120"/>
               </a:rPr>
-              <a:t>Word Labs  •  wordlabs.app  •  Root: 'colour' = hue or shade of light</a:t>
+              <a:t>Word Labs  •  wordlabs.app  •  Root: 'colour' = hue, tint, or shade</a:t>
             </a:r>
             <a:endParaRPr lang="en-US" sz="800" dirty="0"/>
           </a:p>
@@ -31761,7 +31775,7 @@
                 <a:ea typeface="Trebuchet MS" pitchFamily="34" charset="-122"/>
                 <a:cs typeface="Trebuchet MS" pitchFamily="34" charset="-120"/>
               </a:rPr>
-              <a:t>multicoloured</a:t>
+              <a:t>colourless</a:t>
             </a:r>
             <a:endParaRPr lang="en-US" sz="2800" dirty="0"/>
           </a:p>
@@ -31841,7 +31855,7 @@
         </p:nvSpPr>
         <p:spPr>
           <a:xfrm>
-            <a:off x="2221992" y="2258568"/>
+            <a:off x="2938272" y="2258568"/>
             <a:ext cx="1828800" cy="292608"/>
           </a:xfrm>
           <a:prstGeom prst="rect">
@@ -31850,11 +31864,11 @@
             </a:avLst>
           </a:prstGeom>
           <a:solidFill>
-            <a:srgbClr val="DDD6FE"/>
+            <a:srgbClr val="CCFBF1"/>
           </a:solidFill>
           <a:ln w="19050">
             <a:solidFill>
-              <a:srgbClr val="7C3AED"/>
+              <a:srgbClr val="0D9488"/>
             </a:solidFill>
             <a:prstDash val="solid"/>
           </a:ln>
@@ -31875,7 +31889,7 @@
         </p:nvSpPr>
         <p:spPr>
           <a:xfrm>
-            <a:off x="2221992" y="2258568"/>
+            <a:off x="2938272" y="2258568"/>
             <a:ext cx="1828800" cy="292608"/>
           </a:xfrm>
           <a:prstGeom prst="rect">
@@ -31894,13 +31908,13 @@
             <a:r>
               <a:rPr lang="en-US" sz="1300" b="1" dirty="0">
                 <a:solidFill>
-                  <a:srgbClr val="4C1D95"/>
+                  <a:srgbClr val="0F766E"/>
                 </a:solidFill>
                 <a:latin typeface="Trebuchet MS" pitchFamily="34" charset="0"/>
                 <a:ea typeface="Trebuchet MS" pitchFamily="34" charset="-122"/>
                 <a:cs typeface="Trebuchet MS" pitchFamily="34" charset="-120"/>
               </a:rPr>
-              <a:t>multi</a:t>
+              <a:t>colour</a:t>
             </a:r>
             <a:endParaRPr lang="en-US" sz="1300" dirty="0"/>
           </a:p>
@@ -31914,7 +31928,7 @@
         </p:nvSpPr>
         <p:spPr>
           <a:xfrm>
-            <a:off x="2221992" y="2569464"/>
+            <a:off x="2938272" y="2569464"/>
             <a:ext cx="1828800" cy="201168"/>
           </a:xfrm>
           <a:prstGeom prst="rect">
@@ -31939,7 +31953,7 @@
                 <a:ea typeface="Calibri" pitchFamily="34" charset="-122"/>
                 <a:cs typeface="Calibri" pitchFamily="34" charset="-120"/>
               </a:rPr>
-              <a:t>many</a:t>
+              <a:t>hue or shade</a:t>
             </a:r>
             <a:endParaRPr lang="en-US" sz="850" dirty="0"/>
           </a:p>
@@ -31953,7 +31967,7 @@
         </p:nvSpPr>
         <p:spPr>
           <a:xfrm>
-            <a:off x="4370832" y="2258568"/>
+            <a:off x="5803392" y="2258568"/>
             <a:ext cx="1828800" cy="292608"/>
           </a:xfrm>
           <a:prstGeom prst="rect">
@@ -31962,11 +31976,11 @@
             </a:avLst>
           </a:prstGeom>
           <a:solidFill>
-            <a:srgbClr val="CCFBF1"/>
+            <a:srgbClr val="DDD6FE"/>
           </a:solidFill>
           <a:ln w="19050">
             <a:solidFill>
-              <a:srgbClr val="0D9488"/>
+              <a:srgbClr val="7C3AED"/>
             </a:solidFill>
             <a:prstDash val="solid"/>
           </a:ln>
@@ -31987,7 +32001,7 @@
         </p:nvSpPr>
         <p:spPr>
           <a:xfrm>
-            <a:off x="4370832" y="2258568"/>
+            <a:off x="5803392" y="2258568"/>
             <a:ext cx="1828800" cy="292608"/>
           </a:xfrm>
           <a:prstGeom prst="rect">
@@ -32006,13 +32020,13 @@
             <a:r>
               <a:rPr lang="en-US" sz="1300" b="1" dirty="0">
                 <a:solidFill>
-                  <a:srgbClr val="0F766E"/>
+                  <a:srgbClr val="4C1D95"/>
                 </a:solidFill>
                 <a:latin typeface="Trebuchet MS" pitchFamily="34" charset="0"/>
                 <a:ea typeface="Trebuchet MS" pitchFamily="34" charset="-122"/>
                 <a:cs typeface="Trebuchet MS" pitchFamily="34" charset="-120"/>
               </a:rPr>
-              <a:t>colour</a:t>
+              <a:t>less</a:t>
             </a:r>
             <a:endParaRPr lang="en-US" sz="1300" dirty="0"/>
           </a:p>
@@ -32026,7 +32040,7 @@
         </p:nvSpPr>
         <p:spPr>
           <a:xfrm>
-            <a:off x="4370832" y="2569464"/>
+            <a:off x="5803392" y="2569464"/>
             <a:ext cx="1828800" cy="201168"/>
           </a:xfrm>
           <a:prstGeom prst="rect">
@@ -32051,7 +32065,7 @@
                 <a:ea typeface="Calibri" pitchFamily="34" charset="-122"/>
                 <a:cs typeface="Calibri" pitchFamily="34" charset="-120"/>
               </a:rPr>
-              <a:t>hue or shade</a:t>
+              <a:t>without</a:t>
             </a:r>
             <a:endParaRPr lang="en-US" sz="850" dirty="0"/>
           </a:p>
@@ -32065,30 +32079,23 @@
         </p:nvSpPr>
         <p:spPr>
           <a:xfrm>
-            <a:off x="6519672" y="2258568"/>
-            <a:ext cx="1828800" cy="292608"/>
+            <a:off x="365760" y="3273552"/>
+            <a:ext cx="1371600" cy="658368"/>
           </a:xfrm>
           <a:prstGeom prst="rect">
             <a:avLst>
-              <a:gd name="adj" fmla="val 25000"/>
+              <a:gd name="adj" fmla="val 8333"/>
             </a:avLst>
           </a:prstGeom>
           <a:solidFill>
-            <a:srgbClr val="FCE7F3"/>
-          </a:solidFill>
-          <a:ln w="19050">
-            <a:solidFill>
-              <a:srgbClr val="DB2777"/>
-            </a:solidFill>
-            <a:prstDash val="solid"/>
-          </a:ln>
-          <a:effectLst>
-            <a:outerShdw sx="100000" sy="100000" kx="0" ky="0" algn="bl" rotWithShape="0" blurRad="101600" dist="38100" dir="8100000">
-              <a:srgbClr val="000000">
-                <a:alpha val="12000"/>
-              </a:srgbClr>
-            </a:outerShdw>
-          </a:effectLst>
+            <a:srgbClr val="E2E8F0"/>
+          </a:solidFill>
+          <a:ln w="12700">
+            <a:solidFill>
+              <a:srgbClr val="E2E8F0"/>
+            </a:solidFill>
+            <a:prstDash val="solid"/>
+          </a:ln>
         </p:spPr>
       </p:sp>
       <p:sp>
@@ -32099,86 +32106,47 @@
         </p:nvSpPr>
         <p:spPr>
           <a:xfrm>
-            <a:off x="6519672" y="2258568"/>
-            <a:ext cx="1828800" cy="292608"/>
-          </a:xfrm>
-          <a:prstGeom prst="rect">
-            <a:avLst/>
-          </a:prstGeom>
-          <a:noFill/>
-          <a:ln/>
-        </p:spPr>
-        <p:txBody>
-          <a:bodyPr wrap="square" lIns="0" tIns="0" rIns="0" bIns="0" rtlCol="0" anchor="ctr"/>
-          <a:lstStyle/>
-          <a:p>
-            <a:pPr algn="ctr" indent="0" marL="0">
-              <a:buNone/>
-            </a:pPr>
-            <a:r>
-              <a:rPr lang="en-US" sz="1300" b="1" dirty="0">
-                <a:solidFill>
-                  <a:srgbClr val="9D174D"/>
+            <a:off x="365760" y="3273552"/>
+            <a:ext cx="1371600" cy="658368"/>
+          </a:xfrm>
+          <a:prstGeom prst="rect">
+            <a:avLst/>
+          </a:prstGeom>
+          <a:noFill/>
+          <a:ln/>
+        </p:spPr>
+        <p:txBody>
+          <a:bodyPr wrap="square" lIns="0" tIns="0" rIns="0" bIns="0" rtlCol="0" anchor="ctr"/>
+          <a:lstStyle/>
+          <a:p>
+            <a:pPr algn="ctr" indent="0" marL="0">
+              <a:buNone/>
+            </a:pPr>
+            <a:r>
+              <a:rPr lang="en-US" sz="1100" b="1" dirty="0">
+                <a:solidFill>
+                  <a:srgbClr val="475569"/>
                 </a:solidFill>
                 <a:latin typeface="Trebuchet MS" pitchFamily="34" charset="0"/>
                 <a:ea typeface="Trebuchet MS" pitchFamily="34" charset="-122"/>
                 <a:cs typeface="Trebuchet MS" pitchFamily="34" charset="-120"/>
               </a:rPr>
-              <a:t>ed</a:t>
-            </a:r>
-            <a:endParaRPr lang="en-US" sz="1300" dirty="0"/>
-          </a:p>
-        </p:txBody>
-      </p:sp>
-      <p:sp>
-        <p:nvSpPr>
-          <p:cNvPr id="24" name="Text 22"/>
-          <p:cNvSpPr/>
-          <p:nvPr/>
-        </p:nvSpPr>
-        <p:spPr>
-          <a:xfrm>
-            <a:off x="6519672" y="2569464"/>
-            <a:ext cx="1828800" cy="201168"/>
-          </a:xfrm>
-          <a:prstGeom prst="rect">
-            <a:avLst/>
-          </a:prstGeom>
-          <a:noFill/>
-          <a:ln/>
-        </p:spPr>
-        <p:txBody>
-          <a:bodyPr wrap="square" lIns="0" tIns="0" rIns="0" bIns="0" rtlCol="0" anchor="t"/>
-          <a:lstStyle/>
-          <a:p>
-            <a:pPr algn="ctr" indent="0" marL="0">
-              <a:buNone/>
-            </a:pPr>
-            <a:r>
-              <a:rPr lang="en-US" sz="850" dirty="0">
-                <a:solidFill>
-                  <a:srgbClr val="475569"/>
-                </a:solidFill>
-                <a:latin typeface="Calibri" pitchFamily="34" charset="0"/>
-                <a:ea typeface="Calibri" pitchFamily="34" charset="-122"/>
-                <a:cs typeface="Calibri" pitchFamily="34" charset="-120"/>
-              </a:rPr>
-              <a:t>having or done</a:t>
-            </a:r>
-            <a:endParaRPr lang="en-US" sz="850" dirty="0"/>
-          </a:p>
-        </p:txBody>
-      </p:sp>
-      <p:sp>
-        <p:nvSpPr>
-          <p:cNvPr id="25" name="Shape 23"/>
-          <p:cNvSpPr/>
-          <p:nvPr/>
-        </p:nvSpPr>
-        <p:spPr>
-          <a:xfrm>
-            <a:off x="365760" y="3273552"/>
-            <a:ext cx="1371600" cy="658368"/>
+              <a:t>Syllables</a:t>
+            </a:r>
+            <a:endParaRPr lang="en-US" sz="1100" dirty="0"/>
+          </a:p>
+        </p:txBody>
+      </p:sp>
+      <p:sp>
+        <p:nvSpPr>
+          <p:cNvPr id="24" name="Shape 22"/>
+          <p:cNvSpPr/>
+          <p:nvPr/>
+        </p:nvSpPr>
+        <p:spPr>
+          <a:xfrm>
+            <a:off x="1874520" y="3273552"/>
+            <a:ext cx="6903720" cy="658368"/>
           </a:xfrm>
           <a:prstGeom prst="rect">
             <a:avLst>
@@ -32186,11 +32154,38 @@
             </a:avLst>
           </a:prstGeom>
           <a:solidFill>
-            <a:srgbClr val="E2E8F0"/>
-          </a:solidFill>
-          <a:ln w="12700">
-            <a:solidFill>
-              <a:srgbClr val="E2E8F0"/>
+            <a:srgbClr val="CCFBF1"/>
+          </a:solidFill>
+          <a:ln w="12700">
+            <a:solidFill>
+              <a:srgbClr val="0D9488"/>
+            </a:solidFill>
+            <a:prstDash val="solid"/>
+          </a:ln>
+        </p:spPr>
+      </p:sp>
+      <p:sp>
+        <p:nvSpPr>
+          <p:cNvPr id="25" name="Shape 23"/>
+          <p:cNvSpPr/>
+          <p:nvPr/>
+        </p:nvSpPr>
+        <p:spPr>
+          <a:xfrm>
+            <a:off x="2313432" y="3364992"/>
+            <a:ext cx="1645920" cy="475488"/>
+          </a:xfrm>
+          <a:prstGeom prst="rect">
+            <a:avLst>
+              <a:gd name="adj" fmla="val 9615"/>
+            </a:avLst>
+          </a:prstGeom>
+          <a:solidFill>
+            <a:srgbClr val="FFFFFF"/>
+          </a:solidFill>
+          <a:ln w="12700">
+            <a:solidFill>
+              <a:srgbClr val="0D9488"/>
             </a:solidFill>
             <a:prstDash val="solid"/>
           </a:ln>
@@ -32204,63 +32199,75 @@
         </p:nvSpPr>
         <p:spPr>
           <a:xfrm>
-            <a:off x="365760" y="3273552"/>
-            <a:ext cx="1371600" cy="658368"/>
-          </a:xfrm>
-          <a:prstGeom prst="rect">
-            <a:avLst/>
-          </a:prstGeom>
-          <a:noFill/>
-          <a:ln/>
-        </p:spPr>
-        <p:txBody>
-          <a:bodyPr wrap="square" lIns="0" tIns="0" rIns="0" bIns="0" rtlCol="0" anchor="ctr"/>
-          <a:lstStyle/>
-          <a:p>
-            <a:pPr algn="ctr" indent="0" marL="0">
-              <a:buNone/>
-            </a:pPr>
-            <a:r>
-              <a:rPr lang="en-US" sz="1100" b="1" dirty="0">
-                <a:solidFill>
-                  <a:srgbClr val="475569"/>
+            <a:off x="2313432" y="3364992"/>
+            <a:ext cx="1645920" cy="475488"/>
+          </a:xfrm>
+          <a:prstGeom prst="rect">
+            <a:avLst/>
+          </a:prstGeom>
+          <a:noFill/>
+          <a:ln/>
+        </p:spPr>
+        <p:txBody>
+          <a:bodyPr wrap="square" lIns="0" tIns="0" rIns="0" bIns="0" rtlCol="0" anchor="ctr"/>
+          <a:lstStyle/>
+          <a:p>
+            <a:pPr algn="ctr" indent="0" marL="0">
+              <a:buNone/>
+            </a:pPr>
+            <a:r>
+              <a:rPr lang="en-US" sz="1400" b="1" dirty="0">
+                <a:solidFill>
+                  <a:srgbClr val="0D9488"/>
                 </a:solidFill>
                 <a:latin typeface="Trebuchet MS" pitchFamily="34" charset="0"/>
                 <a:ea typeface="Trebuchet MS" pitchFamily="34" charset="-122"/>
                 <a:cs typeface="Trebuchet MS" pitchFamily="34" charset="-120"/>
               </a:rPr>
-              <a:t>Syllables</a:t>
-            </a:r>
-            <a:endParaRPr lang="en-US" sz="1100" dirty="0"/>
-          </a:p>
-        </p:txBody>
-      </p:sp>
-      <p:sp>
-        <p:nvSpPr>
-          <p:cNvPr id="27" name="Shape 25"/>
-          <p:cNvSpPr/>
-          <p:nvPr/>
-        </p:nvSpPr>
-        <p:spPr>
-          <a:xfrm>
-            <a:off x="1874520" y="3273552"/>
-            <a:ext cx="6903720" cy="658368"/>
-          </a:xfrm>
-          <a:prstGeom prst="rect">
-            <a:avLst>
-              <a:gd name="adj" fmla="val 8333"/>
-            </a:avLst>
-          </a:prstGeom>
-          <a:solidFill>
-            <a:srgbClr val="CCFBF1"/>
-          </a:solidFill>
-          <a:ln w="12700">
-            <a:solidFill>
-              <a:srgbClr val="0D9488"/>
-            </a:solidFill>
-            <a:prstDash val="solid"/>
-          </a:ln>
-        </p:spPr>
+              <a:t>col</a:t>
+            </a:r>
+            <a:endParaRPr lang="en-US" sz="1400" dirty="0"/>
+          </a:p>
+        </p:txBody>
+      </p:sp>
+      <p:sp>
+        <p:nvSpPr>
+          <p:cNvPr id="27" name="Text 25"/>
+          <p:cNvSpPr/>
+          <p:nvPr/>
+        </p:nvSpPr>
+        <p:spPr>
+          <a:xfrm>
+            <a:off x="3959352" y="3364992"/>
+            <a:ext cx="411480" cy="475488"/>
+          </a:xfrm>
+          <a:prstGeom prst="rect">
+            <a:avLst/>
+          </a:prstGeom>
+          <a:noFill/>
+          <a:ln/>
+        </p:spPr>
+        <p:txBody>
+          <a:bodyPr wrap="square" lIns="0" tIns="0" rIns="0" bIns="0" rtlCol="0" anchor="ctr"/>
+          <a:lstStyle/>
+          <a:p>
+            <a:pPr algn="ctr" indent="0" marL="0">
+              <a:buNone/>
+            </a:pPr>
+            <a:r>
+              <a:rPr lang="en-US" sz="1600" b="1" dirty="0">
+                <a:solidFill>
+                  <a:srgbClr val="0D9488"/>
+                </a:solidFill>
+                <a:latin typeface="Trebuchet MS" pitchFamily="34" charset="0"/>
+                <a:ea typeface="Trebuchet MS" pitchFamily="34" charset="-122"/>
+                <a:cs typeface="Trebuchet MS" pitchFamily="34" charset="-120"/>
+              </a:rPr>
+              <a:t>·</a:t>
+            </a:r>
+            <a:endParaRPr lang="en-US" sz="1600" dirty="0"/>
+          </a:p>
+        </p:txBody>
       </p:sp>
       <p:sp>
         <p:nvSpPr>
@@ -32270,8 +32277,8 @@
         </p:nvSpPr>
         <p:spPr>
           <a:xfrm>
-            <a:off x="1975104" y="3364992"/>
-            <a:ext cx="1554480" cy="475488"/>
+            <a:off x="4370832" y="3364992"/>
+            <a:ext cx="1645920" cy="475488"/>
           </a:xfrm>
           <a:prstGeom prst="rect">
             <a:avLst>
@@ -32297,8 +32304,8 @@
         </p:nvSpPr>
         <p:spPr>
           <a:xfrm>
-            <a:off x="1975104" y="3364992"/>
-            <a:ext cx="1554480" cy="475488"/>
+            <a:off x="4370832" y="3364992"/>
+            <a:ext cx="1645920" cy="475488"/>
           </a:xfrm>
           <a:prstGeom prst="rect">
             <a:avLst/>
@@ -32322,7 +32329,7 @@
                 <a:ea typeface="Trebuchet MS" pitchFamily="34" charset="-122"/>
                 <a:cs typeface="Trebuchet MS" pitchFamily="34" charset="-120"/>
               </a:rPr>
-              <a:t>mul</a:t>
+              <a:t>our</a:t>
             </a:r>
             <a:endParaRPr lang="en-US" sz="1400" dirty="0"/>
           </a:p>
@@ -32336,8 +32343,8 @@
         </p:nvSpPr>
         <p:spPr>
           <a:xfrm>
-            <a:off x="3529584" y="3364992"/>
-            <a:ext cx="73152" cy="475488"/>
+            <a:off x="6016752" y="3364992"/>
+            <a:ext cx="411480" cy="475488"/>
           </a:xfrm>
           <a:prstGeom prst="rect">
             <a:avLst/>
@@ -32375,8 +32382,8 @@
         </p:nvSpPr>
         <p:spPr>
           <a:xfrm>
-            <a:off x="3602736" y="3364992"/>
-            <a:ext cx="1554480" cy="475488"/>
+            <a:off x="6428232" y="3364992"/>
+            <a:ext cx="1645920" cy="475488"/>
           </a:xfrm>
           <a:prstGeom prst="rect">
             <a:avLst>
@@ -32402,8 +32409,8 @@
         </p:nvSpPr>
         <p:spPr>
           <a:xfrm>
-            <a:off x="3602736" y="3364992"/>
-            <a:ext cx="1554480" cy="475488"/>
+            <a:off x="6428232" y="3364992"/>
+            <a:ext cx="1645920" cy="475488"/>
           </a:xfrm>
           <a:prstGeom prst="rect">
             <a:avLst/>
@@ -32427,7 +32434,7 @@
                 <a:ea typeface="Trebuchet MS" pitchFamily="34" charset="-122"/>
                 <a:cs typeface="Trebuchet MS" pitchFamily="34" charset="-120"/>
               </a:rPr>
-              <a:t>ti</a:t>
+              <a:t>less</a:t>
             </a:r>
             <a:endParaRPr lang="en-US" sz="1400" dirty="0"/>
           </a:p>
@@ -32435,224 +32442,80 @@
       </p:sp>
       <p:sp>
         <p:nvSpPr>
-          <p:cNvPr id="33" name="Text 31"/>
-          <p:cNvSpPr/>
-          <p:nvPr/>
-        </p:nvSpPr>
-        <p:spPr>
-          <a:xfrm>
-            <a:off x="5157216" y="3364992"/>
-            <a:ext cx="73152" cy="475488"/>
-          </a:xfrm>
-          <a:prstGeom prst="rect">
-            <a:avLst/>
-          </a:prstGeom>
-          <a:noFill/>
-          <a:ln/>
-        </p:spPr>
-        <p:txBody>
-          <a:bodyPr wrap="square" lIns="0" tIns="0" rIns="0" bIns="0" rtlCol="0" anchor="ctr"/>
-          <a:lstStyle/>
-          <a:p>
-            <a:pPr algn="ctr" indent="0" marL="0">
-              <a:buNone/>
-            </a:pPr>
-            <a:r>
-              <a:rPr lang="en-US" sz="1600" b="1" dirty="0">
-                <a:solidFill>
-                  <a:srgbClr val="0D9488"/>
+          <p:cNvPr id="33" name="Shape 31"/>
+          <p:cNvSpPr/>
+          <p:nvPr/>
+        </p:nvSpPr>
+        <p:spPr>
+          <a:xfrm>
+            <a:off x="365760" y="4096512"/>
+            <a:ext cx="1371600" cy="804672"/>
+          </a:xfrm>
+          <a:prstGeom prst="rect">
+            <a:avLst>
+              <a:gd name="adj" fmla="val 6818"/>
+            </a:avLst>
+          </a:prstGeom>
+          <a:solidFill>
+            <a:srgbClr val="E2E8F0"/>
+          </a:solidFill>
+          <a:ln w="12700">
+            <a:solidFill>
+              <a:srgbClr val="E2E8F0"/>
+            </a:solidFill>
+            <a:prstDash val="solid"/>
+          </a:ln>
+        </p:spPr>
+      </p:sp>
+      <p:sp>
+        <p:nvSpPr>
+          <p:cNvPr id="34" name="Text 32"/>
+          <p:cNvSpPr/>
+          <p:nvPr/>
+        </p:nvSpPr>
+        <p:spPr>
+          <a:xfrm>
+            <a:off x="365760" y="4096512"/>
+            <a:ext cx="1371600" cy="804672"/>
+          </a:xfrm>
+          <a:prstGeom prst="rect">
+            <a:avLst/>
+          </a:prstGeom>
+          <a:noFill/>
+          <a:ln/>
+        </p:spPr>
+        <p:txBody>
+          <a:bodyPr wrap="square" lIns="0" tIns="0" rIns="0" bIns="0" rtlCol="0" anchor="ctr"/>
+          <a:lstStyle/>
+          <a:p>
+            <a:pPr algn="ctr" indent="0" marL="0">
+              <a:buNone/>
+            </a:pPr>
+            <a:r>
+              <a:rPr lang="en-US" sz="1100" b="1" dirty="0">
+                <a:solidFill>
+                  <a:srgbClr val="475569"/>
                 </a:solidFill>
                 <a:latin typeface="Trebuchet MS" pitchFamily="34" charset="0"/>
                 <a:ea typeface="Trebuchet MS" pitchFamily="34" charset="-122"/>
                 <a:cs typeface="Trebuchet MS" pitchFamily="34" charset="-120"/>
               </a:rPr>
-              <a:t>·</a:t>
-            </a:r>
-            <a:endParaRPr lang="en-US" sz="1600" dirty="0"/>
-          </a:p>
-        </p:txBody>
-      </p:sp>
-      <p:sp>
-        <p:nvSpPr>
-          <p:cNvPr id="34" name="Shape 32"/>
-          <p:cNvSpPr/>
-          <p:nvPr/>
-        </p:nvSpPr>
-        <p:spPr>
-          <a:xfrm>
-            <a:off x="5230368" y="3364992"/>
-            <a:ext cx="1554480" cy="475488"/>
-          </a:xfrm>
-          <a:prstGeom prst="rect">
-            <a:avLst>
-              <a:gd name="adj" fmla="val 9615"/>
-            </a:avLst>
-          </a:prstGeom>
-          <a:solidFill>
-            <a:srgbClr val="FFFFFF"/>
-          </a:solidFill>
-          <a:ln w="12700">
-            <a:solidFill>
-              <a:srgbClr val="0D9488"/>
-            </a:solidFill>
-            <a:prstDash val="solid"/>
-          </a:ln>
-        </p:spPr>
-      </p:sp>
-      <p:sp>
-        <p:nvSpPr>
-          <p:cNvPr id="35" name="Text 33"/>
-          <p:cNvSpPr/>
-          <p:nvPr/>
-        </p:nvSpPr>
-        <p:spPr>
-          <a:xfrm>
-            <a:off x="5230368" y="3364992"/>
-            <a:ext cx="1554480" cy="475488"/>
-          </a:xfrm>
-          <a:prstGeom prst="rect">
-            <a:avLst/>
-          </a:prstGeom>
-          <a:noFill/>
-          <a:ln/>
-        </p:spPr>
-        <p:txBody>
-          <a:bodyPr wrap="square" lIns="0" tIns="0" rIns="0" bIns="0" rtlCol="0" anchor="ctr"/>
-          <a:lstStyle/>
-          <a:p>
-            <a:pPr algn="ctr" indent="0" marL="0">
-              <a:buNone/>
-            </a:pPr>
-            <a:r>
-              <a:rPr lang="en-US" sz="1400" b="1" dirty="0">
-                <a:solidFill>
-                  <a:srgbClr val="0D9488"/>
-                </a:solidFill>
-                <a:latin typeface="Trebuchet MS" pitchFamily="34" charset="0"/>
-                <a:ea typeface="Trebuchet MS" pitchFamily="34" charset="-122"/>
-                <a:cs typeface="Trebuchet MS" pitchFamily="34" charset="-120"/>
-              </a:rPr>
-              <a:t>col</a:t>
-            </a:r>
-            <a:endParaRPr lang="en-US" sz="1400" dirty="0"/>
-          </a:p>
-        </p:txBody>
-      </p:sp>
-      <p:sp>
-        <p:nvSpPr>
-          <p:cNvPr id="36" name="Text 34"/>
-          <p:cNvSpPr/>
-          <p:nvPr/>
-        </p:nvSpPr>
-        <p:spPr>
-          <a:xfrm>
-            <a:off x="6784848" y="3364992"/>
-            <a:ext cx="73152" cy="475488"/>
-          </a:xfrm>
-          <a:prstGeom prst="rect">
-            <a:avLst/>
-          </a:prstGeom>
-          <a:noFill/>
-          <a:ln/>
-        </p:spPr>
-        <p:txBody>
-          <a:bodyPr wrap="square" lIns="0" tIns="0" rIns="0" bIns="0" rtlCol="0" anchor="ctr"/>
-          <a:lstStyle/>
-          <a:p>
-            <a:pPr algn="ctr" indent="0" marL="0">
-              <a:buNone/>
-            </a:pPr>
-            <a:r>
-              <a:rPr lang="en-US" sz="1600" b="1" dirty="0">
-                <a:solidFill>
-                  <a:srgbClr val="0D9488"/>
-                </a:solidFill>
-                <a:latin typeface="Trebuchet MS" pitchFamily="34" charset="0"/>
-                <a:ea typeface="Trebuchet MS" pitchFamily="34" charset="-122"/>
-                <a:cs typeface="Trebuchet MS" pitchFamily="34" charset="-120"/>
-              </a:rPr>
-              <a:t>·</a:t>
-            </a:r>
-            <a:endParaRPr lang="en-US" sz="1600" dirty="0"/>
-          </a:p>
-        </p:txBody>
-      </p:sp>
-      <p:sp>
-        <p:nvSpPr>
-          <p:cNvPr id="37" name="Shape 35"/>
-          <p:cNvSpPr/>
-          <p:nvPr/>
-        </p:nvSpPr>
-        <p:spPr>
-          <a:xfrm>
-            <a:off x="6858000" y="3364992"/>
-            <a:ext cx="1554480" cy="475488"/>
-          </a:xfrm>
-          <a:prstGeom prst="rect">
-            <a:avLst>
-              <a:gd name="adj" fmla="val 9615"/>
-            </a:avLst>
-          </a:prstGeom>
-          <a:solidFill>
-            <a:srgbClr val="FFFFFF"/>
-          </a:solidFill>
-          <a:ln w="12700">
-            <a:solidFill>
-              <a:srgbClr val="0D9488"/>
-            </a:solidFill>
-            <a:prstDash val="solid"/>
-          </a:ln>
-        </p:spPr>
-      </p:sp>
-      <p:sp>
-        <p:nvSpPr>
-          <p:cNvPr id="38" name="Text 36"/>
-          <p:cNvSpPr/>
-          <p:nvPr/>
-        </p:nvSpPr>
-        <p:spPr>
-          <a:xfrm>
-            <a:off x="6858000" y="3364992"/>
-            <a:ext cx="1554480" cy="475488"/>
-          </a:xfrm>
-          <a:prstGeom prst="rect">
-            <a:avLst/>
-          </a:prstGeom>
-          <a:noFill/>
-          <a:ln/>
-        </p:spPr>
-        <p:txBody>
-          <a:bodyPr wrap="square" lIns="0" tIns="0" rIns="0" bIns="0" rtlCol="0" anchor="ctr"/>
-          <a:lstStyle/>
-          <a:p>
-            <a:pPr algn="ctr" indent="0" marL="0">
-              <a:buNone/>
-            </a:pPr>
-            <a:r>
-              <a:rPr lang="en-US" sz="1400" b="1" dirty="0">
-                <a:solidFill>
-                  <a:srgbClr val="0D9488"/>
-                </a:solidFill>
-                <a:latin typeface="Trebuchet MS" pitchFamily="34" charset="0"/>
-                <a:ea typeface="Trebuchet MS" pitchFamily="34" charset="-122"/>
-                <a:cs typeface="Trebuchet MS" pitchFamily="34" charset="-120"/>
-              </a:rPr>
-              <a:t>oured</a:t>
-            </a:r>
-            <a:endParaRPr lang="en-US" sz="1400" dirty="0"/>
-          </a:p>
-        </p:txBody>
-      </p:sp>
-      <p:sp>
-        <p:nvSpPr>
-          <p:cNvPr id="39" name="Shape 37"/>
-          <p:cNvSpPr/>
-          <p:nvPr/>
-        </p:nvSpPr>
-        <p:spPr>
-          <a:xfrm>
-            <a:off x="365760" y="4096512"/>
-            <a:ext cx="1371600" cy="804672"/>
+              <a:t>Phonemes</a:t>
+            </a:r>
+            <a:endParaRPr lang="en-US" sz="1100" dirty="0"/>
+          </a:p>
+        </p:txBody>
+      </p:sp>
+      <p:sp>
+        <p:nvSpPr>
+          <p:cNvPr id="35" name="Shape 33"/>
+          <p:cNvSpPr/>
+          <p:nvPr/>
+        </p:nvSpPr>
+        <p:spPr>
+          <a:xfrm>
+            <a:off x="1874520" y="4096512"/>
+            <a:ext cx="6903720" cy="804672"/>
           </a:xfrm>
           <a:prstGeom prst="rect">
             <a:avLst>
@@ -32660,85 +32523,19 @@
             </a:avLst>
           </a:prstGeom>
           <a:solidFill>
-            <a:srgbClr val="E2E8F0"/>
+            <a:srgbClr val="F8FAFC"/>
           </a:solidFill>
           <a:ln w="12700">
             <a:solidFill>
               <a:srgbClr val="E2E8F0"/>
             </a:solidFill>
-            <a:prstDash val="solid"/>
-          </a:ln>
-        </p:spPr>
-      </p:sp>
-      <p:sp>
-        <p:nvSpPr>
-          <p:cNvPr id="40" name="Text 38"/>
-          <p:cNvSpPr/>
-          <p:nvPr/>
-        </p:nvSpPr>
-        <p:spPr>
-          <a:xfrm>
-            <a:off x="365760" y="4096512"/>
-            <a:ext cx="1371600" cy="804672"/>
-          </a:xfrm>
-          <a:prstGeom prst="rect">
-            <a:avLst/>
-          </a:prstGeom>
-          <a:noFill/>
-          <a:ln/>
-        </p:spPr>
-        <p:txBody>
-          <a:bodyPr wrap="square" lIns="0" tIns="0" rIns="0" bIns="0" rtlCol="0" anchor="ctr"/>
-          <a:lstStyle/>
-          <a:p>
-            <a:pPr algn="ctr" indent="0" marL="0">
-              <a:buNone/>
-            </a:pPr>
-            <a:r>
-              <a:rPr lang="en-US" sz="1100" b="1" dirty="0">
-                <a:solidFill>
-                  <a:srgbClr val="475569"/>
-                </a:solidFill>
-                <a:latin typeface="Trebuchet MS" pitchFamily="34" charset="0"/>
-                <a:ea typeface="Trebuchet MS" pitchFamily="34" charset="-122"/>
-                <a:cs typeface="Trebuchet MS" pitchFamily="34" charset="-120"/>
-              </a:rPr>
-              <a:t>Phonemes</a:t>
-            </a:r>
-            <a:endParaRPr lang="en-US" sz="1100" dirty="0"/>
-          </a:p>
-        </p:txBody>
-      </p:sp>
-      <p:sp>
-        <p:nvSpPr>
-          <p:cNvPr id="41" name="Shape 39"/>
-          <p:cNvSpPr/>
-          <p:nvPr/>
-        </p:nvSpPr>
-        <p:spPr>
-          <a:xfrm>
-            <a:off x="1874520" y="4096512"/>
-            <a:ext cx="6903720" cy="804672"/>
-          </a:xfrm>
-          <a:prstGeom prst="rect">
-            <a:avLst>
-              <a:gd name="adj" fmla="val 6818"/>
-            </a:avLst>
-          </a:prstGeom>
-          <a:solidFill>
-            <a:srgbClr val="F8FAFC"/>
-          </a:solidFill>
-          <a:ln w="12700">
-            <a:solidFill>
-              <a:srgbClr val="E2E8F0"/>
-            </a:solidFill>
             <a:prstDash val="dash"/>
           </a:ln>
         </p:spPr>
       </p:sp>
       <p:sp>
         <p:nvSpPr>
-          <p:cNvPr id="42" name="Text 40"/>
+          <p:cNvPr id="36" name="Text 34"/>
           <p:cNvSpPr/>
           <p:nvPr/>
         </p:nvSpPr>
@@ -33061,7 +32858,7 @@
                 <a:ea typeface="Calibri" pitchFamily="34" charset="-122"/>
                 <a:cs typeface="Calibri" pitchFamily="34" charset="-120"/>
               </a:rPr>
-              <a:t>Word Labs  •  wordlabs.app  •  Root: 'colour' = hue or shade of light</a:t>
+              <a:t>Word Labs  •  wordlabs.app  •  Root: 'colour' = hue, tint, or shade</a:t>
             </a:r>
             <a:endParaRPr lang="en-US" sz="800" dirty="0"/>
           </a:p>
@@ -33200,7 +32997,7 @@
                 <a:ea typeface="Trebuchet MS" pitchFamily="34" charset="-122"/>
                 <a:cs typeface="Trebuchet MS" pitchFamily="34" charset="-120"/>
               </a:rPr>
-              <a:t>multicoloured</a:t>
+              <a:t>colourless</a:t>
             </a:r>
             <a:endParaRPr lang="en-US" sz="2800" dirty="0"/>
           </a:p>
@@ -33280,7 +33077,7 @@
         </p:nvSpPr>
         <p:spPr>
           <a:xfrm>
-            <a:off x="2221992" y="2258568"/>
+            <a:off x="2938272" y="2258568"/>
             <a:ext cx="1828800" cy="292608"/>
           </a:xfrm>
           <a:prstGeom prst="rect">
@@ -33289,11 +33086,11 @@
             </a:avLst>
           </a:prstGeom>
           <a:solidFill>
-            <a:srgbClr val="DDD6FE"/>
+            <a:srgbClr val="CCFBF1"/>
           </a:solidFill>
           <a:ln w="19050">
             <a:solidFill>
-              <a:srgbClr val="7C3AED"/>
+              <a:srgbClr val="0D9488"/>
             </a:solidFill>
             <a:prstDash val="solid"/>
           </a:ln>
@@ -33314,7 +33111,7 @@
         </p:nvSpPr>
         <p:spPr>
           <a:xfrm>
-            <a:off x="2221992" y="2258568"/>
+            <a:off x="2938272" y="2258568"/>
             <a:ext cx="1828800" cy="292608"/>
           </a:xfrm>
           <a:prstGeom prst="rect">
@@ -33333,13 +33130,13 @@
             <a:r>
               <a:rPr lang="en-US" sz="1300" b="1" dirty="0">
                 <a:solidFill>
-                  <a:srgbClr val="4C1D95"/>
+                  <a:srgbClr val="0F766E"/>
                 </a:solidFill>
                 <a:latin typeface="Trebuchet MS" pitchFamily="34" charset="0"/>
                 <a:ea typeface="Trebuchet MS" pitchFamily="34" charset="-122"/>
                 <a:cs typeface="Trebuchet MS" pitchFamily="34" charset="-120"/>
               </a:rPr>
-              <a:t>multi</a:t>
+              <a:t>colour</a:t>
             </a:r>
             <a:endParaRPr lang="en-US" sz="1300" dirty="0"/>
           </a:p>
@@ -33353,7 +33150,7 @@
         </p:nvSpPr>
         <p:spPr>
           <a:xfrm>
-            <a:off x="2221992" y="2569464"/>
+            <a:off x="2938272" y="2569464"/>
             <a:ext cx="1828800" cy="201168"/>
           </a:xfrm>
           <a:prstGeom prst="rect">
@@ -33378,7 +33175,7 @@
                 <a:ea typeface="Calibri" pitchFamily="34" charset="-122"/>
                 <a:cs typeface="Calibri" pitchFamily="34" charset="-120"/>
               </a:rPr>
-              <a:t>many</a:t>
+              <a:t>hue or shade</a:t>
             </a:r>
             <a:endParaRPr lang="en-US" sz="850" dirty="0"/>
           </a:p>
@@ -33392,7 +33189,7 @@
         </p:nvSpPr>
         <p:spPr>
           <a:xfrm>
-            <a:off x="4370832" y="2258568"/>
+            <a:off x="5803392" y="2258568"/>
             <a:ext cx="1828800" cy="292608"/>
           </a:xfrm>
           <a:prstGeom prst="rect">
@@ -33401,11 +33198,11 @@
             </a:avLst>
           </a:prstGeom>
           <a:solidFill>
-            <a:srgbClr val="CCFBF1"/>
+            <a:srgbClr val="DDD6FE"/>
           </a:solidFill>
           <a:ln w="19050">
             <a:solidFill>
-              <a:srgbClr val="0D9488"/>
+              <a:srgbClr val="7C3AED"/>
             </a:solidFill>
             <a:prstDash val="solid"/>
           </a:ln>
@@ -33426,7 +33223,7 @@
         </p:nvSpPr>
         <p:spPr>
           <a:xfrm>
-            <a:off x="4370832" y="2258568"/>
+            <a:off x="5803392" y="2258568"/>
             <a:ext cx="1828800" cy="292608"/>
           </a:xfrm>
           <a:prstGeom prst="rect">
@@ -33445,13 +33242,13 @@
             <a:r>
               <a:rPr lang="en-US" sz="1300" b="1" dirty="0">
                 <a:solidFill>
-                  <a:srgbClr val="0F766E"/>
+                  <a:srgbClr val="4C1D95"/>
                 </a:solidFill>
                 <a:latin typeface="Trebuchet MS" pitchFamily="34" charset="0"/>
                 <a:ea typeface="Trebuchet MS" pitchFamily="34" charset="-122"/>
                 <a:cs typeface="Trebuchet MS" pitchFamily="34" charset="-120"/>
               </a:rPr>
-              <a:t>colour</a:t>
+              <a:t>less</a:t>
             </a:r>
             <a:endParaRPr lang="en-US" sz="1300" dirty="0"/>
           </a:p>
@@ -33465,7 +33262,7 @@
         </p:nvSpPr>
         <p:spPr>
           <a:xfrm>
-            <a:off x="4370832" y="2569464"/>
+            <a:off x="5803392" y="2569464"/>
             <a:ext cx="1828800" cy="201168"/>
           </a:xfrm>
           <a:prstGeom prst="rect">
@@ -33490,7 +33287,7 @@
                 <a:ea typeface="Calibri" pitchFamily="34" charset="-122"/>
                 <a:cs typeface="Calibri" pitchFamily="34" charset="-120"/>
               </a:rPr>
-              <a:t>hue or shade</a:t>
+              <a:t>without</a:t>
             </a:r>
             <a:endParaRPr lang="en-US" sz="850" dirty="0"/>
           </a:p>
@@ -33504,30 +33301,23 @@
         </p:nvSpPr>
         <p:spPr>
           <a:xfrm>
-            <a:off x="6519672" y="2258568"/>
-            <a:ext cx="1828800" cy="292608"/>
+            <a:off x="365760" y="3273552"/>
+            <a:ext cx="1371600" cy="658368"/>
           </a:xfrm>
           <a:prstGeom prst="rect">
             <a:avLst>
-              <a:gd name="adj" fmla="val 25000"/>
+              <a:gd name="adj" fmla="val 8333"/>
             </a:avLst>
           </a:prstGeom>
           <a:solidFill>
-            <a:srgbClr val="FCE7F3"/>
-          </a:solidFill>
-          <a:ln w="19050">
-            <a:solidFill>
-              <a:srgbClr val="DB2777"/>
-            </a:solidFill>
-            <a:prstDash val="solid"/>
-          </a:ln>
-          <a:effectLst>
-            <a:outerShdw sx="100000" sy="100000" kx="0" ky="0" algn="bl" rotWithShape="0" blurRad="101600" dist="38100" dir="8100000">
-              <a:srgbClr val="000000">
-                <a:alpha val="12000"/>
-              </a:srgbClr>
-            </a:outerShdw>
-          </a:effectLst>
+            <a:srgbClr val="E2E8F0"/>
+          </a:solidFill>
+          <a:ln w="12700">
+            <a:solidFill>
+              <a:srgbClr val="E2E8F0"/>
+            </a:solidFill>
+            <a:prstDash val="solid"/>
+          </a:ln>
         </p:spPr>
       </p:sp>
       <p:sp>
@@ -33538,47 +33328,509 @@
         </p:nvSpPr>
         <p:spPr>
           <a:xfrm>
-            <a:off x="6519672" y="2258568"/>
-            <a:ext cx="1828800" cy="292608"/>
-          </a:xfrm>
-          <a:prstGeom prst="rect">
-            <a:avLst/>
-          </a:prstGeom>
-          <a:noFill/>
-          <a:ln/>
-        </p:spPr>
-        <p:txBody>
-          <a:bodyPr wrap="square" lIns="0" tIns="0" rIns="0" bIns="0" rtlCol="0" anchor="ctr"/>
-          <a:lstStyle/>
-          <a:p>
-            <a:pPr algn="ctr" indent="0" marL="0">
-              <a:buNone/>
-            </a:pPr>
-            <a:r>
-              <a:rPr lang="en-US" sz="1300" b="1" dirty="0">
-                <a:solidFill>
-                  <a:srgbClr val="9D174D"/>
+            <a:off x="365760" y="3273552"/>
+            <a:ext cx="1371600" cy="658368"/>
+          </a:xfrm>
+          <a:prstGeom prst="rect">
+            <a:avLst/>
+          </a:prstGeom>
+          <a:noFill/>
+          <a:ln/>
+        </p:spPr>
+        <p:txBody>
+          <a:bodyPr wrap="square" lIns="0" tIns="0" rIns="0" bIns="0" rtlCol="0" anchor="ctr"/>
+          <a:lstStyle/>
+          <a:p>
+            <a:pPr algn="ctr" indent="0" marL="0">
+              <a:buNone/>
+            </a:pPr>
+            <a:r>
+              <a:rPr lang="en-US" sz="1100" b="1" dirty="0">
+                <a:solidFill>
+                  <a:srgbClr val="475569"/>
                 </a:solidFill>
                 <a:latin typeface="Trebuchet MS" pitchFamily="34" charset="0"/>
                 <a:ea typeface="Trebuchet MS" pitchFamily="34" charset="-122"/>
                 <a:cs typeface="Trebuchet MS" pitchFamily="34" charset="-120"/>
               </a:rPr>
-              <a:t>ed</a:t>
-            </a:r>
-            <a:endParaRPr lang="en-US" sz="1300" dirty="0"/>
-          </a:p>
-        </p:txBody>
-      </p:sp>
-      <p:sp>
-        <p:nvSpPr>
-          <p:cNvPr id="24" name="Text 22"/>
-          <p:cNvSpPr/>
-          <p:nvPr/>
-        </p:nvSpPr>
-        <p:spPr>
-          <a:xfrm>
-            <a:off x="6519672" y="2569464"/>
-            <a:ext cx="1828800" cy="201168"/>
+              <a:t>Syllables</a:t>
+            </a:r>
+            <a:endParaRPr lang="en-US" sz="1100" dirty="0"/>
+          </a:p>
+        </p:txBody>
+      </p:sp>
+      <p:sp>
+        <p:nvSpPr>
+          <p:cNvPr id="24" name="Shape 22"/>
+          <p:cNvSpPr/>
+          <p:nvPr/>
+        </p:nvSpPr>
+        <p:spPr>
+          <a:xfrm>
+            <a:off x="1874520" y="3273552"/>
+            <a:ext cx="6903720" cy="658368"/>
+          </a:xfrm>
+          <a:prstGeom prst="rect">
+            <a:avLst>
+              <a:gd name="adj" fmla="val 8333"/>
+            </a:avLst>
+          </a:prstGeom>
+          <a:solidFill>
+            <a:srgbClr val="CCFBF1"/>
+          </a:solidFill>
+          <a:ln w="12700">
+            <a:solidFill>
+              <a:srgbClr val="0D9488"/>
+            </a:solidFill>
+            <a:prstDash val="solid"/>
+          </a:ln>
+        </p:spPr>
+      </p:sp>
+      <p:sp>
+        <p:nvSpPr>
+          <p:cNvPr id="25" name="Shape 23"/>
+          <p:cNvSpPr/>
+          <p:nvPr/>
+        </p:nvSpPr>
+        <p:spPr>
+          <a:xfrm>
+            <a:off x="2313432" y="3364992"/>
+            <a:ext cx="1645920" cy="475488"/>
+          </a:xfrm>
+          <a:prstGeom prst="rect">
+            <a:avLst>
+              <a:gd name="adj" fmla="val 9615"/>
+            </a:avLst>
+          </a:prstGeom>
+          <a:solidFill>
+            <a:srgbClr val="FFFFFF"/>
+          </a:solidFill>
+          <a:ln w="12700">
+            <a:solidFill>
+              <a:srgbClr val="0D9488"/>
+            </a:solidFill>
+            <a:prstDash val="solid"/>
+          </a:ln>
+        </p:spPr>
+      </p:sp>
+      <p:sp>
+        <p:nvSpPr>
+          <p:cNvPr id="26" name="Text 24"/>
+          <p:cNvSpPr/>
+          <p:nvPr/>
+        </p:nvSpPr>
+        <p:spPr>
+          <a:xfrm>
+            <a:off x="2313432" y="3364992"/>
+            <a:ext cx="1645920" cy="475488"/>
+          </a:xfrm>
+          <a:prstGeom prst="rect">
+            <a:avLst/>
+          </a:prstGeom>
+          <a:noFill/>
+          <a:ln/>
+        </p:spPr>
+        <p:txBody>
+          <a:bodyPr wrap="square" lIns="0" tIns="0" rIns="0" bIns="0" rtlCol="0" anchor="ctr"/>
+          <a:lstStyle/>
+          <a:p>
+            <a:pPr algn="ctr" indent="0" marL="0">
+              <a:buNone/>
+            </a:pPr>
+            <a:r>
+              <a:rPr lang="en-US" sz="1400" b="1" dirty="0">
+                <a:solidFill>
+                  <a:srgbClr val="0D9488"/>
+                </a:solidFill>
+                <a:latin typeface="Trebuchet MS" pitchFamily="34" charset="0"/>
+                <a:ea typeface="Trebuchet MS" pitchFamily="34" charset="-122"/>
+                <a:cs typeface="Trebuchet MS" pitchFamily="34" charset="-120"/>
+              </a:rPr>
+              <a:t>col</a:t>
+            </a:r>
+            <a:endParaRPr lang="en-US" sz="1400" dirty="0"/>
+          </a:p>
+        </p:txBody>
+      </p:sp>
+      <p:sp>
+        <p:nvSpPr>
+          <p:cNvPr id="27" name="Text 25"/>
+          <p:cNvSpPr/>
+          <p:nvPr/>
+        </p:nvSpPr>
+        <p:spPr>
+          <a:xfrm>
+            <a:off x="3959352" y="3364992"/>
+            <a:ext cx="411480" cy="475488"/>
+          </a:xfrm>
+          <a:prstGeom prst="rect">
+            <a:avLst/>
+          </a:prstGeom>
+          <a:noFill/>
+          <a:ln/>
+        </p:spPr>
+        <p:txBody>
+          <a:bodyPr wrap="square" lIns="0" tIns="0" rIns="0" bIns="0" rtlCol="0" anchor="ctr"/>
+          <a:lstStyle/>
+          <a:p>
+            <a:pPr algn="ctr" indent="0" marL="0">
+              <a:buNone/>
+            </a:pPr>
+            <a:r>
+              <a:rPr lang="en-US" sz="1600" b="1" dirty="0">
+                <a:solidFill>
+                  <a:srgbClr val="0D9488"/>
+                </a:solidFill>
+                <a:latin typeface="Trebuchet MS" pitchFamily="34" charset="0"/>
+                <a:ea typeface="Trebuchet MS" pitchFamily="34" charset="-122"/>
+                <a:cs typeface="Trebuchet MS" pitchFamily="34" charset="-120"/>
+              </a:rPr>
+              <a:t>·</a:t>
+            </a:r>
+            <a:endParaRPr lang="en-US" sz="1600" dirty="0"/>
+          </a:p>
+        </p:txBody>
+      </p:sp>
+      <p:sp>
+        <p:nvSpPr>
+          <p:cNvPr id="28" name="Shape 26"/>
+          <p:cNvSpPr/>
+          <p:nvPr/>
+        </p:nvSpPr>
+        <p:spPr>
+          <a:xfrm>
+            <a:off x="4370832" y="3364992"/>
+            <a:ext cx="1645920" cy="475488"/>
+          </a:xfrm>
+          <a:prstGeom prst="rect">
+            <a:avLst>
+              <a:gd name="adj" fmla="val 9615"/>
+            </a:avLst>
+          </a:prstGeom>
+          <a:solidFill>
+            <a:srgbClr val="FFFFFF"/>
+          </a:solidFill>
+          <a:ln w="12700">
+            <a:solidFill>
+              <a:srgbClr val="0D9488"/>
+            </a:solidFill>
+            <a:prstDash val="solid"/>
+          </a:ln>
+        </p:spPr>
+      </p:sp>
+      <p:sp>
+        <p:nvSpPr>
+          <p:cNvPr id="29" name="Text 27"/>
+          <p:cNvSpPr/>
+          <p:nvPr/>
+        </p:nvSpPr>
+        <p:spPr>
+          <a:xfrm>
+            <a:off x="4370832" y="3364992"/>
+            <a:ext cx="1645920" cy="475488"/>
+          </a:xfrm>
+          <a:prstGeom prst="rect">
+            <a:avLst/>
+          </a:prstGeom>
+          <a:noFill/>
+          <a:ln/>
+        </p:spPr>
+        <p:txBody>
+          <a:bodyPr wrap="square" lIns="0" tIns="0" rIns="0" bIns="0" rtlCol="0" anchor="ctr"/>
+          <a:lstStyle/>
+          <a:p>
+            <a:pPr algn="ctr" indent="0" marL="0">
+              <a:buNone/>
+            </a:pPr>
+            <a:r>
+              <a:rPr lang="en-US" sz="1400" b="1" dirty="0">
+                <a:solidFill>
+                  <a:srgbClr val="0D9488"/>
+                </a:solidFill>
+                <a:latin typeface="Trebuchet MS" pitchFamily="34" charset="0"/>
+                <a:ea typeface="Trebuchet MS" pitchFamily="34" charset="-122"/>
+                <a:cs typeface="Trebuchet MS" pitchFamily="34" charset="-120"/>
+              </a:rPr>
+              <a:t>our</a:t>
+            </a:r>
+            <a:endParaRPr lang="en-US" sz="1400" dirty="0"/>
+          </a:p>
+        </p:txBody>
+      </p:sp>
+      <p:sp>
+        <p:nvSpPr>
+          <p:cNvPr id="30" name="Text 28"/>
+          <p:cNvSpPr/>
+          <p:nvPr/>
+        </p:nvSpPr>
+        <p:spPr>
+          <a:xfrm>
+            <a:off x="6016752" y="3364992"/>
+            <a:ext cx="411480" cy="475488"/>
+          </a:xfrm>
+          <a:prstGeom prst="rect">
+            <a:avLst/>
+          </a:prstGeom>
+          <a:noFill/>
+          <a:ln/>
+        </p:spPr>
+        <p:txBody>
+          <a:bodyPr wrap="square" lIns="0" tIns="0" rIns="0" bIns="0" rtlCol="0" anchor="ctr"/>
+          <a:lstStyle/>
+          <a:p>
+            <a:pPr algn="ctr" indent="0" marL="0">
+              <a:buNone/>
+            </a:pPr>
+            <a:r>
+              <a:rPr lang="en-US" sz="1600" b="1" dirty="0">
+                <a:solidFill>
+                  <a:srgbClr val="0D9488"/>
+                </a:solidFill>
+                <a:latin typeface="Trebuchet MS" pitchFamily="34" charset="0"/>
+                <a:ea typeface="Trebuchet MS" pitchFamily="34" charset="-122"/>
+                <a:cs typeface="Trebuchet MS" pitchFamily="34" charset="-120"/>
+              </a:rPr>
+              <a:t>·</a:t>
+            </a:r>
+            <a:endParaRPr lang="en-US" sz="1600" dirty="0"/>
+          </a:p>
+        </p:txBody>
+      </p:sp>
+      <p:sp>
+        <p:nvSpPr>
+          <p:cNvPr id="31" name="Shape 29"/>
+          <p:cNvSpPr/>
+          <p:nvPr/>
+        </p:nvSpPr>
+        <p:spPr>
+          <a:xfrm>
+            <a:off x="6428232" y="3364992"/>
+            <a:ext cx="1645920" cy="475488"/>
+          </a:xfrm>
+          <a:prstGeom prst="rect">
+            <a:avLst>
+              <a:gd name="adj" fmla="val 9615"/>
+            </a:avLst>
+          </a:prstGeom>
+          <a:solidFill>
+            <a:srgbClr val="FFFFFF"/>
+          </a:solidFill>
+          <a:ln w="12700">
+            <a:solidFill>
+              <a:srgbClr val="0D9488"/>
+            </a:solidFill>
+            <a:prstDash val="solid"/>
+          </a:ln>
+        </p:spPr>
+      </p:sp>
+      <p:sp>
+        <p:nvSpPr>
+          <p:cNvPr id="32" name="Text 30"/>
+          <p:cNvSpPr/>
+          <p:nvPr/>
+        </p:nvSpPr>
+        <p:spPr>
+          <a:xfrm>
+            <a:off x="6428232" y="3364992"/>
+            <a:ext cx="1645920" cy="475488"/>
+          </a:xfrm>
+          <a:prstGeom prst="rect">
+            <a:avLst/>
+          </a:prstGeom>
+          <a:noFill/>
+          <a:ln/>
+        </p:spPr>
+        <p:txBody>
+          <a:bodyPr wrap="square" lIns="0" tIns="0" rIns="0" bIns="0" rtlCol="0" anchor="ctr"/>
+          <a:lstStyle/>
+          <a:p>
+            <a:pPr algn="ctr" indent="0" marL="0">
+              <a:buNone/>
+            </a:pPr>
+            <a:r>
+              <a:rPr lang="en-US" sz="1400" b="1" dirty="0">
+                <a:solidFill>
+                  <a:srgbClr val="0D9488"/>
+                </a:solidFill>
+                <a:latin typeface="Trebuchet MS" pitchFamily="34" charset="0"/>
+                <a:ea typeface="Trebuchet MS" pitchFamily="34" charset="-122"/>
+                <a:cs typeface="Trebuchet MS" pitchFamily="34" charset="-120"/>
+              </a:rPr>
+              <a:t>less</a:t>
+            </a:r>
+            <a:endParaRPr lang="en-US" sz="1400" dirty="0"/>
+          </a:p>
+        </p:txBody>
+      </p:sp>
+      <p:sp>
+        <p:nvSpPr>
+          <p:cNvPr id="33" name="Shape 31"/>
+          <p:cNvSpPr/>
+          <p:nvPr/>
+        </p:nvSpPr>
+        <p:spPr>
+          <a:xfrm>
+            <a:off x="365760" y="4096512"/>
+            <a:ext cx="1371600" cy="804672"/>
+          </a:xfrm>
+          <a:prstGeom prst="rect">
+            <a:avLst>
+              <a:gd name="adj" fmla="val 6818"/>
+            </a:avLst>
+          </a:prstGeom>
+          <a:solidFill>
+            <a:srgbClr val="E2E8F0"/>
+          </a:solidFill>
+          <a:ln w="12700">
+            <a:solidFill>
+              <a:srgbClr val="E2E8F0"/>
+            </a:solidFill>
+            <a:prstDash val="solid"/>
+          </a:ln>
+        </p:spPr>
+      </p:sp>
+      <p:sp>
+        <p:nvSpPr>
+          <p:cNvPr id="34" name="Text 32"/>
+          <p:cNvSpPr/>
+          <p:nvPr/>
+        </p:nvSpPr>
+        <p:spPr>
+          <a:xfrm>
+            <a:off x="365760" y="4096512"/>
+            <a:ext cx="1371600" cy="804672"/>
+          </a:xfrm>
+          <a:prstGeom prst="rect">
+            <a:avLst/>
+          </a:prstGeom>
+          <a:noFill/>
+          <a:ln/>
+        </p:spPr>
+        <p:txBody>
+          <a:bodyPr wrap="square" lIns="0" tIns="0" rIns="0" bIns="0" rtlCol="0" anchor="ctr"/>
+          <a:lstStyle/>
+          <a:p>
+            <a:pPr algn="ctr" indent="0" marL="0">
+              <a:buNone/>
+            </a:pPr>
+            <a:r>
+              <a:rPr lang="en-US" sz="1100" b="1" dirty="0">
+                <a:solidFill>
+                  <a:srgbClr val="475569"/>
+                </a:solidFill>
+                <a:latin typeface="Trebuchet MS" pitchFamily="34" charset="0"/>
+                <a:ea typeface="Trebuchet MS" pitchFamily="34" charset="-122"/>
+                <a:cs typeface="Trebuchet MS" pitchFamily="34" charset="-120"/>
+              </a:rPr>
+              <a:t>Phonemes</a:t>
+            </a:r>
+            <a:endParaRPr lang="en-US" sz="1100" dirty="0"/>
+          </a:p>
+        </p:txBody>
+      </p:sp>
+      <p:sp>
+        <p:nvSpPr>
+          <p:cNvPr id="35" name="Shape 33"/>
+          <p:cNvSpPr/>
+          <p:nvPr/>
+        </p:nvSpPr>
+        <p:spPr>
+          <a:xfrm>
+            <a:off x="1874520" y="4096512"/>
+            <a:ext cx="6903720" cy="804672"/>
+          </a:xfrm>
+          <a:prstGeom prst="rect">
+            <a:avLst>
+              <a:gd name="adj" fmla="val 6818"/>
+            </a:avLst>
+          </a:prstGeom>
+          <a:solidFill>
+            <a:srgbClr val="FCE7F3"/>
+          </a:solidFill>
+          <a:ln w="12700">
+            <a:solidFill>
+              <a:srgbClr val="DB2777"/>
+            </a:solidFill>
+            <a:prstDash val="solid"/>
+          </a:ln>
+        </p:spPr>
+      </p:sp>
+      <p:sp>
+        <p:nvSpPr>
+          <p:cNvPr id="36" name="Shape 34"/>
+          <p:cNvSpPr/>
+          <p:nvPr/>
+        </p:nvSpPr>
+        <p:spPr>
+          <a:xfrm>
+            <a:off x="2023872" y="4169664"/>
+            <a:ext cx="685800" cy="384048"/>
+          </a:xfrm>
+          <a:prstGeom prst="rect">
+            <a:avLst>
+              <a:gd name="adj" fmla="val 9524"/>
+            </a:avLst>
+          </a:prstGeom>
+          <a:solidFill>
+            <a:srgbClr val="FFFFFF"/>
+          </a:solidFill>
+          <a:ln w="12700">
+            <a:solidFill>
+              <a:srgbClr val="DB2777"/>
+            </a:solidFill>
+            <a:prstDash val="solid"/>
+          </a:ln>
+        </p:spPr>
+      </p:sp>
+      <p:sp>
+        <p:nvSpPr>
+          <p:cNvPr id="37" name="Text 35"/>
+          <p:cNvSpPr/>
+          <p:nvPr/>
+        </p:nvSpPr>
+        <p:spPr>
+          <a:xfrm>
+            <a:off x="2023872" y="4169664"/>
+            <a:ext cx="685800" cy="384048"/>
+          </a:xfrm>
+          <a:prstGeom prst="rect">
+            <a:avLst/>
+          </a:prstGeom>
+          <a:noFill/>
+          <a:ln/>
+        </p:spPr>
+        <p:txBody>
+          <a:bodyPr wrap="square" lIns="0" tIns="0" rIns="0" bIns="0" rtlCol="0" anchor="ctr"/>
+          <a:lstStyle/>
+          <a:p>
+            <a:pPr algn="ctr" indent="0" marL="0">
+              <a:buNone/>
+            </a:pPr>
+            <a:r>
+              <a:rPr lang="en-US" sz="900" b="1" dirty="0">
+                <a:solidFill>
+                  <a:srgbClr val="9D174D"/>
+                </a:solidFill>
+                <a:latin typeface="Trebuchet MS" pitchFamily="34" charset="0"/>
+                <a:ea typeface="Trebuchet MS" pitchFamily="34" charset="-122"/>
+                <a:cs typeface="Trebuchet MS" pitchFamily="34" charset="-120"/>
+              </a:rPr>
+              <a:t>c</a:t>
+            </a:r>
+            <a:endParaRPr lang="en-US" sz="900" dirty="0"/>
+          </a:p>
+        </p:txBody>
+      </p:sp>
+      <p:sp>
+        <p:nvSpPr>
+          <p:cNvPr id="38" name="Text 36"/>
+          <p:cNvSpPr/>
+          <p:nvPr/>
+        </p:nvSpPr>
+        <p:spPr>
+          <a:xfrm>
+            <a:off x="2023872" y="4572000"/>
+            <a:ext cx="685800" cy="219456"/>
           </a:xfrm>
           <a:prstGeom prst="rect">
             <a:avLst/>
@@ -33594,232 +33846,232 @@
               <a:buNone/>
             </a:pPr>
             <a:r>
-              <a:rPr lang="en-US" sz="850" dirty="0">
-                <a:solidFill>
-                  <a:srgbClr val="475569"/>
+              <a:rPr lang="en-US" sz="750" i="1" dirty="0">
+                <a:solidFill>
+                  <a:srgbClr val="94A3B8"/>
                 </a:solidFill>
                 <a:latin typeface="Calibri" pitchFamily="34" charset="0"/>
                 <a:ea typeface="Calibri" pitchFamily="34" charset="-122"/>
                 <a:cs typeface="Calibri" pitchFamily="34" charset="-120"/>
               </a:rPr>
-              <a:t>having or done</a:t>
-            </a:r>
-            <a:endParaRPr lang="en-US" sz="850" dirty="0"/>
-          </a:p>
-        </p:txBody>
-      </p:sp>
-      <p:sp>
-        <p:nvSpPr>
-          <p:cNvPr id="25" name="Shape 23"/>
-          <p:cNvSpPr/>
-          <p:nvPr/>
-        </p:nvSpPr>
-        <p:spPr>
-          <a:xfrm>
-            <a:off x="365760" y="3273552"/>
-            <a:ext cx="1371600" cy="658368"/>
+              <a:t>/k/</a:t>
+            </a:r>
+            <a:endParaRPr lang="en-US" sz="750" dirty="0"/>
+          </a:p>
+        </p:txBody>
+      </p:sp>
+      <p:sp>
+        <p:nvSpPr>
+          <p:cNvPr id="39" name="Shape 37"/>
+          <p:cNvSpPr/>
+          <p:nvPr/>
+        </p:nvSpPr>
+        <p:spPr>
+          <a:xfrm>
+            <a:off x="2831592" y="4169664"/>
+            <a:ext cx="685800" cy="384048"/>
           </a:xfrm>
           <a:prstGeom prst="rect">
             <a:avLst>
-              <a:gd name="adj" fmla="val 8333"/>
+              <a:gd name="adj" fmla="val 9524"/>
             </a:avLst>
           </a:prstGeom>
           <a:solidFill>
-            <a:srgbClr val="E2E8F0"/>
-          </a:solidFill>
-          <a:ln w="12700">
-            <a:solidFill>
-              <a:srgbClr val="E2E8F0"/>
-            </a:solidFill>
-            <a:prstDash val="solid"/>
-          </a:ln>
-        </p:spPr>
-      </p:sp>
-      <p:sp>
-        <p:nvSpPr>
-          <p:cNvPr id="26" name="Text 24"/>
-          <p:cNvSpPr/>
-          <p:nvPr/>
-        </p:nvSpPr>
-        <p:spPr>
-          <a:xfrm>
-            <a:off x="365760" y="3273552"/>
-            <a:ext cx="1371600" cy="658368"/>
-          </a:xfrm>
-          <a:prstGeom prst="rect">
-            <a:avLst/>
-          </a:prstGeom>
-          <a:noFill/>
-          <a:ln/>
-        </p:spPr>
-        <p:txBody>
-          <a:bodyPr wrap="square" lIns="0" tIns="0" rIns="0" bIns="0" rtlCol="0" anchor="ctr"/>
-          <a:lstStyle/>
-          <a:p>
-            <a:pPr algn="ctr" indent="0" marL="0">
-              <a:buNone/>
-            </a:pPr>
-            <a:r>
-              <a:rPr lang="en-US" sz="1100" b="1" dirty="0">
-                <a:solidFill>
-                  <a:srgbClr val="475569"/>
+            <a:srgbClr val="FFFFFF"/>
+          </a:solidFill>
+          <a:ln w="12700">
+            <a:solidFill>
+              <a:srgbClr val="DB2777"/>
+            </a:solidFill>
+            <a:prstDash val="solid"/>
+          </a:ln>
+        </p:spPr>
+      </p:sp>
+      <p:sp>
+        <p:nvSpPr>
+          <p:cNvPr id="40" name="Text 38"/>
+          <p:cNvSpPr/>
+          <p:nvPr/>
+        </p:nvSpPr>
+        <p:spPr>
+          <a:xfrm>
+            <a:off x="2831592" y="4169664"/>
+            <a:ext cx="685800" cy="384048"/>
+          </a:xfrm>
+          <a:prstGeom prst="rect">
+            <a:avLst/>
+          </a:prstGeom>
+          <a:noFill/>
+          <a:ln/>
+        </p:spPr>
+        <p:txBody>
+          <a:bodyPr wrap="square" lIns="0" tIns="0" rIns="0" bIns="0" rtlCol="0" anchor="ctr"/>
+          <a:lstStyle/>
+          <a:p>
+            <a:pPr algn="ctr" indent="0" marL="0">
+              <a:buNone/>
+            </a:pPr>
+            <a:r>
+              <a:rPr lang="en-US" sz="900" b="1" dirty="0">
+                <a:solidFill>
+                  <a:srgbClr val="9D174D"/>
                 </a:solidFill>
                 <a:latin typeface="Trebuchet MS" pitchFamily="34" charset="0"/>
                 <a:ea typeface="Trebuchet MS" pitchFamily="34" charset="-122"/>
                 <a:cs typeface="Trebuchet MS" pitchFamily="34" charset="-120"/>
               </a:rPr>
-              <a:t>Syllables</a:t>
-            </a:r>
-            <a:endParaRPr lang="en-US" sz="1100" dirty="0"/>
-          </a:p>
-        </p:txBody>
-      </p:sp>
-      <p:sp>
-        <p:nvSpPr>
-          <p:cNvPr id="27" name="Shape 25"/>
-          <p:cNvSpPr/>
-          <p:nvPr/>
-        </p:nvSpPr>
-        <p:spPr>
-          <a:xfrm>
-            <a:off x="1874520" y="3273552"/>
-            <a:ext cx="6903720" cy="658368"/>
+              <a:t>o</a:t>
+            </a:r>
+            <a:endParaRPr lang="en-US" sz="900" dirty="0"/>
+          </a:p>
+        </p:txBody>
+      </p:sp>
+      <p:sp>
+        <p:nvSpPr>
+          <p:cNvPr id="41" name="Shape 39"/>
+          <p:cNvSpPr/>
+          <p:nvPr/>
+        </p:nvSpPr>
+        <p:spPr>
+          <a:xfrm>
+            <a:off x="3639312" y="4169664"/>
+            <a:ext cx="685800" cy="384048"/>
           </a:xfrm>
           <a:prstGeom prst="rect">
             <a:avLst>
-              <a:gd name="adj" fmla="val 8333"/>
+              <a:gd name="adj" fmla="val 9524"/>
             </a:avLst>
           </a:prstGeom>
           <a:solidFill>
-            <a:srgbClr val="CCFBF1"/>
-          </a:solidFill>
-          <a:ln w="12700">
-            <a:solidFill>
-              <a:srgbClr val="0D9488"/>
-            </a:solidFill>
-            <a:prstDash val="solid"/>
-          </a:ln>
-        </p:spPr>
-      </p:sp>
-      <p:sp>
-        <p:nvSpPr>
-          <p:cNvPr id="28" name="Shape 26"/>
-          <p:cNvSpPr/>
-          <p:nvPr/>
-        </p:nvSpPr>
-        <p:spPr>
-          <a:xfrm>
-            <a:off x="1975104" y="3364992"/>
-            <a:ext cx="1554480" cy="475488"/>
-          </a:xfrm>
-          <a:prstGeom prst="rect">
-            <a:avLst>
-              <a:gd name="adj" fmla="val 9615"/>
-            </a:avLst>
-          </a:prstGeom>
-          <a:solidFill>
             <a:srgbClr val="FFFFFF"/>
           </a:solidFill>
           <a:ln w="12700">
             <a:solidFill>
-              <a:srgbClr val="0D9488"/>
-            </a:solidFill>
-            <a:prstDash val="solid"/>
-          </a:ln>
-        </p:spPr>
-      </p:sp>
-      <p:sp>
-        <p:nvSpPr>
-          <p:cNvPr id="29" name="Text 27"/>
-          <p:cNvSpPr/>
-          <p:nvPr/>
-        </p:nvSpPr>
-        <p:spPr>
-          <a:xfrm>
-            <a:off x="1975104" y="3364992"/>
-            <a:ext cx="1554480" cy="475488"/>
-          </a:xfrm>
-          <a:prstGeom prst="rect">
-            <a:avLst/>
-          </a:prstGeom>
-          <a:noFill/>
-          <a:ln/>
-        </p:spPr>
-        <p:txBody>
-          <a:bodyPr wrap="square" lIns="0" tIns="0" rIns="0" bIns="0" rtlCol="0" anchor="ctr"/>
-          <a:lstStyle/>
-          <a:p>
-            <a:pPr algn="ctr" indent="0" marL="0">
-              <a:buNone/>
-            </a:pPr>
-            <a:r>
-              <a:rPr lang="en-US" sz="1400" b="1" dirty="0">
-                <a:solidFill>
-                  <a:srgbClr val="0D9488"/>
+              <a:srgbClr val="DB2777"/>
+            </a:solidFill>
+            <a:prstDash val="solid"/>
+          </a:ln>
+        </p:spPr>
+      </p:sp>
+      <p:sp>
+        <p:nvSpPr>
+          <p:cNvPr id="42" name="Text 40"/>
+          <p:cNvSpPr/>
+          <p:nvPr/>
+        </p:nvSpPr>
+        <p:spPr>
+          <a:xfrm>
+            <a:off x="3639312" y="4169664"/>
+            <a:ext cx="685800" cy="384048"/>
+          </a:xfrm>
+          <a:prstGeom prst="rect">
+            <a:avLst/>
+          </a:prstGeom>
+          <a:noFill/>
+          <a:ln/>
+        </p:spPr>
+        <p:txBody>
+          <a:bodyPr wrap="square" lIns="0" tIns="0" rIns="0" bIns="0" rtlCol="0" anchor="ctr"/>
+          <a:lstStyle/>
+          <a:p>
+            <a:pPr algn="ctr" indent="0" marL="0">
+              <a:buNone/>
+            </a:pPr>
+            <a:r>
+              <a:rPr lang="en-US" sz="900" b="1" dirty="0">
+                <a:solidFill>
+                  <a:srgbClr val="9D174D"/>
                 </a:solidFill>
                 <a:latin typeface="Trebuchet MS" pitchFamily="34" charset="0"/>
                 <a:ea typeface="Trebuchet MS" pitchFamily="34" charset="-122"/>
                 <a:cs typeface="Trebuchet MS" pitchFamily="34" charset="-120"/>
               </a:rPr>
-              <a:t>mul</a:t>
-            </a:r>
-            <a:endParaRPr lang="en-US" sz="1400" dirty="0"/>
-          </a:p>
-        </p:txBody>
-      </p:sp>
-      <p:sp>
-        <p:nvSpPr>
-          <p:cNvPr id="30" name="Text 28"/>
-          <p:cNvSpPr/>
-          <p:nvPr/>
-        </p:nvSpPr>
-        <p:spPr>
-          <a:xfrm>
-            <a:off x="3529584" y="3364992"/>
-            <a:ext cx="73152" cy="475488"/>
-          </a:xfrm>
-          <a:prstGeom prst="rect">
-            <a:avLst/>
-          </a:prstGeom>
-          <a:noFill/>
-          <a:ln/>
-        </p:spPr>
-        <p:txBody>
-          <a:bodyPr wrap="square" lIns="0" tIns="0" rIns="0" bIns="0" rtlCol="0" anchor="ctr"/>
-          <a:lstStyle/>
-          <a:p>
-            <a:pPr algn="ctr" indent="0" marL="0">
-              <a:buNone/>
-            </a:pPr>
-            <a:r>
-              <a:rPr lang="en-US" sz="1600" b="1" dirty="0">
-                <a:solidFill>
-                  <a:srgbClr val="0D9488"/>
+              <a:t>l</a:t>
+            </a:r>
+            <a:endParaRPr lang="en-US" sz="900" dirty="0"/>
+          </a:p>
+        </p:txBody>
+      </p:sp>
+      <p:sp>
+        <p:nvSpPr>
+          <p:cNvPr id="43" name="Shape 41"/>
+          <p:cNvSpPr/>
+          <p:nvPr/>
+        </p:nvSpPr>
+        <p:spPr>
+          <a:xfrm>
+            <a:off x="4447032" y="4169664"/>
+            <a:ext cx="685800" cy="384048"/>
+          </a:xfrm>
+          <a:prstGeom prst="rect">
+            <a:avLst>
+              <a:gd name="adj" fmla="val 9524"/>
+            </a:avLst>
+          </a:prstGeom>
+          <a:solidFill>
+            <a:srgbClr val="FFFFFF"/>
+          </a:solidFill>
+          <a:ln w="12700">
+            <a:solidFill>
+              <a:srgbClr val="DB2777"/>
+            </a:solidFill>
+            <a:prstDash val="solid"/>
+          </a:ln>
+        </p:spPr>
+      </p:sp>
+      <p:sp>
+        <p:nvSpPr>
+          <p:cNvPr id="44" name="Text 42"/>
+          <p:cNvSpPr/>
+          <p:nvPr/>
+        </p:nvSpPr>
+        <p:spPr>
+          <a:xfrm>
+            <a:off x="4447032" y="4169664"/>
+            <a:ext cx="685800" cy="384048"/>
+          </a:xfrm>
+          <a:prstGeom prst="rect">
+            <a:avLst/>
+          </a:prstGeom>
+          <a:noFill/>
+          <a:ln/>
+        </p:spPr>
+        <p:txBody>
+          <a:bodyPr wrap="square" lIns="0" tIns="0" rIns="0" bIns="0" rtlCol="0" anchor="ctr"/>
+          <a:lstStyle/>
+          <a:p>
+            <a:pPr algn="ctr" indent="0" marL="0">
+              <a:buNone/>
+            </a:pPr>
+            <a:r>
+              <a:rPr lang="en-US" sz="900" b="1" dirty="0">
+                <a:solidFill>
+                  <a:srgbClr val="9D174D"/>
                 </a:solidFill>
                 <a:latin typeface="Trebuchet MS" pitchFamily="34" charset="0"/>
                 <a:ea typeface="Trebuchet MS" pitchFamily="34" charset="-122"/>
                 <a:cs typeface="Trebuchet MS" pitchFamily="34" charset="-120"/>
               </a:rPr>
-              <a:t>·</a:t>
-            </a:r>
-            <a:endParaRPr lang="en-US" sz="1600" dirty="0"/>
-          </a:p>
-        </p:txBody>
-      </p:sp>
-      <p:sp>
-        <p:nvSpPr>
-          <p:cNvPr id="31" name="Shape 29"/>
-          <p:cNvSpPr/>
-          <p:nvPr/>
-        </p:nvSpPr>
-        <p:spPr>
-          <a:xfrm>
-            <a:off x="3602736" y="3364992"/>
-            <a:ext cx="1554480" cy="475488"/>
+              <a:t>ou</a:t>
+            </a:r>
+            <a:endParaRPr lang="en-US" sz="900" dirty="0"/>
+          </a:p>
+        </p:txBody>
+      </p:sp>
+      <p:sp>
+        <p:nvSpPr>
+          <p:cNvPr id="45" name="Shape 43"/>
+          <p:cNvSpPr/>
+          <p:nvPr/>
+        </p:nvSpPr>
+        <p:spPr>
+          <a:xfrm>
+            <a:off x="5254752" y="4169664"/>
+            <a:ext cx="685800" cy="384048"/>
           </a:xfrm>
           <a:prstGeom prst="rect">
             <a:avLst>
-              <a:gd name="adj" fmla="val 9615"/>
+              <a:gd name="adj" fmla="val 9524"/>
             </a:avLst>
           </a:prstGeom>
           <a:solidFill>
@@ -33827,104 +34079,131 @@
           </a:solidFill>
           <a:ln w="12700">
             <a:solidFill>
-              <a:srgbClr val="0D9488"/>
-            </a:solidFill>
-            <a:prstDash val="solid"/>
-          </a:ln>
-        </p:spPr>
-      </p:sp>
-      <p:sp>
-        <p:nvSpPr>
-          <p:cNvPr id="32" name="Text 30"/>
-          <p:cNvSpPr/>
-          <p:nvPr/>
-        </p:nvSpPr>
-        <p:spPr>
-          <a:xfrm>
-            <a:off x="3602736" y="3364992"/>
-            <a:ext cx="1554480" cy="475488"/>
-          </a:xfrm>
-          <a:prstGeom prst="rect">
-            <a:avLst/>
-          </a:prstGeom>
-          <a:noFill/>
-          <a:ln/>
-        </p:spPr>
-        <p:txBody>
-          <a:bodyPr wrap="square" lIns="0" tIns="0" rIns="0" bIns="0" rtlCol="0" anchor="ctr"/>
-          <a:lstStyle/>
-          <a:p>
-            <a:pPr algn="ctr" indent="0" marL="0">
-              <a:buNone/>
-            </a:pPr>
-            <a:r>
-              <a:rPr lang="en-US" sz="1400" b="1" dirty="0">
-                <a:solidFill>
-                  <a:srgbClr val="0D9488"/>
+              <a:srgbClr val="DB2777"/>
+            </a:solidFill>
+            <a:prstDash val="solid"/>
+          </a:ln>
+        </p:spPr>
+      </p:sp>
+      <p:sp>
+        <p:nvSpPr>
+          <p:cNvPr id="46" name="Text 44"/>
+          <p:cNvSpPr/>
+          <p:nvPr/>
+        </p:nvSpPr>
+        <p:spPr>
+          <a:xfrm>
+            <a:off x="5254752" y="4169664"/>
+            <a:ext cx="685800" cy="384048"/>
+          </a:xfrm>
+          <a:prstGeom prst="rect">
+            <a:avLst/>
+          </a:prstGeom>
+          <a:noFill/>
+          <a:ln/>
+        </p:spPr>
+        <p:txBody>
+          <a:bodyPr wrap="square" lIns="0" tIns="0" rIns="0" bIns="0" rtlCol="0" anchor="ctr"/>
+          <a:lstStyle/>
+          <a:p>
+            <a:pPr algn="ctr" indent="0" marL="0">
+              <a:buNone/>
+            </a:pPr>
+            <a:r>
+              <a:rPr lang="en-US" sz="900" b="1" dirty="0">
+                <a:solidFill>
+                  <a:srgbClr val="9D174D"/>
                 </a:solidFill>
                 <a:latin typeface="Trebuchet MS" pitchFamily="34" charset="0"/>
                 <a:ea typeface="Trebuchet MS" pitchFamily="34" charset="-122"/>
                 <a:cs typeface="Trebuchet MS" pitchFamily="34" charset="-120"/>
               </a:rPr>
-              <a:t>ti</a:t>
-            </a:r>
-            <a:endParaRPr lang="en-US" sz="1400" dirty="0"/>
-          </a:p>
-        </p:txBody>
-      </p:sp>
-      <p:sp>
-        <p:nvSpPr>
-          <p:cNvPr id="33" name="Text 31"/>
-          <p:cNvSpPr/>
-          <p:nvPr/>
-        </p:nvSpPr>
-        <p:spPr>
-          <a:xfrm>
-            <a:off x="5157216" y="3364992"/>
-            <a:ext cx="73152" cy="475488"/>
-          </a:xfrm>
-          <a:prstGeom prst="rect">
-            <a:avLst/>
-          </a:prstGeom>
-          <a:noFill/>
-          <a:ln/>
-        </p:spPr>
-        <p:txBody>
-          <a:bodyPr wrap="square" lIns="0" tIns="0" rIns="0" bIns="0" rtlCol="0" anchor="ctr"/>
-          <a:lstStyle/>
-          <a:p>
-            <a:pPr algn="ctr" indent="0" marL="0">
-              <a:buNone/>
-            </a:pPr>
-            <a:r>
-              <a:rPr lang="en-US" sz="1600" b="1" dirty="0">
-                <a:solidFill>
-                  <a:srgbClr val="0D9488"/>
+              <a:t>r</a:t>
+            </a:r>
+            <a:endParaRPr lang="en-US" sz="900" dirty="0"/>
+          </a:p>
+        </p:txBody>
+      </p:sp>
+      <p:sp>
+        <p:nvSpPr>
+          <p:cNvPr id="47" name="Shape 45"/>
+          <p:cNvSpPr/>
+          <p:nvPr/>
+        </p:nvSpPr>
+        <p:spPr>
+          <a:xfrm>
+            <a:off x="6062472" y="4169664"/>
+            <a:ext cx="685800" cy="384048"/>
+          </a:xfrm>
+          <a:prstGeom prst="rect">
+            <a:avLst>
+              <a:gd name="adj" fmla="val 9524"/>
+            </a:avLst>
+          </a:prstGeom>
+          <a:solidFill>
+            <a:srgbClr val="FFFFFF"/>
+          </a:solidFill>
+          <a:ln w="12700">
+            <a:solidFill>
+              <a:srgbClr val="DB2777"/>
+            </a:solidFill>
+            <a:prstDash val="solid"/>
+          </a:ln>
+        </p:spPr>
+      </p:sp>
+      <p:sp>
+        <p:nvSpPr>
+          <p:cNvPr id="48" name="Text 46"/>
+          <p:cNvSpPr/>
+          <p:nvPr/>
+        </p:nvSpPr>
+        <p:spPr>
+          <a:xfrm>
+            <a:off x="6062472" y="4169664"/>
+            <a:ext cx="685800" cy="384048"/>
+          </a:xfrm>
+          <a:prstGeom prst="rect">
+            <a:avLst/>
+          </a:prstGeom>
+          <a:noFill/>
+          <a:ln/>
+        </p:spPr>
+        <p:txBody>
+          <a:bodyPr wrap="square" lIns="0" tIns="0" rIns="0" bIns="0" rtlCol="0" anchor="ctr"/>
+          <a:lstStyle/>
+          <a:p>
+            <a:pPr algn="ctr" indent="0" marL="0">
+              <a:buNone/>
+            </a:pPr>
+            <a:r>
+              <a:rPr lang="en-US" sz="900" b="1" dirty="0">
+                <a:solidFill>
+                  <a:srgbClr val="9D174D"/>
                 </a:solidFill>
                 <a:latin typeface="Trebuchet MS" pitchFamily="34" charset="0"/>
                 <a:ea typeface="Trebuchet MS" pitchFamily="34" charset="-122"/>
                 <a:cs typeface="Trebuchet MS" pitchFamily="34" charset="-120"/>
               </a:rPr>
-              <a:t>·</a:t>
-            </a:r>
-            <a:endParaRPr lang="en-US" sz="1600" dirty="0"/>
-          </a:p>
-        </p:txBody>
-      </p:sp>
-      <p:sp>
-        <p:nvSpPr>
-          <p:cNvPr id="34" name="Shape 32"/>
-          <p:cNvSpPr/>
-          <p:nvPr/>
-        </p:nvSpPr>
-        <p:spPr>
-          <a:xfrm>
-            <a:off x="5230368" y="3364992"/>
-            <a:ext cx="1554480" cy="475488"/>
+              <a:t>l</a:t>
+            </a:r>
+            <a:endParaRPr lang="en-US" sz="900" dirty="0"/>
+          </a:p>
+        </p:txBody>
+      </p:sp>
+      <p:sp>
+        <p:nvSpPr>
+          <p:cNvPr id="49" name="Shape 47"/>
+          <p:cNvSpPr/>
+          <p:nvPr/>
+        </p:nvSpPr>
+        <p:spPr>
+          <a:xfrm>
+            <a:off x="6870192" y="4169664"/>
+            <a:ext cx="685800" cy="384048"/>
           </a:xfrm>
           <a:prstGeom prst="rect">
             <a:avLst>
-              <a:gd name="adj" fmla="val 9615"/>
+              <a:gd name="adj" fmla="val 9524"/>
             </a:avLst>
           </a:prstGeom>
           <a:solidFill>
@@ -33932,1075 +34211,112 @@
           </a:solidFill>
           <a:ln w="12700">
             <a:solidFill>
-              <a:srgbClr val="0D9488"/>
-            </a:solidFill>
-            <a:prstDash val="solid"/>
-          </a:ln>
-        </p:spPr>
-      </p:sp>
-      <p:sp>
-        <p:nvSpPr>
-          <p:cNvPr id="35" name="Text 33"/>
-          <p:cNvSpPr/>
-          <p:nvPr/>
-        </p:nvSpPr>
-        <p:spPr>
-          <a:xfrm>
-            <a:off x="5230368" y="3364992"/>
-            <a:ext cx="1554480" cy="475488"/>
-          </a:xfrm>
-          <a:prstGeom prst="rect">
-            <a:avLst/>
-          </a:prstGeom>
-          <a:noFill/>
-          <a:ln/>
-        </p:spPr>
-        <p:txBody>
-          <a:bodyPr wrap="square" lIns="0" tIns="0" rIns="0" bIns="0" rtlCol="0" anchor="ctr"/>
-          <a:lstStyle/>
-          <a:p>
-            <a:pPr algn="ctr" indent="0" marL="0">
-              <a:buNone/>
-            </a:pPr>
-            <a:r>
-              <a:rPr lang="en-US" sz="1400" b="1" dirty="0">
-                <a:solidFill>
-                  <a:srgbClr val="0D9488"/>
+              <a:srgbClr val="DB2777"/>
+            </a:solidFill>
+            <a:prstDash val="solid"/>
+          </a:ln>
+        </p:spPr>
+      </p:sp>
+      <p:sp>
+        <p:nvSpPr>
+          <p:cNvPr id="50" name="Text 48"/>
+          <p:cNvSpPr/>
+          <p:nvPr/>
+        </p:nvSpPr>
+        <p:spPr>
+          <a:xfrm>
+            <a:off x="6870192" y="4169664"/>
+            <a:ext cx="685800" cy="384048"/>
+          </a:xfrm>
+          <a:prstGeom prst="rect">
+            <a:avLst/>
+          </a:prstGeom>
+          <a:noFill/>
+          <a:ln/>
+        </p:spPr>
+        <p:txBody>
+          <a:bodyPr wrap="square" lIns="0" tIns="0" rIns="0" bIns="0" rtlCol="0" anchor="ctr"/>
+          <a:lstStyle/>
+          <a:p>
+            <a:pPr algn="ctr" indent="0" marL="0">
+              <a:buNone/>
+            </a:pPr>
+            <a:r>
+              <a:rPr lang="en-US" sz="900" b="1" dirty="0">
+                <a:solidFill>
+                  <a:srgbClr val="9D174D"/>
                 </a:solidFill>
                 <a:latin typeface="Trebuchet MS" pitchFamily="34" charset="0"/>
                 <a:ea typeface="Trebuchet MS" pitchFamily="34" charset="-122"/>
                 <a:cs typeface="Trebuchet MS" pitchFamily="34" charset="-120"/>
               </a:rPr>
-              <a:t>col</a:t>
-            </a:r>
-            <a:endParaRPr lang="en-US" sz="1400" dirty="0"/>
-          </a:p>
-        </p:txBody>
-      </p:sp>
-      <p:sp>
-        <p:nvSpPr>
-          <p:cNvPr id="36" name="Text 34"/>
-          <p:cNvSpPr/>
-          <p:nvPr/>
-        </p:nvSpPr>
-        <p:spPr>
-          <a:xfrm>
-            <a:off x="6784848" y="3364992"/>
-            <a:ext cx="73152" cy="475488"/>
-          </a:xfrm>
-          <a:prstGeom prst="rect">
-            <a:avLst/>
-          </a:prstGeom>
-          <a:noFill/>
-          <a:ln/>
-        </p:spPr>
-        <p:txBody>
-          <a:bodyPr wrap="square" lIns="0" tIns="0" rIns="0" bIns="0" rtlCol="0" anchor="ctr"/>
-          <a:lstStyle/>
-          <a:p>
-            <a:pPr algn="ctr" indent="0" marL="0">
-              <a:buNone/>
-            </a:pPr>
-            <a:r>
-              <a:rPr lang="en-US" sz="1600" b="1" dirty="0">
-                <a:solidFill>
-                  <a:srgbClr val="0D9488"/>
+              <a:t>e</a:t>
+            </a:r>
+            <a:endParaRPr lang="en-US" sz="900" dirty="0"/>
+          </a:p>
+        </p:txBody>
+      </p:sp>
+      <p:sp>
+        <p:nvSpPr>
+          <p:cNvPr id="51" name="Shape 49"/>
+          <p:cNvSpPr/>
+          <p:nvPr/>
+        </p:nvSpPr>
+        <p:spPr>
+          <a:xfrm>
+            <a:off x="7677912" y="4169664"/>
+            <a:ext cx="685800" cy="384048"/>
+          </a:xfrm>
+          <a:prstGeom prst="rect">
+            <a:avLst>
+              <a:gd name="adj" fmla="val 9524"/>
+            </a:avLst>
+          </a:prstGeom>
+          <a:solidFill>
+            <a:srgbClr val="FFFFFF"/>
+          </a:solidFill>
+          <a:ln w="12700">
+            <a:solidFill>
+              <a:srgbClr val="DB2777"/>
+            </a:solidFill>
+            <a:prstDash val="solid"/>
+          </a:ln>
+        </p:spPr>
+      </p:sp>
+      <p:sp>
+        <p:nvSpPr>
+          <p:cNvPr id="52" name="Text 50"/>
+          <p:cNvSpPr/>
+          <p:nvPr/>
+        </p:nvSpPr>
+        <p:spPr>
+          <a:xfrm>
+            <a:off x="7677912" y="4169664"/>
+            <a:ext cx="685800" cy="384048"/>
+          </a:xfrm>
+          <a:prstGeom prst="rect">
+            <a:avLst/>
+          </a:prstGeom>
+          <a:noFill/>
+          <a:ln/>
+        </p:spPr>
+        <p:txBody>
+          <a:bodyPr wrap="square" lIns="0" tIns="0" rIns="0" bIns="0" rtlCol="0" anchor="ctr"/>
+          <a:lstStyle/>
+          <a:p>
+            <a:pPr algn="ctr" indent="0" marL="0">
+              <a:buNone/>
+            </a:pPr>
+            <a:r>
+              <a:rPr lang="en-US" sz="900" b="1" dirty="0">
+                <a:solidFill>
+                  <a:srgbClr val="9D174D"/>
                 </a:solidFill>
                 <a:latin typeface="Trebuchet MS" pitchFamily="34" charset="0"/>
                 <a:ea typeface="Trebuchet MS" pitchFamily="34" charset="-122"/>
                 <a:cs typeface="Trebuchet MS" pitchFamily="34" charset="-120"/>
               </a:rPr>
-              <a:t>·</a:t>
-            </a:r>
-            <a:endParaRPr lang="en-US" sz="1600" dirty="0"/>
-          </a:p>
-        </p:txBody>
-      </p:sp>
-      <p:sp>
-        <p:nvSpPr>
-          <p:cNvPr id="37" name="Shape 35"/>
-          <p:cNvSpPr/>
-          <p:nvPr/>
-        </p:nvSpPr>
-        <p:spPr>
-          <a:xfrm>
-            <a:off x="6858000" y="3364992"/>
-            <a:ext cx="1554480" cy="475488"/>
-          </a:xfrm>
-          <a:prstGeom prst="rect">
-            <a:avLst>
-              <a:gd name="adj" fmla="val 9615"/>
-            </a:avLst>
-          </a:prstGeom>
-          <a:solidFill>
-            <a:srgbClr val="FFFFFF"/>
-          </a:solidFill>
-          <a:ln w="12700">
-            <a:solidFill>
-              <a:srgbClr val="0D9488"/>
-            </a:solidFill>
-            <a:prstDash val="solid"/>
-          </a:ln>
-        </p:spPr>
-      </p:sp>
-      <p:sp>
-        <p:nvSpPr>
-          <p:cNvPr id="38" name="Text 36"/>
-          <p:cNvSpPr/>
-          <p:nvPr/>
-        </p:nvSpPr>
-        <p:spPr>
-          <a:xfrm>
-            <a:off x="6858000" y="3364992"/>
-            <a:ext cx="1554480" cy="475488"/>
-          </a:xfrm>
-          <a:prstGeom prst="rect">
-            <a:avLst/>
-          </a:prstGeom>
-          <a:noFill/>
-          <a:ln/>
-        </p:spPr>
-        <p:txBody>
-          <a:bodyPr wrap="square" lIns="0" tIns="0" rIns="0" bIns="0" rtlCol="0" anchor="ctr"/>
-          <a:lstStyle/>
-          <a:p>
-            <a:pPr algn="ctr" indent="0" marL="0">
-              <a:buNone/>
-            </a:pPr>
-            <a:r>
-              <a:rPr lang="en-US" sz="1400" b="1" dirty="0">
-                <a:solidFill>
-                  <a:srgbClr val="0D9488"/>
-                </a:solidFill>
-                <a:latin typeface="Trebuchet MS" pitchFamily="34" charset="0"/>
-                <a:ea typeface="Trebuchet MS" pitchFamily="34" charset="-122"/>
-                <a:cs typeface="Trebuchet MS" pitchFamily="34" charset="-120"/>
-              </a:rPr>
-              <a:t>oured</a:t>
-            </a:r>
-            <a:endParaRPr lang="en-US" sz="1400" dirty="0"/>
-          </a:p>
-        </p:txBody>
-      </p:sp>
-      <p:sp>
-        <p:nvSpPr>
-          <p:cNvPr id="39" name="Shape 37"/>
-          <p:cNvSpPr/>
-          <p:nvPr/>
-        </p:nvSpPr>
-        <p:spPr>
-          <a:xfrm>
-            <a:off x="365760" y="4096512"/>
-            <a:ext cx="1371600" cy="804672"/>
-          </a:xfrm>
-          <a:prstGeom prst="rect">
-            <a:avLst>
-              <a:gd name="adj" fmla="val 6818"/>
-            </a:avLst>
-          </a:prstGeom>
-          <a:solidFill>
-            <a:srgbClr val="E2E8F0"/>
-          </a:solidFill>
-          <a:ln w="12700">
-            <a:solidFill>
-              <a:srgbClr val="E2E8F0"/>
-            </a:solidFill>
-            <a:prstDash val="solid"/>
-          </a:ln>
-        </p:spPr>
-      </p:sp>
-      <p:sp>
-        <p:nvSpPr>
-          <p:cNvPr id="40" name="Text 38"/>
-          <p:cNvSpPr/>
-          <p:nvPr/>
-        </p:nvSpPr>
-        <p:spPr>
-          <a:xfrm>
-            <a:off x="365760" y="4096512"/>
-            <a:ext cx="1371600" cy="804672"/>
-          </a:xfrm>
-          <a:prstGeom prst="rect">
-            <a:avLst/>
-          </a:prstGeom>
-          <a:noFill/>
-          <a:ln/>
-        </p:spPr>
-        <p:txBody>
-          <a:bodyPr wrap="square" lIns="0" tIns="0" rIns="0" bIns="0" rtlCol="0" anchor="ctr"/>
-          <a:lstStyle/>
-          <a:p>
-            <a:pPr algn="ctr" indent="0" marL="0">
-              <a:buNone/>
-            </a:pPr>
-            <a:r>
-              <a:rPr lang="en-US" sz="1100" b="1" dirty="0">
-                <a:solidFill>
-                  <a:srgbClr val="475569"/>
-                </a:solidFill>
-                <a:latin typeface="Trebuchet MS" pitchFamily="34" charset="0"/>
-                <a:ea typeface="Trebuchet MS" pitchFamily="34" charset="-122"/>
-                <a:cs typeface="Trebuchet MS" pitchFamily="34" charset="-120"/>
-              </a:rPr>
-              <a:t>Phonemes</a:t>
-            </a:r>
-            <a:endParaRPr lang="en-US" sz="1100" dirty="0"/>
-          </a:p>
-        </p:txBody>
-      </p:sp>
-      <p:sp>
-        <p:nvSpPr>
-          <p:cNvPr id="41" name="Shape 39"/>
-          <p:cNvSpPr/>
-          <p:nvPr/>
-        </p:nvSpPr>
-        <p:spPr>
-          <a:xfrm>
-            <a:off x="1874520" y="4096512"/>
-            <a:ext cx="6903720" cy="804672"/>
-          </a:xfrm>
-          <a:prstGeom prst="rect">
-            <a:avLst>
-              <a:gd name="adj" fmla="val 6818"/>
-            </a:avLst>
-          </a:prstGeom>
-          <a:solidFill>
-            <a:srgbClr val="FCE7F3"/>
-          </a:solidFill>
-          <a:ln w="12700">
-            <a:solidFill>
-              <a:srgbClr val="DB2777"/>
-            </a:solidFill>
-            <a:prstDash val="solid"/>
-          </a:ln>
-        </p:spPr>
-      </p:sp>
-      <p:sp>
-        <p:nvSpPr>
-          <p:cNvPr id="42" name="Shape 40"/>
-          <p:cNvSpPr/>
-          <p:nvPr/>
-        </p:nvSpPr>
-        <p:spPr>
-          <a:xfrm>
-            <a:off x="1952596" y="4169664"/>
-            <a:ext cx="493776" cy="384048"/>
-          </a:xfrm>
-          <a:prstGeom prst="rect">
-            <a:avLst>
-              <a:gd name="adj" fmla="val 9524"/>
-            </a:avLst>
-          </a:prstGeom>
-          <a:solidFill>
-            <a:srgbClr val="FFFFFF"/>
-          </a:solidFill>
-          <a:ln w="12700">
-            <a:solidFill>
-              <a:srgbClr val="DB2777"/>
-            </a:solidFill>
-            <a:prstDash val="solid"/>
-          </a:ln>
-        </p:spPr>
-      </p:sp>
-      <p:sp>
-        <p:nvSpPr>
-          <p:cNvPr id="43" name="Text 41"/>
-          <p:cNvSpPr/>
-          <p:nvPr/>
-        </p:nvSpPr>
-        <p:spPr>
-          <a:xfrm>
-            <a:off x="1952596" y="4169664"/>
-            <a:ext cx="493776" cy="384048"/>
-          </a:xfrm>
-          <a:prstGeom prst="rect">
-            <a:avLst/>
-          </a:prstGeom>
-          <a:noFill/>
-          <a:ln/>
-        </p:spPr>
-        <p:txBody>
-          <a:bodyPr wrap="square" lIns="0" tIns="0" rIns="0" bIns="0" rtlCol="0" anchor="ctr"/>
-          <a:lstStyle/>
-          <a:p>
-            <a:pPr algn="ctr" indent="0" marL="0">
-              <a:buNone/>
-            </a:pPr>
-            <a:r>
-              <a:rPr lang="en-US" sz="900" b="1" dirty="0">
-                <a:solidFill>
-                  <a:srgbClr val="9D174D"/>
-                </a:solidFill>
-                <a:latin typeface="Trebuchet MS" pitchFamily="34" charset="0"/>
-                <a:ea typeface="Trebuchet MS" pitchFamily="34" charset="-122"/>
-                <a:cs typeface="Trebuchet MS" pitchFamily="34" charset="-120"/>
-              </a:rPr>
-              <a:t>m</a:t>
-            </a:r>
-            <a:endParaRPr lang="en-US" sz="900" dirty="0"/>
-          </a:p>
-        </p:txBody>
-      </p:sp>
-      <p:sp>
-        <p:nvSpPr>
-          <p:cNvPr id="44" name="Shape 42"/>
-          <p:cNvSpPr/>
-          <p:nvPr/>
-        </p:nvSpPr>
-        <p:spPr>
-          <a:xfrm>
-            <a:off x="2497015" y="4169664"/>
-            <a:ext cx="493776" cy="384048"/>
-          </a:xfrm>
-          <a:prstGeom prst="rect">
-            <a:avLst>
-              <a:gd name="adj" fmla="val 9524"/>
-            </a:avLst>
-          </a:prstGeom>
-          <a:solidFill>
-            <a:srgbClr val="FFFFFF"/>
-          </a:solidFill>
-          <a:ln w="12700">
-            <a:solidFill>
-              <a:srgbClr val="DB2777"/>
-            </a:solidFill>
-            <a:prstDash val="solid"/>
-          </a:ln>
-        </p:spPr>
-      </p:sp>
-      <p:sp>
-        <p:nvSpPr>
-          <p:cNvPr id="45" name="Text 43"/>
-          <p:cNvSpPr/>
-          <p:nvPr/>
-        </p:nvSpPr>
-        <p:spPr>
-          <a:xfrm>
-            <a:off x="2497015" y="4169664"/>
-            <a:ext cx="493776" cy="384048"/>
-          </a:xfrm>
-          <a:prstGeom prst="rect">
-            <a:avLst/>
-          </a:prstGeom>
-          <a:noFill/>
-          <a:ln/>
-        </p:spPr>
-        <p:txBody>
-          <a:bodyPr wrap="square" lIns="0" tIns="0" rIns="0" bIns="0" rtlCol="0" anchor="ctr"/>
-          <a:lstStyle/>
-          <a:p>
-            <a:pPr algn="ctr" indent="0" marL="0">
-              <a:buNone/>
-            </a:pPr>
-            <a:r>
-              <a:rPr lang="en-US" sz="900" b="1" dirty="0">
-                <a:solidFill>
-                  <a:srgbClr val="9D174D"/>
-                </a:solidFill>
-                <a:latin typeface="Trebuchet MS" pitchFamily="34" charset="0"/>
-                <a:ea typeface="Trebuchet MS" pitchFamily="34" charset="-122"/>
-                <a:cs typeface="Trebuchet MS" pitchFamily="34" charset="-120"/>
-              </a:rPr>
-              <a:t>u</a:t>
-            </a:r>
-            <a:endParaRPr lang="en-US" sz="900" dirty="0"/>
-          </a:p>
-        </p:txBody>
-      </p:sp>
-      <p:sp>
-        <p:nvSpPr>
-          <p:cNvPr id="46" name="Shape 44"/>
-          <p:cNvSpPr/>
-          <p:nvPr/>
-        </p:nvSpPr>
-        <p:spPr>
-          <a:xfrm>
-            <a:off x="3041435" y="4169664"/>
-            <a:ext cx="493776" cy="384048"/>
-          </a:xfrm>
-          <a:prstGeom prst="rect">
-            <a:avLst>
-              <a:gd name="adj" fmla="val 9524"/>
-            </a:avLst>
-          </a:prstGeom>
-          <a:solidFill>
-            <a:srgbClr val="FFFFFF"/>
-          </a:solidFill>
-          <a:ln w="12700">
-            <a:solidFill>
-              <a:srgbClr val="DB2777"/>
-            </a:solidFill>
-            <a:prstDash val="solid"/>
-          </a:ln>
-        </p:spPr>
-      </p:sp>
-      <p:sp>
-        <p:nvSpPr>
-          <p:cNvPr id="47" name="Text 45"/>
-          <p:cNvSpPr/>
-          <p:nvPr/>
-        </p:nvSpPr>
-        <p:spPr>
-          <a:xfrm>
-            <a:off x="3041435" y="4169664"/>
-            <a:ext cx="493776" cy="384048"/>
-          </a:xfrm>
-          <a:prstGeom prst="rect">
-            <a:avLst/>
-          </a:prstGeom>
-          <a:noFill/>
-          <a:ln/>
-        </p:spPr>
-        <p:txBody>
-          <a:bodyPr wrap="square" lIns="0" tIns="0" rIns="0" bIns="0" rtlCol="0" anchor="ctr"/>
-          <a:lstStyle/>
-          <a:p>
-            <a:pPr algn="ctr" indent="0" marL="0">
-              <a:buNone/>
-            </a:pPr>
-            <a:r>
-              <a:rPr lang="en-US" sz="900" b="1" dirty="0">
-                <a:solidFill>
-                  <a:srgbClr val="9D174D"/>
-                </a:solidFill>
-                <a:latin typeface="Trebuchet MS" pitchFamily="34" charset="0"/>
-                <a:ea typeface="Trebuchet MS" pitchFamily="34" charset="-122"/>
-                <a:cs typeface="Trebuchet MS" pitchFamily="34" charset="-120"/>
-              </a:rPr>
-              <a:t>l</a:t>
-            </a:r>
-            <a:endParaRPr lang="en-US" sz="900" dirty="0"/>
-          </a:p>
-        </p:txBody>
-      </p:sp>
-      <p:sp>
-        <p:nvSpPr>
-          <p:cNvPr id="48" name="Shape 46"/>
-          <p:cNvSpPr/>
-          <p:nvPr/>
-        </p:nvSpPr>
-        <p:spPr>
-          <a:xfrm>
-            <a:off x="3585855" y="4169664"/>
-            <a:ext cx="493776" cy="384048"/>
-          </a:xfrm>
-          <a:prstGeom prst="rect">
-            <a:avLst>
-              <a:gd name="adj" fmla="val 9524"/>
-            </a:avLst>
-          </a:prstGeom>
-          <a:solidFill>
-            <a:srgbClr val="FFFFFF"/>
-          </a:solidFill>
-          <a:ln w="12700">
-            <a:solidFill>
-              <a:srgbClr val="DB2777"/>
-            </a:solidFill>
-            <a:prstDash val="solid"/>
-          </a:ln>
-        </p:spPr>
-      </p:sp>
-      <p:sp>
-        <p:nvSpPr>
-          <p:cNvPr id="49" name="Text 47"/>
-          <p:cNvSpPr/>
-          <p:nvPr/>
-        </p:nvSpPr>
-        <p:spPr>
-          <a:xfrm>
-            <a:off x="3585855" y="4169664"/>
-            <a:ext cx="493776" cy="384048"/>
-          </a:xfrm>
-          <a:prstGeom prst="rect">
-            <a:avLst/>
-          </a:prstGeom>
-          <a:noFill/>
-          <a:ln/>
-        </p:spPr>
-        <p:txBody>
-          <a:bodyPr wrap="square" lIns="0" tIns="0" rIns="0" bIns="0" rtlCol="0" anchor="ctr"/>
-          <a:lstStyle/>
-          <a:p>
-            <a:pPr algn="ctr" indent="0" marL="0">
-              <a:buNone/>
-            </a:pPr>
-            <a:r>
-              <a:rPr lang="en-US" sz="900" b="1" dirty="0">
-                <a:solidFill>
-                  <a:srgbClr val="9D174D"/>
-                </a:solidFill>
-                <a:latin typeface="Trebuchet MS" pitchFamily="34" charset="0"/>
-                <a:ea typeface="Trebuchet MS" pitchFamily="34" charset="-122"/>
-                <a:cs typeface="Trebuchet MS" pitchFamily="34" charset="-120"/>
-              </a:rPr>
-              <a:t>t</a:t>
-            </a:r>
-            <a:endParaRPr lang="en-US" sz="900" dirty="0"/>
-          </a:p>
-        </p:txBody>
-      </p:sp>
-      <p:sp>
-        <p:nvSpPr>
-          <p:cNvPr id="50" name="Shape 48"/>
-          <p:cNvSpPr/>
-          <p:nvPr/>
-        </p:nvSpPr>
-        <p:spPr>
-          <a:xfrm>
-            <a:off x="4130274" y="4169664"/>
-            <a:ext cx="493776" cy="384048"/>
-          </a:xfrm>
-          <a:prstGeom prst="rect">
-            <a:avLst>
-              <a:gd name="adj" fmla="val 9524"/>
-            </a:avLst>
-          </a:prstGeom>
-          <a:solidFill>
-            <a:srgbClr val="FFFFFF"/>
-          </a:solidFill>
-          <a:ln w="12700">
-            <a:solidFill>
-              <a:srgbClr val="DB2777"/>
-            </a:solidFill>
-            <a:prstDash val="solid"/>
-          </a:ln>
-        </p:spPr>
-      </p:sp>
-      <p:sp>
-        <p:nvSpPr>
-          <p:cNvPr id="51" name="Text 49"/>
-          <p:cNvSpPr/>
-          <p:nvPr/>
-        </p:nvSpPr>
-        <p:spPr>
-          <a:xfrm>
-            <a:off x="4130274" y="4169664"/>
-            <a:ext cx="493776" cy="384048"/>
-          </a:xfrm>
-          <a:prstGeom prst="rect">
-            <a:avLst/>
-          </a:prstGeom>
-          <a:noFill/>
-          <a:ln/>
-        </p:spPr>
-        <p:txBody>
-          <a:bodyPr wrap="square" lIns="0" tIns="0" rIns="0" bIns="0" rtlCol="0" anchor="ctr"/>
-          <a:lstStyle/>
-          <a:p>
-            <a:pPr algn="ctr" indent="0" marL="0">
-              <a:buNone/>
-            </a:pPr>
-            <a:r>
-              <a:rPr lang="en-US" sz="900" b="1" dirty="0">
-                <a:solidFill>
-                  <a:srgbClr val="9D174D"/>
-                </a:solidFill>
-                <a:latin typeface="Trebuchet MS" pitchFamily="34" charset="0"/>
-                <a:ea typeface="Trebuchet MS" pitchFamily="34" charset="-122"/>
-                <a:cs typeface="Trebuchet MS" pitchFamily="34" charset="-120"/>
-              </a:rPr>
-              <a:t>i</a:t>
-            </a:r>
-            <a:endParaRPr lang="en-US" sz="900" dirty="0"/>
-          </a:p>
-        </p:txBody>
-      </p:sp>
-      <p:sp>
-        <p:nvSpPr>
-          <p:cNvPr id="52" name="Shape 50"/>
-          <p:cNvSpPr/>
-          <p:nvPr/>
-        </p:nvSpPr>
-        <p:spPr>
-          <a:xfrm>
-            <a:off x="4674694" y="4169664"/>
-            <a:ext cx="493776" cy="384048"/>
-          </a:xfrm>
-          <a:prstGeom prst="rect">
-            <a:avLst>
-              <a:gd name="adj" fmla="val 9524"/>
-            </a:avLst>
-          </a:prstGeom>
-          <a:solidFill>
-            <a:srgbClr val="FFFFFF"/>
-          </a:solidFill>
-          <a:ln w="12700">
-            <a:solidFill>
-              <a:srgbClr val="DB2777"/>
-            </a:solidFill>
-            <a:prstDash val="solid"/>
-          </a:ln>
-        </p:spPr>
-      </p:sp>
-      <p:sp>
-        <p:nvSpPr>
-          <p:cNvPr id="53" name="Text 51"/>
-          <p:cNvSpPr/>
-          <p:nvPr/>
-        </p:nvSpPr>
-        <p:spPr>
-          <a:xfrm>
-            <a:off x="4674694" y="4169664"/>
-            <a:ext cx="493776" cy="384048"/>
-          </a:xfrm>
-          <a:prstGeom prst="rect">
-            <a:avLst/>
-          </a:prstGeom>
-          <a:noFill/>
-          <a:ln/>
-        </p:spPr>
-        <p:txBody>
-          <a:bodyPr wrap="square" lIns="0" tIns="0" rIns="0" bIns="0" rtlCol="0" anchor="ctr"/>
-          <a:lstStyle/>
-          <a:p>
-            <a:pPr algn="ctr" indent="0" marL="0">
-              <a:buNone/>
-            </a:pPr>
-            <a:r>
-              <a:rPr lang="en-US" sz="900" b="1" dirty="0">
-                <a:solidFill>
-                  <a:srgbClr val="9D174D"/>
-                </a:solidFill>
-                <a:latin typeface="Trebuchet MS" pitchFamily="34" charset="0"/>
-                <a:ea typeface="Trebuchet MS" pitchFamily="34" charset="-122"/>
-                <a:cs typeface="Trebuchet MS" pitchFamily="34" charset="-120"/>
-              </a:rPr>
-              <a:t>c</a:t>
-            </a:r>
-            <a:endParaRPr lang="en-US" sz="900" dirty="0"/>
-          </a:p>
-        </p:txBody>
-      </p:sp>
-      <p:sp>
-        <p:nvSpPr>
-          <p:cNvPr id="54" name="Text 52"/>
-          <p:cNvSpPr/>
-          <p:nvPr/>
-        </p:nvSpPr>
-        <p:spPr>
-          <a:xfrm>
-            <a:off x="4674694" y="4572000"/>
-            <a:ext cx="493776" cy="219456"/>
-          </a:xfrm>
-          <a:prstGeom prst="rect">
-            <a:avLst/>
-          </a:prstGeom>
-          <a:noFill/>
-          <a:ln/>
-        </p:spPr>
-        <p:txBody>
-          <a:bodyPr wrap="square" lIns="0" tIns="0" rIns="0" bIns="0" rtlCol="0" anchor="t"/>
-          <a:lstStyle/>
-          <a:p>
-            <a:pPr algn="ctr" indent="0" marL="0">
-              <a:buNone/>
-            </a:pPr>
-            <a:r>
-              <a:rPr lang="en-US" sz="750" i="1" dirty="0">
-                <a:solidFill>
-                  <a:srgbClr val="94A3B8"/>
-                </a:solidFill>
-                <a:latin typeface="Calibri" pitchFamily="34" charset="0"/>
-                <a:ea typeface="Calibri" pitchFamily="34" charset="-122"/>
-                <a:cs typeface="Calibri" pitchFamily="34" charset="-120"/>
-              </a:rPr>
-              <a:t>/k/</a:t>
-            </a:r>
-            <a:endParaRPr lang="en-US" sz="750" dirty="0"/>
-          </a:p>
-        </p:txBody>
-      </p:sp>
-      <p:sp>
-        <p:nvSpPr>
-          <p:cNvPr id="55" name="Shape 53"/>
-          <p:cNvSpPr/>
-          <p:nvPr/>
-        </p:nvSpPr>
-        <p:spPr>
-          <a:xfrm>
-            <a:off x="5219114" y="4169664"/>
-            <a:ext cx="493776" cy="384048"/>
-          </a:xfrm>
-          <a:prstGeom prst="rect">
-            <a:avLst>
-              <a:gd name="adj" fmla="val 9524"/>
-            </a:avLst>
-          </a:prstGeom>
-          <a:solidFill>
-            <a:srgbClr val="FFFFFF"/>
-          </a:solidFill>
-          <a:ln w="12700">
-            <a:solidFill>
-              <a:srgbClr val="DB2777"/>
-            </a:solidFill>
-            <a:prstDash val="solid"/>
-          </a:ln>
-        </p:spPr>
-      </p:sp>
-      <p:sp>
-        <p:nvSpPr>
-          <p:cNvPr id="56" name="Text 54"/>
-          <p:cNvSpPr/>
-          <p:nvPr/>
-        </p:nvSpPr>
-        <p:spPr>
-          <a:xfrm>
-            <a:off x="5219114" y="4169664"/>
-            <a:ext cx="493776" cy="384048"/>
-          </a:xfrm>
-          <a:prstGeom prst="rect">
-            <a:avLst/>
-          </a:prstGeom>
-          <a:noFill/>
-          <a:ln/>
-        </p:spPr>
-        <p:txBody>
-          <a:bodyPr wrap="square" lIns="0" tIns="0" rIns="0" bIns="0" rtlCol="0" anchor="ctr"/>
-          <a:lstStyle/>
-          <a:p>
-            <a:pPr algn="ctr" indent="0" marL="0">
-              <a:buNone/>
-            </a:pPr>
-            <a:r>
-              <a:rPr lang="en-US" sz="900" b="1" dirty="0">
-                <a:solidFill>
-                  <a:srgbClr val="9D174D"/>
-                </a:solidFill>
-                <a:latin typeface="Trebuchet MS" pitchFamily="34" charset="0"/>
-                <a:ea typeface="Trebuchet MS" pitchFamily="34" charset="-122"/>
-                <a:cs typeface="Trebuchet MS" pitchFamily="34" charset="-120"/>
-              </a:rPr>
-              <a:t>o</a:t>
-            </a:r>
-            <a:endParaRPr lang="en-US" sz="900" dirty="0"/>
-          </a:p>
-        </p:txBody>
-      </p:sp>
-      <p:sp>
-        <p:nvSpPr>
-          <p:cNvPr id="57" name="Shape 55"/>
-          <p:cNvSpPr/>
-          <p:nvPr/>
-        </p:nvSpPr>
-        <p:spPr>
-          <a:xfrm>
-            <a:off x="5763534" y="4169664"/>
-            <a:ext cx="493776" cy="384048"/>
-          </a:xfrm>
-          <a:prstGeom prst="rect">
-            <a:avLst>
-              <a:gd name="adj" fmla="val 9524"/>
-            </a:avLst>
-          </a:prstGeom>
-          <a:solidFill>
-            <a:srgbClr val="FFFFFF"/>
-          </a:solidFill>
-          <a:ln w="12700">
-            <a:solidFill>
-              <a:srgbClr val="DB2777"/>
-            </a:solidFill>
-            <a:prstDash val="solid"/>
-          </a:ln>
-        </p:spPr>
-      </p:sp>
-      <p:sp>
-        <p:nvSpPr>
-          <p:cNvPr id="58" name="Text 56"/>
-          <p:cNvSpPr/>
-          <p:nvPr/>
-        </p:nvSpPr>
-        <p:spPr>
-          <a:xfrm>
-            <a:off x="5763534" y="4169664"/>
-            <a:ext cx="493776" cy="384048"/>
-          </a:xfrm>
-          <a:prstGeom prst="rect">
-            <a:avLst/>
-          </a:prstGeom>
-          <a:noFill/>
-          <a:ln/>
-        </p:spPr>
-        <p:txBody>
-          <a:bodyPr wrap="square" lIns="0" tIns="0" rIns="0" bIns="0" rtlCol="0" anchor="ctr"/>
-          <a:lstStyle/>
-          <a:p>
-            <a:pPr algn="ctr" indent="0" marL="0">
-              <a:buNone/>
-            </a:pPr>
-            <a:r>
-              <a:rPr lang="en-US" sz="900" b="1" dirty="0">
-                <a:solidFill>
-                  <a:srgbClr val="9D174D"/>
-                </a:solidFill>
-                <a:latin typeface="Trebuchet MS" pitchFamily="34" charset="0"/>
-                <a:ea typeface="Trebuchet MS" pitchFamily="34" charset="-122"/>
-                <a:cs typeface="Trebuchet MS" pitchFamily="34" charset="-120"/>
-              </a:rPr>
-              <a:t>l</a:t>
-            </a:r>
-            <a:endParaRPr lang="en-US" sz="900" dirty="0"/>
-          </a:p>
-        </p:txBody>
-      </p:sp>
-      <p:sp>
-        <p:nvSpPr>
-          <p:cNvPr id="59" name="Shape 57"/>
-          <p:cNvSpPr/>
-          <p:nvPr/>
-        </p:nvSpPr>
-        <p:spPr>
-          <a:xfrm>
-            <a:off x="6307953" y="4169664"/>
-            <a:ext cx="493776" cy="384048"/>
-          </a:xfrm>
-          <a:prstGeom prst="rect">
-            <a:avLst>
-              <a:gd name="adj" fmla="val 9524"/>
-            </a:avLst>
-          </a:prstGeom>
-          <a:solidFill>
-            <a:srgbClr val="FFFFFF"/>
-          </a:solidFill>
-          <a:ln w="12700">
-            <a:solidFill>
-              <a:srgbClr val="DB2777"/>
-            </a:solidFill>
-            <a:prstDash val="solid"/>
-          </a:ln>
-        </p:spPr>
-      </p:sp>
-      <p:sp>
-        <p:nvSpPr>
-          <p:cNvPr id="60" name="Text 58"/>
-          <p:cNvSpPr/>
-          <p:nvPr/>
-        </p:nvSpPr>
-        <p:spPr>
-          <a:xfrm>
-            <a:off x="6307953" y="4169664"/>
-            <a:ext cx="493776" cy="384048"/>
-          </a:xfrm>
-          <a:prstGeom prst="rect">
-            <a:avLst/>
-          </a:prstGeom>
-          <a:noFill/>
-          <a:ln/>
-        </p:spPr>
-        <p:txBody>
-          <a:bodyPr wrap="square" lIns="0" tIns="0" rIns="0" bIns="0" rtlCol="0" anchor="ctr"/>
-          <a:lstStyle/>
-          <a:p>
-            <a:pPr algn="ctr" indent="0" marL="0">
-              <a:buNone/>
-            </a:pPr>
-            <a:r>
-              <a:rPr lang="en-US" sz="900" b="1" dirty="0">
-                <a:solidFill>
-                  <a:srgbClr val="9D174D"/>
-                </a:solidFill>
-                <a:latin typeface="Trebuchet MS" pitchFamily="34" charset="0"/>
-                <a:ea typeface="Trebuchet MS" pitchFamily="34" charset="-122"/>
-                <a:cs typeface="Trebuchet MS" pitchFamily="34" charset="-120"/>
-              </a:rPr>
-              <a:t>ou</a:t>
-            </a:r>
-            <a:endParaRPr lang="en-US" sz="900" dirty="0"/>
-          </a:p>
-        </p:txBody>
-      </p:sp>
-      <p:sp>
-        <p:nvSpPr>
-          <p:cNvPr id="61" name="Shape 59"/>
-          <p:cNvSpPr/>
-          <p:nvPr/>
-        </p:nvSpPr>
-        <p:spPr>
-          <a:xfrm>
-            <a:off x="6852373" y="4169664"/>
-            <a:ext cx="493776" cy="384048"/>
-          </a:xfrm>
-          <a:prstGeom prst="rect">
-            <a:avLst>
-              <a:gd name="adj" fmla="val 9524"/>
-            </a:avLst>
-          </a:prstGeom>
-          <a:solidFill>
-            <a:srgbClr val="FFFFFF"/>
-          </a:solidFill>
-          <a:ln w="12700">
-            <a:solidFill>
-              <a:srgbClr val="DB2777"/>
-            </a:solidFill>
-            <a:prstDash val="solid"/>
-          </a:ln>
-        </p:spPr>
-      </p:sp>
-      <p:sp>
-        <p:nvSpPr>
-          <p:cNvPr id="62" name="Text 60"/>
-          <p:cNvSpPr/>
-          <p:nvPr/>
-        </p:nvSpPr>
-        <p:spPr>
-          <a:xfrm>
-            <a:off x="6852373" y="4169664"/>
-            <a:ext cx="493776" cy="384048"/>
-          </a:xfrm>
-          <a:prstGeom prst="rect">
-            <a:avLst/>
-          </a:prstGeom>
-          <a:noFill/>
-          <a:ln/>
-        </p:spPr>
-        <p:txBody>
-          <a:bodyPr wrap="square" lIns="0" tIns="0" rIns="0" bIns="0" rtlCol="0" anchor="ctr"/>
-          <a:lstStyle/>
-          <a:p>
-            <a:pPr algn="ctr" indent="0" marL="0">
-              <a:buNone/>
-            </a:pPr>
-            <a:r>
-              <a:rPr lang="en-US" sz="900" b="1" dirty="0">
-                <a:solidFill>
-                  <a:srgbClr val="9D174D"/>
-                </a:solidFill>
-                <a:latin typeface="Trebuchet MS" pitchFamily="34" charset="0"/>
-                <a:ea typeface="Trebuchet MS" pitchFamily="34" charset="-122"/>
-                <a:cs typeface="Trebuchet MS" pitchFamily="34" charset="-120"/>
-              </a:rPr>
-              <a:t>r</a:t>
-            </a:r>
-            <a:endParaRPr lang="en-US" sz="900" dirty="0"/>
-          </a:p>
-        </p:txBody>
-      </p:sp>
-      <p:sp>
-        <p:nvSpPr>
-          <p:cNvPr id="63" name="Shape 61"/>
-          <p:cNvSpPr/>
-          <p:nvPr/>
-        </p:nvSpPr>
-        <p:spPr>
-          <a:xfrm>
-            <a:off x="7396793" y="4169664"/>
-            <a:ext cx="493776" cy="384048"/>
-          </a:xfrm>
-          <a:prstGeom prst="rect">
-            <a:avLst>
-              <a:gd name="adj" fmla="val 9524"/>
-            </a:avLst>
-          </a:prstGeom>
-          <a:solidFill>
-            <a:srgbClr val="FFFFFF"/>
-          </a:solidFill>
-          <a:ln w="12700">
-            <a:solidFill>
-              <a:srgbClr val="DB2777"/>
-            </a:solidFill>
-            <a:prstDash val="solid"/>
-          </a:ln>
-        </p:spPr>
-      </p:sp>
-      <p:sp>
-        <p:nvSpPr>
-          <p:cNvPr id="64" name="Text 62"/>
-          <p:cNvSpPr/>
-          <p:nvPr/>
-        </p:nvSpPr>
-        <p:spPr>
-          <a:xfrm>
-            <a:off x="7396793" y="4169664"/>
-            <a:ext cx="493776" cy="384048"/>
-          </a:xfrm>
-          <a:prstGeom prst="rect">
-            <a:avLst/>
-          </a:prstGeom>
-          <a:noFill/>
-          <a:ln/>
-        </p:spPr>
-        <p:txBody>
-          <a:bodyPr wrap="square" lIns="0" tIns="0" rIns="0" bIns="0" rtlCol="0" anchor="ctr"/>
-          <a:lstStyle/>
-          <a:p>
-            <a:pPr algn="ctr" indent="0" marL="0">
-              <a:buNone/>
-            </a:pPr>
-            <a:r>
-              <a:rPr lang="en-US" sz="900" b="1" dirty="0">
-                <a:solidFill>
-                  <a:srgbClr val="9D174D"/>
-                </a:solidFill>
-                <a:latin typeface="Trebuchet MS" pitchFamily="34" charset="0"/>
-                <a:ea typeface="Trebuchet MS" pitchFamily="34" charset="-122"/>
-                <a:cs typeface="Trebuchet MS" pitchFamily="34" charset="-120"/>
-              </a:rPr>
-              <a:t>e</a:t>
-            </a:r>
-            <a:endParaRPr lang="en-US" sz="900" dirty="0"/>
-          </a:p>
-        </p:txBody>
-      </p:sp>
-      <p:sp>
-        <p:nvSpPr>
-          <p:cNvPr id="65" name="Shape 63"/>
-          <p:cNvSpPr/>
-          <p:nvPr/>
-        </p:nvSpPr>
-        <p:spPr>
-          <a:xfrm>
-            <a:off x="7941212" y="4169664"/>
-            <a:ext cx="493776" cy="384048"/>
-          </a:xfrm>
-          <a:prstGeom prst="rect">
-            <a:avLst>
-              <a:gd name="adj" fmla="val 9524"/>
-            </a:avLst>
-          </a:prstGeom>
-          <a:solidFill>
-            <a:srgbClr val="FFFFFF"/>
-          </a:solidFill>
-          <a:ln w="12700">
-            <a:solidFill>
-              <a:srgbClr val="DB2777"/>
-            </a:solidFill>
-            <a:prstDash val="solid"/>
-          </a:ln>
-        </p:spPr>
-      </p:sp>
-      <p:sp>
-        <p:nvSpPr>
-          <p:cNvPr id="66" name="Text 64"/>
-          <p:cNvSpPr/>
-          <p:nvPr/>
-        </p:nvSpPr>
-        <p:spPr>
-          <a:xfrm>
-            <a:off x="7941212" y="4169664"/>
-            <a:ext cx="493776" cy="384048"/>
-          </a:xfrm>
-          <a:prstGeom prst="rect">
-            <a:avLst/>
-          </a:prstGeom>
-          <a:noFill/>
-          <a:ln/>
-        </p:spPr>
-        <p:txBody>
-          <a:bodyPr wrap="square" lIns="0" tIns="0" rIns="0" bIns="0" rtlCol="0" anchor="ctr"/>
-          <a:lstStyle/>
-          <a:p>
-            <a:pPr algn="ctr" indent="0" marL="0">
-              <a:buNone/>
-            </a:pPr>
-            <a:r>
-              <a:rPr lang="en-US" sz="900" b="1" dirty="0">
-                <a:solidFill>
-                  <a:srgbClr val="9D174D"/>
-                </a:solidFill>
-                <a:latin typeface="Trebuchet MS" pitchFamily="34" charset="0"/>
-                <a:ea typeface="Trebuchet MS" pitchFamily="34" charset="-122"/>
-                <a:cs typeface="Trebuchet MS" pitchFamily="34" charset="-120"/>
-              </a:rPr>
-              <a:t>d</a:t>
+              <a:t>ss</a:t>
             </a:r>
             <a:endParaRPr lang="en-US" sz="900" dirty="0"/>
           </a:p>
@@ -35292,7 +34608,7 @@
                 <a:ea typeface="Calibri" pitchFamily="34" charset="-122"/>
                 <a:cs typeface="Calibri" pitchFamily="34" charset="-120"/>
               </a:rPr>
-              <a:t>Word Labs  •  wordlabs.app  •  Root: 'colour' = hue or shade of light</a:t>
+              <a:t>Word Labs  •  wordlabs.app  •  Root: 'colour' = hue, tint, or shade</a:t>
             </a:r>
             <a:endParaRPr lang="en-US" sz="800" dirty="0"/>
           </a:p>
@@ -36461,7 +35777,7 @@
                 <a:ea typeface="Calibri" pitchFamily="34" charset="-122"/>
                 <a:cs typeface="Calibri" pitchFamily="34" charset="-120"/>
               </a:rPr>
-              <a:t>Word Labs  •  wordlabs.app  •  Root: 'colour' = hue or shade of light</a:t>
+              <a:t>Word Labs  •  wordlabs.app  •  Root: 'colour' = hue, tint, or shade</a:t>
             </a:r>
             <a:endParaRPr lang="en-US" sz="800" dirty="0"/>
           </a:p>
@@ -36954,7 +36270,7 @@
                 <a:ea typeface="Trebuchet MS" pitchFamily="34" charset="-122"/>
                 <a:cs typeface="Trebuchet MS" pitchFamily="34" charset="-120"/>
               </a:rPr>
-              <a:t>bi-</a:t>
+              <a:t>multi-</a:t>
             </a:r>
             <a:endParaRPr lang="en-US" sz="1300" dirty="0"/>
           </a:p>
@@ -37107,7 +36423,7 @@
                 <a:ea typeface="Trebuchet MS" pitchFamily="34" charset="-122"/>
                 <a:cs typeface="Trebuchet MS" pitchFamily="34" charset="-120"/>
               </a:rPr>
-              <a:t>multi-</a:t>
+              <a:t>bi-</a:t>
             </a:r>
             <a:endParaRPr lang="en-US" sz="1300" dirty="0"/>
           </a:p>
@@ -38003,7 +37319,7 @@
                 <a:ea typeface="Trebuchet MS" pitchFamily="34" charset="-122"/>
                 <a:cs typeface="Trebuchet MS" pitchFamily="34" charset="-120"/>
               </a:rPr>
-              <a:t>colourant</a:t>
+              <a:t>discolouration</a:t>
             </a:r>
             <a:endParaRPr lang="en-US" sz="1200" dirty="0"/>
           </a:p>
@@ -38069,7 +37385,7 @@
                 <a:ea typeface="Trebuchet MS" pitchFamily="34" charset="-122"/>
                 <a:cs typeface="Trebuchet MS" pitchFamily="34" charset="-120"/>
               </a:rPr>
-              <a:t>discolouration</a:t>
+              <a:t>bicolour</a:t>
             </a:r>
             <a:endParaRPr lang="en-US" sz="1200" dirty="0"/>
           </a:p>
@@ -38361,7 +37677,7 @@
                 <a:ea typeface="Calibri" pitchFamily="34" charset="-122"/>
                 <a:cs typeface="Calibri" pitchFamily="34" charset="-120"/>
               </a:rPr>
-              <a:t>Word Labs  •  wordlabs.app  •  Root: 'colour' = hue or shade of light</a:t>
+              <a:t>Word Labs  •  wordlabs.app  •  Root: 'colour' = hue, tint, or shade</a:t>
             </a:r>
             <a:endParaRPr lang="en-US" sz="800" dirty="0"/>
           </a:p>
@@ -38525,7 +37841,7 @@
                 <a:ea typeface="Calibri" pitchFamily="34" charset="-122"/>
                 <a:cs typeface="Calibri" pitchFamily="34" charset="-120"/>
               </a:rPr>
-              <a:t>The core part of a word carrying its basic meaning. For example, 'colour' means 'hue or shade of light'.</a:t>
+              <a:t>The core part of a word carrying its basic meaning. For example, 'colour' means 'hue, tint, or shade'.</a:t>
             </a:r>
             <a:endParaRPr lang="en-US" sz="1350" dirty="0"/>
           </a:p>
@@ -39145,7 +38461,7 @@
                 <a:ea typeface="Calibri" pitchFamily="34" charset="-122"/>
                 <a:cs typeface="Calibri" pitchFamily="34" charset="-120"/>
               </a:rPr>
-              <a:t>Word Labs  •  wordlabs.app  •  Root: 'colour' = hue or shade of light</a:t>
+              <a:t>Word Labs  •  wordlabs.app  •  Root: 'colour' = hue, tint, or shade</a:t>
             </a:r>
             <a:endParaRPr lang="en-US" sz="800" dirty="0"/>
           </a:p>
@@ -39257,7 +38573,7 @@
                 <a:ea typeface="Calibri" pitchFamily="34" charset="-122"/>
                 <a:cs typeface="Calibri" pitchFamily="34" charset="-120"/>
               </a:rPr>
-              <a:t>1.  The word 'colourful' contains the root 'colour' plus the suffix '-ful'.</a:t>
+              <a:t>1.  The root 'colour' comes from ancient Greek.</a:t>
             </a:r>
             <a:endParaRPr lang="en-US" sz="1300" dirty="0"/>
           </a:p>
@@ -39280,11 +38596,11 @@
             </a:avLst>
           </a:prstGeom>
           <a:solidFill>
-            <a:srgbClr val="DCFCE7"/>
-          </a:solidFill>
-          <a:ln w="12700">
-            <a:solidFill>
-              <a:srgbClr val="16A34A"/>
+            <a:srgbClr val="FEE2E2"/>
+          </a:solidFill>
+          <a:ln w="12700">
+            <a:solidFill>
+              <a:srgbClr val="DC2626"/>
             </a:solidFill>
             <a:prstDash val="solid"/>
           </a:ln>
@@ -39317,13 +38633,13 @@
             <a:r>
               <a:rPr lang="en-US" sz="1100" b="1" dirty="0">
                 <a:solidFill>
-                  <a:srgbClr val="16A34A"/>
+                  <a:srgbClr val="DC2626"/>
                 </a:solidFill>
                 <a:latin typeface="Trebuchet MS" pitchFamily="34" charset="0"/>
                 <a:ea typeface="Trebuchet MS" pitchFamily="34" charset="-122"/>
                 <a:cs typeface="Trebuchet MS" pitchFamily="34" charset="-120"/>
               </a:rPr>
-              <a:t>TRUE</a:t>
+              <a:t>FALSE</a:t>
             </a:r>
             <a:endParaRPr lang="en-US" sz="1100" dirty="0"/>
           </a:p>
@@ -39396,7 +38712,7 @@
                 <a:ea typeface="Calibri" pitchFamily="34" charset="-122"/>
                 <a:cs typeface="Calibri" pitchFamily="34" charset="-120"/>
               </a:rPr>
-              <a:t>2.  The root 'colour' comes from an ancient Greek word.</a:t>
+              <a:t>2.  'Colourless' means having no colour.</a:t>
             </a:r>
             <a:endParaRPr lang="en-US" sz="1300" dirty="0"/>
           </a:p>
@@ -39419,11 +38735,11 @@
             </a:avLst>
           </a:prstGeom>
           <a:solidFill>
-            <a:srgbClr val="FEE2E2"/>
-          </a:solidFill>
-          <a:ln w="12700">
-            <a:solidFill>
-              <a:srgbClr val="DC2626"/>
+            <a:srgbClr val="DCFCE7"/>
+          </a:solidFill>
+          <a:ln w="12700">
+            <a:solidFill>
+              <a:srgbClr val="16A34A"/>
             </a:solidFill>
             <a:prstDash val="solid"/>
           </a:ln>
@@ -39456,13 +38772,13 @@
             <a:r>
               <a:rPr lang="en-US" sz="1100" b="1" dirty="0">
                 <a:solidFill>
-                  <a:srgbClr val="DC2626"/>
+                  <a:srgbClr val="16A34A"/>
                 </a:solidFill>
                 <a:latin typeface="Trebuchet MS" pitchFamily="34" charset="0"/>
                 <a:ea typeface="Trebuchet MS" pitchFamily="34" charset="-122"/>
                 <a:cs typeface="Trebuchet MS" pitchFamily="34" charset="-120"/>
               </a:rPr>
-              <a:t>FALSE</a:t>
+              <a:t>TRUE</a:t>
             </a:r>
             <a:endParaRPr lang="en-US" sz="1100" dirty="0"/>
           </a:p>
@@ -39535,7 +38851,7 @@
                 <a:ea typeface="Calibri" pitchFamily="34" charset="-122"/>
                 <a:cs typeface="Calibri" pitchFamily="34" charset="-120"/>
               </a:rPr>
-              <a:t>3.  Adding '-less' to 'colour' makes a word meaning without any colour.</a:t>
+              <a:t>3.  The word 'colourful' contains the root 'colour'.</a:t>
             </a:r>
             <a:endParaRPr lang="en-US" sz="1300" dirty="0"/>
           </a:p>
@@ -39674,7 +38990,7 @@
                 <a:ea typeface="Calibri" pitchFamily="34" charset="-122"/>
                 <a:cs typeface="Calibri" pitchFamily="34" charset="-120"/>
               </a:rPr>
-              <a:t>4.  The prefix 'dis-' in 'discolour' means to reverse or undo something.</a:t>
+              <a:t>4.  The prefix 'dis' in 'discolour' means 'again'.</a:t>
             </a:r>
             <a:endParaRPr lang="en-US" sz="1300" dirty="0"/>
           </a:p>
@@ -39697,11 +39013,11 @@
             </a:avLst>
           </a:prstGeom>
           <a:solidFill>
-            <a:srgbClr val="DCFCE7"/>
-          </a:solidFill>
-          <a:ln w="12700">
-            <a:solidFill>
-              <a:srgbClr val="16A34A"/>
+            <a:srgbClr val="FEE2E2"/>
+          </a:solidFill>
+          <a:ln w="12700">
+            <a:solidFill>
+              <a:srgbClr val="DC2626"/>
             </a:solidFill>
             <a:prstDash val="solid"/>
           </a:ln>
@@ -39734,13 +39050,13 @@
             <a:r>
               <a:rPr lang="en-US" sz="1100" b="1" dirty="0">
                 <a:solidFill>
-                  <a:srgbClr val="16A34A"/>
+                  <a:srgbClr val="DC2626"/>
                 </a:solidFill>
                 <a:latin typeface="Trebuchet MS" pitchFamily="34" charset="0"/>
                 <a:ea typeface="Trebuchet MS" pitchFamily="34" charset="-122"/>
                 <a:cs typeface="Trebuchet MS" pitchFamily="34" charset="-120"/>
               </a:rPr>
-              <a:t>TRUE</a:t>
+              <a:t>FALSE</a:t>
             </a:r>
             <a:endParaRPr lang="en-US" sz="1100" dirty="0"/>
           </a:p>
@@ -39813,7 +39129,7 @@
                 <a:ea typeface="Calibri" pitchFamily="34" charset="-122"/>
                 <a:cs typeface="Calibri" pitchFamily="34" charset="-120"/>
               </a:rPr>
-              <a:t>5.  'Colourless' and 'colourful' have exactly the same meaning.</a:t>
+              <a:t>5.  'Multicoloured' means having many different colours.</a:t>
             </a:r>
             <a:endParaRPr lang="en-US" sz="1300" dirty="0"/>
           </a:p>
@@ -39836,11 +39152,11 @@
             </a:avLst>
           </a:prstGeom>
           <a:solidFill>
-            <a:srgbClr val="FEE2E2"/>
-          </a:solidFill>
-          <a:ln w="12700">
-            <a:solidFill>
-              <a:srgbClr val="DC2626"/>
+            <a:srgbClr val="DCFCE7"/>
+          </a:solidFill>
+          <a:ln w="12700">
+            <a:solidFill>
+              <a:srgbClr val="16A34A"/>
             </a:solidFill>
             <a:prstDash val="solid"/>
           </a:ln>
@@ -39873,13 +39189,13 @@
             <a:r>
               <a:rPr lang="en-US" sz="1100" b="1" dirty="0">
                 <a:solidFill>
-                  <a:srgbClr val="DC2626"/>
+                  <a:srgbClr val="16A34A"/>
                 </a:solidFill>
                 <a:latin typeface="Trebuchet MS" pitchFamily="34" charset="0"/>
                 <a:ea typeface="Trebuchet MS" pitchFamily="34" charset="-122"/>
                 <a:cs typeface="Trebuchet MS" pitchFamily="34" charset="-120"/>
               </a:rPr>
-              <a:t>FALSE</a:t>
+              <a:t>TRUE</a:t>
             </a:r>
             <a:endParaRPr lang="en-US" sz="1100" dirty="0"/>
           </a:p>
@@ -40171,7 +39487,7 @@
                 <a:ea typeface="Calibri" pitchFamily="34" charset="-122"/>
                 <a:cs typeface="Calibri" pitchFamily="34" charset="-120"/>
               </a:rPr>
-              <a:t>Word Labs  •  wordlabs.app  •  Root: 'colour' = hue or shade of light</a:t>
+              <a:t>Word Labs  •  wordlabs.app  •  Root: 'colour' = hue, tint, or shade</a:t>
             </a:r>
             <a:endParaRPr lang="en-US" sz="800" dirty="0"/>
           </a:p>
@@ -40308,7 +39624,7 @@
                 <a:ea typeface="Trebuchet MS" pitchFamily="34" charset="-122"/>
                 <a:cs typeface="Trebuchet MS" pitchFamily="34" charset="-120"/>
               </a:rPr>
-              <a:t>hue or shade of light</a:t>
+              <a:t>hue, tint, or shade</a:t>
             </a:r>
             <a:endParaRPr lang="en-US" sz="2000" dirty="0"/>
           </a:p>
@@ -40848,7 +40164,7 @@
                 <a:ea typeface="Trebuchet MS" pitchFamily="34" charset="-122"/>
                 <a:cs typeface="Trebuchet MS" pitchFamily="34" charset="-120"/>
               </a:rPr>
-              <a:t>colourant</a:t>
+              <a:t>discolouration</a:t>
             </a:r>
             <a:endParaRPr lang="en-US" sz="1300" dirty="0"/>
           </a:p>
@@ -41140,7 +40456,7 @@
                 <a:ea typeface="Calibri" pitchFamily="34" charset="-122"/>
                 <a:cs typeface="Calibri" pitchFamily="34" charset="-120"/>
               </a:rPr>
-              <a:t>Word Labs  •  wordlabs.app  •  Root: 'colour' = hue or shade of light</a:t>
+              <a:t>Word Labs  •  wordlabs.app  •  Root: 'colour' = hue, tint, or shade</a:t>
             </a:r>
             <a:endParaRPr lang="en-US" sz="800" dirty="0"/>
           </a:p>
@@ -41633,7 +40949,7 @@
                 <a:ea typeface="Trebuchet MS" pitchFamily="34" charset="-122"/>
                 <a:cs typeface="Trebuchet MS" pitchFamily="34" charset="-120"/>
               </a:rPr>
-              <a:t>bi-</a:t>
+              <a:t>multi-</a:t>
             </a:r>
             <a:endParaRPr lang="en-US" sz="1300" dirty="0"/>
           </a:p>
@@ -41786,7 +41102,7 @@
                 <a:ea typeface="Trebuchet MS" pitchFamily="34" charset="-122"/>
                 <a:cs typeface="Trebuchet MS" pitchFamily="34" charset="-120"/>
               </a:rPr>
-              <a:t>multi-</a:t>
+              <a:t>bi-</a:t>
             </a:r>
             <a:endParaRPr lang="en-US" sz="1300" dirty="0"/>
           </a:p>
@@ -42914,7 +42230,7 @@
                 <a:ea typeface="Calibri" pitchFamily="34" charset="-122"/>
                 <a:cs typeface="Calibri" pitchFamily="34" charset="-120"/>
               </a:rPr>
-              <a:t>Word Labs  •  wordlabs.app  •  Root: 'colour' = hue or shade of light</a:t>
+              <a:t>Word Labs  •  wordlabs.app  •  Root: 'colour' = hue, tint, or shade</a:t>
             </a:r>
             <a:endParaRPr lang="en-US" sz="800" dirty="0"/>
           </a:p>
@@ -43092,7 +42408,7 @@
                 <a:ea typeface="Calibri" pitchFamily="34" charset="-122"/>
                 <a:cs typeface="Calibri" pitchFamily="34" charset="-120"/>
               </a:rPr>
-              <a:t>A substance used to add colour to something, like food dye.</a:t>
+              <a:t>A stain or patch where something has changed to an unwanted colour.</a:t>
             </a:r>
             <a:endParaRPr lang="en-US" sz="1200" dirty="0"/>
           </a:p>
@@ -43231,7 +42547,7 @@
                 <a:ea typeface="Calibri" pitchFamily="34" charset="-122"/>
                 <a:cs typeface="Calibri" pitchFamily="34" charset="-120"/>
               </a:rPr>
-              <a:t>Having many different colours all together.</a:t>
+              <a:t>Having many different colours all at once.</a:t>
             </a:r>
             <a:endParaRPr lang="en-US" sz="1200" dirty="0"/>
           </a:p>
@@ -43370,7 +42686,7 @@
                 <a:ea typeface="Calibri" pitchFamily="34" charset="-122"/>
                 <a:cs typeface="Calibri" pitchFamily="34" charset="-120"/>
               </a:rPr>
-              <a:t>Having had colour added to it or naturally having colour.</a:t>
+              <a:t>Having had colour added or applied to it.</a:t>
             </a:r>
             <a:endParaRPr lang="en-US" sz="1200" dirty="0"/>
           </a:p>
@@ -43509,7 +42825,7 @@
                 <a:ea typeface="Calibri" pitchFamily="34" charset="-122"/>
                 <a:cs typeface="Calibri" pitchFamily="34" charset="-120"/>
               </a:rPr>
-              <a:t>The activity of adding colour to a picture, or the colours something has.</a:t>
+              <a:t>The act of adding colour to something, like a drawing.</a:t>
             </a:r>
             <a:endParaRPr lang="en-US" sz="1200" dirty="0"/>
           </a:p>
@@ -43787,7 +43103,7 @@
                 <a:ea typeface="Calibri" pitchFamily="34" charset="-122"/>
                 <a:cs typeface="Calibri" pitchFamily="34" charset="-120"/>
               </a:rPr>
-              <a:t>To change or spoil the original colour of something.</a:t>
+              <a:t>To change something's colour, usually making it look stained or faded.</a:t>
             </a:r>
             <a:endParaRPr lang="en-US" sz="1200" dirty="0"/>
           </a:p>
@@ -43860,7 +43176,7 @@
                 <a:ea typeface="Trebuchet MS" pitchFamily="34" charset="-122"/>
                 <a:cs typeface="Trebuchet MS" pitchFamily="34" charset="-120"/>
               </a:rPr>
-              <a:t>colourant</a:t>
+              <a:t>discolouration</a:t>
             </a:r>
             <a:endParaRPr lang="en-US" sz="1200" dirty="0"/>
           </a:p>
@@ -43926,7 +43242,7 @@
                 <a:ea typeface="Calibri" pitchFamily="34" charset="-122"/>
                 <a:cs typeface="Calibri" pitchFamily="34" charset="-120"/>
               </a:rPr>
-              <a:t>Having no colour at all; clear or pale.</a:t>
+              <a:t>Having no colour at all; appearing clear or dull.</a:t>
             </a:r>
             <a:endParaRPr lang="en-US" sz="1200" dirty="0"/>
           </a:p>
@@ -44218,7 +43534,7 @@
                 <a:ea typeface="Calibri" pitchFamily="34" charset="-122"/>
                 <a:cs typeface="Calibri" pitchFamily="34" charset="-120"/>
               </a:rPr>
-              <a:t>Word Labs  •  wordlabs.app  •  Root: 'colour' = hue or shade of light</a:t>
+              <a:t>Word Labs  •  wordlabs.app  •  Root: 'colour' = hue, tint, or shade</a:t>
             </a:r>
             <a:endParaRPr lang="en-US" sz="800" dirty="0"/>
           </a:p>
@@ -44421,7 +43737,7 @@
                 <a:ea typeface="Calibri" pitchFamily="34" charset="-122"/>
                 <a:cs typeface="Calibri" pitchFamily="34" charset="-120"/>
               </a:rPr>
-              <a:t>The artist used a colourful palette to paint the rainforest scene.</a:t>
+              <a:t>The artist painted a colourful mural on the school wall that everyone admired.</a:t>
             </a:r>
             <a:endParaRPr lang="en-US" sz="1500" dirty="0"/>
           </a:p>
@@ -44585,7 +43901,7 @@
                 <a:ea typeface="Calibri" pitchFamily="34" charset="-122"/>
                 <a:cs typeface="Calibri" pitchFamily="34" charset="-120"/>
               </a:rPr>
-              <a:t>Leaving the fabric in the sun caused it to discolour over time.</a:t>
+              <a:t>The old photograph had become discoloured and faded after sitting in the sun for years.</a:t>
             </a:r>
             <a:endParaRPr lang="en-US" sz="1500" dirty="0"/>
           </a:p>
@@ -44749,7 +44065,7 @@
                 <a:ea typeface="Calibri" pitchFamily="34" charset="-122"/>
                 <a:cs typeface="Calibri" pitchFamily="34" charset="-120"/>
               </a:rPr>
-              <a:t>The students enjoyed colouring in their maps of Australia with different shades.</a:t>
+              <a:t>She loved colouring in detailed patterns with her set of pencils.</a:t>
             </a:r>
             <a:endParaRPr lang="en-US" sz="1500" dirty="0"/>
           </a:p>

--- a/output/wordlabs-colour-3day.pptx
+++ b/output/wordlabs-colour-3day.pptx
@@ -4240,7 +4240,7 @@
                 <a:ea typeface="Calibri" pitchFamily="34" charset="-122"/>
                 <a:cs typeface="Calibri" pitchFamily="34" charset="-120"/>
               </a:rPr>
-              <a:t>"hue, tint, or shade"</a:t>
+              <a:t>"the property of light; to add colour"</a:t>
             </a:r>
             <a:endParaRPr lang="en-US" sz="2200" dirty="0"/>
           </a:p>
@@ -4279,7 +4279,7 @@
                 <a:ea typeface="Calibri" pitchFamily="34" charset="-122"/>
                 <a:cs typeface="Calibri" pitchFamily="34" charset="-120"/>
               </a:rPr>
-              <a:t>Origin: Latin: color</a:t>
+              <a:t>Origin: Anglo-Saxon (Old English) root</a:t>
             </a:r>
             <a:endParaRPr lang="en-US" sz="1300" dirty="0"/>
           </a:p>
@@ -5288,7 +5288,7 @@
                 <a:ea typeface="Calibri" pitchFamily="34" charset="-122"/>
                 <a:cs typeface="Calibri" pitchFamily="34" charset="-120"/>
               </a:rPr>
-              <a:t>Word Labs  •  wordlabs.app  •  Root: 'colour' = hue, tint, or shade</a:t>
+              <a:t>Word Labs  •  wordlabs.app  •  Root: 'colour' = the property of light; to add colour</a:t>
             </a:r>
             <a:endParaRPr lang="en-US" sz="800" dirty="0"/>
           </a:p>
@@ -5928,7 +5928,7 @@
                 <a:ea typeface="Calibri" pitchFamily="34" charset="-122"/>
                 <a:cs typeface="Calibri" pitchFamily="34" charset="-120"/>
               </a:rPr>
-              <a:t>Word Labs  •  wordlabs.app  •  Root: 'colour' = hue, tint, or shade</a:t>
+              <a:t>Word Labs  •  wordlabs.app  •  Root: 'colour' = the property of light; to add colour</a:t>
             </a:r>
             <a:endParaRPr lang="en-US" sz="800" dirty="0"/>
           </a:p>
@@ -6040,7 +6040,7 @@
                 <a:ea typeface="Calibri" pitchFamily="34" charset="-122"/>
                 <a:cs typeface="Calibri" pitchFamily="34" charset="-120"/>
               </a:rPr>
-              <a:t>The </a:t>
+              <a:t>The parade was </a:t>
             </a:r>
             <a:pPr algn="l" indent="0" marL="0">
               <a:buNone/>
@@ -6057,7 +6057,7 @@
                 <a:ea typeface="Calibri" pitchFamily="34" charset="-122"/>
                 <a:cs typeface="Calibri" pitchFamily="34" charset="-120"/>
               </a:rPr>
-              <a:t>colourful</a:t>
+              <a:t>colourfully</a:t>
             </a:r>
             <a:pPr algn="l" indent="0" marL="0">
               <a:buNone/>
@@ -6071,7 +6071,7 @@
                 <a:ea typeface="Calibri" pitchFamily="34" charset="-122"/>
                 <a:cs typeface="Calibri" pitchFamily="34" charset="-120"/>
               </a:rPr>
-              <a:t> butterfly landed on a </a:t>
+              <a:t> decorated with ribbons and balloons. The old photograph had </a:t>
             </a:r>
             <a:pPr algn="l" indent="0" marL="0">
               <a:buNone/>
@@ -6102,7 +6102,7 @@
                 <a:ea typeface="Calibri" pitchFamily="34" charset="-122"/>
                 <a:cs typeface="Calibri" pitchFamily="34" charset="-120"/>
               </a:rPr>
-              <a:t> leaf near the pond.</a:t>
+              <a:t> with age.</a:t>
             </a:r>
             <a:endParaRPr lang="en-US" sz="1800" dirty="0"/>
           </a:p>
@@ -6257,7 +6257,7 @@
                 <a:ea typeface="Trebuchet MS" pitchFamily="34" charset="-122"/>
                 <a:cs typeface="Trebuchet MS" pitchFamily="34" charset="-120"/>
               </a:rPr>
-              <a:t>colourful</a:t>
+              <a:t>colourfully</a:t>
             </a:r>
             <a:endParaRPr lang="en-US" sz="1400" dirty="0"/>
           </a:p>
@@ -6716,7 +6716,7 @@
                 <a:ea typeface="Calibri" pitchFamily="34" charset="-122"/>
                 <a:cs typeface="Calibri" pitchFamily="34" charset="-120"/>
               </a:rPr>
-              <a:t>Word Labs  •  wordlabs.app  •  Root: 'colour' = hue, tint, or shade</a:t>
+              <a:t>Word Labs  •  wordlabs.app  •  Root: 'colour' = the property of light; to add colour</a:t>
             </a:r>
             <a:endParaRPr lang="en-US" sz="800" dirty="0"/>
           </a:p>
@@ -6855,7 +6855,7 @@
                 <a:ea typeface="Trebuchet MS" pitchFamily="34" charset="-122"/>
                 <a:cs typeface="Trebuchet MS" pitchFamily="34" charset="-120"/>
               </a:rPr>
-              <a:t>colourful</a:t>
+              <a:t>colourfully</a:t>
             </a:r>
             <a:endParaRPr lang="en-US" sz="2800" dirty="0"/>
           </a:p>
@@ -7543,7 +7543,7 @@
                 <a:ea typeface="Calibri" pitchFamily="34" charset="-122"/>
                 <a:cs typeface="Calibri" pitchFamily="34" charset="-120"/>
               </a:rPr>
-              <a:t>Word Labs  •  wordlabs.app  •  Root: 'colour' = hue, tint, or shade</a:t>
+              <a:t>Word Labs  •  wordlabs.app  •  Root: 'colour' = the property of light; to add colour</a:t>
             </a:r>
             <a:endParaRPr lang="en-US" sz="800" dirty="0"/>
           </a:p>
@@ -7682,7 +7682,7 @@
                 <a:ea typeface="Trebuchet MS" pitchFamily="34" charset="-122"/>
                 <a:cs typeface="Trebuchet MS" pitchFamily="34" charset="-120"/>
               </a:rPr>
-              <a:t>colourful</a:t>
+              <a:t>colourfully</a:t>
             </a:r>
             <a:endParaRPr lang="en-US" sz="2800" dirty="0"/>
           </a:p>
@@ -7762,7 +7762,7 @@
         </p:nvSpPr>
         <p:spPr>
           <a:xfrm>
-            <a:off x="2938272" y="2258568"/>
+            <a:off x="2221992" y="2258568"/>
             <a:ext cx="1828800" cy="292608"/>
           </a:xfrm>
           <a:prstGeom prst="rect">
@@ -7796,7 +7796,7 @@
         </p:nvSpPr>
         <p:spPr>
           <a:xfrm>
-            <a:off x="2938272" y="2258568"/>
+            <a:off x="2221992" y="2258568"/>
             <a:ext cx="1828800" cy="292608"/>
           </a:xfrm>
           <a:prstGeom prst="rect">
@@ -7835,7 +7835,7 @@
         </p:nvSpPr>
         <p:spPr>
           <a:xfrm>
-            <a:off x="2938272" y="2569464"/>
+            <a:off x="2221992" y="2569464"/>
             <a:ext cx="1828800" cy="201168"/>
           </a:xfrm>
           <a:prstGeom prst="rect">
@@ -7860,7 +7860,7 @@
                 <a:ea typeface="Calibri" pitchFamily="34" charset="-122"/>
                 <a:cs typeface="Calibri" pitchFamily="34" charset="-120"/>
               </a:rPr>
-              <a:t>hue or shade</a:t>
+              <a:t>the property of light; to add colour</a:t>
             </a:r>
             <a:endParaRPr lang="en-US" sz="850" dirty="0"/>
           </a:p>
@@ -7874,7 +7874,7 @@
         </p:nvSpPr>
         <p:spPr>
           <a:xfrm>
-            <a:off x="5803392" y="2258568"/>
+            <a:off x="4370832" y="2258568"/>
             <a:ext cx="1828800" cy="292608"/>
           </a:xfrm>
           <a:prstGeom prst="rect">
@@ -7908,7 +7908,7 @@
         </p:nvSpPr>
         <p:spPr>
           <a:xfrm>
-            <a:off x="5803392" y="2258568"/>
+            <a:off x="4370832" y="2258568"/>
             <a:ext cx="1828800" cy="292608"/>
           </a:xfrm>
           <a:prstGeom prst="rect">
@@ -7947,7 +7947,7 @@
         </p:nvSpPr>
         <p:spPr>
           <a:xfrm>
-            <a:off x="5803392" y="2569464"/>
+            <a:off x="4370832" y="2569464"/>
             <a:ext cx="1828800" cy="201168"/>
           </a:xfrm>
           <a:prstGeom prst="rect">
@@ -7986,6 +7986,118 @@
         </p:nvSpPr>
         <p:spPr>
           <a:xfrm>
+            <a:off x="6519672" y="2258568"/>
+            <a:ext cx="1828800" cy="292608"/>
+          </a:xfrm>
+          <a:prstGeom prst="rect">
+            <a:avLst>
+              <a:gd name="adj" fmla="val 25000"/>
+            </a:avLst>
+          </a:prstGeom>
+          <a:solidFill>
+            <a:srgbClr val="FCE7F3"/>
+          </a:solidFill>
+          <a:ln w="19050">
+            <a:solidFill>
+              <a:srgbClr val="DB2777"/>
+            </a:solidFill>
+            <a:prstDash val="solid"/>
+          </a:ln>
+          <a:effectLst>
+            <a:outerShdw sx="100000" sy="100000" kx="0" ky="0" algn="bl" rotWithShape="0" blurRad="101600" dist="38100" dir="8100000">
+              <a:srgbClr val="000000">
+                <a:alpha val="12000"/>
+              </a:srgbClr>
+            </a:outerShdw>
+          </a:effectLst>
+        </p:spPr>
+      </p:sp>
+      <p:sp>
+        <p:nvSpPr>
+          <p:cNvPr id="23" name="Text 21"/>
+          <p:cNvSpPr/>
+          <p:nvPr/>
+        </p:nvSpPr>
+        <p:spPr>
+          <a:xfrm>
+            <a:off x="6519672" y="2258568"/>
+            <a:ext cx="1828800" cy="292608"/>
+          </a:xfrm>
+          <a:prstGeom prst="rect">
+            <a:avLst/>
+          </a:prstGeom>
+          <a:noFill/>
+          <a:ln/>
+        </p:spPr>
+        <p:txBody>
+          <a:bodyPr wrap="square" lIns="0" tIns="0" rIns="0" bIns="0" rtlCol="0" anchor="ctr"/>
+          <a:lstStyle/>
+          <a:p>
+            <a:pPr algn="ctr" indent="0" marL="0">
+              <a:buNone/>
+            </a:pPr>
+            <a:r>
+              <a:rPr lang="en-US" sz="1300" b="1" dirty="0">
+                <a:solidFill>
+                  <a:srgbClr val="9D174D"/>
+                </a:solidFill>
+                <a:latin typeface="Trebuchet MS" pitchFamily="34" charset="0"/>
+                <a:ea typeface="Trebuchet MS" pitchFamily="34" charset="-122"/>
+                <a:cs typeface="Trebuchet MS" pitchFamily="34" charset="-120"/>
+              </a:rPr>
+              <a:t>ly</a:t>
+            </a:r>
+            <a:endParaRPr lang="en-US" sz="1300" dirty="0"/>
+          </a:p>
+        </p:txBody>
+      </p:sp>
+      <p:sp>
+        <p:nvSpPr>
+          <p:cNvPr id="24" name="Text 22"/>
+          <p:cNvSpPr/>
+          <p:nvPr/>
+        </p:nvSpPr>
+        <p:spPr>
+          <a:xfrm>
+            <a:off x="6519672" y="2569464"/>
+            <a:ext cx="1828800" cy="201168"/>
+          </a:xfrm>
+          <a:prstGeom prst="rect">
+            <a:avLst/>
+          </a:prstGeom>
+          <a:noFill/>
+          <a:ln/>
+        </p:spPr>
+        <p:txBody>
+          <a:bodyPr wrap="square" lIns="0" tIns="0" rIns="0" bIns="0" rtlCol="0" anchor="t"/>
+          <a:lstStyle/>
+          <a:p>
+            <a:pPr algn="ctr" indent="0" marL="0">
+              <a:buNone/>
+            </a:pPr>
+            <a:r>
+              <a:rPr lang="en-US" sz="850" dirty="0">
+                <a:solidFill>
+                  <a:srgbClr val="475569"/>
+                </a:solidFill>
+                <a:latin typeface="Calibri" pitchFamily="34" charset="0"/>
+                <a:ea typeface="Calibri" pitchFamily="34" charset="-122"/>
+                <a:cs typeface="Calibri" pitchFamily="34" charset="-120"/>
+              </a:rPr>
+              <a:t>in a way</a:t>
+            </a:r>
+            <a:endParaRPr lang="en-US" sz="850" dirty="0"/>
+          </a:p>
+        </p:txBody>
+      </p:sp>
+      <p:sp>
+        <p:nvSpPr>
+          <p:cNvPr id="25" name="Shape 23"/>
+          <p:cNvSpPr/>
+          <p:nvPr/>
+        </p:nvSpPr>
+        <p:spPr>
+          <a:xfrm>
             <a:off x="365760" y="3273552"/>
             <a:ext cx="1371600" cy="658368"/>
           </a:xfrm>
@@ -8007,7 +8119,7 @@
       </p:sp>
       <p:sp>
         <p:nvSpPr>
-          <p:cNvPr id="23" name="Text 21"/>
+          <p:cNvPr id="26" name="Text 24"/>
           <p:cNvSpPr/>
           <p:nvPr/>
         </p:nvSpPr>
@@ -8046,7 +8158,7 @@
       </p:sp>
       <p:sp>
         <p:nvSpPr>
-          <p:cNvPr id="24" name="Shape 22"/>
+          <p:cNvPr id="27" name="Shape 25"/>
           <p:cNvSpPr/>
           <p:nvPr/>
         </p:nvSpPr>
@@ -8073,7 +8185,7 @@
       </p:sp>
       <p:sp>
         <p:nvSpPr>
-          <p:cNvPr id="25" name="Text 23"/>
+          <p:cNvPr id="28" name="Text 26"/>
           <p:cNvSpPr/>
           <p:nvPr/>
         </p:nvSpPr>
@@ -8112,7 +8224,7 @@
       </p:sp>
       <p:sp>
         <p:nvSpPr>
-          <p:cNvPr id="26" name="Shape 24"/>
+          <p:cNvPr id="29" name="Shape 27"/>
           <p:cNvSpPr/>
           <p:nvPr/>
         </p:nvSpPr>
@@ -8139,7 +8251,7 @@
       </p:sp>
       <p:sp>
         <p:nvSpPr>
-          <p:cNvPr id="27" name="Text 25"/>
+          <p:cNvPr id="30" name="Text 28"/>
           <p:cNvSpPr/>
           <p:nvPr/>
         </p:nvSpPr>
@@ -8178,7 +8290,7 @@
       </p:sp>
       <p:sp>
         <p:nvSpPr>
-          <p:cNvPr id="28" name="Shape 26"/>
+          <p:cNvPr id="31" name="Shape 29"/>
           <p:cNvSpPr/>
           <p:nvPr/>
         </p:nvSpPr>
@@ -8205,7 +8317,7 @@
       </p:sp>
       <p:sp>
         <p:nvSpPr>
-          <p:cNvPr id="29" name="Text 27"/>
+          <p:cNvPr id="32" name="Text 30"/>
           <p:cNvSpPr/>
           <p:nvPr/>
         </p:nvSpPr>
@@ -8528,7 +8640,7 @@
                 <a:ea typeface="Calibri" pitchFamily="34" charset="-122"/>
                 <a:cs typeface="Calibri" pitchFamily="34" charset="-120"/>
               </a:rPr>
-              <a:t>Word Labs  •  wordlabs.app  •  Root: 'colour' = hue, tint, or shade</a:t>
+              <a:t>Word Labs  •  wordlabs.app  •  Root: 'colour' = the property of light; to add colour</a:t>
             </a:r>
             <a:endParaRPr lang="en-US" sz="800" dirty="0"/>
           </a:p>
@@ -8667,7 +8779,7 @@
                 <a:ea typeface="Trebuchet MS" pitchFamily="34" charset="-122"/>
                 <a:cs typeface="Trebuchet MS" pitchFamily="34" charset="-120"/>
               </a:rPr>
-              <a:t>colourful</a:t>
+              <a:t>colourfully</a:t>
             </a:r>
             <a:endParaRPr lang="en-US" sz="2800" dirty="0"/>
           </a:p>
@@ -8747,7 +8859,7 @@
         </p:nvSpPr>
         <p:spPr>
           <a:xfrm>
-            <a:off x="2938272" y="2258568"/>
+            <a:off x="2221992" y="2258568"/>
             <a:ext cx="1828800" cy="292608"/>
           </a:xfrm>
           <a:prstGeom prst="rect">
@@ -8781,7 +8893,7 @@
         </p:nvSpPr>
         <p:spPr>
           <a:xfrm>
-            <a:off x="2938272" y="2258568"/>
+            <a:off x="2221992" y="2258568"/>
             <a:ext cx="1828800" cy="292608"/>
           </a:xfrm>
           <a:prstGeom prst="rect">
@@ -8820,7 +8932,7 @@
         </p:nvSpPr>
         <p:spPr>
           <a:xfrm>
-            <a:off x="2938272" y="2569464"/>
+            <a:off x="2221992" y="2569464"/>
             <a:ext cx="1828800" cy="201168"/>
           </a:xfrm>
           <a:prstGeom prst="rect">
@@ -8845,7 +8957,7 @@
                 <a:ea typeface="Calibri" pitchFamily="34" charset="-122"/>
                 <a:cs typeface="Calibri" pitchFamily="34" charset="-120"/>
               </a:rPr>
-              <a:t>hue or shade</a:t>
+              <a:t>the property of light; to add colour</a:t>
             </a:r>
             <a:endParaRPr lang="en-US" sz="850" dirty="0"/>
           </a:p>
@@ -8859,7 +8971,7 @@
         </p:nvSpPr>
         <p:spPr>
           <a:xfrm>
-            <a:off x="5803392" y="2258568"/>
+            <a:off x="4370832" y="2258568"/>
             <a:ext cx="1828800" cy="292608"/>
           </a:xfrm>
           <a:prstGeom prst="rect">
@@ -8893,7 +9005,7 @@
         </p:nvSpPr>
         <p:spPr>
           <a:xfrm>
-            <a:off x="5803392" y="2258568"/>
+            <a:off x="4370832" y="2258568"/>
             <a:ext cx="1828800" cy="292608"/>
           </a:xfrm>
           <a:prstGeom prst="rect">
@@ -8932,7 +9044,7 @@
         </p:nvSpPr>
         <p:spPr>
           <a:xfrm>
-            <a:off x="5803392" y="2569464"/>
+            <a:off x="4370832" y="2569464"/>
             <a:ext cx="1828800" cy="201168"/>
           </a:xfrm>
           <a:prstGeom prst="rect">
@@ -8971,6 +9083,118 @@
         </p:nvSpPr>
         <p:spPr>
           <a:xfrm>
+            <a:off x="6519672" y="2258568"/>
+            <a:ext cx="1828800" cy="292608"/>
+          </a:xfrm>
+          <a:prstGeom prst="rect">
+            <a:avLst>
+              <a:gd name="adj" fmla="val 25000"/>
+            </a:avLst>
+          </a:prstGeom>
+          <a:solidFill>
+            <a:srgbClr val="FCE7F3"/>
+          </a:solidFill>
+          <a:ln w="19050">
+            <a:solidFill>
+              <a:srgbClr val="DB2777"/>
+            </a:solidFill>
+            <a:prstDash val="solid"/>
+          </a:ln>
+          <a:effectLst>
+            <a:outerShdw sx="100000" sy="100000" kx="0" ky="0" algn="bl" rotWithShape="0" blurRad="101600" dist="38100" dir="8100000">
+              <a:srgbClr val="000000">
+                <a:alpha val="12000"/>
+              </a:srgbClr>
+            </a:outerShdw>
+          </a:effectLst>
+        </p:spPr>
+      </p:sp>
+      <p:sp>
+        <p:nvSpPr>
+          <p:cNvPr id="23" name="Text 21"/>
+          <p:cNvSpPr/>
+          <p:nvPr/>
+        </p:nvSpPr>
+        <p:spPr>
+          <a:xfrm>
+            <a:off x="6519672" y="2258568"/>
+            <a:ext cx="1828800" cy="292608"/>
+          </a:xfrm>
+          <a:prstGeom prst="rect">
+            <a:avLst/>
+          </a:prstGeom>
+          <a:noFill/>
+          <a:ln/>
+        </p:spPr>
+        <p:txBody>
+          <a:bodyPr wrap="square" lIns="0" tIns="0" rIns="0" bIns="0" rtlCol="0" anchor="ctr"/>
+          <a:lstStyle/>
+          <a:p>
+            <a:pPr algn="ctr" indent="0" marL="0">
+              <a:buNone/>
+            </a:pPr>
+            <a:r>
+              <a:rPr lang="en-US" sz="1300" b="1" dirty="0">
+                <a:solidFill>
+                  <a:srgbClr val="9D174D"/>
+                </a:solidFill>
+                <a:latin typeface="Trebuchet MS" pitchFamily="34" charset="0"/>
+                <a:ea typeface="Trebuchet MS" pitchFamily="34" charset="-122"/>
+                <a:cs typeface="Trebuchet MS" pitchFamily="34" charset="-120"/>
+              </a:rPr>
+              <a:t>ly</a:t>
+            </a:r>
+            <a:endParaRPr lang="en-US" sz="1300" dirty="0"/>
+          </a:p>
+        </p:txBody>
+      </p:sp>
+      <p:sp>
+        <p:nvSpPr>
+          <p:cNvPr id="24" name="Text 22"/>
+          <p:cNvSpPr/>
+          <p:nvPr/>
+        </p:nvSpPr>
+        <p:spPr>
+          <a:xfrm>
+            <a:off x="6519672" y="2569464"/>
+            <a:ext cx="1828800" cy="201168"/>
+          </a:xfrm>
+          <a:prstGeom prst="rect">
+            <a:avLst/>
+          </a:prstGeom>
+          <a:noFill/>
+          <a:ln/>
+        </p:spPr>
+        <p:txBody>
+          <a:bodyPr wrap="square" lIns="0" tIns="0" rIns="0" bIns="0" rtlCol="0" anchor="t"/>
+          <a:lstStyle/>
+          <a:p>
+            <a:pPr algn="ctr" indent="0" marL="0">
+              <a:buNone/>
+            </a:pPr>
+            <a:r>
+              <a:rPr lang="en-US" sz="850" dirty="0">
+                <a:solidFill>
+                  <a:srgbClr val="475569"/>
+                </a:solidFill>
+                <a:latin typeface="Calibri" pitchFamily="34" charset="0"/>
+                <a:ea typeface="Calibri" pitchFamily="34" charset="-122"/>
+                <a:cs typeface="Calibri" pitchFamily="34" charset="-120"/>
+              </a:rPr>
+              <a:t>in a way</a:t>
+            </a:r>
+            <a:endParaRPr lang="en-US" sz="850" dirty="0"/>
+          </a:p>
+        </p:txBody>
+      </p:sp>
+      <p:sp>
+        <p:nvSpPr>
+          <p:cNvPr id="25" name="Shape 23"/>
+          <p:cNvSpPr/>
+          <p:nvPr/>
+        </p:nvSpPr>
+        <p:spPr>
+          <a:xfrm>
             <a:off x="365760" y="3273552"/>
             <a:ext cx="1371600" cy="658368"/>
           </a:xfrm>
@@ -8992,7 +9216,7 @@
       </p:sp>
       <p:sp>
         <p:nvSpPr>
-          <p:cNvPr id="23" name="Text 21"/>
+          <p:cNvPr id="26" name="Text 24"/>
           <p:cNvSpPr/>
           <p:nvPr/>
         </p:nvSpPr>
@@ -9031,7 +9255,7 @@
       </p:sp>
       <p:sp>
         <p:nvSpPr>
-          <p:cNvPr id="24" name="Shape 22"/>
+          <p:cNvPr id="27" name="Shape 25"/>
           <p:cNvSpPr/>
           <p:nvPr/>
         </p:nvSpPr>
@@ -9058,14 +9282,14 @@
       </p:sp>
       <p:sp>
         <p:nvSpPr>
-          <p:cNvPr id="25" name="Shape 23"/>
-          <p:cNvSpPr/>
-          <p:nvPr/>
-        </p:nvSpPr>
-        <p:spPr>
-          <a:xfrm>
-            <a:off x="2313432" y="3364992"/>
-            <a:ext cx="1645920" cy="475488"/>
+          <p:cNvPr id="28" name="Shape 26"/>
+          <p:cNvSpPr/>
+          <p:nvPr/>
+        </p:nvSpPr>
+        <p:spPr>
+          <a:xfrm>
+            <a:off x="1975104" y="3364992"/>
+            <a:ext cx="1554480" cy="475488"/>
           </a:xfrm>
           <a:prstGeom prst="rect">
             <a:avLst>
@@ -9085,14 +9309,14 @@
       </p:sp>
       <p:sp>
         <p:nvSpPr>
-          <p:cNvPr id="26" name="Text 24"/>
-          <p:cNvSpPr/>
-          <p:nvPr/>
-        </p:nvSpPr>
-        <p:spPr>
-          <a:xfrm>
-            <a:off x="2313432" y="3364992"/>
-            <a:ext cx="1645920" cy="475488"/>
+          <p:cNvPr id="29" name="Text 27"/>
+          <p:cNvSpPr/>
+          <p:nvPr/>
+        </p:nvSpPr>
+        <p:spPr>
+          <a:xfrm>
+            <a:off x="1975104" y="3364992"/>
+            <a:ext cx="1554480" cy="475488"/>
           </a:xfrm>
           <a:prstGeom prst="rect">
             <a:avLst/>
@@ -9124,14 +9348,14 @@
       </p:sp>
       <p:sp>
         <p:nvSpPr>
-          <p:cNvPr id="27" name="Text 25"/>
-          <p:cNvSpPr/>
-          <p:nvPr/>
-        </p:nvSpPr>
-        <p:spPr>
-          <a:xfrm>
-            <a:off x="3959352" y="3364992"/>
-            <a:ext cx="411480" cy="475488"/>
+          <p:cNvPr id="30" name="Text 28"/>
+          <p:cNvSpPr/>
+          <p:nvPr/>
+        </p:nvSpPr>
+        <p:spPr>
+          <a:xfrm>
+            <a:off x="3529584" y="3364992"/>
+            <a:ext cx="73152" cy="475488"/>
           </a:xfrm>
           <a:prstGeom prst="rect">
             <a:avLst/>
@@ -9163,14 +9387,14 @@
       </p:sp>
       <p:sp>
         <p:nvSpPr>
-          <p:cNvPr id="28" name="Shape 26"/>
-          <p:cNvSpPr/>
-          <p:nvPr/>
-        </p:nvSpPr>
-        <p:spPr>
-          <a:xfrm>
-            <a:off x="4370832" y="3364992"/>
-            <a:ext cx="1645920" cy="475488"/>
+          <p:cNvPr id="31" name="Shape 29"/>
+          <p:cNvSpPr/>
+          <p:nvPr/>
+        </p:nvSpPr>
+        <p:spPr>
+          <a:xfrm>
+            <a:off x="3602736" y="3364992"/>
+            <a:ext cx="1554480" cy="475488"/>
           </a:xfrm>
           <a:prstGeom prst="rect">
             <a:avLst>
@@ -9190,14 +9414,14 @@
       </p:sp>
       <p:sp>
         <p:nvSpPr>
-          <p:cNvPr id="29" name="Text 27"/>
-          <p:cNvSpPr/>
-          <p:nvPr/>
-        </p:nvSpPr>
-        <p:spPr>
-          <a:xfrm>
-            <a:off x="4370832" y="3364992"/>
-            <a:ext cx="1645920" cy="475488"/>
+          <p:cNvPr id="32" name="Text 30"/>
+          <p:cNvSpPr/>
+          <p:nvPr/>
+        </p:nvSpPr>
+        <p:spPr>
+          <a:xfrm>
+            <a:off x="3602736" y="3364992"/>
+            <a:ext cx="1554480" cy="475488"/>
           </a:xfrm>
           <a:prstGeom prst="rect">
             <a:avLst/>
@@ -9229,14 +9453,14 @@
       </p:sp>
       <p:sp>
         <p:nvSpPr>
-          <p:cNvPr id="30" name="Text 28"/>
-          <p:cNvSpPr/>
-          <p:nvPr/>
-        </p:nvSpPr>
-        <p:spPr>
-          <a:xfrm>
-            <a:off x="6016752" y="3364992"/>
-            <a:ext cx="411480" cy="475488"/>
+          <p:cNvPr id="33" name="Text 31"/>
+          <p:cNvSpPr/>
+          <p:nvPr/>
+        </p:nvSpPr>
+        <p:spPr>
+          <a:xfrm>
+            <a:off x="5157216" y="3364992"/>
+            <a:ext cx="73152" cy="475488"/>
           </a:xfrm>
           <a:prstGeom prst="rect">
             <a:avLst/>
@@ -9268,14 +9492,14 @@
       </p:sp>
       <p:sp>
         <p:nvSpPr>
-          <p:cNvPr id="31" name="Shape 29"/>
-          <p:cNvSpPr/>
-          <p:nvPr/>
-        </p:nvSpPr>
-        <p:spPr>
-          <a:xfrm>
-            <a:off x="6428232" y="3364992"/>
-            <a:ext cx="1645920" cy="475488"/>
+          <p:cNvPr id="34" name="Shape 32"/>
+          <p:cNvSpPr/>
+          <p:nvPr/>
+        </p:nvSpPr>
+        <p:spPr>
+          <a:xfrm>
+            <a:off x="5230368" y="3364992"/>
+            <a:ext cx="1554480" cy="475488"/>
           </a:xfrm>
           <a:prstGeom prst="rect">
             <a:avLst>
@@ -9295,14 +9519,14 @@
       </p:sp>
       <p:sp>
         <p:nvSpPr>
-          <p:cNvPr id="32" name="Text 30"/>
-          <p:cNvSpPr/>
-          <p:nvPr/>
-        </p:nvSpPr>
-        <p:spPr>
-          <a:xfrm>
-            <a:off x="6428232" y="3364992"/>
-            <a:ext cx="1645920" cy="475488"/>
+          <p:cNvPr id="35" name="Text 33"/>
+          <p:cNvSpPr/>
+          <p:nvPr/>
+        </p:nvSpPr>
+        <p:spPr>
+          <a:xfrm>
+            <a:off x="5230368" y="3364992"/>
+            <a:ext cx="1554480" cy="475488"/>
           </a:xfrm>
           <a:prstGeom prst="rect">
             <a:avLst/>
@@ -9334,7 +9558,112 @@
       </p:sp>
       <p:sp>
         <p:nvSpPr>
-          <p:cNvPr id="33" name="Shape 31"/>
+          <p:cNvPr id="36" name="Text 34"/>
+          <p:cNvSpPr/>
+          <p:nvPr/>
+        </p:nvSpPr>
+        <p:spPr>
+          <a:xfrm>
+            <a:off x="6784848" y="3364992"/>
+            <a:ext cx="73152" cy="475488"/>
+          </a:xfrm>
+          <a:prstGeom prst="rect">
+            <a:avLst/>
+          </a:prstGeom>
+          <a:noFill/>
+          <a:ln/>
+        </p:spPr>
+        <p:txBody>
+          <a:bodyPr wrap="square" lIns="0" tIns="0" rIns="0" bIns="0" rtlCol="0" anchor="ctr"/>
+          <a:lstStyle/>
+          <a:p>
+            <a:pPr algn="ctr" indent="0" marL="0">
+              <a:buNone/>
+            </a:pPr>
+            <a:r>
+              <a:rPr lang="en-US" sz="1600" b="1" dirty="0">
+                <a:solidFill>
+                  <a:srgbClr val="0D9488"/>
+                </a:solidFill>
+                <a:latin typeface="Trebuchet MS" pitchFamily="34" charset="0"/>
+                <a:ea typeface="Trebuchet MS" pitchFamily="34" charset="-122"/>
+                <a:cs typeface="Trebuchet MS" pitchFamily="34" charset="-120"/>
+              </a:rPr>
+              <a:t>·</a:t>
+            </a:r>
+            <a:endParaRPr lang="en-US" sz="1600" dirty="0"/>
+          </a:p>
+        </p:txBody>
+      </p:sp>
+      <p:sp>
+        <p:nvSpPr>
+          <p:cNvPr id="37" name="Shape 35"/>
+          <p:cNvSpPr/>
+          <p:nvPr/>
+        </p:nvSpPr>
+        <p:spPr>
+          <a:xfrm>
+            <a:off x="6858000" y="3364992"/>
+            <a:ext cx="1554480" cy="475488"/>
+          </a:xfrm>
+          <a:prstGeom prst="rect">
+            <a:avLst>
+              <a:gd name="adj" fmla="val 9615"/>
+            </a:avLst>
+          </a:prstGeom>
+          <a:solidFill>
+            <a:srgbClr val="FFFFFF"/>
+          </a:solidFill>
+          <a:ln w="12700">
+            <a:solidFill>
+              <a:srgbClr val="0D9488"/>
+            </a:solidFill>
+            <a:prstDash val="solid"/>
+          </a:ln>
+        </p:spPr>
+      </p:sp>
+      <p:sp>
+        <p:nvSpPr>
+          <p:cNvPr id="38" name="Text 36"/>
+          <p:cNvSpPr/>
+          <p:nvPr/>
+        </p:nvSpPr>
+        <p:spPr>
+          <a:xfrm>
+            <a:off x="6858000" y="3364992"/>
+            <a:ext cx="1554480" cy="475488"/>
+          </a:xfrm>
+          <a:prstGeom prst="rect">
+            <a:avLst/>
+          </a:prstGeom>
+          <a:noFill/>
+          <a:ln/>
+        </p:spPr>
+        <p:txBody>
+          <a:bodyPr wrap="square" lIns="0" tIns="0" rIns="0" bIns="0" rtlCol="0" anchor="ctr"/>
+          <a:lstStyle/>
+          <a:p>
+            <a:pPr algn="ctr" indent="0" marL="0">
+              <a:buNone/>
+            </a:pPr>
+            <a:r>
+              <a:rPr lang="en-US" sz="1400" b="1" dirty="0">
+                <a:solidFill>
+                  <a:srgbClr val="0D9488"/>
+                </a:solidFill>
+                <a:latin typeface="Trebuchet MS" pitchFamily="34" charset="0"/>
+                <a:ea typeface="Trebuchet MS" pitchFamily="34" charset="-122"/>
+                <a:cs typeface="Trebuchet MS" pitchFamily="34" charset="-120"/>
+              </a:rPr>
+              <a:t>ly</a:t>
+            </a:r>
+            <a:endParaRPr lang="en-US" sz="1400" dirty="0"/>
+          </a:p>
+        </p:txBody>
+      </p:sp>
+      <p:sp>
+        <p:nvSpPr>
+          <p:cNvPr id="39" name="Shape 37"/>
           <p:cNvSpPr/>
           <p:nvPr/>
         </p:nvSpPr>
@@ -9361,7 +9690,7 @@
       </p:sp>
       <p:sp>
         <p:nvSpPr>
-          <p:cNvPr id="34" name="Text 32"/>
+          <p:cNvPr id="40" name="Text 38"/>
           <p:cNvSpPr/>
           <p:nvPr/>
         </p:nvSpPr>
@@ -9400,7 +9729,7 @@
       </p:sp>
       <p:sp>
         <p:nvSpPr>
-          <p:cNvPr id="35" name="Shape 33"/>
+          <p:cNvPr id="41" name="Shape 39"/>
           <p:cNvSpPr/>
           <p:nvPr/>
         </p:nvSpPr>
@@ -9427,7 +9756,7 @@
       </p:sp>
       <p:sp>
         <p:nvSpPr>
-          <p:cNvPr id="36" name="Text 34"/>
+          <p:cNvPr id="42" name="Text 40"/>
           <p:cNvSpPr/>
           <p:nvPr/>
         </p:nvSpPr>
@@ -9750,7 +10079,7 @@
                 <a:ea typeface="Calibri" pitchFamily="34" charset="-122"/>
                 <a:cs typeface="Calibri" pitchFamily="34" charset="-120"/>
               </a:rPr>
-              <a:t>Word Labs  •  wordlabs.app  •  Root: 'colour' = hue, tint, or shade</a:t>
+              <a:t>Word Labs  •  wordlabs.app  •  Root: 'colour' = the property of light; to add colour</a:t>
             </a:r>
             <a:endParaRPr lang="en-US" sz="800" dirty="0"/>
           </a:p>
@@ -9889,7 +10218,7 @@
                 <a:ea typeface="Trebuchet MS" pitchFamily="34" charset="-122"/>
                 <a:cs typeface="Trebuchet MS" pitchFamily="34" charset="-120"/>
               </a:rPr>
-              <a:t>colourful</a:t>
+              <a:t>colourfully</a:t>
             </a:r>
             <a:endParaRPr lang="en-US" sz="2800" dirty="0"/>
           </a:p>
@@ -9969,7 +10298,7 @@
         </p:nvSpPr>
         <p:spPr>
           <a:xfrm>
-            <a:off x="2938272" y="2258568"/>
+            <a:off x="2221992" y="2258568"/>
             <a:ext cx="1828800" cy="292608"/>
           </a:xfrm>
           <a:prstGeom prst="rect">
@@ -10003,7 +10332,7 @@
         </p:nvSpPr>
         <p:spPr>
           <a:xfrm>
-            <a:off x="2938272" y="2258568"/>
+            <a:off x="2221992" y="2258568"/>
             <a:ext cx="1828800" cy="292608"/>
           </a:xfrm>
           <a:prstGeom prst="rect">
@@ -10042,7 +10371,7 @@
         </p:nvSpPr>
         <p:spPr>
           <a:xfrm>
-            <a:off x="2938272" y="2569464"/>
+            <a:off x="2221992" y="2569464"/>
             <a:ext cx="1828800" cy="201168"/>
           </a:xfrm>
           <a:prstGeom prst="rect">
@@ -10067,7 +10396,7 @@
                 <a:ea typeface="Calibri" pitchFamily="34" charset="-122"/>
                 <a:cs typeface="Calibri" pitchFamily="34" charset="-120"/>
               </a:rPr>
-              <a:t>hue or shade</a:t>
+              <a:t>the property of light; to add colour</a:t>
             </a:r>
             <a:endParaRPr lang="en-US" sz="850" dirty="0"/>
           </a:p>
@@ -10081,7 +10410,7 @@
         </p:nvSpPr>
         <p:spPr>
           <a:xfrm>
-            <a:off x="5803392" y="2258568"/>
+            <a:off x="4370832" y="2258568"/>
             <a:ext cx="1828800" cy="292608"/>
           </a:xfrm>
           <a:prstGeom prst="rect">
@@ -10115,7 +10444,7 @@
         </p:nvSpPr>
         <p:spPr>
           <a:xfrm>
-            <a:off x="5803392" y="2258568"/>
+            <a:off x="4370832" y="2258568"/>
             <a:ext cx="1828800" cy="292608"/>
           </a:xfrm>
           <a:prstGeom prst="rect">
@@ -10154,7 +10483,7 @@
         </p:nvSpPr>
         <p:spPr>
           <a:xfrm>
-            <a:off x="5803392" y="2569464"/>
+            <a:off x="4370832" y="2569464"/>
             <a:ext cx="1828800" cy="201168"/>
           </a:xfrm>
           <a:prstGeom prst="rect">
@@ -10193,6 +10522,118 @@
         </p:nvSpPr>
         <p:spPr>
           <a:xfrm>
+            <a:off x="6519672" y="2258568"/>
+            <a:ext cx="1828800" cy="292608"/>
+          </a:xfrm>
+          <a:prstGeom prst="rect">
+            <a:avLst>
+              <a:gd name="adj" fmla="val 25000"/>
+            </a:avLst>
+          </a:prstGeom>
+          <a:solidFill>
+            <a:srgbClr val="FCE7F3"/>
+          </a:solidFill>
+          <a:ln w="19050">
+            <a:solidFill>
+              <a:srgbClr val="DB2777"/>
+            </a:solidFill>
+            <a:prstDash val="solid"/>
+          </a:ln>
+          <a:effectLst>
+            <a:outerShdw sx="100000" sy="100000" kx="0" ky="0" algn="bl" rotWithShape="0" blurRad="101600" dist="38100" dir="8100000">
+              <a:srgbClr val="000000">
+                <a:alpha val="12000"/>
+              </a:srgbClr>
+            </a:outerShdw>
+          </a:effectLst>
+        </p:spPr>
+      </p:sp>
+      <p:sp>
+        <p:nvSpPr>
+          <p:cNvPr id="23" name="Text 21"/>
+          <p:cNvSpPr/>
+          <p:nvPr/>
+        </p:nvSpPr>
+        <p:spPr>
+          <a:xfrm>
+            <a:off x="6519672" y="2258568"/>
+            <a:ext cx="1828800" cy="292608"/>
+          </a:xfrm>
+          <a:prstGeom prst="rect">
+            <a:avLst/>
+          </a:prstGeom>
+          <a:noFill/>
+          <a:ln/>
+        </p:spPr>
+        <p:txBody>
+          <a:bodyPr wrap="square" lIns="0" tIns="0" rIns="0" bIns="0" rtlCol="0" anchor="ctr"/>
+          <a:lstStyle/>
+          <a:p>
+            <a:pPr algn="ctr" indent="0" marL="0">
+              <a:buNone/>
+            </a:pPr>
+            <a:r>
+              <a:rPr lang="en-US" sz="1300" b="1" dirty="0">
+                <a:solidFill>
+                  <a:srgbClr val="9D174D"/>
+                </a:solidFill>
+                <a:latin typeface="Trebuchet MS" pitchFamily="34" charset="0"/>
+                <a:ea typeface="Trebuchet MS" pitchFamily="34" charset="-122"/>
+                <a:cs typeface="Trebuchet MS" pitchFamily="34" charset="-120"/>
+              </a:rPr>
+              <a:t>ly</a:t>
+            </a:r>
+            <a:endParaRPr lang="en-US" sz="1300" dirty="0"/>
+          </a:p>
+        </p:txBody>
+      </p:sp>
+      <p:sp>
+        <p:nvSpPr>
+          <p:cNvPr id="24" name="Text 22"/>
+          <p:cNvSpPr/>
+          <p:nvPr/>
+        </p:nvSpPr>
+        <p:spPr>
+          <a:xfrm>
+            <a:off x="6519672" y="2569464"/>
+            <a:ext cx="1828800" cy="201168"/>
+          </a:xfrm>
+          <a:prstGeom prst="rect">
+            <a:avLst/>
+          </a:prstGeom>
+          <a:noFill/>
+          <a:ln/>
+        </p:spPr>
+        <p:txBody>
+          <a:bodyPr wrap="square" lIns="0" tIns="0" rIns="0" bIns="0" rtlCol="0" anchor="t"/>
+          <a:lstStyle/>
+          <a:p>
+            <a:pPr algn="ctr" indent="0" marL="0">
+              <a:buNone/>
+            </a:pPr>
+            <a:r>
+              <a:rPr lang="en-US" sz="850" dirty="0">
+                <a:solidFill>
+                  <a:srgbClr val="475569"/>
+                </a:solidFill>
+                <a:latin typeface="Calibri" pitchFamily="34" charset="0"/>
+                <a:ea typeface="Calibri" pitchFamily="34" charset="-122"/>
+                <a:cs typeface="Calibri" pitchFamily="34" charset="-120"/>
+              </a:rPr>
+              <a:t>in a way</a:t>
+            </a:r>
+            <a:endParaRPr lang="en-US" sz="850" dirty="0"/>
+          </a:p>
+        </p:txBody>
+      </p:sp>
+      <p:sp>
+        <p:nvSpPr>
+          <p:cNvPr id="25" name="Shape 23"/>
+          <p:cNvSpPr/>
+          <p:nvPr/>
+        </p:nvSpPr>
+        <p:spPr>
+          <a:xfrm>
             <a:off x="365760" y="3273552"/>
             <a:ext cx="1371600" cy="658368"/>
           </a:xfrm>
@@ -10214,7 +10655,7 @@
       </p:sp>
       <p:sp>
         <p:nvSpPr>
-          <p:cNvPr id="23" name="Text 21"/>
+          <p:cNvPr id="26" name="Text 24"/>
           <p:cNvSpPr/>
           <p:nvPr/>
         </p:nvSpPr>
@@ -10253,7 +10694,7 @@
       </p:sp>
       <p:sp>
         <p:nvSpPr>
-          <p:cNvPr id="24" name="Shape 22"/>
+          <p:cNvPr id="27" name="Shape 25"/>
           <p:cNvSpPr/>
           <p:nvPr/>
         </p:nvSpPr>
@@ -10280,14 +10721,14 @@
       </p:sp>
       <p:sp>
         <p:nvSpPr>
-          <p:cNvPr id="25" name="Shape 23"/>
-          <p:cNvSpPr/>
-          <p:nvPr/>
-        </p:nvSpPr>
-        <p:spPr>
-          <a:xfrm>
-            <a:off x="2313432" y="3364992"/>
-            <a:ext cx="1645920" cy="475488"/>
+          <p:cNvPr id="28" name="Shape 26"/>
+          <p:cNvSpPr/>
+          <p:nvPr/>
+        </p:nvSpPr>
+        <p:spPr>
+          <a:xfrm>
+            <a:off x="1975104" y="3364992"/>
+            <a:ext cx="1554480" cy="475488"/>
           </a:xfrm>
           <a:prstGeom prst="rect">
             <a:avLst>
@@ -10307,14 +10748,14 @@
       </p:sp>
       <p:sp>
         <p:nvSpPr>
-          <p:cNvPr id="26" name="Text 24"/>
-          <p:cNvSpPr/>
-          <p:nvPr/>
-        </p:nvSpPr>
-        <p:spPr>
-          <a:xfrm>
-            <a:off x="2313432" y="3364992"/>
-            <a:ext cx="1645920" cy="475488"/>
+          <p:cNvPr id="29" name="Text 27"/>
+          <p:cNvSpPr/>
+          <p:nvPr/>
+        </p:nvSpPr>
+        <p:spPr>
+          <a:xfrm>
+            <a:off x="1975104" y="3364992"/>
+            <a:ext cx="1554480" cy="475488"/>
           </a:xfrm>
           <a:prstGeom prst="rect">
             <a:avLst/>
@@ -10346,14 +10787,14 @@
       </p:sp>
       <p:sp>
         <p:nvSpPr>
-          <p:cNvPr id="27" name="Text 25"/>
-          <p:cNvSpPr/>
-          <p:nvPr/>
-        </p:nvSpPr>
-        <p:spPr>
-          <a:xfrm>
-            <a:off x="3959352" y="3364992"/>
-            <a:ext cx="411480" cy="475488"/>
+          <p:cNvPr id="30" name="Text 28"/>
+          <p:cNvSpPr/>
+          <p:nvPr/>
+        </p:nvSpPr>
+        <p:spPr>
+          <a:xfrm>
+            <a:off x="3529584" y="3364992"/>
+            <a:ext cx="73152" cy="475488"/>
           </a:xfrm>
           <a:prstGeom prst="rect">
             <a:avLst/>
@@ -10385,14 +10826,14 @@
       </p:sp>
       <p:sp>
         <p:nvSpPr>
-          <p:cNvPr id="28" name="Shape 26"/>
-          <p:cNvSpPr/>
-          <p:nvPr/>
-        </p:nvSpPr>
-        <p:spPr>
-          <a:xfrm>
-            <a:off x="4370832" y="3364992"/>
-            <a:ext cx="1645920" cy="475488"/>
+          <p:cNvPr id="31" name="Shape 29"/>
+          <p:cNvSpPr/>
+          <p:nvPr/>
+        </p:nvSpPr>
+        <p:spPr>
+          <a:xfrm>
+            <a:off x="3602736" y="3364992"/>
+            <a:ext cx="1554480" cy="475488"/>
           </a:xfrm>
           <a:prstGeom prst="rect">
             <a:avLst>
@@ -10412,14 +10853,14 @@
       </p:sp>
       <p:sp>
         <p:nvSpPr>
-          <p:cNvPr id="29" name="Text 27"/>
-          <p:cNvSpPr/>
-          <p:nvPr/>
-        </p:nvSpPr>
-        <p:spPr>
-          <a:xfrm>
-            <a:off x="4370832" y="3364992"/>
-            <a:ext cx="1645920" cy="475488"/>
+          <p:cNvPr id="32" name="Text 30"/>
+          <p:cNvSpPr/>
+          <p:nvPr/>
+        </p:nvSpPr>
+        <p:spPr>
+          <a:xfrm>
+            <a:off x="3602736" y="3364992"/>
+            <a:ext cx="1554480" cy="475488"/>
           </a:xfrm>
           <a:prstGeom prst="rect">
             <a:avLst/>
@@ -10451,14 +10892,14 @@
       </p:sp>
       <p:sp>
         <p:nvSpPr>
-          <p:cNvPr id="30" name="Text 28"/>
-          <p:cNvSpPr/>
-          <p:nvPr/>
-        </p:nvSpPr>
-        <p:spPr>
-          <a:xfrm>
-            <a:off x="6016752" y="3364992"/>
-            <a:ext cx="411480" cy="475488"/>
+          <p:cNvPr id="33" name="Text 31"/>
+          <p:cNvSpPr/>
+          <p:nvPr/>
+        </p:nvSpPr>
+        <p:spPr>
+          <a:xfrm>
+            <a:off x="5157216" y="3364992"/>
+            <a:ext cx="73152" cy="475488"/>
           </a:xfrm>
           <a:prstGeom prst="rect">
             <a:avLst/>
@@ -10490,14 +10931,14 @@
       </p:sp>
       <p:sp>
         <p:nvSpPr>
-          <p:cNvPr id="31" name="Shape 29"/>
-          <p:cNvSpPr/>
-          <p:nvPr/>
-        </p:nvSpPr>
-        <p:spPr>
-          <a:xfrm>
-            <a:off x="6428232" y="3364992"/>
-            <a:ext cx="1645920" cy="475488"/>
+          <p:cNvPr id="34" name="Shape 32"/>
+          <p:cNvSpPr/>
+          <p:nvPr/>
+        </p:nvSpPr>
+        <p:spPr>
+          <a:xfrm>
+            <a:off x="5230368" y="3364992"/>
+            <a:ext cx="1554480" cy="475488"/>
           </a:xfrm>
           <a:prstGeom prst="rect">
             <a:avLst>
@@ -10517,14 +10958,14 @@
       </p:sp>
       <p:sp>
         <p:nvSpPr>
-          <p:cNvPr id="32" name="Text 30"/>
-          <p:cNvSpPr/>
-          <p:nvPr/>
-        </p:nvSpPr>
-        <p:spPr>
-          <a:xfrm>
-            <a:off x="6428232" y="3364992"/>
-            <a:ext cx="1645920" cy="475488"/>
+          <p:cNvPr id="35" name="Text 33"/>
+          <p:cNvSpPr/>
+          <p:nvPr/>
+        </p:nvSpPr>
+        <p:spPr>
+          <a:xfrm>
+            <a:off x="5230368" y="3364992"/>
+            <a:ext cx="1554480" cy="475488"/>
           </a:xfrm>
           <a:prstGeom prst="rect">
             <a:avLst/>
@@ -10556,7 +10997,112 @@
       </p:sp>
       <p:sp>
         <p:nvSpPr>
-          <p:cNvPr id="33" name="Shape 31"/>
+          <p:cNvPr id="36" name="Text 34"/>
+          <p:cNvSpPr/>
+          <p:nvPr/>
+        </p:nvSpPr>
+        <p:spPr>
+          <a:xfrm>
+            <a:off x="6784848" y="3364992"/>
+            <a:ext cx="73152" cy="475488"/>
+          </a:xfrm>
+          <a:prstGeom prst="rect">
+            <a:avLst/>
+          </a:prstGeom>
+          <a:noFill/>
+          <a:ln/>
+        </p:spPr>
+        <p:txBody>
+          <a:bodyPr wrap="square" lIns="0" tIns="0" rIns="0" bIns="0" rtlCol="0" anchor="ctr"/>
+          <a:lstStyle/>
+          <a:p>
+            <a:pPr algn="ctr" indent="0" marL="0">
+              <a:buNone/>
+            </a:pPr>
+            <a:r>
+              <a:rPr lang="en-US" sz="1600" b="1" dirty="0">
+                <a:solidFill>
+                  <a:srgbClr val="0D9488"/>
+                </a:solidFill>
+                <a:latin typeface="Trebuchet MS" pitchFamily="34" charset="0"/>
+                <a:ea typeface="Trebuchet MS" pitchFamily="34" charset="-122"/>
+                <a:cs typeface="Trebuchet MS" pitchFamily="34" charset="-120"/>
+              </a:rPr>
+              <a:t>·</a:t>
+            </a:r>
+            <a:endParaRPr lang="en-US" sz="1600" dirty="0"/>
+          </a:p>
+        </p:txBody>
+      </p:sp>
+      <p:sp>
+        <p:nvSpPr>
+          <p:cNvPr id="37" name="Shape 35"/>
+          <p:cNvSpPr/>
+          <p:nvPr/>
+        </p:nvSpPr>
+        <p:spPr>
+          <a:xfrm>
+            <a:off x="6858000" y="3364992"/>
+            <a:ext cx="1554480" cy="475488"/>
+          </a:xfrm>
+          <a:prstGeom prst="rect">
+            <a:avLst>
+              <a:gd name="adj" fmla="val 9615"/>
+            </a:avLst>
+          </a:prstGeom>
+          <a:solidFill>
+            <a:srgbClr val="FFFFFF"/>
+          </a:solidFill>
+          <a:ln w="12700">
+            <a:solidFill>
+              <a:srgbClr val="0D9488"/>
+            </a:solidFill>
+            <a:prstDash val="solid"/>
+          </a:ln>
+        </p:spPr>
+      </p:sp>
+      <p:sp>
+        <p:nvSpPr>
+          <p:cNvPr id="38" name="Text 36"/>
+          <p:cNvSpPr/>
+          <p:nvPr/>
+        </p:nvSpPr>
+        <p:spPr>
+          <a:xfrm>
+            <a:off x="6858000" y="3364992"/>
+            <a:ext cx="1554480" cy="475488"/>
+          </a:xfrm>
+          <a:prstGeom prst="rect">
+            <a:avLst/>
+          </a:prstGeom>
+          <a:noFill/>
+          <a:ln/>
+        </p:spPr>
+        <p:txBody>
+          <a:bodyPr wrap="square" lIns="0" tIns="0" rIns="0" bIns="0" rtlCol="0" anchor="ctr"/>
+          <a:lstStyle/>
+          <a:p>
+            <a:pPr algn="ctr" indent="0" marL="0">
+              <a:buNone/>
+            </a:pPr>
+            <a:r>
+              <a:rPr lang="en-US" sz="1400" b="1" dirty="0">
+                <a:solidFill>
+                  <a:srgbClr val="0D9488"/>
+                </a:solidFill>
+                <a:latin typeface="Trebuchet MS" pitchFamily="34" charset="0"/>
+                <a:ea typeface="Trebuchet MS" pitchFamily="34" charset="-122"/>
+                <a:cs typeface="Trebuchet MS" pitchFamily="34" charset="-120"/>
+              </a:rPr>
+              <a:t>ly</a:t>
+            </a:r>
+            <a:endParaRPr lang="en-US" sz="1400" dirty="0"/>
+          </a:p>
+        </p:txBody>
+      </p:sp>
+      <p:sp>
+        <p:nvSpPr>
+          <p:cNvPr id="39" name="Shape 37"/>
           <p:cNvSpPr/>
           <p:nvPr/>
         </p:nvSpPr>
@@ -10583,7 +11129,7 @@
       </p:sp>
       <p:sp>
         <p:nvSpPr>
-          <p:cNvPr id="34" name="Text 32"/>
+          <p:cNvPr id="40" name="Text 38"/>
           <p:cNvSpPr/>
           <p:nvPr/>
         </p:nvSpPr>
@@ -10622,18 +11168,18 @@
       </p:sp>
       <p:sp>
         <p:nvSpPr>
-          <p:cNvPr id="35" name="Shape 33"/>
+          <p:cNvPr id="41" name="Shape 39"/>
           <p:cNvSpPr/>
           <p:nvPr/>
         </p:nvSpPr>
         <p:spPr>
           <a:xfrm>
             <a:off x="1874520" y="4096512"/>
-            <a:ext cx="6903720" cy="804672"/>
+            <a:ext cx="6903720" cy="658368"/>
           </a:xfrm>
           <a:prstGeom prst="rect">
             <a:avLst>
-              <a:gd name="adj" fmla="val 6818"/>
+              <a:gd name="adj" fmla="val 8333"/>
             </a:avLst>
           </a:prstGeom>
           <a:solidFill>
@@ -10649,18 +11195,18 @@
       </p:sp>
       <p:sp>
         <p:nvSpPr>
-          <p:cNvPr id="36" name="Shape 34"/>
-          <p:cNvSpPr/>
-          <p:nvPr/>
-        </p:nvSpPr>
-        <p:spPr>
-          <a:xfrm>
-            <a:off x="2023872" y="4169664"/>
-            <a:ext cx="685800" cy="384048"/>
+          <p:cNvPr id="42" name="Shape 40"/>
+          <p:cNvSpPr/>
+          <p:nvPr/>
+        </p:nvSpPr>
+        <p:spPr>
+          <a:xfrm>
+            <a:off x="1951828" y="4169664"/>
+            <a:ext cx="603504" cy="475488"/>
           </a:xfrm>
           <a:prstGeom prst="rect">
             <a:avLst>
-              <a:gd name="adj" fmla="val 9524"/>
+              <a:gd name="adj" fmla="val 7692"/>
             </a:avLst>
           </a:prstGeom>
           <a:solidFill>
@@ -10676,14 +11222,14 @@
       </p:sp>
       <p:sp>
         <p:nvSpPr>
-          <p:cNvPr id="37" name="Text 35"/>
-          <p:cNvSpPr/>
-          <p:nvPr/>
-        </p:nvSpPr>
-        <p:spPr>
-          <a:xfrm>
-            <a:off x="2023872" y="4169664"/>
-            <a:ext cx="685800" cy="384048"/>
+          <p:cNvPr id="43" name="Text 41"/>
+          <p:cNvSpPr/>
+          <p:nvPr/>
+        </p:nvSpPr>
+        <p:spPr>
+          <a:xfrm>
+            <a:off x="1951828" y="4169664"/>
+            <a:ext cx="603504" cy="475488"/>
           </a:xfrm>
           <a:prstGeom prst="rect">
             <a:avLst/>
@@ -10715,57 +11261,18 @@
       </p:sp>
       <p:sp>
         <p:nvSpPr>
-          <p:cNvPr id="38" name="Text 36"/>
-          <p:cNvSpPr/>
-          <p:nvPr/>
-        </p:nvSpPr>
-        <p:spPr>
-          <a:xfrm>
-            <a:off x="2023872" y="4572000"/>
-            <a:ext cx="685800" cy="219456"/>
-          </a:xfrm>
-          <a:prstGeom prst="rect">
-            <a:avLst/>
-          </a:prstGeom>
-          <a:noFill/>
-          <a:ln/>
-        </p:spPr>
-        <p:txBody>
-          <a:bodyPr wrap="square" lIns="0" tIns="0" rIns="0" bIns="0" rtlCol="0" anchor="t"/>
-          <a:lstStyle/>
-          <a:p>
-            <a:pPr algn="ctr" indent="0" marL="0">
-              <a:buNone/>
-            </a:pPr>
-            <a:r>
-              <a:rPr lang="en-US" sz="750" i="1" dirty="0">
-                <a:solidFill>
-                  <a:srgbClr val="94A3B8"/>
-                </a:solidFill>
-                <a:latin typeface="Calibri" pitchFamily="34" charset="0"/>
-                <a:ea typeface="Calibri" pitchFamily="34" charset="-122"/>
-                <a:cs typeface="Calibri" pitchFamily="34" charset="-120"/>
-              </a:rPr>
-              <a:t>/k/</a:t>
-            </a:r>
-            <a:endParaRPr lang="en-US" sz="750" dirty="0"/>
-          </a:p>
-        </p:txBody>
-      </p:sp>
-      <p:sp>
-        <p:nvSpPr>
-          <p:cNvPr id="39" name="Shape 37"/>
-          <p:cNvSpPr/>
-          <p:nvPr/>
-        </p:nvSpPr>
-        <p:spPr>
-          <a:xfrm>
-            <a:off x="2831592" y="4169664"/>
-            <a:ext cx="685800" cy="384048"/>
+          <p:cNvPr id="44" name="Shape 42"/>
+          <p:cNvSpPr/>
+          <p:nvPr/>
+        </p:nvSpPr>
+        <p:spPr>
+          <a:xfrm>
+            <a:off x="2605209" y="4169664"/>
+            <a:ext cx="603504" cy="475488"/>
           </a:xfrm>
           <a:prstGeom prst="rect">
             <a:avLst>
-              <a:gd name="adj" fmla="val 9524"/>
+              <a:gd name="adj" fmla="val 7692"/>
             </a:avLst>
           </a:prstGeom>
           <a:solidFill>
@@ -10781,14 +11288,14 @@
       </p:sp>
       <p:sp>
         <p:nvSpPr>
-          <p:cNvPr id="40" name="Text 38"/>
-          <p:cNvSpPr/>
-          <p:nvPr/>
-        </p:nvSpPr>
-        <p:spPr>
-          <a:xfrm>
-            <a:off x="2831592" y="4169664"/>
-            <a:ext cx="685800" cy="384048"/>
+          <p:cNvPr id="45" name="Text 43"/>
+          <p:cNvSpPr/>
+          <p:nvPr/>
+        </p:nvSpPr>
+        <p:spPr>
+          <a:xfrm>
+            <a:off x="2605209" y="4169664"/>
+            <a:ext cx="603504" cy="475488"/>
           </a:xfrm>
           <a:prstGeom prst="rect">
             <a:avLst/>
@@ -10820,18 +11327,18 @@
       </p:sp>
       <p:sp>
         <p:nvSpPr>
-          <p:cNvPr id="41" name="Shape 39"/>
-          <p:cNvSpPr/>
-          <p:nvPr/>
-        </p:nvSpPr>
-        <p:spPr>
-          <a:xfrm>
-            <a:off x="3639312" y="4169664"/>
-            <a:ext cx="685800" cy="384048"/>
+          <p:cNvPr id="46" name="Shape 44"/>
+          <p:cNvSpPr/>
+          <p:nvPr/>
+        </p:nvSpPr>
+        <p:spPr>
+          <a:xfrm>
+            <a:off x="3258589" y="4169664"/>
+            <a:ext cx="603504" cy="475488"/>
           </a:xfrm>
           <a:prstGeom prst="rect">
             <a:avLst>
-              <a:gd name="adj" fmla="val 9524"/>
+              <a:gd name="adj" fmla="val 7692"/>
             </a:avLst>
           </a:prstGeom>
           <a:solidFill>
@@ -10847,14 +11354,14 @@
       </p:sp>
       <p:sp>
         <p:nvSpPr>
-          <p:cNvPr id="42" name="Text 40"/>
-          <p:cNvSpPr/>
-          <p:nvPr/>
-        </p:nvSpPr>
-        <p:spPr>
-          <a:xfrm>
-            <a:off x="3639312" y="4169664"/>
-            <a:ext cx="685800" cy="384048"/>
+          <p:cNvPr id="47" name="Text 45"/>
+          <p:cNvSpPr/>
+          <p:nvPr/>
+        </p:nvSpPr>
+        <p:spPr>
+          <a:xfrm>
+            <a:off x="3258589" y="4169664"/>
+            <a:ext cx="603504" cy="475488"/>
           </a:xfrm>
           <a:prstGeom prst="rect">
             <a:avLst/>
@@ -10886,18 +11393,18 @@
       </p:sp>
       <p:sp>
         <p:nvSpPr>
-          <p:cNvPr id="43" name="Shape 41"/>
-          <p:cNvSpPr/>
-          <p:nvPr/>
-        </p:nvSpPr>
-        <p:spPr>
-          <a:xfrm>
-            <a:off x="4447032" y="4169664"/>
-            <a:ext cx="685800" cy="384048"/>
+          <p:cNvPr id="48" name="Shape 46"/>
+          <p:cNvSpPr/>
+          <p:nvPr/>
+        </p:nvSpPr>
+        <p:spPr>
+          <a:xfrm>
+            <a:off x="3911969" y="4169664"/>
+            <a:ext cx="603504" cy="475488"/>
           </a:xfrm>
           <a:prstGeom prst="rect">
             <a:avLst>
-              <a:gd name="adj" fmla="val 9524"/>
+              <a:gd name="adj" fmla="val 7692"/>
             </a:avLst>
           </a:prstGeom>
           <a:solidFill>
@@ -10913,14 +11420,14 @@
       </p:sp>
       <p:sp>
         <p:nvSpPr>
-          <p:cNvPr id="44" name="Text 42"/>
-          <p:cNvSpPr/>
-          <p:nvPr/>
-        </p:nvSpPr>
-        <p:spPr>
-          <a:xfrm>
-            <a:off x="4447032" y="4169664"/>
-            <a:ext cx="685800" cy="384048"/>
+          <p:cNvPr id="49" name="Text 47"/>
+          <p:cNvSpPr/>
+          <p:nvPr/>
+        </p:nvSpPr>
+        <p:spPr>
+          <a:xfrm>
+            <a:off x="3911969" y="4169664"/>
+            <a:ext cx="603504" cy="475488"/>
           </a:xfrm>
           <a:prstGeom prst="rect">
             <a:avLst/>
@@ -10952,18 +11459,18 @@
       </p:sp>
       <p:sp>
         <p:nvSpPr>
-          <p:cNvPr id="45" name="Shape 43"/>
-          <p:cNvSpPr/>
-          <p:nvPr/>
-        </p:nvSpPr>
-        <p:spPr>
-          <a:xfrm>
-            <a:off x="5254752" y="4169664"/>
-            <a:ext cx="685800" cy="384048"/>
+          <p:cNvPr id="50" name="Shape 48"/>
+          <p:cNvSpPr/>
+          <p:nvPr/>
+        </p:nvSpPr>
+        <p:spPr>
+          <a:xfrm>
+            <a:off x="4565350" y="4169664"/>
+            <a:ext cx="603504" cy="475488"/>
           </a:xfrm>
           <a:prstGeom prst="rect">
             <a:avLst>
-              <a:gd name="adj" fmla="val 9524"/>
+              <a:gd name="adj" fmla="val 7692"/>
             </a:avLst>
           </a:prstGeom>
           <a:solidFill>
@@ -10979,14 +11486,14 @@
       </p:sp>
       <p:sp>
         <p:nvSpPr>
-          <p:cNvPr id="46" name="Text 44"/>
-          <p:cNvSpPr/>
-          <p:nvPr/>
-        </p:nvSpPr>
-        <p:spPr>
-          <a:xfrm>
-            <a:off x="5254752" y="4169664"/>
-            <a:ext cx="685800" cy="384048"/>
+          <p:cNvPr id="51" name="Text 49"/>
+          <p:cNvSpPr/>
+          <p:nvPr/>
+        </p:nvSpPr>
+        <p:spPr>
+          <a:xfrm>
+            <a:off x="4565350" y="4169664"/>
+            <a:ext cx="603504" cy="475488"/>
           </a:xfrm>
           <a:prstGeom prst="rect">
             <a:avLst/>
@@ -11018,18 +11525,18 @@
       </p:sp>
       <p:sp>
         <p:nvSpPr>
-          <p:cNvPr id="47" name="Shape 45"/>
-          <p:cNvSpPr/>
-          <p:nvPr/>
-        </p:nvSpPr>
-        <p:spPr>
-          <a:xfrm>
-            <a:off x="6062472" y="4169664"/>
-            <a:ext cx="685800" cy="384048"/>
+          <p:cNvPr id="52" name="Shape 50"/>
+          <p:cNvSpPr/>
+          <p:nvPr/>
+        </p:nvSpPr>
+        <p:spPr>
+          <a:xfrm>
+            <a:off x="5218730" y="4169664"/>
+            <a:ext cx="603504" cy="475488"/>
           </a:xfrm>
           <a:prstGeom prst="rect">
             <a:avLst>
-              <a:gd name="adj" fmla="val 9524"/>
+              <a:gd name="adj" fmla="val 7692"/>
             </a:avLst>
           </a:prstGeom>
           <a:solidFill>
@@ -11045,14 +11552,14 @@
       </p:sp>
       <p:sp>
         <p:nvSpPr>
-          <p:cNvPr id="48" name="Text 46"/>
-          <p:cNvSpPr/>
-          <p:nvPr/>
-        </p:nvSpPr>
-        <p:spPr>
-          <a:xfrm>
-            <a:off x="6062472" y="4169664"/>
-            <a:ext cx="685800" cy="384048"/>
+          <p:cNvPr id="53" name="Text 51"/>
+          <p:cNvSpPr/>
+          <p:nvPr/>
+        </p:nvSpPr>
+        <p:spPr>
+          <a:xfrm>
+            <a:off x="5218730" y="4169664"/>
+            <a:ext cx="603504" cy="475488"/>
           </a:xfrm>
           <a:prstGeom prst="rect">
             <a:avLst/>
@@ -11084,18 +11591,18 @@
       </p:sp>
       <p:sp>
         <p:nvSpPr>
-          <p:cNvPr id="49" name="Shape 47"/>
-          <p:cNvSpPr/>
-          <p:nvPr/>
-        </p:nvSpPr>
-        <p:spPr>
-          <a:xfrm>
-            <a:off x="6870192" y="4169664"/>
-            <a:ext cx="685800" cy="384048"/>
+          <p:cNvPr id="54" name="Shape 52"/>
+          <p:cNvSpPr/>
+          <p:nvPr/>
+        </p:nvSpPr>
+        <p:spPr>
+          <a:xfrm>
+            <a:off x="5872111" y="4169664"/>
+            <a:ext cx="603504" cy="475488"/>
           </a:xfrm>
           <a:prstGeom prst="rect">
             <a:avLst>
-              <a:gd name="adj" fmla="val 9524"/>
+              <a:gd name="adj" fmla="val 7692"/>
             </a:avLst>
           </a:prstGeom>
           <a:solidFill>
@@ -11111,14 +11618,14 @@
       </p:sp>
       <p:sp>
         <p:nvSpPr>
-          <p:cNvPr id="50" name="Text 48"/>
-          <p:cNvSpPr/>
-          <p:nvPr/>
-        </p:nvSpPr>
-        <p:spPr>
-          <a:xfrm>
-            <a:off x="6870192" y="4169664"/>
-            <a:ext cx="685800" cy="384048"/>
+          <p:cNvPr id="55" name="Text 53"/>
+          <p:cNvSpPr/>
+          <p:nvPr/>
+        </p:nvSpPr>
+        <p:spPr>
+          <a:xfrm>
+            <a:off x="5872111" y="4169664"/>
+            <a:ext cx="603504" cy="475488"/>
           </a:xfrm>
           <a:prstGeom prst="rect">
             <a:avLst/>
@@ -11150,18 +11657,18 @@
       </p:sp>
       <p:sp>
         <p:nvSpPr>
-          <p:cNvPr id="51" name="Shape 49"/>
-          <p:cNvSpPr/>
-          <p:nvPr/>
-        </p:nvSpPr>
-        <p:spPr>
-          <a:xfrm>
-            <a:off x="7677912" y="4169664"/>
-            <a:ext cx="685800" cy="384048"/>
+          <p:cNvPr id="56" name="Shape 54"/>
+          <p:cNvSpPr/>
+          <p:nvPr/>
+        </p:nvSpPr>
+        <p:spPr>
+          <a:xfrm>
+            <a:off x="6525491" y="4169664"/>
+            <a:ext cx="603504" cy="475488"/>
           </a:xfrm>
           <a:prstGeom prst="rect">
             <a:avLst>
-              <a:gd name="adj" fmla="val 9524"/>
+              <a:gd name="adj" fmla="val 7692"/>
             </a:avLst>
           </a:prstGeom>
           <a:solidFill>
@@ -11177,14 +11684,14 @@
       </p:sp>
       <p:sp>
         <p:nvSpPr>
-          <p:cNvPr id="52" name="Text 50"/>
-          <p:cNvSpPr/>
-          <p:nvPr/>
-        </p:nvSpPr>
-        <p:spPr>
-          <a:xfrm>
-            <a:off x="7677912" y="4169664"/>
-            <a:ext cx="685800" cy="384048"/>
+          <p:cNvPr id="57" name="Text 55"/>
+          <p:cNvSpPr/>
+          <p:nvPr/>
+        </p:nvSpPr>
+        <p:spPr>
+          <a:xfrm>
+            <a:off x="6525491" y="4169664"/>
+            <a:ext cx="603504" cy="475488"/>
           </a:xfrm>
           <a:prstGeom prst="rect">
             <a:avLst/>
@@ -11209,6 +11716,138 @@
                 <a:cs typeface="Trebuchet MS" pitchFamily="34" charset="-120"/>
               </a:rPr>
               <a:t>l</a:t>
+            </a:r>
+            <a:endParaRPr lang="en-US" sz="900" dirty="0"/>
+          </a:p>
+        </p:txBody>
+      </p:sp>
+      <p:sp>
+        <p:nvSpPr>
+          <p:cNvPr id="58" name="Shape 56"/>
+          <p:cNvSpPr/>
+          <p:nvPr/>
+        </p:nvSpPr>
+        <p:spPr>
+          <a:xfrm>
+            <a:off x="7178871" y="4169664"/>
+            <a:ext cx="603504" cy="475488"/>
+          </a:xfrm>
+          <a:prstGeom prst="rect">
+            <a:avLst>
+              <a:gd name="adj" fmla="val 7692"/>
+            </a:avLst>
+          </a:prstGeom>
+          <a:solidFill>
+            <a:srgbClr val="FFFFFF"/>
+          </a:solidFill>
+          <a:ln w="12700">
+            <a:solidFill>
+              <a:srgbClr val="DB2777"/>
+            </a:solidFill>
+            <a:prstDash val="solid"/>
+          </a:ln>
+        </p:spPr>
+      </p:sp>
+      <p:sp>
+        <p:nvSpPr>
+          <p:cNvPr id="59" name="Text 57"/>
+          <p:cNvSpPr/>
+          <p:nvPr/>
+        </p:nvSpPr>
+        <p:spPr>
+          <a:xfrm>
+            <a:off x="7178871" y="4169664"/>
+            <a:ext cx="603504" cy="475488"/>
+          </a:xfrm>
+          <a:prstGeom prst="rect">
+            <a:avLst/>
+          </a:prstGeom>
+          <a:noFill/>
+          <a:ln/>
+        </p:spPr>
+        <p:txBody>
+          <a:bodyPr wrap="square" lIns="0" tIns="0" rIns="0" bIns="0" rtlCol="0" anchor="ctr"/>
+          <a:lstStyle/>
+          <a:p>
+            <a:pPr algn="ctr" indent="0" marL="0">
+              <a:buNone/>
+            </a:pPr>
+            <a:r>
+              <a:rPr lang="en-US" sz="900" b="1" dirty="0">
+                <a:solidFill>
+                  <a:srgbClr val="9D174D"/>
+                </a:solidFill>
+                <a:latin typeface="Trebuchet MS" pitchFamily="34" charset="0"/>
+                <a:ea typeface="Trebuchet MS" pitchFamily="34" charset="-122"/>
+                <a:cs typeface="Trebuchet MS" pitchFamily="34" charset="-120"/>
+              </a:rPr>
+              <a:t>l</a:t>
+            </a:r>
+            <a:endParaRPr lang="en-US" sz="900" dirty="0"/>
+          </a:p>
+        </p:txBody>
+      </p:sp>
+      <p:sp>
+        <p:nvSpPr>
+          <p:cNvPr id="60" name="Shape 58"/>
+          <p:cNvSpPr/>
+          <p:nvPr/>
+        </p:nvSpPr>
+        <p:spPr>
+          <a:xfrm>
+            <a:off x="7832252" y="4169664"/>
+            <a:ext cx="603504" cy="475488"/>
+          </a:xfrm>
+          <a:prstGeom prst="rect">
+            <a:avLst>
+              <a:gd name="adj" fmla="val 7692"/>
+            </a:avLst>
+          </a:prstGeom>
+          <a:solidFill>
+            <a:srgbClr val="FFFFFF"/>
+          </a:solidFill>
+          <a:ln w="12700">
+            <a:solidFill>
+              <a:srgbClr val="DB2777"/>
+            </a:solidFill>
+            <a:prstDash val="solid"/>
+          </a:ln>
+        </p:spPr>
+      </p:sp>
+      <p:sp>
+        <p:nvSpPr>
+          <p:cNvPr id="61" name="Text 59"/>
+          <p:cNvSpPr/>
+          <p:nvPr/>
+        </p:nvSpPr>
+        <p:spPr>
+          <a:xfrm>
+            <a:off x="7832252" y="4169664"/>
+            <a:ext cx="603504" cy="475488"/>
+          </a:xfrm>
+          <a:prstGeom prst="rect">
+            <a:avLst/>
+          </a:prstGeom>
+          <a:noFill/>
+          <a:ln/>
+        </p:spPr>
+        <p:txBody>
+          <a:bodyPr wrap="square" lIns="0" tIns="0" rIns="0" bIns="0" rtlCol="0" anchor="ctr"/>
+          <a:lstStyle/>
+          <a:p>
+            <a:pPr algn="ctr" indent="0" marL="0">
+              <a:buNone/>
+            </a:pPr>
+            <a:r>
+              <a:rPr lang="en-US" sz="900" b="1" dirty="0">
+                <a:solidFill>
+                  <a:srgbClr val="9D174D"/>
+                </a:solidFill>
+                <a:latin typeface="Trebuchet MS" pitchFamily="34" charset="0"/>
+                <a:ea typeface="Trebuchet MS" pitchFamily="34" charset="-122"/>
+                <a:cs typeface="Trebuchet MS" pitchFamily="34" charset="-120"/>
+              </a:rPr>
+              <a:t>y</a:t>
             </a:r>
             <a:endParaRPr lang="en-US" sz="900" dirty="0"/>
           </a:p>
@@ -11500,7 +12139,7 @@
                 <a:ea typeface="Calibri" pitchFamily="34" charset="-122"/>
                 <a:cs typeface="Calibri" pitchFamily="34" charset="-120"/>
               </a:rPr>
-              <a:t>Word Labs  •  wordlabs.app  •  Root: 'colour' = hue, tint, or shade</a:t>
+              <a:t>Word Labs  •  wordlabs.app  •  Root: 'colour' = the property of light; to add colour</a:t>
             </a:r>
             <a:endParaRPr lang="en-US" sz="800" dirty="0"/>
           </a:p>
@@ -12327,7 +12966,7 @@
                 <a:ea typeface="Calibri" pitchFamily="34" charset="-122"/>
                 <a:cs typeface="Calibri" pitchFamily="34" charset="-120"/>
               </a:rPr>
-              <a:t>Word Labs  •  wordlabs.app  •  Root: 'colour' = hue, tint, or shade</a:t>
+              <a:t>Word Labs  •  wordlabs.app  •  Root: 'colour' = the property of light; to add colour</a:t>
             </a:r>
             <a:endParaRPr lang="en-US" sz="800" dirty="0"/>
           </a:p>
@@ -12644,7 +13283,7 @@
                 <a:ea typeface="Calibri" pitchFamily="34" charset="-122"/>
                 <a:cs typeface="Calibri" pitchFamily="34" charset="-120"/>
               </a:rPr>
-              <a:t>not or reverse</a:t>
+              <a:t>not; opposite; apart</a:t>
             </a:r>
             <a:endParaRPr lang="en-US" sz="850" dirty="0"/>
           </a:p>
@@ -12756,7 +13395,7 @@
                 <a:ea typeface="Calibri" pitchFamily="34" charset="-122"/>
                 <a:cs typeface="Calibri" pitchFamily="34" charset="-120"/>
               </a:rPr>
-              <a:t>hue or shade</a:t>
+              <a:t>the property of light; to add colour</a:t>
             </a:r>
             <a:endParaRPr lang="en-US" sz="850" dirty="0"/>
           </a:p>
@@ -13424,7 +14063,7 @@
                 <a:ea typeface="Calibri" pitchFamily="34" charset="-122"/>
                 <a:cs typeface="Calibri" pitchFamily="34" charset="-120"/>
               </a:rPr>
-              <a:t>Word Labs  •  wordlabs.app  •  Root: 'colour' = hue, tint, or shade</a:t>
+              <a:t>Word Labs  •  wordlabs.app  •  Root: 'colour' = the property of light; to add colour</a:t>
             </a:r>
             <a:endParaRPr lang="en-US" sz="800" dirty="0"/>
           </a:p>
@@ -13741,7 +14380,7 @@
                 <a:ea typeface="Calibri" pitchFamily="34" charset="-122"/>
                 <a:cs typeface="Calibri" pitchFamily="34" charset="-120"/>
               </a:rPr>
-              <a:t>not or reverse</a:t>
+              <a:t>not; opposite; apart</a:t>
             </a:r>
             <a:endParaRPr lang="en-US" sz="850" dirty="0"/>
           </a:p>
@@ -13853,7 +14492,7 @@
                 <a:ea typeface="Calibri" pitchFamily="34" charset="-122"/>
                 <a:cs typeface="Calibri" pitchFamily="34" charset="-120"/>
               </a:rPr>
-              <a:t>hue or shade</a:t>
+              <a:t>the property of light; to add colour</a:t>
             </a:r>
             <a:endParaRPr lang="en-US" sz="850" dirty="0"/>
           </a:p>
@@ -14667,7 +15306,7 @@
                 <a:ea typeface="Calibri" pitchFamily="34" charset="-122"/>
                 <a:cs typeface="Calibri" pitchFamily="34" charset="-120"/>
               </a:rPr>
-              <a:t>Root 'colour' — hue, tint, or shade</a:t>
+              <a:t>Root 'colour' — the property of light; to add colour</a:t>
             </a:r>
             <a:endParaRPr lang="en-US" sz="1600" dirty="0"/>
           </a:p>
@@ -15023,7 +15662,7 @@
                 <a:ea typeface="Calibri" pitchFamily="34" charset="-122"/>
                 <a:cs typeface="Calibri" pitchFamily="34" charset="-120"/>
               </a:rPr>
-              <a:t>Word Labs  •  wordlabs.app  •  Root: 'colour' = hue, tint, or shade</a:t>
+              <a:t>Word Labs  •  wordlabs.app  •  Root: 'colour' = the property of light; to add colour</a:t>
             </a:r>
             <a:endParaRPr lang="en-US" sz="800" dirty="0"/>
           </a:p>
@@ -15340,7 +15979,7 @@
                 <a:ea typeface="Calibri" pitchFamily="34" charset="-122"/>
                 <a:cs typeface="Calibri" pitchFamily="34" charset="-120"/>
               </a:rPr>
-              <a:t>not or reverse</a:t>
+              <a:t>not; opposite; apart</a:t>
             </a:r>
             <a:endParaRPr lang="en-US" sz="850" dirty="0"/>
           </a:p>
@@ -15452,7 +16091,7 @@
                 <a:ea typeface="Calibri" pitchFamily="34" charset="-122"/>
                 <a:cs typeface="Calibri" pitchFamily="34" charset="-120"/>
               </a:rPr>
-              <a:t>hue or shade</a:t>
+              <a:t>the property of light; to add colour</a:t>
             </a:r>
             <a:endParaRPr lang="en-US" sz="850" dirty="0"/>
           </a:p>
@@ -16014,11 +16653,11 @@
         <p:spPr>
           <a:xfrm>
             <a:off x="1874520" y="4096512"/>
-            <a:ext cx="6903720" cy="804672"/>
+            <a:ext cx="6903720" cy="658368"/>
           </a:xfrm>
           <a:prstGeom prst="rect">
             <a:avLst>
-              <a:gd name="adj" fmla="val 6818"/>
+              <a:gd name="adj" fmla="val 8333"/>
             </a:avLst>
           </a:prstGeom>
           <a:solidFill>
@@ -16041,11 +16680,11 @@
         <p:spPr>
           <a:xfrm>
             <a:off x="1951330" y="4169664"/>
-            <a:ext cx="676656" cy="384048"/>
+            <a:ext cx="676656" cy="475488"/>
           </a:xfrm>
           <a:prstGeom prst="rect">
             <a:avLst>
-              <a:gd name="adj" fmla="val 9524"/>
+              <a:gd name="adj" fmla="val 7692"/>
             </a:avLst>
           </a:prstGeom>
           <a:solidFill>
@@ -16068,7 +16707,7 @@
         <p:spPr>
           <a:xfrm>
             <a:off x="1951330" y="4169664"/>
-            <a:ext cx="676656" cy="384048"/>
+            <a:ext cx="676656" cy="475488"/>
           </a:xfrm>
           <a:prstGeom prst="rect">
             <a:avLst/>
@@ -16107,11 +16746,11 @@
         <p:spPr>
           <a:xfrm>
             <a:off x="2677363" y="4169664"/>
-            <a:ext cx="676656" cy="384048"/>
+            <a:ext cx="676656" cy="475488"/>
           </a:xfrm>
           <a:prstGeom prst="rect">
             <a:avLst>
-              <a:gd name="adj" fmla="val 9524"/>
+              <a:gd name="adj" fmla="val 7692"/>
             </a:avLst>
           </a:prstGeom>
           <a:solidFill>
@@ -16134,7 +16773,7 @@
         <p:spPr>
           <a:xfrm>
             <a:off x="2677363" y="4169664"/>
-            <a:ext cx="676656" cy="384048"/>
+            <a:ext cx="676656" cy="475488"/>
           </a:xfrm>
           <a:prstGeom prst="rect">
             <a:avLst/>
@@ -16173,11 +16812,11 @@
         <p:spPr>
           <a:xfrm>
             <a:off x="3403397" y="4169664"/>
-            <a:ext cx="676656" cy="384048"/>
+            <a:ext cx="676656" cy="475488"/>
           </a:xfrm>
           <a:prstGeom prst="rect">
             <a:avLst>
-              <a:gd name="adj" fmla="val 9524"/>
+              <a:gd name="adj" fmla="val 7692"/>
             </a:avLst>
           </a:prstGeom>
           <a:solidFill>
@@ -16200,7 +16839,7 @@
         <p:spPr>
           <a:xfrm>
             <a:off x="3403397" y="4169664"/>
-            <a:ext cx="676656" cy="384048"/>
+            <a:ext cx="676656" cy="475488"/>
           </a:xfrm>
           <a:prstGeom prst="rect">
             <a:avLst/>
@@ -16232,57 +16871,18 @@
       </p:sp>
       <p:sp>
         <p:nvSpPr>
-          <p:cNvPr id="45" name="Text 43"/>
-          <p:cNvSpPr/>
-          <p:nvPr/>
-        </p:nvSpPr>
-        <p:spPr>
-          <a:xfrm>
-            <a:off x="3403397" y="4572000"/>
-            <a:ext cx="676656" cy="219456"/>
-          </a:xfrm>
-          <a:prstGeom prst="rect">
-            <a:avLst/>
-          </a:prstGeom>
-          <a:noFill/>
-          <a:ln/>
-        </p:spPr>
-        <p:txBody>
-          <a:bodyPr wrap="square" lIns="0" tIns="0" rIns="0" bIns="0" rtlCol="0" anchor="t"/>
-          <a:lstStyle/>
-          <a:p>
-            <a:pPr algn="ctr" indent="0" marL="0">
-              <a:buNone/>
-            </a:pPr>
-            <a:r>
-              <a:rPr lang="en-US" sz="750" i="1" dirty="0">
-                <a:solidFill>
-                  <a:srgbClr val="94A3B8"/>
-                </a:solidFill>
-                <a:latin typeface="Calibri" pitchFamily="34" charset="0"/>
-                <a:ea typeface="Calibri" pitchFamily="34" charset="-122"/>
-                <a:cs typeface="Calibri" pitchFamily="34" charset="-120"/>
-              </a:rPr>
-              <a:t>/z/</a:t>
-            </a:r>
-            <a:endParaRPr lang="en-US" sz="750" dirty="0"/>
-          </a:p>
-        </p:txBody>
-      </p:sp>
-      <p:sp>
-        <p:nvSpPr>
-          <p:cNvPr id="46" name="Shape 44"/>
+          <p:cNvPr id="45" name="Shape 43"/>
           <p:cNvSpPr/>
           <p:nvPr/>
         </p:nvSpPr>
         <p:spPr>
           <a:xfrm>
             <a:off x="4129430" y="4169664"/>
-            <a:ext cx="676656" cy="384048"/>
+            <a:ext cx="676656" cy="475488"/>
           </a:xfrm>
           <a:prstGeom prst="rect">
             <a:avLst>
-              <a:gd name="adj" fmla="val 9524"/>
+              <a:gd name="adj" fmla="val 7692"/>
             </a:avLst>
           </a:prstGeom>
           <a:solidFill>
@@ -16298,14 +16898,14 @@
       </p:sp>
       <p:sp>
         <p:nvSpPr>
-          <p:cNvPr id="47" name="Text 45"/>
+          <p:cNvPr id="46" name="Text 44"/>
           <p:cNvSpPr/>
           <p:nvPr/>
         </p:nvSpPr>
         <p:spPr>
           <a:xfrm>
             <a:off x="4129430" y="4169664"/>
-            <a:ext cx="676656" cy="384048"/>
+            <a:ext cx="676656" cy="475488"/>
           </a:xfrm>
           <a:prstGeom prst="rect">
             <a:avLst/>
@@ -16337,80 +16937,41 @@
       </p:sp>
       <p:sp>
         <p:nvSpPr>
+          <p:cNvPr id="47" name="Shape 45"/>
+          <p:cNvSpPr/>
+          <p:nvPr/>
+        </p:nvSpPr>
+        <p:spPr>
+          <a:xfrm>
+            <a:off x="4855464" y="4169664"/>
+            <a:ext cx="676656" cy="475488"/>
+          </a:xfrm>
+          <a:prstGeom prst="rect">
+            <a:avLst>
+              <a:gd name="adj" fmla="val 7692"/>
+            </a:avLst>
+          </a:prstGeom>
+          <a:solidFill>
+            <a:srgbClr val="FFFFFF"/>
+          </a:solidFill>
+          <a:ln w="12700">
+            <a:solidFill>
+              <a:srgbClr val="DB2777"/>
+            </a:solidFill>
+            <a:prstDash val="solid"/>
+          </a:ln>
+        </p:spPr>
+      </p:sp>
+      <p:sp>
+        <p:nvSpPr>
           <p:cNvPr id="48" name="Text 46"/>
           <p:cNvSpPr/>
           <p:nvPr/>
         </p:nvSpPr>
         <p:spPr>
           <a:xfrm>
-            <a:off x="4129430" y="4572000"/>
-            <a:ext cx="676656" cy="219456"/>
-          </a:xfrm>
-          <a:prstGeom prst="rect">
-            <a:avLst/>
-          </a:prstGeom>
-          <a:noFill/>
-          <a:ln/>
-        </p:spPr>
-        <p:txBody>
-          <a:bodyPr wrap="square" lIns="0" tIns="0" rIns="0" bIns="0" rtlCol="0" anchor="t"/>
-          <a:lstStyle/>
-          <a:p>
-            <a:pPr algn="ctr" indent="0" marL="0">
-              <a:buNone/>
-            </a:pPr>
-            <a:r>
-              <a:rPr lang="en-US" sz="750" i="1" dirty="0">
-                <a:solidFill>
-                  <a:srgbClr val="94A3B8"/>
-                </a:solidFill>
-                <a:latin typeface="Calibri" pitchFamily="34" charset="0"/>
-                <a:ea typeface="Calibri" pitchFamily="34" charset="-122"/>
-                <a:cs typeface="Calibri" pitchFamily="34" charset="-120"/>
-              </a:rPr>
-              <a:t>/k/</a:t>
-            </a:r>
-            <a:endParaRPr lang="en-US" sz="750" dirty="0"/>
-          </a:p>
-        </p:txBody>
-      </p:sp>
-      <p:sp>
-        <p:nvSpPr>
-          <p:cNvPr id="49" name="Shape 47"/>
-          <p:cNvSpPr/>
-          <p:nvPr/>
-        </p:nvSpPr>
-        <p:spPr>
-          <a:xfrm>
             <a:off x="4855464" y="4169664"/>
-            <a:ext cx="676656" cy="384048"/>
-          </a:xfrm>
-          <a:prstGeom prst="rect">
-            <a:avLst>
-              <a:gd name="adj" fmla="val 9524"/>
-            </a:avLst>
-          </a:prstGeom>
-          <a:solidFill>
-            <a:srgbClr val="FFFFFF"/>
-          </a:solidFill>
-          <a:ln w="12700">
-            <a:solidFill>
-              <a:srgbClr val="DB2777"/>
-            </a:solidFill>
-            <a:prstDash val="solid"/>
-          </a:ln>
-        </p:spPr>
-      </p:sp>
-      <p:sp>
-        <p:nvSpPr>
-          <p:cNvPr id="50" name="Text 48"/>
-          <p:cNvSpPr/>
-          <p:nvPr/>
-        </p:nvSpPr>
-        <p:spPr>
-          <a:xfrm>
-            <a:off x="4855464" y="4169664"/>
-            <a:ext cx="676656" cy="384048"/>
+            <a:ext cx="676656" cy="475488"/>
           </a:xfrm>
           <a:prstGeom prst="rect">
             <a:avLst/>
@@ -16442,18 +17003,18 @@
       </p:sp>
       <p:sp>
         <p:nvSpPr>
-          <p:cNvPr id="51" name="Shape 49"/>
+          <p:cNvPr id="49" name="Shape 47"/>
           <p:cNvSpPr/>
           <p:nvPr/>
         </p:nvSpPr>
         <p:spPr>
           <a:xfrm>
             <a:off x="5581498" y="4169664"/>
-            <a:ext cx="676656" cy="384048"/>
+            <a:ext cx="676656" cy="475488"/>
           </a:xfrm>
           <a:prstGeom prst="rect">
             <a:avLst>
-              <a:gd name="adj" fmla="val 9524"/>
+              <a:gd name="adj" fmla="val 7692"/>
             </a:avLst>
           </a:prstGeom>
           <a:solidFill>
@@ -16469,14 +17030,14 @@
       </p:sp>
       <p:sp>
         <p:nvSpPr>
-          <p:cNvPr id="52" name="Text 50"/>
+          <p:cNvPr id="50" name="Text 48"/>
           <p:cNvSpPr/>
           <p:nvPr/>
         </p:nvSpPr>
         <p:spPr>
           <a:xfrm>
             <a:off x="5581498" y="4169664"/>
-            <a:ext cx="676656" cy="384048"/>
+            <a:ext cx="676656" cy="475488"/>
           </a:xfrm>
           <a:prstGeom prst="rect">
             <a:avLst/>
@@ -16508,18 +17069,18 @@
       </p:sp>
       <p:sp>
         <p:nvSpPr>
-          <p:cNvPr id="53" name="Shape 51"/>
+          <p:cNvPr id="51" name="Shape 49"/>
           <p:cNvSpPr/>
           <p:nvPr/>
         </p:nvSpPr>
         <p:spPr>
           <a:xfrm>
             <a:off x="6307531" y="4169664"/>
-            <a:ext cx="676656" cy="384048"/>
+            <a:ext cx="676656" cy="475488"/>
           </a:xfrm>
           <a:prstGeom prst="rect">
             <a:avLst>
-              <a:gd name="adj" fmla="val 9524"/>
+              <a:gd name="adj" fmla="val 7692"/>
             </a:avLst>
           </a:prstGeom>
           <a:solidFill>
@@ -16535,14 +17096,14 @@
       </p:sp>
       <p:sp>
         <p:nvSpPr>
-          <p:cNvPr id="54" name="Text 52"/>
+          <p:cNvPr id="52" name="Text 50"/>
           <p:cNvSpPr/>
           <p:nvPr/>
         </p:nvSpPr>
         <p:spPr>
           <a:xfrm>
             <a:off x="6307531" y="4169664"/>
-            <a:ext cx="676656" cy="384048"/>
+            <a:ext cx="676656" cy="475488"/>
           </a:xfrm>
           <a:prstGeom prst="rect">
             <a:avLst/>
@@ -16566,7 +17127,7 @@
                 <a:ea typeface="Trebuchet MS" pitchFamily="34" charset="-122"/>
                 <a:cs typeface="Trebuchet MS" pitchFamily="34" charset="-120"/>
               </a:rPr>
-              <a:t>ou</a:t>
+              <a:t>our</a:t>
             </a:r>
             <a:endParaRPr lang="en-US" sz="900" dirty="0"/>
           </a:p>
@@ -16574,18 +17135,18 @@
       </p:sp>
       <p:sp>
         <p:nvSpPr>
-          <p:cNvPr id="55" name="Shape 53"/>
+          <p:cNvPr id="53" name="Shape 51"/>
           <p:cNvSpPr/>
           <p:nvPr/>
         </p:nvSpPr>
         <p:spPr>
           <a:xfrm>
             <a:off x="7033565" y="4169664"/>
-            <a:ext cx="676656" cy="384048"/>
+            <a:ext cx="676656" cy="475488"/>
           </a:xfrm>
           <a:prstGeom prst="rect">
             <a:avLst>
-              <a:gd name="adj" fmla="val 9524"/>
+              <a:gd name="adj" fmla="val 7692"/>
             </a:avLst>
           </a:prstGeom>
           <a:solidFill>
@@ -16601,14 +17162,14 @@
       </p:sp>
       <p:sp>
         <p:nvSpPr>
-          <p:cNvPr id="56" name="Text 54"/>
+          <p:cNvPr id="54" name="Text 52"/>
           <p:cNvSpPr/>
           <p:nvPr/>
         </p:nvSpPr>
         <p:spPr>
           <a:xfrm>
             <a:off x="7033565" y="4169664"/>
-            <a:ext cx="676656" cy="384048"/>
+            <a:ext cx="676656" cy="475488"/>
           </a:xfrm>
           <a:prstGeom prst="rect">
             <a:avLst/>
@@ -16632,7 +17193,7 @@
                 <a:ea typeface="Trebuchet MS" pitchFamily="34" charset="-122"/>
                 <a:cs typeface="Trebuchet MS" pitchFamily="34" charset="-120"/>
               </a:rPr>
-              <a:t>r</a:t>
+              <a:t>e</a:t>
             </a:r>
             <a:endParaRPr lang="en-US" sz="900" dirty="0"/>
           </a:p>
@@ -16640,18 +17201,18 @@
       </p:sp>
       <p:sp>
         <p:nvSpPr>
-          <p:cNvPr id="57" name="Shape 55"/>
+          <p:cNvPr id="55" name="Shape 53"/>
           <p:cNvSpPr/>
           <p:nvPr/>
         </p:nvSpPr>
         <p:spPr>
           <a:xfrm>
             <a:off x="7759598" y="4169664"/>
-            <a:ext cx="676656" cy="384048"/>
+            <a:ext cx="676656" cy="475488"/>
           </a:xfrm>
           <a:prstGeom prst="rect">
             <a:avLst>
-              <a:gd name="adj" fmla="val 9524"/>
+              <a:gd name="adj" fmla="val 7692"/>
             </a:avLst>
           </a:prstGeom>
           <a:solidFill>
@@ -16667,14 +17228,14 @@
       </p:sp>
       <p:sp>
         <p:nvSpPr>
-          <p:cNvPr id="58" name="Text 56"/>
+          <p:cNvPr id="56" name="Text 54"/>
           <p:cNvSpPr/>
           <p:nvPr/>
         </p:nvSpPr>
         <p:spPr>
           <a:xfrm>
             <a:off x="7759598" y="4169664"/>
-            <a:ext cx="676656" cy="384048"/>
+            <a:ext cx="676656" cy="475488"/>
           </a:xfrm>
           <a:prstGeom prst="rect">
             <a:avLst/>
@@ -16698,7 +17259,7 @@
                 <a:ea typeface="Trebuchet MS" pitchFamily="34" charset="-122"/>
                 <a:cs typeface="Trebuchet MS" pitchFamily="34" charset="-120"/>
               </a:rPr>
-              <a:t>ed</a:t>
+              <a:t>d</a:t>
             </a:r>
             <a:endParaRPr lang="en-US" sz="900" dirty="0"/>
           </a:p>
@@ -17272,7 +17833,7 @@
                 <a:ea typeface="Calibri" pitchFamily="34" charset="-122"/>
                 <a:cs typeface="Calibri" pitchFamily="34" charset="-120"/>
               </a:rPr>
-              <a:t>Word Labs  •  wordlabs.app  •  Root: 'colour' = hue, tint, or shade</a:t>
+              <a:t>Word Labs  •  wordlabs.app  •  Root: 'colour' = the property of light; to add colour</a:t>
             </a:r>
             <a:endParaRPr lang="en-US" sz="800" dirty="0"/>
           </a:p>
@@ -17606,7 +18167,7 @@
                 <a:ea typeface="Trebuchet MS" pitchFamily="34" charset="-122"/>
                 <a:cs typeface="Trebuchet MS" pitchFamily="34" charset="-120"/>
               </a:rPr>
-              <a:t>2</a:t>
+              <a:t>0</a:t>
             </a:r>
             <a:pPr algn="ctr" indent="0" marL="0">
               <a:buNone/>
@@ -17620,7 +18181,7 @@
                 <a:ea typeface="Trebuchet MS" pitchFamily="34" charset="-122"/>
                 <a:cs typeface="Trebuchet MS" pitchFamily="34" charset="-120"/>
               </a:rPr>
-              <a:t>  punctuation marks</a:t>
+              <a:t>  punctuation mark</a:t>
             </a:r>
             <a:endParaRPr lang="en-US" sz="2800" dirty="0"/>
           </a:p>
@@ -17912,7 +18473,7 @@
                 <a:ea typeface="Calibri" pitchFamily="34" charset="-122"/>
                 <a:cs typeface="Calibri" pitchFamily="34" charset="-120"/>
               </a:rPr>
-              <a:t>Word Labs  •  wordlabs.app  •  Root: 'colour' = hue, tint, or shade</a:t>
+              <a:t>Word Labs  •  wordlabs.app  •  Root: 'colour' = the property of light; to add colour</a:t>
             </a:r>
             <a:endParaRPr lang="en-US" sz="800" dirty="0"/>
           </a:p>
@@ -18024,7 +18585,7 @@
                 <a:ea typeface="Calibri" pitchFamily="34" charset="-122"/>
                 <a:cs typeface="Calibri" pitchFamily="34" charset="-120"/>
               </a:rPr>
-              <a:t>The </a:t>
+              <a:t>The leaves were </a:t>
             </a:r>
             <a:pPr algn="l" indent="0" marL="0">
               <a:buNone/>
@@ -18041,7 +18602,7 @@
                 <a:ea typeface="Calibri" pitchFamily="34" charset="-122"/>
                 <a:cs typeface="Calibri" pitchFamily="34" charset="-120"/>
               </a:rPr>
-              <a:t>multicoloured</a:t>
+              <a:t>discolouring</a:t>
             </a:r>
             <a:pPr algn="l" indent="0" marL="0">
               <a:buNone/>
@@ -18055,7 +18616,7 @@
                 <a:ea typeface="Calibri" pitchFamily="34" charset="-122"/>
                 <a:cs typeface="Calibri" pitchFamily="34" charset="-120"/>
               </a:rPr>
-              <a:t> kite flew high above the park, but its </a:t>
+              <a:t> as autumn arrived. The </a:t>
             </a:r>
             <a:pPr algn="l" indent="0" marL="0">
               <a:buNone/>
@@ -18072,7 +18633,7 @@
                 <a:ea typeface="Calibri" pitchFamily="34" charset="-122"/>
                 <a:cs typeface="Calibri" pitchFamily="34" charset="-120"/>
               </a:rPr>
-              <a:t>colouring</a:t>
+              <a:t>multicolour</a:t>
             </a:r>
             <a:pPr algn="l" indent="0" marL="0">
               <a:buNone/>
@@ -18086,7 +18647,7 @@
                 <a:ea typeface="Calibri" pitchFamily="34" charset="-122"/>
                 <a:cs typeface="Calibri" pitchFamily="34" charset="-120"/>
               </a:rPr>
-              <a:t> had faded, leaving it looking </a:t>
+              <a:t> kite soared high above the park. The </a:t>
             </a:r>
             <a:pPr algn="l" indent="0" marL="0">
               <a:buNone/>
@@ -18103,7 +18664,7 @@
                 <a:ea typeface="Calibri" pitchFamily="34" charset="-122"/>
                 <a:cs typeface="Calibri" pitchFamily="34" charset="-120"/>
               </a:rPr>
-              <a:t>colourless</a:t>
+              <a:t>multicoloured</a:t>
             </a:r>
             <a:pPr algn="l" indent="0" marL="0">
               <a:buNone/>
@@ -18117,7 +18678,7 @@
                 <a:ea typeface="Calibri" pitchFamily="34" charset="-122"/>
                 <a:cs typeface="Calibri" pitchFamily="34" charset="-120"/>
               </a:rPr>
-              <a:t> against the bright sky.</a:t>
+              <a:t> umbrella brightened up the rainy day.</a:t>
             </a:r>
             <a:endParaRPr lang="en-US" sz="1800" dirty="0"/>
           </a:p>
@@ -18272,7 +18833,7 @@
                 <a:ea typeface="Trebuchet MS" pitchFamily="34" charset="-122"/>
                 <a:cs typeface="Trebuchet MS" pitchFamily="34" charset="-120"/>
               </a:rPr>
-              <a:t>multicoloured</a:t>
+              <a:t>discolouring</a:t>
             </a:r>
             <a:endParaRPr lang="en-US" sz="1400" dirty="0"/>
           </a:p>
@@ -18400,7 +18961,7 @@
                 <a:ea typeface="Trebuchet MS" pitchFamily="34" charset="-122"/>
                 <a:cs typeface="Trebuchet MS" pitchFamily="34" charset="-120"/>
               </a:rPr>
-              <a:t>colouring</a:t>
+              <a:t>multicolour</a:t>
             </a:r>
             <a:endParaRPr lang="en-US" sz="1400" dirty="0"/>
           </a:p>
@@ -18528,7 +19089,7 @@
                 <a:ea typeface="Trebuchet MS" pitchFamily="34" charset="-122"/>
                 <a:cs typeface="Trebuchet MS" pitchFamily="34" charset="-120"/>
               </a:rPr>
-              <a:t>colourless</a:t>
+              <a:t>multicoloured</a:t>
             </a:r>
             <a:endParaRPr lang="en-US" sz="1400" dirty="0"/>
           </a:p>
@@ -18859,7 +19420,7 @@
                 <a:ea typeface="Calibri" pitchFamily="34" charset="-122"/>
                 <a:cs typeface="Calibri" pitchFamily="34" charset="-120"/>
               </a:rPr>
-              <a:t>Word Labs  •  wordlabs.app  •  Root: 'colour' = hue, tint, or shade</a:t>
+              <a:t>Word Labs  •  wordlabs.app  •  Root: 'colour' = the property of light; to add colour</a:t>
             </a:r>
             <a:endParaRPr lang="en-US" sz="800" dirty="0"/>
           </a:p>
@@ -18998,7 +19559,7 @@
                 <a:ea typeface="Trebuchet MS" pitchFamily="34" charset="-122"/>
                 <a:cs typeface="Trebuchet MS" pitchFamily="34" charset="-120"/>
               </a:rPr>
-              <a:t>multicoloured</a:t>
+              <a:t>discolouring</a:t>
             </a:r>
             <a:endParaRPr lang="en-US" sz="2800" dirty="0"/>
           </a:p>
@@ -19686,7 +20247,7 @@
                 <a:ea typeface="Calibri" pitchFamily="34" charset="-122"/>
                 <a:cs typeface="Calibri" pitchFamily="34" charset="-120"/>
               </a:rPr>
-              <a:t>Word Labs  •  wordlabs.app  •  Root: 'colour' = hue, tint, or shade</a:t>
+              <a:t>Word Labs  •  wordlabs.app  •  Root: 'colour' = the property of light; to add colour</a:t>
             </a:r>
             <a:endParaRPr lang="en-US" sz="800" dirty="0"/>
           </a:p>
@@ -19825,7 +20386,7 @@
                 <a:ea typeface="Trebuchet MS" pitchFamily="34" charset="-122"/>
                 <a:cs typeface="Trebuchet MS" pitchFamily="34" charset="-120"/>
               </a:rPr>
-              <a:t>multicoloured</a:t>
+              <a:t>discolouring</a:t>
             </a:r>
             <a:endParaRPr lang="en-US" sz="2800" dirty="0"/>
           </a:p>
@@ -19964,7 +20525,7 @@
                 <a:ea typeface="Trebuchet MS" pitchFamily="34" charset="-122"/>
                 <a:cs typeface="Trebuchet MS" pitchFamily="34" charset="-120"/>
               </a:rPr>
-              <a:t>multi</a:t>
+              <a:t>dis</a:t>
             </a:r>
             <a:endParaRPr lang="en-US" sz="1300" dirty="0"/>
           </a:p>
@@ -20003,7 +20564,7 @@
                 <a:ea typeface="Calibri" pitchFamily="34" charset="-122"/>
                 <a:cs typeface="Calibri" pitchFamily="34" charset="-120"/>
               </a:rPr>
-              <a:t>many</a:t>
+              <a:t>not; opposite; apart</a:t>
             </a:r>
             <a:endParaRPr lang="en-US" sz="850" dirty="0"/>
           </a:p>
@@ -20115,7 +20676,7 @@
                 <a:ea typeface="Calibri" pitchFamily="34" charset="-122"/>
                 <a:cs typeface="Calibri" pitchFamily="34" charset="-120"/>
               </a:rPr>
-              <a:t>hue or shade</a:t>
+              <a:t>the property of light; to add colour</a:t>
             </a:r>
             <a:endParaRPr lang="en-US" sz="850" dirty="0"/>
           </a:p>
@@ -20188,7 +20749,7 @@
                 <a:ea typeface="Trebuchet MS" pitchFamily="34" charset="-122"/>
                 <a:cs typeface="Trebuchet MS" pitchFamily="34" charset="-120"/>
               </a:rPr>
-              <a:t>ed</a:t>
+              <a:t>ing</a:t>
             </a:r>
             <a:endParaRPr lang="en-US" sz="1300" dirty="0"/>
           </a:p>
@@ -20227,7 +20788,7 @@
                 <a:ea typeface="Calibri" pitchFamily="34" charset="-122"/>
                 <a:cs typeface="Calibri" pitchFamily="34" charset="-120"/>
               </a:rPr>
-              <a:t>made or having</a:t>
+              <a:t>happening now</a:t>
             </a:r>
             <a:endParaRPr lang="en-US" sz="850" dirty="0"/>
           </a:p>
@@ -20783,7 +21344,7 @@
                 <a:ea typeface="Calibri" pitchFamily="34" charset="-122"/>
                 <a:cs typeface="Calibri" pitchFamily="34" charset="-120"/>
               </a:rPr>
-              <a:t>Word Labs  •  wordlabs.app  •  Root: 'colour' = hue, tint, or shade</a:t>
+              <a:t>Word Labs  •  wordlabs.app  •  Root: 'colour' = the property of light; to add colour</a:t>
             </a:r>
             <a:endParaRPr lang="en-US" sz="800" dirty="0"/>
           </a:p>
@@ -20922,7 +21483,7 @@
                 <a:ea typeface="Trebuchet MS" pitchFamily="34" charset="-122"/>
                 <a:cs typeface="Trebuchet MS" pitchFamily="34" charset="-120"/>
               </a:rPr>
-              <a:t>multicoloured</a:t>
+              <a:t>discolouring</a:t>
             </a:r>
             <a:endParaRPr lang="en-US" sz="2800" dirty="0"/>
           </a:p>
@@ -21061,7 +21622,7 @@
                 <a:ea typeface="Trebuchet MS" pitchFamily="34" charset="-122"/>
                 <a:cs typeface="Trebuchet MS" pitchFamily="34" charset="-120"/>
               </a:rPr>
-              <a:t>multi</a:t>
+              <a:t>dis</a:t>
             </a:r>
             <a:endParaRPr lang="en-US" sz="1300" dirty="0"/>
           </a:p>
@@ -21100,7 +21661,7 @@
                 <a:ea typeface="Calibri" pitchFamily="34" charset="-122"/>
                 <a:cs typeface="Calibri" pitchFamily="34" charset="-120"/>
               </a:rPr>
-              <a:t>many</a:t>
+              <a:t>not; opposite; apart</a:t>
             </a:r>
             <a:endParaRPr lang="en-US" sz="850" dirty="0"/>
           </a:p>
@@ -21212,7 +21773,7 @@
                 <a:ea typeface="Calibri" pitchFamily="34" charset="-122"/>
                 <a:cs typeface="Calibri" pitchFamily="34" charset="-120"/>
               </a:rPr>
-              <a:t>hue or shade</a:t>
+              <a:t>the property of light; to add colour</a:t>
             </a:r>
             <a:endParaRPr lang="en-US" sz="850" dirty="0"/>
           </a:p>
@@ -21285,7 +21846,7 @@
                 <a:ea typeface="Trebuchet MS" pitchFamily="34" charset="-122"/>
                 <a:cs typeface="Trebuchet MS" pitchFamily="34" charset="-120"/>
               </a:rPr>
-              <a:t>ed</a:t>
+              <a:t>ing</a:t>
             </a:r>
             <a:endParaRPr lang="en-US" sz="1300" dirty="0"/>
           </a:p>
@@ -21324,7 +21885,7 @@
                 <a:ea typeface="Calibri" pitchFamily="34" charset="-122"/>
                 <a:cs typeface="Calibri" pitchFamily="34" charset="-120"/>
               </a:rPr>
-              <a:t>made or having</a:t>
+              <a:t>happening now</a:t>
             </a:r>
             <a:endParaRPr lang="en-US" sz="850" dirty="0"/>
           </a:p>
@@ -21483,7 +22044,7 @@
                 <a:ea typeface="Trebuchet MS" pitchFamily="34" charset="-122"/>
                 <a:cs typeface="Trebuchet MS" pitchFamily="34" charset="-120"/>
               </a:rPr>
-              <a:t>mul</a:t>
+              <a:t>dis</a:t>
             </a:r>
             <a:endParaRPr lang="en-US" sz="1400" dirty="0"/>
           </a:p>
@@ -21588,7 +22149,7 @@
                 <a:ea typeface="Trebuchet MS" pitchFamily="34" charset="-122"/>
                 <a:cs typeface="Trebuchet MS" pitchFamily="34" charset="-120"/>
               </a:rPr>
-              <a:t>ti</a:t>
+              <a:t>col</a:t>
             </a:r>
             <a:endParaRPr lang="en-US" sz="1400" dirty="0"/>
           </a:p>
@@ -21693,7 +22254,7 @@
                 <a:ea typeface="Trebuchet MS" pitchFamily="34" charset="-122"/>
                 <a:cs typeface="Trebuchet MS" pitchFamily="34" charset="-120"/>
               </a:rPr>
-              <a:t>col</a:t>
+              <a:t>our</a:t>
             </a:r>
             <a:endParaRPr lang="en-US" sz="1400" dirty="0"/>
           </a:p>
@@ -21798,7 +22359,7 @@
                 <a:ea typeface="Trebuchet MS" pitchFamily="34" charset="-122"/>
                 <a:cs typeface="Trebuchet MS" pitchFamily="34" charset="-120"/>
               </a:rPr>
-              <a:t>oured</a:t>
+              <a:t>ing</a:t>
             </a:r>
             <a:endParaRPr lang="en-US" sz="1400" dirty="0"/>
           </a:p>
@@ -22222,7 +22783,7 @@
                 <a:ea typeface="Calibri" pitchFamily="34" charset="-122"/>
                 <a:cs typeface="Calibri" pitchFamily="34" charset="-120"/>
               </a:rPr>
-              <a:t>Word Labs  •  wordlabs.app  •  Root: 'colour' = hue, tint, or shade</a:t>
+              <a:t>Word Labs  •  wordlabs.app  •  Root: 'colour' = the property of light; to add colour</a:t>
             </a:r>
             <a:endParaRPr lang="en-US" sz="800" dirty="0"/>
           </a:p>
@@ -22361,7 +22922,7 @@
                 <a:ea typeface="Trebuchet MS" pitchFamily="34" charset="-122"/>
                 <a:cs typeface="Trebuchet MS" pitchFamily="34" charset="-120"/>
               </a:rPr>
-              <a:t>multicoloured</a:t>
+              <a:t>discolouring</a:t>
             </a:r>
             <a:endParaRPr lang="en-US" sz="2800" dirty="0"/>
           </a:p>
@@ -22500,7 +23061,7 @@
                 <a:ea typeface="Trebuchet MS" pitchFamily="34" charset="-122"/>
                 <a:cs typeface="Trebuchet MS" pitchFamily="34" charset="-120"/>
               </a:rPr>
-              <a:t>multi</a:t>
+              <a:t>dis</a:t>
             </a:r>
             <a:endParaRPr lang="en-US" sz="1300" dirty="0"/>
           </a:p>
@@ -22539,7 +23100,7 @@
                 <a:ea typeface="Calibri" pitchFamily="34" charset="-122"/>
                 <a:cs typeface="Calibri" pitchFamily="34" charset="-120"/>
               </a:rPr>
-              <a:t>many</a:t>
+              <a:t>not; opposite; apart</a:t>
             </a:r>
             <a:endParaRPr lang="en-US" sz="850" dirty="0"/>
           </a:p>
@@ -22651,7 +23212,7 @@
                 <a:ea typeface="Calibri" pitchFamily="34" charset="-122"/>
                 <a:cs typeface="Calibri" pitchFamily="34" charset="-120"/>
               </a:rPr>
-              <a:t>hue or shade</a:t>
+              <a:t>the property of light; to add colour</a:t>
             </a:r>
             <a:endParaRPr lang="en-US" sz="850" dirty="0"/>
           </a:p>
@@ -22724,7 +23285,7 @@
                 <a:ea typeface="Trebuchet MS" pitchFamily="34" charset="-122"/>
                 <a:cs typeface="Trebuchet MS" pitchFamily="34" charset="-120"/>
               </a:rPr>
-              <a:t>ed</a:t>
+              <a:t>ing</a:t>
             </a:r>
             <a:endParaRPr lang="en-US" sz="1300" dirty="0"/>
           </a:p>
@@ -22763,7 +23324,7 @@
                 <a:ea typeface="Calibri" pitchFamily="34" charset="-122"/>
                 <a:cs typeface="Calibri" pitchFamily="34" charset="-120"/>
               </a:rPr>
-              <a:t>made or having</a:t>
+              <a:t>happening now</a:t>
             </a:r>
             <a:endParaRPr lang="en-US" sz="850" dirty="0"/>
           </a:p>
@@ -22922,7 +23483,7 @@
                 <a:ea typeface="Trebuchet MS" pitchFamily="34" charset="-122"/>
                 <a:cs typeface="Trebuchet MS" pitchFamily="34" charset="-120"/>
               </a:rPr>
-              <a:t>mul</a:t>
+              <a:t>dis</a:t>
             </a:r>
             <a:endParaRPr lang="en-US" sz="1400" dirty="0"/>
           </a:p>
@@ -23027,7 +23588,7 @@
                 <a:ea typeface="Trebuchet MS" pitchFamily="34" charset="-122"/>
                 <a:cs typeface="Trebuchet MS" pitchFamily="34" charset="-120"/>
               </a:rPr>
-              <a:t>ti</a:t>
+              <a:t>col</a:t>
             </a:r>
             <a:endParaRPr lang="en-US" sz="1400" dirty="0"/>
           </a:p>
@@ -23132,7 +23693,7 @@
                 <a:ea typeface="Trebuchet MS" pitchFamily="34" charset="-122"/>
                 <a:cs typeface="Trebuchet MS" pitchFamily="34" charset="-120"/>
               </a:rPr>
-              <a:t>col</a:t>
+              <a:t>our</a:t>
             </a:r>
             <a:endParaRPr lang="en-US" sz="1400" dirty="0"/>
           </a:p>
@@ -23237,7 +23798,7 @@
                 <a:ea typeface="Trebuchet MS" pitchFamily="34" charset="-122"/>
                 <a:cs typeface="Trebuchet MS" pitchFamily="34" charset="-120"/>
               </a:rPr>
-              <a:t>oured</a:t>
+              <a:t>ing</a:t>
             </a:r>
             <a:endParaRPr lang="en-US" sz="1400" dirty="0"/>
           </a:p>
@@ -23318,11 +23879,11 @@
         <p:spPr>
           <a:xfrm>
             <a:off x="1874520" y="4096512"/>
-            <a:ext cx="6903720" cy="804672"/>
+            <a:ext cx="6903720" cy="658368"/>
           </a:xfrm>
           <a:prstGeom prst="rect">
             <a:avLst>
-              <a:gd name="adj" fmla="val 6818"/>
+              <a:gd name="adj" fmla="val 8333"/>
             </a:avLst>
           </a:prstGeom>
           <a:solidFill>
@@ -23344,12 +23905,12 @@
         </p:nvSpPr>
         <p:spPr>
           <a:xfrm>
-            <a:off x="1952244" y="4169664"/>
-            <a:ext cx="543652" cy="384048"/>
+            <a:off x="1951330" y="4169664"/>
+            <a:ext cx="676656" cy="475488"/>
           </a:xfrm>
           <a:prstGeom prst="rect">
             <a:avLst>
-              <a:gd name="adj" fmla="val 9524"/>
+              <a:gd name="adj" fmla="val 7692"/>
             </a:avLst>
           </a:prstGeom>
           <a:solidFill>
@@ -23371,8 +23932,8 @@
         </p:nvSpPr>
         <p:spPr>
           <a:xfrm>
-            <a:off x="1952244" y="4169664"/>
-            <a:ext cx="543652" cy="384048"/>
+            <a:off x="1951330" y="4169664"/>
+            <a:ext cx="676656" cy="475488"/>
           </a:xfrm>
           <a:prstGeom prst="rect">
             <a:avLst/>
@@ -23396,7 +23957,7 @@
                 <a:ea typeface="Trebuchet MS" pitchFamily="34" charset="-122"/>
                 <a:cs typeface="Trebuchet MS" pitchFamily="34" charset="-120"/>
               </a:rPr>
-              <a:t>m</a:t>
+              <a:t>d</a:t>
             </a:r>
             <a:endParaRPr lang="en-US" sz="900" dirty="0"/>
           </a:p>
@@ -23410,12 +23971,12 @@
         </p:nvSpPr>
         <p:spPr>
           <a:xfrm>
-            <a:off x="2546188" y="4169664"/>
-            <a:ext cx="543652" cy="384048"/>
+            <a:off x="2677363" y="4169664"/>
+            <a:ext cx="676656" cy="475488"/>
           </a:xfrm>
           <a:prstGeom prst="rect">
             <a:avLst>
-              <a:gd name="adj" fmla="val 9524"/>
+              <a:gd name="adj" fmla="val 7692"/>
             </a:avLst>
           </a:prstGeom>
           <a:solidFill>
@@ -23437,8 +23998,8 @@
         </p:nvSpPr>
         <p:spPr>
           <a:xfrm>
-            <a:off x="2546188" y="4169664"/>
-            <a:ext cx="543652" cy="384048"/>
+            <a:off x="2677363" y="4169664"/>
+            <a:ext cx="676656" cy="475488"/>
           </a:xfrm>
           <a:prstGeom prst="rect">
             <a:avLst/>
@@ -23462,7 +24023,7 @@
                 <a:ea typeface="Trebuchet MS" pitchFamily="34" charset="-122"/>
                 <a:cs typeface="Trebuchet MS" pitchFamily="34" charset="-120"/>
               </a:rPr>
-              <a:t>u</a:t>
+              <a:t>i</a:t>
             </a:r>
             <a:endParaRPr lang="en-US" sz="900" dirty="0"/>
           </a:p>
@@ -23476,12 +24037,12 @@
         </p:nvSpPr>
         <p:spPr>
           <a:xfrm>
-            <a:off x="3140133" y="4169664"/>
-            <a:ext cx="543652" cy="384048"/>
+            <a:off x="3403397" y="4169664"/>
+            <a:ext cx="676656" cy="475488"/>
           </a:xfrm>
           <a:prstGeom prst="rect">
             <a:avLst>
-              <a:gd name="adj" fmla="val 9524"/>
+              <a:gd name="adj" fmla="val 7692"/>
             </a:avLst>
           </a:prstGeom>
           <a:solidFill>
@@ -23503,8 +24064,8 @@
         </p:nvSpPr>
         <p:spPr>
           <a:xfrm>
-            <a:off x="3140133" y="4169664"/>
-            <a:ext cx="543652" cy="384048"/>
+            <a:off x="3403397" y="4169664"/>
+            <a:ext cx="676656" cy="475488"/>
           </a:xfrm>
           <a:prstGeom prst="rect">
             <a:avLst/>
@@ -23528,7 +24089,7 @@
                 <a:ea typeface="Trebuchet MS" pitchFamily="34" charset="-122"/>
                 <a:cs typeface="Trebuchet MS" pitchFamily="34" charset="-120"/>
               </a:rPr>
-              <a:t>l</a:t>
+              <a:t>s</a:t>
             </a:r>
             <a:endParaRPr lang="en-US" sz="900" dirty="0"/>
           </a:p>
@@ -23542,12 +24103,12 @@
         </p:nvSpPr>
         <p:spPr>
           <a:xfrm>
-            <a:off x="3734077" y="4169664"/>
-            <a:ext cx="543652" cy="384048"/>
+            <a:off x="4129430" y="4169664"/>
+            <a:ext cx="676656" cy="475488"/>
           </a:xfrm>
           <a:prstGeom prst="rect">
             <a:avLst>
-              <a:gd name="adj" fmla="val 9524"/>
+              <a:gd name="adj" fmla="val 7692"/>
             </a:avLst>
           </a:prstGeom>
           <a:solidFill>
@@ -23569,8 +24130,8 @@
         </p:nvSpPr>
         <p:spPr>
           <a:xfrm>
-            <a:off x="3734077" y="4169664"/>
-            <a:ext cx="543652" cy="384048"/>
+            <a:off x="4129430" y="4169664"/>
+            <a:ext cx="676656" cy="475488"/>
           </a:xfrm>
           <a:prstGeom prst="rect">
             <a:avLst/>
@@ -23594,7 +24155,7 @@
                 <a:ea typeface="Trebuchet MS" pitchFamily="34" charset="-122"/>
                 <a:cs typeface="Trebuchet MS" pitchFamily="34" charset="-120"/>
               </a:rPr>
-              <a:t>t</a:t>
+              <a:t>c</a:t>
             </a:r>
             <a:endParaRPr lang="en-US" sz="900" dirty="0"/>
           </a:p>
@@ -23608,12 +24169,12 @@
         </p:nvSpPr>
         <p:spPr>
           <a:xfrm>
-            <a:off x="4328021" y="4169664"/>
-            <a:ext cx="543652" cy="384048"/>
+            <a:off x="4855464" y="4169664"/>
+            <a:ext cx="676656" cy="475488"/>
           </a:xfrm>
           <a:prstGeom prst="rect">
             <a:avLst>
-              <a:gd name="adj" fmla="val 9524"/>
+              <a:gd name="adj" fmla="val 7692"/>
             </a:avLst>
           </a:prstGeom>
           <a:solidFill>
@@ -23635,8 +24196,8 @@
         </p:nvSpPr>
         <p:spPr>
           <a:xfrm>
-            <a:off x="4328021" y="4169664"/>
-            <a:ext cx="543652" cy="384048"/>
+            <a:off x="4855464" y="4169664"/>
+            <a:ext cx="676656" cy="475488"/>
           </a:xfrm>
           <a:prstGeom prst="rect">
             <a:avLst/>
@@ -23660,7 +24221,7 @@
                 <a:ea typeface="Trebuchet MS" pitchFamily="34" charset="-122"/>
                 <a:cs typeface="Trebuchet MS" pitchFamily="34" charset="-120"/>
               </a:rPr>
-              <a:t>i</a:t>
+              <a:t>o</a:t>
             </a:r>
             <a:endParaRPr lang="en-US" sz="900" dirty="0"/>
           </a:p>
@@ -23674,12 +24235,12 @@
         </p:nvSpPr>
         <p:spPr>
           <a:xfrm>
-            <a:off x="4921966" y="4169664"/>
-            <a:ext cx="543652" cy="384048"/>
+            <a:off x="5581498" y="4169664"/>
+            <a:ext cx="676656" cy="475488"/>
           </a:xfrm>
           <a:prstGeom prst="rect">
             <a:avLst>
-              <a:gd name="adj" fmla="val 9524"/>
+              <a:gd name="adj" fmla="val 7692"/>
             </a:avLst>
           </a:prstGeom>
           <a:solidFill>
@@ -23701,8 +24262,8 @@
         </p:nvSpPr>
         <p:spPr>
           <a:xfrm>
-            <a:off x="4921966" y="4169664"/>
-            <a:ext cx="543652" cy="384048"/>
+            <a:off x="5581498" y="4169664"/>
+            <a:ext cx="676656" cy="475488"/>
           </a:xfrm>
           <a:prstGeom prst="rect">
             <a:avLst/>
@@ -23726,7 +24287,7 @@
                 <a:ea typeface="Trebuchet MS" pitchFamily="34" charset="-122"/>
                 <a:cs typeface="Trebuchet MS" pitchFamily="34" charset="-120"/>
               </a:rPr>
-              <a:t>c</a:t>
+              <a:t>l</a:t>
             </a:r>
             <a:endParaRPr lang="en-US" sz="900" dirty="0"/>
           </a:p>
@@ -23734,57 +24295,18 @@
       </p:sp>
       <p:sp>
         <p:nvSpPr>
-          <p:cNvPr id="54" name="Text 52"/>
-          <p:cNvSpPr/>
-          <p:nvPr/>
-        </p:nvSpPr>
-        <p:spPr>
-          <a:xfrm>
-            <a:off x="4921966" y="4572000"/>
-            <a:ext cx="543652" cy="219456"/>
-          </a:xfrm>
-          <a:prstGeom prst="rect">
-            <a:avLst/>
-          </a:prstGeom>
-          <a:noFill/>
-          <a:ln/>
-        </p:spPr>
-        <p:txBody>
-          <a:bodyPr wrap="square" lIns="0" tIns="0" rIns="0" bIns="0" rtlCol="0" anchor="t"/>
-          <a:lstStyle/>
-          <a:p>
-            <a:pPr algn="ctr" indent="0" marL="0">
-              <a:buNone/>
-            </a:pPr>
-            <a:r>
-              <a:rPr lang="en-US" sz="750" i="1" dirty="0">
-                <a:solidFill>
-                  <a:srgbClr val="94A3B8"/>
-                </a:solidFill>
-                <a:latin typeface="Calibri" pitchFamily="34" charset="0"/>
-                <a:ea typeface="Calibri" pitchFamily="34" charset="-122"/>
-                <a:cs typeface="Calibri" pitchFamily="34" charset="-120"/>
-              </a:rPr>
-              <a:t>/k/</a:t>
-            </a:r>
-            <a:endParaRPr lang="en-US" sz="750" dirty="0"/>
-          </a:p>
-        </p:txBody>
-      </p:sp>
-      <p:sp>
-        <p:nvSpPr>
-          <p:cNvPr id="55" name="Shape 53"/>
-          <p:cNvSpPr/>
-          <p:nvPr/>
-        </p:nvSpPr>
-        <p:spPr>
-          <a:xfrm>
-            <a:off x="5515910" y="4169664"/>
-            <a:ext cx="543652" cy="384048"/>
+          <p:cNvPr id="54" name="Shape 52"/>
+          <p:cNvSpPr/>
+          <p:nvPr/>
+        </p:nvSpPr>
+        <p:spPr>
+          <a:xfrm>
+            <a:off x="6307531" y="4169664"/>
+            <a:ext cx="676656" cy="475488"/>
           </a:xfrm>
           <a:prstGeom prst="rect">
             <a:avLst>
-              <a:gd name="adj" fmla="val 9524"/>
+              <a:gd name="adj" fmla="val 7692"/>
             </a:avLst>
           </a:prstGeom>
           <a:solidFill>
@@ -23800,14 +24322,14 @@
       </p:sp>
       <p:sp>
         <p:nvSpPr>
-          <p:cNvPr id="56" name="Text 54"/>
-          <p:cNvSpPr/>
-          <p:nvPr/>
-        </p:nvSpPr>
-        <p:spPr>
-          <a:xfrm>
-            <a:off x="5515910" y="4169664"/>
-            <a:ext cx="543652" cy="384048"/>
+          <p:cNvPr id="55" name="Text 53"/>
+          <p:cNvSpPr/>
+          <p:nvPr/>
+        </p:nvSpPr>
+        <p:spPr>
+          <a:xfrm>
+            <a:off x="6307531" y="4169664"/>
+            <a:ext cx="676656" cy="475488"/>
           </a:xfrm>
           <a:prstGeom prst="rect">
             <a:avLst/>
@@ -23831,7 +24353,7 @@
                 <a:ea typeface="Trebuchet MS" pitchFamily="34" charset="-122"/>
                 <a:cs typeface="Trebuchet MS" pitchFamily="34" charset="-120"/>
               </a:rPr>
-              <a:t>o</a:t>
+              <a:t>our</a:t>
             </a:r>
             <a:endParaRPr lang="en-US" sz="900" dirty="0"/>
           </a:p>
@@ -23839,18 +24361,18 @@
       </p:sp>
       <p:sp>
         <p:nvSpPr>
-          <p:cNvPr id="57" name="Shape 55"/>
-          <p:cNvSpPr/>
-          <p:nvPr/>
-        </p:nvSpPr>
-        <p:spPr>
-          <a:xfrm>
-            <a:off x="6109855" y="4169664"/>
-            <a:ext cx="543652" cy="384048"/>
+          <p:cNvPr id="56" name="Shape 54"/>
+          <p:cNvSpPr/>
+          <p:nvPr/>
+        </p:nvSpPr>
+        <p:spPr>
+          <a:xfrm>
+            <a:off x="7033565" y="4169664"/>
+            <a:ext cx="676656" cy="475488"/>
           </a:xfrm>
           <a:prstGeom prst="rect">
             <a:avLst>
-              <a:gd name="adj" fmla="val 9524"/>
+              <a:gd name="adj" fmla="val 7692"/>
             </a:avLst>
           </a:prstGeom>
           <a:solidFill>
@@ -23866,14 +24388,14 @@
       </p:sp>
       <p:sp>
         <p:nvSpPr>
-          <p:cNvPr id="58" name="Text 56"/>
-          <p:cNvSpPr/>
-          <p:nvPr/>
-        </p:nvSpPr>
-        <p:spPr>
-          <a:xfrm>
-            <a:off x="6109855" y="4169664"/>
-            <a:ext cx="543652" cy="384048"/>
+          <p:cNvPr id="57" name="Text 55"/>
+          <p:cNvSpPr/>
+          <p:nvPr/>
+        </p:nvSpPr>
+        <p:spPr>
+          <a:xfrm>
+            <a:off x="7033565" y="4169664"/>
+            <a:ext cx="676656" cy="475488"/>
           </a:xfrm>
           <a:prstGeom prst="rect">
             <a:avLst/>
@@ -23897,7 +24419,7 @@
                 <a:ea typeface="Trebuchet MS" pitchFamily="34" charset="-122"/>
                 <a:cs typeface="Trebuchet MS" pitchFamily="34" charset="-120"/>
               </a:rPr>
-              <a:t>l</a:t>
+              <a:t>i</a:t>
             </a:r>
             <a:endParaRPr lang="en-US" sz="900" dirty="0"/>
           </a:p>
@@ -23905,18 +24427,18 @@
       </p:sp>
       <p:sp>
         <p:nvSpPr>
-          <p:cNvPr id="59" name="Shape 57"/>
-          <p:cNvSpPr/>
-          <p:nvPr/>
-        </p:nvSpPr>
-        <p:spPr>
-          <a:xfrm>
-            <a:off x="6703799" y="4169664"/>
-            <a:ext cx="543652" cy="384048"/>
+          <p:cNvPr id="58" name="Shape 56"/>
+          <p:cNvSpPr/>
+          <p:nvPr/>
+        </p:nvSpPr>
+        <p:spPr>
+          <a:xfrm>
+            <a:off x="7759598" y="4169664"/>
+            <a:ext cx="676656" cy="475488"/>
           </a:xfrm>
           <a:prstGeom prst="rect">
             <a:avLst>
-              <a:gd name="adj" fmla="val 9524"/>
+              <a:gd name="adj" fmla="val 7692"/>
             </a:avLst>
           </a:prstGeom>
           <a:solidFill>
@@ -23932,14 +24454,14 @@
       </p:sp>
       <p:sp>
         <p:nvSpPr>
-          <p:cNvPr id="60" name="Text 58"/>
-          <p:cNvSpPr/>
-          <p:nvPr/>
-        </p:nvSpPr>
-        <p:spPr>
-          <a:xfrm>
-            <a:off x="6703799" y="4169664"/>
-            <a:ext cx="543652" cy="384048"/>
+          <p:cNvPr id="59" name="Text 57"/>
+          <p:cNvSpPr/>
+          <p:nvPr/>
+        </p:nvSpPr>
+        <p:spPr>
+          <a:xfrm>
+            <a:off x="7759598" y="4169664"/>
+            <a:ext cx="676656" cy="475488"/>
           </a:xfrm>
           <a:prstGeom prst="rect">
             <a:avLst/>
@@ -23963,139 +24485,7 @@
                 <a:ea typeface="Trebuchet MS" pitchFamily="34" charset="-122"/>
                 <a:cs typeface="Trebuchet MS" pitchFamily="34" charset="-120"/>
               </a:rPr>
-              <a:t>ou</a:t>
-            </a:r>
-            <a:endParaRPr lang="en-US" sz="900" dirty="0"/>
-          </a:p>
-        </p:txBody>
-      </p:sp>
-      <p:sp>
-        <p:nvSpPr>
-          <p:cNvPr id="61" name="Shape 59"/>
-          <p:cNvSpPr/>
-          <p:nvPr/>
-        </p:nvSpPr>
-        <p:spPr>
-          <a:xfrm>
-            <a:off x="7297743" y="4169664"/>
-            <a:ext cx="543652" cy="384048"/>
-          </a:xfrm>
-          <a:prstGeom prst="rect">
-            <a:avLst>
-              <a:gd name="adj" fmla="val 9524"/>
-            </a:avLst>
-          </a:prstGeom>
-          <a:solidFill>
-            <a:srgbClr val="FFFFFF"/>
-          </a:solidFill>
-          <a:ln w="12700">
-            <a:solidFill>
-              <a:srgbClr val="DB2777"/>
-            </a:solidFill>
-            <a:prstDash val="solid"/>
-          </a:ln>
-        </p:spPr>
-      </p:sp>
-      <p:sp>
-        <p:nvSpPr>
-          <p:cNvPr id="62" name="Text 60"/>
-          <p:cNvSpPr/>
-          <p:nvPr/>
-        </p:nvSpPr>
-        <p:spPr>
-          <a:xfrm>
-            <a:off x="7297743" y="4169664"/>
-            <a:ext cx="543652" cy="384048"/>
-          </a:xfrm>
-          <a:prstGeom prst="rect">
-            <a:avLst/>
-          </a:prstGeom>
-          <a:noFill/>
-          <a:ln/>
-        </p:spPr>
-        <p:txBody>
-          <a:bodyPr wrap="square" lIns="0" tIns="0" rIns="0" bIns="0" rtlCol="0" anchor="ctr"/>
-          <a:lstStyle/>
-          <a:p>
-            <a:pPr algn="ctr" indent="0" marL="0">
-              <a:buNone/>
-            </a:pPr>
-            <a:r>
-              <a:rPr lang="en-US" sz="900" b="1" dirty="0">
-                <a:solidFill>
-                  <a:srgbClr val="9D174D"/>
-                </a:solidFill>
-                <a:latin typeface="Trebuchet MS" pitchFamily="34" charset="0"/>
-                <a:ea typeface="Trebuchet MS" pitchFamily="34" charset="-122"/>
-                <a:cs typeface="Trebuchet MS" pitchFamily="34" charset="-120"/>
-              </a:rPr>
-              <a:t>r</a:t>
-            </a:r>
-            <a:endParaRPr lang="en-US" sz="900" dirty="0"/>
-          </a:p>
-        </p:txBody>
-      </p:sp>
-      <p:sp>
-        <p:nvSpPr>
-          <p:cNvPr id="63" name="Shape 61"/>
-          <p:cNvSpPr/>
-          <p:nvPr/>
-        </p:nvSpPr>
-        <p:spPr>
-          <a:xfrm>
-            <a:off x="7891688" y="4169664"/>
-            <a:ext cx="543652" cy="384048"/>
-          </a:xfrm>
-          <a:prstGeom prst="rect">
-            <a:avLst>
-              <a:gd name="adj" fmla="val 9524"/>
-            </a:avLst>
-          </a:prstGeom>
-          <a:solidFill>
-            <a:srgbClr val="FFFFFF"/>
-          </a:solidFill>
-          <a:ln w="12700">
-            <a:solidFill>
-              <a:srgbClr val="DB2777"/>
-            </a:solidFill>
-            <a:prstDash val="solid"/>
-          </a:ln>
-        </p:spPr>
-      </p:sp>
-      <p:sp>
-        <p:nvSpPr>
-          <p:cNvPr id="64" name="Text 62"/>
-          <p:cNvSpPr/>
-          <p:nvPr/>
-        </p:nvSpPr>
-        <p:spPr>
-          <a:xfrm>
-            <a:off x="7891688" y="4169664"/>
-            <a:ext cx="543652" cy="384048"/>
-          </a:xfrm>
-          <a:prstGeom prst="rect">
-            <a:avLst/>
-          </a:prstGeom>
-          <a:noFill/>
-          <a:ln/>
-        </p:spPr>
-        <p:txBody>
-          <a:bodyPr wrap="square" lIns="0" tIns="0" rIns="0" bIns="0" rtlCol="0" anchor="ctr"/>
-          <a:lstStyle/>
-          <a:p>
-            <a:pPr algn="ctr" indent="0" marL="0">
-              <a:buNone/>
-            </a:pPr>
-            <a:r>
-              <a:rPr lang="en-US" sz="900" b="1" dirty="0">
-                <a:solidFill>
-                  <a:srgbClr val="9D174D"/>
-                </a:solidFill>
-                <a:latin typeface="Trebuchet MS" pitchFamily="34" charset="0"/>
-                <a:ea typeface="Trebuchet MS" pitchFamily="34" charset="-122"/>
-                <a:cs typeface="Trebuchet MS" pitchFamily="34" charset="-120"/>
-              </a:rPr>
-              <a:t>ed</a:t>
+              <a:t>ng</a:t>
             </a:r>
             <a:endParaRPr lang="en-US" sz="900" dirty="0"/>
           </a:p>
@@ -24387,7 +24777,7 @@
                 <a:ea typeface="Calibri" pitchFamily="34" charset="-122"/>
                 <a:cs typeface="Calibri" pitchFamily="34" charset="-120"/>
               </a:rPr>
-              <a:t>Word Labs  •  wordlabs.app  •  Root: 'colour' = hue, tint, or shade</a:t>
+              <a:t>Word Labs  •  wordlabs.app  •  Root: 'colour' = the property of light; to add colour</a:t>
             </a:r>
             <a:endParaRPr lang="en-US" sz="800" dirty="0"/>
           </a:p>
@@ -24526,7 +24916,7 @@
                 <a:ea typeface="Trebuchet MS" pitchFamily="34" charset="-122"/>
                 <a:cs typeface="Trebuchet MS" pitchFamily="34" charset="-120"/>
               </a:rPr>
-              <a:t>colouring</a:t>
+              <a:t>multicolour</a:t>
             </a:r>
             <a:endParaRPr lang="en-US" sz="2800" dirty="0"/>
           </a:p>
@@ -25214,7 +25604,7 @@
                 <a:ea typeface="Calibri" pitchFamily="34" charset="-122"/>
                 <a:cs typeface="Calibri" pitchFamily="34" charset="-120"/>
               </a:rPr>
-              <a:t>Word Labs  •  wordlabs.app  •  Root: 'colour' = hue, tint, or shade</a:t>
+              <a:t>Word Labs  •  wordlabs.app  •  Root: 'colour' = the property of light; to add colour</a:t>
             </a:r>
             <a:endParaRPr lang="en-US" sz="800" dirty="0"/>
           </a:p>
@@ -25353,7 +25743,7 @@
                 <a:ea typeface="Trebuchet MS" pitchFamily="34" charset="-122"/>
                 <a:cs typeface="Trebuchet MS" pitchFamily="34" charset="-120"/>
               </a:rPr>
-              <a:t>colouring</a:t>
+              <a:t>multicolour</a:t>
             </a:r>
             <a:endParaRPr lang="en-US" sz="2800" dirty="0"/>
           </a:p>
@@ -25442,11 +25832,11 @@
             </a:avLst>
           </a:prstGeom>
           <a:solidFill>
-            <a:srgbClr val="CCFBF1"/>
+            <a:srgbClr val="DDD6FE"/>
           </a:solidFill>
           <a:ln w="19050">
             <a:solidFill>
-              <a:srgbClr val="0D9488"/>
+              <a:srgbClr val="7C3AED"/>
             </a:solidFill>
             <a:prstDash val="solid"/>
           </a:ln>
@@ -25486,13 +25876,13 @@
             <a:r>
               <a:rPr lang="en-US" sz="1300" b="1" dirty="0">
                 <a:solidFill>
-                  <a:srgbClr val="0F766E"/>
+                  <a:srgbClr val="4C1D95"/>
                 </a:solidFill>
                 <a:latin typeface="Trebuchet MS" pitchFamily="34" charset="0"/>
                 <a:ea typeface="Trebuchet MS" pitchFamily="34" charset="-122"/>
                 <a:cs typeface="Trebuchet MS" pitchFamily="34" charset="-120"/>
               </a:rPr>
-              <a:t>colour</a:t>
+              <a:t>multi</a:t>
             </a:r>
             <a:endParaRPr lang="en-US" sz="1300" dirty="0"/>
           </a:p>
@@ -25531,7 +25921,7 @@
                 <a:ea typeface="Calibri" pitchFamily="34" charset="-122"/>
                 <a:cs typeface="Calibri" pitchFamily="34" charset="-120"/>
               </a:rPr>
-              <a:t>hue or shade</a:t>
+              <a:t>many</a:t>
             </a:r>
             <a:endParaRPr lang="en-US" sz="850" dirty="0"/>
           </a:p>
@@ -25554,11 +25944,11 @@
             </a:avLst>
           </a:prstGeom>
           <a:solidFill>
-            <a:srgbClr val="FCE7F3"/>
+            <a:srgbClr val="CCFBF1"/>
           </a:solidFill>
           <a:ln w="19050">
             <a:solidFill>
-              <a:srgbClr val="DB2777"/>
+              <a:srgbClr val="0D9488"/>
             </a:solidFill>
             <a:prstDash val="solid"/>
           </a:ln>
@@ -25598,13 +25988,13 @@
             <a:r>
               <a:rPr lang="en-US" sz="1300" b="1" dirty="0">
                 <a:solidFill>
-                  <a:srgbClr val="9D174D"/>
+                  <a:srgbClr val="0F766E"/>
                 </a:solidFill>
                 <a:latin typeface="Trebuchet MS" pitchFamily="34" charset="0"/>
                 <a:ea typeface="Trebuchet MS" pitchFamily="34" charset="-122"/>
                 <a:cs typeface="Trebuchet MS" pitchFamily="34" charset="-120"/>
               </a:rPr>
-              <a:t>ing</a:t>
+              <a:t>colour</a:t>
             </a:r>
             <a:endParaRPr lang="en-US" sz="1300" dirty="0"/>
           </a:p>
@@ -25643,7 +26033,7 @@
                 <a:ea typeface="Calibri" pitchFamily="34" charset="-122"/>
                 <a:cs typeface="Calibri" pitchFamily="34" charset="-120"/>
               </a:rPr>
-              <a:t>action or process</a:t>
+              <a:t>the property of light; to add colour</a:t>
             </a:r>
             <a:endParaRPr lang="en-US" sz="850" dirty="0"/>
           </a:p>
@@ -26199,7 +26589,7 @@
                 <a:ea typeface="Calibri" pitchFamily="34" charset="-122"/>
                 <a:cs typeface="Calibri" pitchFamily="34" charset="-120"/>
               </a:rPr>
-              <a:t>Word Labs  •  wordlabs.app  •  Root: 'colour' = hue, tint, or shade</a:t>
+              <a:t>Word Labs  •  wordlabs.app  •  Root: 'colour' = the property of light; to add colour</a:t>
             </a:r>
             <a:endParaRPr lang="en-US" sz="800" dirty="0"/>
           </a:p>
@@ -26272,7 +26662,7 @@
                 <a:ea typeface="Trebuchet MS" pitchFamily="34" charset="-122"/>
                 <a:cs typeface="Trebuchet MS" pitchFamily="34" charset="-120"/>
               </a:rPr>
-              <a:t>We are learning that the root 'colour' means 'hue, tint, or shade'.</a:t>
+              <a:t>We are learning that the root 'colour' means 'the property of light; to add colour'.</a:t>
             </a:r>
             <a:endParaRPr lang="en-US" sz="2000" dirty="0"/>
           </a:p>
@@ -26918,7 +27308,7 @@
                 <a:ea typeface="Calibri" pitchFamily="34" charset="-122"/>
                 <a:cs typeface="Calibri" pitchFamily="34" charset="-120"/>
               </a:rPr>
-              <a:t>Word Labs  •  wordlabs.app  •  Root: 'colour' = hue, tint, or shade</a:t>
+              <a:t>Word Labs  •  wordlabs.app  •  Root: 'colour' = the property of light; to add colour</a:t>
             </a:r>
             <a:endParaRPr lang="en-US" sz="800" dirty="0"/>
           </a:p>
@@ -27057,7 +27447,7 @@
                 <a:ea typeface="Trebuchet MS" pitchFamily="34" charset="-122"/>
                 <a:cs typeface="Trebuchet MS" pitchFamily="34" charset="-120"/>
               </a:rPr>
-              <a:t>colouring</a:t>
+              <a:t>multicolour</a:t>
             </a:r>
             <a:endParaRPr lang="en-US" sz="2800" dirty="0"/>
           </a:p>
@@ -27146,11 +27536,11 @@
             </a:avLst>
           </a:prstGeom>
           <a:solidFill>
-            <a:srgbClr val="CCFBF1"/>
+            <a:srgbClr val="DDD6FE"/>
           </a:solidFill>
           <a:ln w="19050">
             <a:solidFill>
-              <a:srgbClr val="0D9488"/>
+              <a:srgbClr val="7C3AED"/>
             </a:solidFill>
             <a:prstDash val="solid"/>
           </a:ln>
@@ -27190,13 +27580,13 @@
             <a:r>
               <a:rPr lang="en-US" sz="1300" b="1" dirty="0">
                 <a:solidFill>
-                  <a:srgbClr val="0F766E"/>
+                  <a:srgbClr val="4C1D95"/>
                 </a:solidFill>
                 <a:latin typeface="Trebuchet MS" pitchFamily="34" charset="0"/>
                 <a:ea typeface="Trebuchet MS" pitchFamily="34" charset="-122"/>
                 <a:cs typeface="Trebuchet MS" pitchFamily="34" charset="-120"/>
               </a:rPr>
-              <a:t>colour</a:t>
+              <a:t>multi</a:t>
             </a:r>
             <a:endParaRPr lang="en-US" sz="1300" dirty="0"/>
           </a:p>
@@ -27235,7 +27625,7 @@
                 <a:ea typeface="Calibri" pitchFamily="34" charset="-122"/>
                 <a:cs typeface="Calibri" pitchFamily="34" charset="-120"/>
               </a:rPr>
-              <a:t>hue or shade</a:t>
+              <a:t>many</a:t>
             </a:r>
             <a:endParaRPr lang="en-US" sz="850" dirty="0"/>
           </a:p>
@@ -27258,11 +27648,11 @@
             </a:avLst>
           </a:prstGeom>
           <a:solidFill>
-            <a:srgbClr val="FCE7F3"/>
+            <a:srgbClr val="CCFBF1"/>
           </a:solidFill>
           <a:ln w="19050">
             <a:solidFill>
-              <a:srgbClr val="DB2777"/>
+              <a:srgbClr val="0D9488"/>
             </a:solidFill>
             <a:prstDash val="solid"/>
           </a:ln>
@@ -27302,13 +27692,13 @@
             <a:r>
               <a:rPr lang="en-US" sz="1300" b="1" dirty="0">
                 <a:solidFill>
-                  <a:srgbClr val="9D174D"/>
+                  <a:srgbClr val="0F766E"/>
                 </a:solidFill>
                 <a:latin typeface="Trebuchet MS" pitchFamily="34" charset="0"/>
                 <a:ea typeface="Trebuchet MS" pitchFamily="34" charset="-122"/>
                 <a:cs typeface="Trebuchet MS" pitchFamily="34" charset="-120"/>
               </a:rPr>
-              <a:t>ing</a:t>
+              <a:t>colour</a:t>
             </a:r>
             <a:endParaRPr lang="en-US" sz="1300" dirty="0"/>
           </a:p>
@@ -27347,7 +27737,7 @@
                 <a:ea typeface="Calibri" pitchFamily="34" charset="-122"/>
                 <a:cs typeface="Calibri" pitchFamily="34" charset="-120"/>
               </a:rPr>
-              <a:t>action or process</a:t>
+              <a:t>the property of light; to add colour</a:t>
             </a:r>
             <a:endParaRPr lang="en-US" sz="850" dirty="0"/>
           </a:p>
@@ -27454,8 +27844,8 @@
         </p:nvSpPr>
         <p:spPr>
           <a:xfrm>
-            <a:off x="2313432" y="3364992"/>
-            <a:ext cx="1645920" cy="475488"/>
+            <a:off x="1975104" y="3364992"/>
+            <a:ext cx="1554480" cy="475488"/>
           </a:xfrm>
           <a:prstGeom prst="rect">
             <a:avLst>
@@ -27481,8 +27871,8 @@
         </p:nvSpPr>
         <p:spPr>
           <a:xfrm>
-            <a:off x="2313432" y="3364992"/>
-            <a:ext cx="1645920" cy="475488"/>
+            <a:off x="1975104" y="3364992"/>
+            <a:ext cx="1554480" cy="475488"/>
           </a:xfrm>
           <a:prstGeom prst="rect">
             <a:avLst/>
@@ -27506,7 +27896,7 @@
                 <a:ea typeface="Trebuchet MS" pitchFamily="34" charset="-122"/>
                 <a:cs typeface="Trebuchet MS" pitchFamily="34" charset="-120"/>
               </a:rPr>
-              <a:t>col</a:t>
+              <a:t>mul</a:t>
             </a:r>
             <a:endParaRPr lang="en-US" sz="1400" dirty="0"/>
           </a:p>
@@ -27520,8 +27910,8 @@
         </p:nvSpPr>
         <p:spPr>
           <a:xfrm>
-            <a:off x="3959352" y="3364992"/>
-            <a:ext cx="411480" cy="475488"/>
+            <a:off x="3529584" y="3364992"/>
+            <a:ext cx="73152" cy="475488"/>
           </a:xfrm>
           <a:prstGeom prst="rect">
             <a:avLst/>
@@ -27559,8 +27949,8 @@
         </p:nvSpPr>
         <p:spPr>
           <a:xfrm>
-            <a:off x="4370832" y="3364992"/>
-            <a:ext cx="1645920" cy="475488"/>
+            <a:off x="3602736" y="3364992"/>
+            <a:ext cx="1554480" cy="475488"/>
           </a:xfrm>
           <a:prstGeom prst="rect">
             <a:avLst>
@@ -27586,8 +27976,8 @@
         </p:nvSpPr>
         <p:spPr>
           <a:xfrm>
-            <a:off x="4370832" y="3364992"/>
-            <a:ext cx="1645920" cy="475488"/>
+            <a:off x="3602736" y="3364992"/>
+            <a:ext cx="1554480" cy="475488"/>
           </a:xfrm>
           <a:prstGeom prst="rect">
             <a:avLst/>
@@ -27611,7 +28001,7 @@
                 <a:ea typeface="Trebuchet MS" pitchFamily="34" charset="-122"/>
                 <a:cs typeface="Trebuchet MS" pitchFamily="34" charset="-120"/>
               </a:rPr>
-              <a:t>our</a:t>
+              <a:t>ti</a:t>
             </a:r>
             <a:endParaRPr lang="en-US" sz="1400" dirty="0"/>
           </a:p>
@@ -27625,8 +28015,8 @@
         </p:nvSpPr>
         <p:spPr>
           <a:xfrm>
-            <a:off x="6016752" y="3364992"/>
-            <a:ext cx="411480" cy="475488"/>
+            <a:off x="5157216" y="3364992"/>
+            <a:ext cx="73152" cy="475488"/>
           </a:xfrm>
           <a:prstGeom prst="rect">
             <a:avLst/>
@@ -27664,8 +28054,8 @@
         </p:nvSpPr>
         <p:spPr>
           <a:xfrm>
-            <a:off x="6428232" y="3364992"/>
-            <a:ext cx="1645920" cy="475488"/>
+            <a:off x="5230368" y="3364992"/>
+            <a:ext cx="1554480" cy="475488"/>
           </a:xfrm>
           <a:prstGeom prst="rect">
             <a:avLst>
@@ -27691,8 +28081,8 @@
         </p:nvSpPr>
         <p:spPr>
           <a:xfrm>
-            <a:off x="6428232" y="3364992"/>
-            <a:ext cx="1645920" cy="475488"/>
+            <a:off x="5230368" y="3364992"/>
+            <a:ext cx="1554480" cy="475488"/>
           </a:xfrm>
           <a:prstGeom prst="rect">
             <a:avLst/>
@@ -27716,7 +28106,7 @@
                 <a:ea typeface="Trebuchet MS" pitchFamily="34" charset="-122"/>
                 <a:cs typeface="Trebuchet MS" pitchFamily="34" charset="-120"/>
               </a:rPr>
-              <a:t>ing</a:t>
+              <a:t>col</a:t>
             </a:r>
             <a:endParaRPr lang="en-US" sz="1400" dirty="0"/>
           </a:p>
@@ -27724,7 +28114,112 @@
       </p:sp>
       <p:sp>
         <p:nvSpPr>
-          <p:cNvPr id="33" name="Shape 31"/>
+          <p:cNvPr id="33" name="Text 31"/>
+          <p:cNvSpPr/>
+          <p:nvPr/>
+        </p:nvSpPr>
+        <p:spPr>
+          <a:xfrm>
+            <a:off x="6784848" y="3364992"/>
+            <a:ext cx="73152" cy="475488"/>
+          </a:xfrm>
+          <a:prstGeom prst="rect">
+            <a:avLst/>
+          </a:prstGeom>
+          <a:noFill/>
+          <a:ln/>
+        </p:spPr>
+        <p:txBody>
+          <a:bodyPr wrap="square" lIns="0" tIns="0" rIns="0" bIns="0" rtlCol="0" anchor="ctr"/>
+          <a:lstStyle/>
+          <a:p>
+            <a:pPr algn="ctr" indent="0" marL="0">
+              <a:buNone/>
+            </a:pPr>
+            <a:r>
+              <a:rPr lang="en-US" sz="1600" b="1" dirty="0">
+                <a:solidFill>
+                  <a:srgbClr val="0D9488"/>
+                </a:solidFill>
+                <a:latin typeface="Trebuchet MS" pitchFamily="34" charset="0"/>
+                <a:ea typeface="Trebuchet MS" pitchFamily="34" charset="-122"/>
+                <a:cs typeface="Trebuchet MS" pitchFamily="34" charset="-120"/>
+              </a:rPr>
+              <a:t>·</a:t>
+            </a:r>
+            <a:endParaRPr lang="en-US" sz="1600" dirty="0"/>
+          </a:p>
+        </p:txBody>
+      </p:sp>
+      <p:sp>
+        <p:nvSpPr>
+          <p:cNvPr id="34" name="Shape 32"/>
+          <p:cNvSpPr/>
+          <p:nvPr/>
+        </p:nvSpPr>
+        <p:spPr>
+          <a:xfrm>
+            <a:off x="6858000" y="3364992"/>
+            <a:ext cx="1554480" cy="475488"/>
+          </a:xfrm>
+          <a:prstGeom prst="rect">
+            <a:avLst>
+              <a:gd name="adj" fmla="val 9615"/>
+            </a:avLst>
+          </a:prstGeom>
+          <a:solidFill>
+            <a:srgbClr val="FFFFFF"/>
+          </a:solidFill>
+          <a:ln w="12700">
+            <a:solidFill>
+              <a:srgbClr val="0D9488"/>
+            </a:solidFill>
+            <a:prstDash val="solid"/>
+          </a:ln>
+        </p:spPr>
+      </p:sp>
+      <p:sp>
+        <p:nvSpPr>
+          <p:cNvPr id="35" name="Text 33"/>
+          <p:cNvSpPr/>
+          <p:nvPr/>
+        </p:nvSpPr>
+        <p:spPr>
+          <a:xfrm>
+            <a:off x="6858000" y="3364992"/>
+            <a:ext cx="1554480" cy="475488"/>
+          </a:xfrm>
+          <a:prstGeom prst="rect">
+            <a:avLst/>
+          </a:prstGeom>
+          <a:noFill/>
+          <a:ln/>
+        </p:spPr>
+        <p:txBody>
+          <a:bodyPr wrap="square" lIns="0" tIns="0" rIns="0" bIns="0" rtlCol="0" anchor="ctr"/>
+          <a:lstStyle/>
+          <a:p>
+            <a:pPr algn="ctr" indent="0" marL="0">
+              <a:buNone/>
+            </a:pPr>
+            <a:r>
+              <a:rPr lang="en-US" sz="1400" b="1" dirty="0">
+                <a:solidFill>
+                  <a:srgbClr val="0D9488"/>
+                </a:solidFill>
+                <a:latin typeface="Trebuchet MS" pitchFamily="34" charset="0"/>
+                <a:ea typeface="Trebuchet MS" pitchFamily="34" charset="-122"/>
+                <a:cs typeface="Trebuchet MS" pitchFamily="34" charset="-120"/>
+              </a:rPr>
+              <a:t>our</a:t>
+            </a:r>
+            <a:endParaRPr lang="en-US" sz="1400" dirty="0"/>
+          </a:p>
+        </p:txBody>
+      </p:sp>
+      <p:sp>
+        <p:nvSpPr>
+          <p:cNvPr id="36" name="Shape 34"/>
           <p:cNvSpPr/>
           <p:nvPr/>
         </p:nvSpPr>
@@ -27751,7 +28246,7 @@
       </p:sp>
       <p:sp>
         <p:nvSpPr>
-          <p:cNvPr id="34" name="Text 32"/>
+          <p:cNvPr id="37" name="Text 35"/>
           <p:cNvSpPr/>
           <p:nvPr/>
         </p:nvSpPr>
@@ -27790,7 +28285,7 @@
       </p:sp>
       <p:sp>
         <p:nvSpPr>
-          <p:cNvPr id="35" name="Shape 33"/>
+          <p:cNvPr id="38" name="Shape 36"/>
           <p:cNvSpPr/>
           <p:nvPr/>
         </p:nvSpPr>
@@ -27817,7 +28312,7 @@
       </p:sp>
       <p:sp>
         <p:nvSpPr>
-          <p:cNvPr id="36" name="Text 34"/>
+          <p:cNvPr id="39" name="Text 37"/>
           <p:cNvSpPr/>
           <p:nvPr/>
         </p:nvSpPr>
@@ -28140,7 +28635,7 @@
                 <a:ea typeface="Calibri" pitchFamily="34" charset="-122"/>
                 <a:cs typeface="Calibri" pitchFamily="34" charset="-120"/>
               </a:rPr>
-              <a:t>Word Labs  •  wordlabs.app  •  Root: 'colour' = hue, tint, or shade</a:t>
+              <a:t>Word Labs  •  wordlabs.app  •  Root: 'colour' = the property of light; to add colour</a:t>
             </a:r>
             <a:endParaRPr lang="en-US" sz="800" dirty="0"/>
           </a:p>
@@ -28279,7 +28774,7 @@
                 <a:ea typeface="Trebuchet MS" pitchFamily="34" charset="-122"/>
                 <a:cs typeface="Trebuchet MS" pitchFamily="34" charset="-120"/>
               </a:rPr>
-              <a:t>colouring</a:t>
+              <a:t>multicolour</a:t>
             </a:r>
             <a:endParaRPr lang="en-US" sz="2800" dirty="0"/>
           </a:p>
@@ -28368,11 +28863,11 @@
             </a:avLst>
           </a:prstGeom>
           <a:solidFill>
-            <a:srgbClr val="CCFBF1"/>
+            <a:srgbClr val="DDD6FE"/>
           </a:solidFill>
           <a:ln w="19050">
             <a:solidFill>
-              <a:srgbClr val="0D9488"/>
+              <a:srgbClr val="7C3AED"/>
             </a:solidFill>
             <a:prstDash val="solid"/>
           </a:ln>
@@ -28412,13 +28907,13 @@
             <a:r>
               <a:rPr lang="en-US" sz="1300" b="1" dirty="0">
                 <a:solidFill>
-                  <a:srgbClr val="0F766E"/>
+                  <a:srgbClr val="4C1D95"/>
                 </a:solidFill>
                 <a:latin typeface="Trebuchet MS" pitchFamily="34" charset="0"/>
                 <a:ea typeface="Trebuchet MS" pitchFamily="34" charset="-122"/>
                 <a:cs typeface="Trebuchet MS" pitchFamily="34" charset="-120"/>
               </a:rPr>
-              <a:t>colour</a:t>
+              <a:t>multi</a:t>
             </a:r>
             <a:endParaRPr lang="en-US" sz="1300" dirty="0"/>
           </a:p>
@@ -28457,7 +28952,7 @@
                 <a:ea typeface="Calibri" pitchFamily="34" charset="-122"/>
                 <a:cs typeface="Calibri" pitchFamily="34" charset="-120"/>
               </a:rPr>
-              <a:t>hue or shade</a:t>
+              <a:t>many</a:t>
             </a:r>
             <a:endParaRPr lang="en-US" sz="850" dirty="0"/>
           </a:p>
@@ -28480,11 +28975,11 @@
             </a:avLst>
           </a:prstGeom>
           <a:solidFill>
-            <a:srgbClr val="FCE7F3"/>
+            <a:srgbClr val="CCFBF1"/>
           </a:solidFill>
           <a:ln w="19050">
             <a:solidFill>
-              <a:srgbClr val="DB2777"/>
+              <a:srgbClr val="0D9488"/>
             </a:solidFill>
             <a:prstDash val="solid"/>
           </a:ln>
@@ -28524,13 +29019,13 @@
             <a:r>
               <a:rPr lang="en-US" sz="1300" b="1" dirty="0">
                 <a:solidFill>
-                  <a:srgbClr val="9D174D"/>
+                  <a:srgbClr val="0F766E"/>
                 </a:solidFill>
                 <a:latin typeface="Trebuchet MS" pitchFamily="34" charset="0"/>
                 <a:ea typeface="Trebuchet MS" pitchFamily="34" charset="-122"/>
                 <a:cs typeface="Trebuchet MS" pitchFamily="34" charset="-120"/>
               </a:rPr>
-              <a:t>ing</a:t>
+              <a:t>colour</a:t>
             </a:r>
             <a:endParaRPr lang="en-US" sz="1300" dirty="0"/>
           </a:p>
@@ -28569,7 +29064,7 @@
                 <a:ea typeface="Calibri" pitchFamily="34" charset="-122"/>
                 <a:cs typeface="Calibri" pitchFamily="34" charset="-120"/>
               </a:rPr>
-              <a:t>action or process</a:t>
+              <a:t>the property of light; to add colour</a:t>
             </a:r>
             <a:endParaRPr lang="en-US" sz="850" dirty="0"/>
           </a:p>
@@ -28676,8 +29171,8 @@
         </p:nvSpPr>
         <p:spPr>
           <a:xfrm>
-            <a:off x="2313432" y="3364992"/>
-            <a:ext cx="1645920" cy="475488"/>
+            <a:off x="1975104" y="3364992"/>
+            <a:ext cx="1554480" cy="475488"/>
           </a:xfrm>
           <a:prstGeom prst="rect">
             <a:avLst>
@@ -28703,8 +29198,8 @@
         </p:nvSpPr>
         <p:spPr>
           <a:xfrm>
-            <a:off x="2313432" y="3364992"/>
-            <a:ext cx="1645920" cy="475488"/>
+            <a:off x="1975104" y="3364992"/>
+            <a:ext cx="1554480" cy="475488"/>
           </a:xfrm>
           <a:prstGeom prst="rect">
             <a:avLst/>
@@ -28728,7 +29223,7 @@
                 <a:ea typeface="Trebuchet MS" pitchFamily="34" charset="-122"/>
                 <a:cs typeface="Trebuchet MS" pitchFamily="34" charset="-120"/>
               </a:rPr>
-              <a:t>col</a:t>
+              <a:t>mul</a:t>
             </a:r>
             <a:endParaRPr lang="en-US" sz="1400" dirty="0"/>
           </a:p>
@@ -28742,8 +29237,8 @@
         </p:nvSpPr>
         <p:spPr>
           <a:xfrm>
-            <a:off x="3959352" y="3364992"/>
-            <a:ext cx="411480" cy="475488"/>
+            <a:off x="3529584" y="3364992"/>
+            <a:ext cx="73152" cy="475488"/>
           </a:xfrm>
           <a:prstGeom prst="rect">
             <a:avLst/>
@@ -28781,8 +29276,8 @@
         </p:nvSpPr>
         <p:spPr>
           <a:xfrm>
-            <a:off x="4370832" y="3364992"/>
-            <a:ext cx="1645920" cy="475488"/>
+            <a:off x="3602736" y="3364992"/>
+            <a:ext cx="1554480" cy="475488"/>
           </a:xfrm>
           <a:prstGeom prst="rect">
             <a:avLst>
@@ -28808,8 +29303,8 @@
         </p:nvSpPr>
         <p:spPr>
           <a:xfrm>
-            <a:off x="4370832" y="3364992"/>
-            <a:ext cx="1645920" cy="475488"/>
+            <a:off x="3602736" y="3364992"/>
+            <a:ext cx="1554480" cy="475488"/>
           </a:xfrm>
           <a:prstGeom prst="rect">
             <a:avLst/>
@@ -28833,7 +29328,7 @@
                 <a:ea typeface="Trebuchet MS" pitchFamily="34" charset="-122"/>
                 <a:cs typeface="Trebuchet MS" pitchFamily="34" charset="-120"/>
               </a:rPr>
-              <a:t>our</a:t>
+              <a:t>ti</a:t>
             </a:r>
             <a:endParaRPr lang="en-US" sz="1400" dirty="0"/>
           </a:p>
@@ -28847,8 +29342,8 @@
         </p:nvSpPr>
         <p:spPr>
           <a:xfrm>
-            <a:off x="6016752" y="3364992"/>
-            <a:ext cx="411480" cy="475488"/>
+            <a:off x="5157216" y="3364992"/>
+            <a:ext cx="73152" cy="475488"/>
           </a:xfrm>
           <a:prstGeom prst="rect">
             <a:avLst/>
@@ -28886,8 +29381,8 @@
         </p:nvSpPr>
         <p:spPr>
           <a:xfrm>
-            <a:off x="6428232" y="3364992"/>
-            <a:ext cx="1645920" cy="475488"/>
+            <a:off x="5230368" y="3364992"/>
+            <a:ext cx="1554480" cy="475488"/>
           </a:xfrm>
           <a:prstGeom prst="rect">
             <a:avLst>
@@ -28913,8 +29408,8 @@
         </p:nvSpPr>
         <p:spPr>
           <a:xfrm>
-            <a:off x="6428232" y="3364992"/>
-            <a:ext cx="1645920" cy="475488"/>
+            <a:off x="5230368" y="3364992"/>
+            <a:ext cx="1554480" cy="475488"/>
           </a:xfrm>
           <a:prstGeom prst="rect">
             <a:avLst/>
@@ -28938,7 +29433,7 @@
                 <a:ea typeface="Trebuchet MS" pitchFamily="34" charset="-122"/>
                 <a:cs typeface="Trebuchet MS" pitchFamily="34" charset="-120"/>
               </a:rPr>
-              <a:t>ing</a:t>
+              <a:t>col</a:t>
             </a:r>
             <a:endParaRPr lang="en-US" sz="1400" dirty="0"/>
           </a:p>
@@ -28946,7 +29441,112 @@
       </p:sp>
       <p:sp>
         <p:nvSpPr>
-          <p:cNvPr id="33" name="Shape 31"/>
+          <p:cNvPr id="33" name="Text 31"/>
+          <p:cNvSpPr/>
+          <p:nvPr/>
+        </p:nvSpPr>
+        <p:spPr>
+          <a:xfrm>
+            <a:off x="6784848" y="3364992"/>
+            <a:ext cx="73152" cy="475488"/>
+          </a:xfrm>
+          <a:prstGeom prst="rect">
+            <a:avLst/>
+          </a:prstGeom>
+          <a:noFill/>
+          <a:ln/>
+        </p:spPr>
+        <p:txBody>
+          <a:bodyPr wrap="square" lIns="0" tIns="0" rIns="0" bIns="0" rtlCol="0" anchor="ctr"/>
+          <a:lstStyle/>
+          <a:p>
+            <a:pPr algn="ctr" indent="0" marL="0">
+              <a:buNone/>
+            </a:pPr>
+            <a:r>
+              <a:rPr lang="en-US" sz="1600" b="1" dirty="0">
+                <a:solidFill>
+                  <a:srgbClr val="0D9488"/>
+                </a:solidFill>
+                <a:latin typeface="Trebuchet MS" pitchFamily="34" charset="0"/>
+                <a:ea typeface="Trebuchet MS" pitchFamily="34" charset="-122"/>
+                <a:cs typeface="Trebuchet MS" pitchFamily="34" charset="-120"/>
+              </a:rPr>
+              <a:t>·</a:t>
+            </a:r>
+            <a:endParaRPr lang="en-US" sz="1600" dirty="0"/>
+          </a:p>
+        </p:txBody>
+      </p:sp>
+      <p:sp>
+        <p:nvSpPr>
+          <p:cNvPr id="34" name="Shape 32"/>
+          <p:cNvSpPr/>
+          <p:nvPr/>
+        </p:nvSpPr>
+        <p:spPr>
+          <a:xfrm>
+            <a:off x="6858000" y="3364992"/>
+            <a:ext cx="1554480" cy="475488"/>
+          </a:xfrm>
+          <a:prstGeom prst="rect">
+            <a:avLst>
+              <a:gd name="adj" fmla="val 9615"/>
+            </a:avLst>
+          </a:prstGeom>
+          <a:solidFill>
+            <a:srgbClr val="FFFFFF"/>
+          </a:solidFill>
+          <a:ln w="12700">
+            <a:solidFill>
+              <a:srgbClr val="0D9488"/>
+            </a:solidFill>
+            <a:prstDash val="solid"/>
+          </a:ln>
+        </p:spPr>
+      </p:sp>
+      <p:sp>
+        <p:nvSpPr>
+          <p:cNvPr id="35" name="Text 33"/>
+          <p:cNvSpPr/>
+          <p:nvPr/>
+        </p:nvSpPr>
+        <p:spPr>
+          <a:xfrm>
+            <a:off x="6858000" y="3364992"/>
+            <a:ext cx="1554480" cy="475488"/>
+          </a:xfrm>
+          <a:prstGeom prst="rect">
+            <a:avLst/>
+          </a:prstGeom>
+          <a:noFill/>
+          <a:ln/>
+        </p:spPr>
+        <p:txBody>
+          <a:bodyPr wrap="square" lIns="0" tIns="0" rIns="0" bIns="0" rtlCol="0" anchor="ctr"/>
+          <a:lstStyle/>
+          <a:p>
+            <a:pPr algn="ctr" indent="0" marL="0">
+              <a:buNone/>
+            </a:pPr>
+            <a:r>
+              <a:rPr lang="en-US" sz="1400" b="1" dirty="0">
+                <a:solidFill>
+                  <a:srgbClr val="0D9488"/>
+                </a:solidFill>
+                <a:latin typeface="Trebuchet MS" pitchFamily="34" charset="0"/>
+                <a:ea typeface="Trebuchet MS" pitchFamily="34" charset="-122"/>
+                <a:cs typeface="Trebuchet MS" pitchFamily="34" charset="-120"/>
+              </a:rPr>
+              <a:t>our</a:t>
+            </a:r>
+            <a:endParaRPr lang="en-US" sz="1400" dirty="0"/>
+          </a:p>
+        </p:txBody>
+      </p:sp>
+      <p:sp>
+        <p:nvSpPr>
+          <p:cNvPr id="36" name="Shape 34"/>
           <p:cNvSpPr/>
           <p:nvPr/>
         </p:nvSpPr>
@@ -28973,7 +29573,7 @@
       </p:sp>
       <p:sp>
         <p:nvSpPr>
-          <p:cNvPr id="34" name="Text 32"/>
+          <p:cNvPr id="37" name="Text 35"/>
           <p:cNvSpPr/>
           <p:nvPr/>
         </p:nvSpPr>
@@ -29012,18 +29612,18 @@
       </p:sp>
       <p:sp>
         <p:nvSpPr>
-          <p:cNvPr id="35" name="Shape 33"/>
+          <p:cNvPr id="38" name="Shape 36"/>
           <p:cNvSpPr/>
           <p:nvPr/>
         </p:nvSpPr>
         <p:spPr>
           <a:xfrm>
             <a:off x="1874520" y="4096512"/>
-            <a:ext cx="6903720" cy="804672"/>
+            <a:ext cx="6903720" cy="658368"/>
           </a:xfrm>
           <a:prstGeom prst="rect">
             <a:avLst>
-              <a:gd name="adj" fmla="val 6818"/>
+              <a:gd name="adj" fmla="val 8333"/>
             </a:avLst>
           </a:prstGeom>
           <a:solidFill>
@@ -29039,18 +29639,18 @@
       </p:sp>
       <p:sp>
         <p:nvSpPr>
-          <p:cNvPr id="36" name="Shape 34"/>
-          <p:cNvSpPr/>
-          <p:nvPr/>
-        </p:nvSpPr>
-        <p:spPr>
-          <a:xfrm>
-            <a:off x="2124837" y="4169664"/>
-            <a:ext cx="685800" cy="384048"/>
+          <p:cNvPr id="39" name="Shape 37"/>
+          <p:cNvSpPr/>
+          <p:nvPr/>
+        </p:nvSpPr>
+        <p:spPr>
+          <a:xfrm>
+            <a:off x="1951330" y="4169664"/>
+            <a:ext cx="676656" cy="475488"/>
           </a:xfrm>
           <a:prstGeom prst="rect">
             <a:avLst>
-              <a:gd name="adj" fmla="val 9524"/>
+              <a:gd name="adj" fmla="val 7692"/>
             </a:avLst>
           </a:prstGeom>
           <a:solidFill>
@@ -29066,14 +29666,14 @@
       </p:sp>
       <p:sp>
         <p:nvSpPr>
-          <p:cNvPr id="37" name="Text 35"/>
-          <p:cNvSpPr/>
-          <p:nvPr/>
-        </p:nvSpPr>
-        <p:spPr>
-          <a:xfrm>
-            <a:off x="2124837" y="4169664"/>
-            <a:ext cx="685800" cy="384048"/>
+          <p:cNvPr id="40" name="Text 38"/>
+          <p:cNvSpPr/>
+          <p:nvPr/>
+        </p:nvSpPr>
+        <p:spPr>
+          <a:xfrm>
+            <a:off x="1951330" y="4169664"/>
+            <a:ext cx="676656" cy="475488"/>
           </a:xfrm>
           <a:prstGeom prst="rect">
             <a:avLst/>
@@ -29097,7 +29697,7 @@
                 <a:ea typeface="Trebuchet MS" pitchFamily="34" charset="-122"/>
                 <a:cs typeface="Trebuchet MS" pitchFamily="34" charset="-120"/>
               </a:rPr>
-              <a:t>c</a:t>
+              <a:t>m</a:t>
             </a:r>
             <a:endParaRPr lang="en-US" sz="900" dirty="0"/>
           </a:p>
@@ -29105,57 +29705,18 @@
       </p:sp>
       <p:sp>
         <p:nvSpPr>
-          <p:cNvPr id="38" name="Text 36"/>
-          <p:cNvSpPr/>
-          <p:nvPr/>
-        </p:nvSpPr>
-        <p:spPr>
-          <a:xfrm>
-            <a:off x="2124837" y="4572000"/>
-            <a:ext cx="685800" cy="219456"/>
-          </a:xfrm>
-          <a:prstGeom prst="rect">
-            <a:avLst/>
-          </a:prstGeom>
-          <a:noFill/>
-          <a:ln/>
-        </p:spPr>
-        <p:txBody>
-          <a:bodyPr wrap="square" lIns="0" tIns="0" rIns="0" bIns="0" rtlCol="0" anchor="t"/>
-          <a:lstStyle/>
-          <a:p>
-            <a:pPr algn="ctr" indent="0" marL="0">
-              <a:buNone/>
-            </a:pPr>
-            <a:r>
-              <a:rPr lang="en-US" sz="750" i="1" dirty="0">
-                <a:solidFill>
-                  <a:srgbClr val="94A3B8"/>
-                </a:solidFill>
-                <a:latin typeface="Calibri" pitchFamily="34" charset="0"/>
-                <a:ea typeface="Calibri" pitchFamily="34" charset="-122"/>
-                <a:cs typeface="Calibri" pitchFamily="34" charset="-120"/>
-              </a:rPr>
-              <a:t>/k/</a:t>
-            </a:r>
-            <a:endParaRPr lang="en-US" sz="750" dirty="0"/>
-          </a:p>
-        </p:txBody>
-      </p:sp>
-      <p:sp>
-        <p:nvSpPr>
-          <p:cNvPr id="39" name="Shape 37"/>
-          <p:cNvSpPr/>
-          <p:nvPr/>
-        </p:nvSpPr>
-        <p:spPr>
-          <a:xfrm>
-            <a:off x="3033522" y="4169664"/>
-            <a:ext cx="685800" cy="384048"/>
+          <p:cNvPr id="41" name="Shape 39"/>
+          <p:cNvSpPr/>
+          <p:nvPr/>
+        </p:nvSpPr>
+        <p:spPr>
+          <a:xfrm>
+            <a:off x="2677363" y="4169664"/>
+            <a:ext cx="676656" cy="475488"/>
           </a:xfrm>
           <a:prstGeom prst="rect">
             <a:avLst>
-              <a:gd name="adj" fmla="val 9524"/>
+              <a:gd name="adj" fmla="val 7692"/>
             </a:avLst>
           </a:prstGeom>
           <a:solidFill>
@@ -29171,14 +29732,14 @@
       </p:sp>
       <p:sp>
         <p:nvSpPr>
-          <p:cNvPr id="40" name="Text 38"/>
-          <p:cNvSpPr/>
-          <p:nvPr/>
-        </p:nvSpPr>
-        <p:spPr>
-          <a:xfrm>
-            <a:off x="3033522" y="4169664"/>
-            <a:ext cx="685800" cy="384048"/>
+          <p:cNvPr id="42" name="Text 40"/>
+          <p:cNvSpPr/>
+          <p:nvPr/>
+        </p:nvSpPr>
+        <p:spPr>
+          <a:xfrm>
+            <a:off x="2677363" y="4169664"/>
+            <a:ext cx="676656" cy="475488"/>
           </a:xfrm>
           <a:prstGeom prst="rect">
             <a:avLst/>
@@ -29202,7 +29763,7 @@
                 <a:ea typeface="Trebuchet MS" pitchFamily="34" charset="-122"/>
                 <a:cs typeface="Trebuchet MS" pitchFamily="34" charset="-120"/>
               </a:rPr>
-              <a:t>o</a:t>
+              <a:t>u</a:t>
             </a:r>
             <a:endParaRPr lang="en-US" sz="900" dirty="0"/>
           </a:p>
@@ -29210,18 +29771,18 @@
       </p:sp>
       <p:sp>
         <p:nvSpPr>
-          <p:cNvPr id="41" name="Shape 39"/>
-          <p:cNvSpPr/>
-          <p:nvPr/>
-        </p:nvSpPr>
-        <p:spPr>
-          <a:xfrm>
-            <a:off x="3942207" y="4169664"/>
-            <a:ext cx="685800" cy="384048"/>
+          <p:cNvPr id="43" name="Shape 41"/>
+          <p:cNvSpPr/>
+          <p:nvPr/>
+        </p:nvSpPr>
+        <p:spPr>
+          <a:xfrm>
+            <a:off x="3403397" y="4169664"/>
+            <a:ext cx="676656" cy="475488"/>
           </a:xfrm>
           <a:prstGeom prst="rect">
             <a:avLst>
-              <a:gd name="adj" fmla="val 9524"/>
+              <a:gd name="adj" fmla="val 7692"/>
             </a:avLst>
           </a:prstGeom>
           <a:solidFill>
@@ -29237,14 +29798,14 @@
       </p:sp>
       <p:sp>
         <p:nvSpPr>
-          <p:cNvPr id="42" name="Text 40"/>
-          <p:cNvSpPr/>
-          <p:nvPr/>
-        </p:nvSpPr>
-        <p:spPr>
-          <a:xfrm>
-            <a:off x="3942207" y="4169664"/>
-            <a:ext cx="685800" cy="384048"/>
+          <p:cNvPr id="44" name="Text 42"/>
+          <p:cNvSpPr/>
+          <p:nvPr/>
+        </p:nvSpPr>
+        <p:spPr>
+          <a:xfrm>
+            <a:off x="3403397" y="4169664"/>
+            <a:ext cx="676656" cy="475488"/>
           </a:xfrm>
           <a:prstGeom prst="rect">
             <a:avLst/>
@@ -29276,18 +29837,18 @@
       </p:sp>
       <p:sp>
         <p:nvSpPr>
-          <p:cNvPr id="43" name="Shape 41"/>
-          <p:cNvSpPr/>
-          <p:nvPr/>
-        </p:nvSpPr>
-        <p:spPr>
-          <a:xfrm>
-            <a:off x="4850892" y="4169664"/>
-            <a:ext cx="685800" cy="384048"/>
+          <p:cNvPr id="45" name="Shape 43"/>
+          <p:cNvSpPr/>
+          <p:nvPr/>
+        </p:nvSpPr>
+        <p:spPr>
+          <a:xfrm>
+            <a:off x="4129430" y="4169664"/>
+            <a:ext cx="676656" cy="475488"/>
           </a:xfrm>
           <a:prstGeom prst="rect">
             <a:avLst>
-              <a:gd name="adj" fmla="val 9524"/>
+              <a:gd name="adj" fmla="val 7692"/>
             </a:avLst>
           </a:prstGeom>
           <a:solidFill>
@@ -29303,14 +29864,14 @@
       </p:sp>
       <p:sp>
         <p:nvSpPr>
-          <p:cNvPr id="44" name="Text 42"/>
-          <p:cNvSpPr/>
-          <p:nvPr/>
-        </p:nvSpPr>
-        <p:spPr>
-          <a:xfrm>
-            <a:off x="4850892" y="4169664"/>
-            <a:ext cx="685800" cy="384048"/>
+          <p:cNvPr id="46" name="Text 44"/>
+          <p:cNvSpPr/>
+          <p:nvPr/>
+        </p:nvSpPr>
+        <p:spPr>
+          <a:xfrm>
+            <a:off x="4129430" y="4169664"/>
+            <a:ext cx="676656" cy="475488"/>
           </a:xfrm>
           <a:prstGeom prst="rect">
             <a:avLst/>
@@ -29334,7 +29895,7 @@
                 <a:ea typeface="Trebuchet MS" pitchFamily="34" charset="-122"/>
                 <a:cs typeface="Trebuchet MS" pitchFamily="34" charset="-120"/>
               </a:rPr>
-              <a:t>ou</a:t>
+              <a:t>t</a:t>
             </a:r>
             <a:endParaRPr lang="en-US" sz="900" dirty="0"/>
           </a:p>
@@ -29342,18 +29903,18 @@
       </p:sp>
       <p:sp>
         <p:nvSpPr>
-          <p:cNvPr id="45" name="Shape 43"/>
-          <p:cNvSpPr/>
-          <p:nvPr/>
-        </p:nvSpPr>
-        <p:spPr>
-          <a:xfrm>
-            <a:off x="5759577" y="4169664"/>
-            <a:ext cx="685800" cy="384048"/>
+          <p:cNvPr id="47" name="Shape 45"/>
+          <p:cNvSpPr/>
+          <p:nvPr/>
+        </p:nvSpPr>
+        <p:spPr>
+          <a:xfrm>
+            <a:off x="4855464" y="4169664"/>
+            <a:ext cx="676656" cy="475488"/>
           </a:xfrm>
           <a:prstGeom prst="rect">
             <a:avLst>
-              <a:gd name="adj" fmla="val 9524"/>
+              <a:gd name="adj" fmla="val 7692"/>
             </a:avLst>
           </a:prstGeom>
           <a:solidFill>
@@ -29369,14 +29930,14 @@
       </p:sp>
       <p:sp>
         <p:nvSpPr>
-          <p:cNvPr id="46" name="Text 44"/>
-          <p:cNvSpPr/>
-          <p:nvPr/>
-        </p:nvSpPr>
-        <p:spPr>
-          <a:xfrm>
-            <a:off x="5759577" y="4169664"/>
-            <a:ext cx="685800" cy="384048"/>
+          <p:cNvPr id="48" name="Text 46"/>
+          <p:cNvSpPr/>
+          <p:nvPr/>
+        </p:nvSpPr>
+        <p:spPr>
+          <a:xfrm>
+            <a:off x="4855464" y="4169664"/>
+            <a:ext cx="676656" cy="475488"/>
           </a:xfrm>
           <a:prstGeom prst="rect">
             <a:avLst/>
@@ -29400,7 +29961,7 @@
                 <a:ea typeface="Trebuchet MS" pitchFamily="34" charset="-122"/>
                 <a:cs typeface="Trebuchet MS" pitchFamily="34" charset="-120"/>
               </a:rPr>
-              <a:t>r</a:t>
+              <a:t>i</a:t>
             </a:r>
             <a:endParaRPr lang="en-US" sz="900" dirty="0"/>
           </a:p>
@@ -29408,18 +29969,18 @@
       </p:sp>
       <p:sp>
         <p:nvSpPr>
-          <p:cNvPr id="47" name="Shape 45"/>
-          <p:cNvSpPr/>
-          <p:nvPr/>
-        </p:nvSpPr>
-        <p:spPr>
-          <a:xfrm>
-            <a:off x="6668262" y="4169664"/>
-            <a:ext cx="685800" cy="384048"/>
+          <p:cNvPr id="49" name="Shape 47"/>
+          <p:cNvSpPr/>
+          <p:nvPr/>
+        </p:nvSpPr>
+        <p:spPr>
+          <a:xfrm>
+            <a:off x="5581498" y="4169664"/>
+            <a:ext cx="676656" cy="475488"/>
           </a:xfrm>
           <a:prstGeom prst="rect">
             <a:avLst>
-              <a:gd name="adj" fmla="val 9524"/>
+              <a:gd name="adj" fmla="val 7692"/>
             </a:avLst>
           </a:prstGeom>
           <a:solidFill>
@@ -29435,14 +29996,14 @@
       </p:sp>
       <p:sp>
         <p:nvSpPr>
-          <p:cNvPr id="48" name="Text 46"/>
-          <p:cNvSpPr/>
-          <p:nvPr/>
-        </p:nvSpPr>
-        <p:spPr>
-          <a:xfrm>
-            <a:off x="6668262" y="4169664"/>
-            <a:ext cx="685800" cy="384048"/>
+          <p:cNvPr id="50" name="Text 48"/>
+          <p:cNvSpPr/>
+          <p:nvPr/>
+        </p:nvSpPr>
+        <p:spPr>
+          <a:xfrm>
+            <a:off x="5581498" y="4169664"/>
+            <a:ext cx="676656" cy="475488"/>
           </a:xfrm>
           <a:prstGeom prst="rect">
             <a:avLst/>
@@ -29466,7 +30027,7 @@
                 <a:ea typeface="Trebuchet MS" pitchFamily="34" charset="-122"/>
                 <a:cs typeface="Trebuchet MS" pitchFamily="34" charset="-120"/>
               </a:rPr>
-              <a:t>i</a:t>
+              <a:t>c</a:t>
             </a:r>
             <a:endParaRPr lang="en-US" sz="900" dirty="0"/>
           </a:p>
@@ -29474,18 +30035,18 @@
       </p:sp>
       <p:sp>
         <p:nvSpPr>
-          <p:cNvPr id="49" name="Shape 47"/>
-          <p:cNvSpPr/>
-          <p:nvPr/>
-        </p:nvSpPr>
-        <p:spPr>
-          <a:xfrm>
-            <a:off x="7576947" y="4169664"/>
-            <a:ext cx="685800" cy="384048"/>
+          <p:cNvPr id="51" name="Shape 49"/>
+          <p:cNvSpPr/>
+          <p:nvPr/>
+        </p:nvSpPr>
+        <p:spPr>
+          <a:xfrm>
+            <a:off x="6307531" y="4169664"/>
+            <a:ext cx="676656" cy="475488"/>
           </a:xfrm>
           <a:prstGeom prst="rect">
             <a:avLst>
-              <a:gd name="adj" fmla="val 9524"/>
+              <a:gd name="adj" fmla="val 7692"/>
             </a:avLst>
           </a:prstGeom>
           <a:solidFill>
@@ -29501,14 +30062,14 @@
       </p:sp>
       <p:sp>
         <p:nvSpPr>
-          <p:cNvPr id="50" name="Text 48"/>
-          <p:cNvSpPr/>
-          <p:nvPr/>
-        </p:nvSpPr>
-        <p:spPr>
-          <a:xfrm>
-            <a:off x="7576947" y="4169664"/>
-            <a:ext cx="685800" cy="384048"/>
+          <p:cNvPr id="52" name="Text 50"/>
+          <p:cNvSpPr/>
+          <p:nvPr/>
+        </p:nvSpPr>
+        <p:spPr>
+          <a:xfrm>
+            <a:off x="6307531" y="4169664"/>
+            <a:ext cx="676656" cy="475488"/>
           </a:xfrm>
           <a:prstGeom prst="rect">
             <a:avLst/>
@@ -29532,7 +30093,139 @@
                 <a:ea typeface="Trebuchet MS" pitchFamily="34" charset="-122"/>
                 <a:cs typeface="Trebuchet MS" pitchFamily="34" charset="-120"/>
               </a:rPr>
-              <a:t>ng</a:t>
+              <a:t>o</a:t>
+            </a:r>
+            <a:endParaRPr lang="en-US" sz="900" dirty="0"/>
+          </a:p>
+        </p:txBody>
+      </p:sp>
+      <p:sp>
+        <p:nvSpPr>
+          <p:cNvPr id="53" name="Shape 51"/>
+          <p:cNvSpPr/>
+          <p:nvPr/>
+        </p:nvSpPr>
+        <p:spPr>
+          <a:xfrm>
+            <a:off x="7033565" y="4169664"/>
+            <a:ext cx="676656" cy="475488"/>
+          </a:xfrm>
+          <a:prstGeom prst="rect">
+            <a:avLst>
+              <a:gd name="adj" fmla="val 7692"/>
+            </a:avLst>
+          </a:prstGeom>
+          <a:solidFill>
+            <a:srgbClr val="FFFFFF"/>
+          </a:solidFill>
+          <a:ln w="12700">
+            <a:solidFill>
+              <a:srgbClr val="DB2777"/>
+            </a:solidFill>
+            <a:prstDash val="solid"/>
+          </a:ln>
+        </p:spPr>
+      </p:sp>
+      <p:sp>
+        <p:nvSpPr>
+          <p:cNvPr id="54" name="Text 52"/>
+          <p:cNvSpPr/>
+          <p:nvPr/>
+        </p:nvSpPr>
+        <p:spPr>
+          <a:xfrm>
+            <a:off x="7033565" y="4169664"/>
+            <a:ext cx="676656" cy="475488"/>
+          </a:xfrm>
+          <a:prstGeom prst="rect">
+            <a:avLst/>
+          </a:prstGeom>
+          <a:noFill/>
+          <a:ln/>
+        </p:spPr>
+        <p:txBody>
+          <a:bodyPr wrap="square" lIns="0" tIns="0" rIns="0" bIns="0" rtlCol="0" anchor="ctr"/>
+          <a:lstStyle/>
+          <a:p>
+            <a:pPr algn="ctr" indent="0" marL="0">
+              <a:buNone/>
+            </a:pPr>
+            <a:r>
+              <a:rPr lang="en-US" sz="900" b="1" dirty="0">
+                <a:solidFill>
+                  <a:srgbClr val="9D174D"/>
+                </a:solidFill>
+                <a:latin typeface="Trebuchet MS" pitchFamily="34" charset="0"/>
+                <a:ea typeface="Trebuchet MS" pitchFamily="34" charset="-122"/>
+                <a:cs typeface="Trebuchet MS" pitchFamily="34" charset="-120"/>
+              </a:rPr>
+              <a:t>l</a:t>
+            </a:r>
+            <a:endParaRPr lang="en-US" sz="900" dirty="0"/>
+          </a:p>
+        </p:txBody>
+      </p:sp>
+      <p:sp>
+        <p:nvSpPr>
+          <p:cNvPr id="55" name="Shape 53"/>
+          <p:cNvSpPr/>
+          <p:nvPr/>
+        </p:nvSpPr>
+        <p:spPr>
+          <a:xfrm>
+            <a:off x="7759598" y="4169664"/>
+            <a:ext cx="676656" cy="475488"/>
+          </a:xfrm>
+          <a:prstGeom prst="rect">
+            <a:avLst>
+              <a:gd name="adj" fmla="val 7692"/>
+            </a:avLst>
+          </a:prstGeom>
+          <a:solidFill>
+            <a:srgbClr val="FFFFFF"/>
+          </a:solidFill>
+          <a:ln w="12700">
+            <a:solidFill>
+              <a:srgbClr val="DB2777"/>
+            </a:solidFill>
+            <a:prstDash val="solid"/>
+          </a:ln>
+        </p:spPr>
+      </p:sp>
+      <p:sp>
+        <p:nvSpPr>
+          <p:cNvPr id="56" name="Text 54"/>
+          <p:cNvSpPr/>
+          <p:nvPr/>
+        </p:nvSpPr>
+        <p:spPr>
+          <a:xfrm>
+            <a:off x="7759598" y="4169664"/>
+            <a:ext cx="676656" cy="475488"/>
+          </a:xfrm>
+          <a:prstGeom prst="rect">
+            <a:avLst/>
+          </a:prstGeom>
+          <a:noFill/>
+          <a:ln/>
+        </p:spPr>
+        <p:txBody>
+          <a:bodyPr wrap="square" lIns="0" tIns="0" rIns="0" bIns="0" rtlCol="0" anchor="ctr"/>
+          <a:lstStyle/>
+          <a:p>
+            <a:pPr algn="ctr" indent="0" marL="0">
+              <a:buNone/>
+            </a:pPr>
+            <a:r>
+              <a:rPr lang="en-US" sz="900" b="1" dirty="0">
+                <a:solidFill>
+                  <a:srgbClr val="9D174D"/>
+                </a:solidFill>
+                <a:latin typeface="Trebuchet MS" pitchFamily="34" charset="0"/>
+                <a:ea typeface="Trebuchet MS" pitchFamily="34" charset="-122"/>
+                <a:cs typeface="Trebuchet MS" pitchFamily="34" charset="-120"/>
+              </a:rPr>
+              <a:t>our</a:t>
             </a:r>
             <a:endParaRPr lang="en-US" sz="900" dirty="0"/>
           </a:p>
@@ -29824,7 +30517,7 @@
                 <a:ea typeface="Calibri" pitchFamily="34" charset="-122"/>
                 <a:cs typeface="Calibri" pitchFamily="34" charset="-120"/>
               </a:rPr>
-              <a:t>Word Labs  •  wordlabs.app  •  Root: 'colour' = hue, tint, or shade</a:t>
+              <a:t>Word Labs  •  wordlabs.app  •  Root: 'colour' = the property of light; to add colour</a:t>
             </a:r>
             <a:endParaRPr lang="en-US" sz="800" dirty="0"/>
           </a:p>
@@ -29963,7 +30656,7 @@
                 <a:ea typeface="Trebuchet MS" pitchFamily="34" charset="-122"/>
                 <a:cs typeface="Trebuchet MS" pitchFamily="34" charset="-120"/>
               </a:rPr>
-              <a:t>colourless</a:t>
+              <a:t>multicoloured</a:t>
             </a:r>
             <a:endParaRPr lang="en-US" sz="2800" dirty="0"/>
           </a:p>
@@ -30651,7 +31344,7 @@
                 <a:ea typeface="Calibri" pitchFamily="34" charset="-122"/>
                 <a:cs typeface="Calibri" pitchFamily="34" charset="-120"/>
               </a:rPr>
-              <a:t>Word Labs  •  wordlabs.app  •  Root: 'colour' = hue, tint, or shade</a:t>
+              <a:t>Word Labs  •  wordlabs.app  •  Root: 'colour' = the property of light; to add colour</a:t>
             </a:r>
             <a:endParaRPr lang="en-US" sz="800" dirty="0"/>
           </a:p>
@@ -30790,7 +31483,7 @@
                 <a:ea typeface="Trebuchet MS" pitchFamily="34" charset="-122"/>
                 <a:cs typeface="Trebuchet MS" pitchFamily="34" charset="-120"/>
               </a:rPr>
-              <a:t>colourless</a:t>
+              <a:t>multicoloured</a:t>
             </a:r>
             <a:endParaRPr lang="en-US" sz="2800" dirty="0"/>
           </a:p>
@@ -30870,7 +31563,7 @@
         </p:nvSpPr>
         <p:spPr>
           <a:xfrm>
-            <a:off x="2938272" y="2258568"/>
+            <a:off x="2221992" y="2258568"/>
             <a:ext cx="1828800" cy="292608"/>
           </a:xfrm>
           <a:prstGeom prst="rect">
@@ -30879,11 +31572,11 @@
             </a:avLst>
           </a:prstGeom>
           <a:solidFill>
-            <a:srgbClr val="CCFBF1"/>
+            <a:srgbClr val="DDD6FE"/>
           </a:solidFill>
           <a:ln w="19050">
             <a:solidFill>
-              <a:srgbClr val="0D9488"/>
+              <a:srgbClr val="7C3AED"/>
             </a:solidFill>
             <a:prstDash val="solid"/>
           </a:ln>
@@ -30904,7 +31597,7 @@
         </p:nvSpPr>
         <p:spPr>
           <a:xfrm>
-            <a:off x="2938272" y="2258568"/>
+            <a:off x="2221992" y="2258568"/>
             <a:ext cx="1828800" cy="292608"/>
           </a:xfrm>
           <a:prstGeom prst="rect">
@@ -30923,13 +31616,13 @@
             <a:r>
               <a:rPr lang="en-US" sz="1300" b="1" dirty="0">
                 <a:solidFill>
-                  <a:srgbClr val="0F766E"/>
+                  <a:srgbClr val="4C1D95"/>
                 </a:solidFill>
                 <a:latin typeface="Trebuchet MS" pitchFamily="34" charset="0"/>
                 <a:ea typeface="Trebuchet MS" pitchFamily="34" charset="-122"/>
                 <a:cs typeface="Trebuchet MS" pitchFamily="34" charset="-120"/>
               </a:rPr>
-              <a:t>colour</a:t>
+              <a:t>multi</a:t>
             </a:r>
             <a:endParaRPr lang="en-US" sz="1300" dirty="0"/>
           </a:p>
@@ -30943,7 +31636,7 @@
         </p:nvSpPr>
         <p:spPr>
           <a:xfrm>
-            <a:off x="2938272" y="2569464"/>
+            <a:off x="2221992" y="2569464"/>
             <a:ext cx="1828800" cy="201168"/>
           </a:xfrm>
           <a:prstGeom prst="rect">
@@ -30968,7 +31661,7 @@
                 <a:ea typeface="Calibri" pitchFamily="34" charset="-122"/>
                 <a:cs typeface="Calibri" pitchFamily="34" charset="-120"/>
               </a:rPr>
-              <a:t>hue or shade</a:t>
+              <a:t>many</a:t>
             </a:r>
             <a:endParaRPr lang="en-US" sz="850" dirty="0"/>
           </a:p>
@@ -30982,7 +31675,7 @@
         </p:nvSpPr>
         <p:spPr>
           <a:xfrm>
-            <a:off x="5803392" y="2258568"/>
+            <a:off x="4370832" y="2258568"/>
             <a:ext cx="1828800" cy="292608"/>
           </a:xfrm>
           <a:prstGeom prst="rect">
@@ -30991,11 +31684,11 @@
             </a:avLst>
           </a:prstGeom>
           <a:solidFill>
-            <a:srgbClr val="DDD6FE"/>
+            <a:srgbClr val="CCFBF1"/>
           </a:solidFill>
           <a:ln w="19050">
             <a:solidFill>
-              <a:srgbClr val="7C3AED"/>
+              <a:srgbClr val="0D9488"/>
             </a:solidFill>
             <a:prstDash val="solid"/>
           </a:ln>
@@ -31016,7 +31709,7 @@
         </p:nvSpPr>
         <p:spPr>
           <a:xfrm>
-            <a:off x="5803392" y="2258568"/>
+            <a:off x="4370832" y="2258568"/>
             <a:ext cx="1828800" cy="292608"/>
           </a:xfrm>
           <a:prstGeom prst="rect">
@@ -31035,13 +31728,13 @@
             <a:r>
               <a:rPr lang="en-US" sz="1300" b="1" dirty="0">
                 <a:solidFill>
-                  <a:srgbClr val="4C1D95"/>
+                  <a:srgbClr val="0F766E"/>
                 </a:solidFill>
                 <a:latin typeface="Trebuchet MS" pitchFamily="34" charset="0"/>
                 <a:ea typeface="Trebuchet MS" pitchFamily="34" charset="-122"/>
                 <a:cs typeface="Trebuchet MS" pitchFamily="34" charset="-120"/>
               </a:rPr>
-              <a:t>less</a:t>
+              <a:t>colour</a:t>
             </a:r>
             <a:endParaRPr lang="en-US" sz="1300" dirty="0"/>
           </a:p>
@@ -31055,7 +31748,7 @@
         </p:nvSpPr>
         <p:spPr>
           <a:xfrm>
-            <a:off x="5803392" y="2569464"/>
+            <a:off x="4370832" y="2569464"/>
             <a:ext cx="1828800" cy="201168"/>
           </a:xfrm>
           <a:prstGeom prst="rect">
@@ -31080,7 +31773,7 @@
                 <a:ea typeface="Calibri" pitchFamily="34" charset="-122"/>
                 <a:cs typeface="Calibri" pitchFamily="34" charset="-120"/>
               </a:rPr>
-              <a:t>without</a:t>
+              <a:t>the property of light; to add colour</a:t>
             </a:r>
             <a:endParaRPr lang="en-US" sz="850" dirty="0"/>
           </a:p>
@@ -31089,6 +31782,118 @@
       <p:sp>
         <p:nvSpPr>
           <p:cNvPr id="22" name="Shape 20"/>
+          <p:cNvSpPr/>
+          <p:nvPr/>
+        </p:nvSpPr>
+        <p:spPr>
+          <a:xfrm>
+            <a:off x="6519672" y="2258568"/>
+            <a:ext cx="1828800" cy="292608"/>
+          </a:xfrm>
+          <a:prstGeom prst="rect">
+            <a:avLst>
+              <a:gd name="adj" fmla="val 25000"/>
+            </a:avLst>
+          </a:prstGeom>
+          <a:solidFill>
+            <a:srgbClr val="FCE7F3"/>
+          </a:solidFill>
+          <a:ln w="19050">
+            <a:solidFill>
+              <a:srgbClr val="DB2777"/>
+            </a:solidFill>
+            <a:prstDash val="solid"/>
+          </a:ln>
+          <a:effectLst>
+            <a:outerShdw sx="100000" sy="100000" kx="0" ky="0" algn="bl" rotWithShape="0" blurRad="101600" dist="38100" dir="8100000">
+              <a:srgbClr val="000000">
+                <a:alpha val="12000"/>
+              </a:srgbClr>
+            </a:outerShdw>
+          </a:effectLst>
+        </p:spPr>
+      </p:sp>
+      <p:sp>
+        <p:nvSpPr>
+          <p:cNvPr id="23" name="Text 21"/>
+          <p:cNvSpPr/>
+          <p:nvPr/>
+        </p:nvSpPr>
+        <p:spPr>
+          <a:xfrm>
+            <a:off x="6519672" y="2258568"/>
+            <a:ext cx="1828800" cy="292608"/>
+          </a:xfrm>
+          <a:prstGeom prst="rect">
+            <a:avLst/>
+          </a:prstGeom>
+          <a:noFill/>
+          <a:ln/>
+        </p:spPr>
+        <p:txBody>
+          <a:bodyPr wrap="square" lIns="0" tIns="0" rIns="0" bIns="0" rtlCol="0" anchor="ctr"/>
+          <a:lstStyle/>
+          <a:p>
+            <a:pPr algn="ctr" indent="0" marL="0">
+              <a:buNone/>
+            </a:pPr>
+            <a:r>
+              <a:rPr lang="en-US" sz="1300" b="1" dirty="0">
+                <a:solidFill>
+                  <a:srgbClr val="9D174D"/>
+                </a:solidFill>
+                <a:latin typeface="Trebuchet MS" pitchFamily="34" charset="0"/>
+                <a:ea typeface="Trebuchet MS" pitchFamily="34" charset="-122"/>
+                <a:cs typeface="Trebuchet MS" pitchFamily="34" charset="-120"/>
+              </a:rPr>
+              <a:t>ed</a:t>
+            </a:r>
+            <a:endParaRPr lang="en-US" sz="1300" dirty="0"/>
+          </a:p>
+        </p:txBody>
+      </p:sp>
+      <p:sp>
+        <p:nvSpPr>
+          <p:cNvPr id="24" name="Text 22"/>
+          <p:cNvSpPr/>
+          <p:nvPr/>
+        </p:nvSpPr>
+        <p:spPr>
+          <a:xfrm>
+            <a:off x="6519672" y="2569464"/>
+            <a:ext cx="1828800" cy="201168"/>
+          </a:xfrm>
+          <a:prstGeom prst="rect">
+            <a:avLst/>
+          </a:prstGeom>
+          <a:noFill/>
+          <a:ln/>
+        </p:spPr>
+        <p:txBody>
+          <a:bodyPr wrap="square" lIns="0" tIns="0" rIns="0" bIns="0" rtlCol="0" anchor="t"/>
+          <a:lstStyle/>
+          <a:p>
+            <a:pPr algn="ctr" indent="0" marL="0">
+              <a:buNone/>
+            </a:pPr>
+            <a:r>
+              <a:rPr lang="en-US" sz="850" dirty="0">
+                <a:solidFill>
+                  <a:srgbClr val="475569"/>
+                </a:solidFill>
+                <a:latin typeface="Calibri" pitchFamily="34" charset="0"/>
+                <a:ea typeface="Calibri" pitchFamily="34" charset="-122"/>
+                <a:cs typeface="Calibri" pitchFamily="34" charset="-120"/>
+              </a:rPr>
+              <a:t>past tense</a:t>
+            </a:r>
+            <a:endParaRPr lang="en-US" sz="850" dirty="0"/>
+          </a:p>
+        </p:txBody>
+      </p:sp>
+      <p:sp>
+        <p:nvSpPr>
+          <p:cNvPr id="25" name="Shape 23"/>
           <p:cNvSpPr/>
           <p:nvPr/>
         </p:nvSpPr>
@@ -31115,7 +31920,7 @@
       </p:sp>
       <p:sp>
         <p:nvSpPr>
-          <p:cNvPr id="23" name="Text 21"/>
+          <p:cNvPr id="26" name="Text 24"/>
           <p:cNvSpPr/>
           <p:nvPr/>
         </p:nvSpPr>
@@ -31154,7 +31959,7 @@
       </p:sp>
       <p:sp>
         <p:nvSpPr>
-          <p:cNvPr id="24" name="Shape 22"/>
+          <p:cNvPr id="27" name="Shape 25"/>
           <p:cNvSpPr/>
           <p:nvPr/>
         </p:nvSpPr>
@@ -31181,7 +31986,7 @@
       </p:sp>
       <p:sp>
         <p:nvSpPr>
-          <p:cNvPr id="25" name="Text 23"/>
+          <p:cNvPr id="28" name="Text 26"/>
           <p:cNvSpPr/>
           <p:nvPr/>
         </p:nvSpPr>
@@ -31220,7 +32025,7 @@
       </p:sp>
       <p:sp>
         <p:nvSpPr>
-          <p:cNvPr id="26" name="Shape 24"/>
+          <p:cNvPr id="29" name="Shape 27"/>
           <p:cNvSpPr/>
           <p:nvPr/>
         </p:nvSpPr>
@@ -31247,7 +32052,7 @@
       </p:sp>
       <p:sp>
         <p:nvSpPr>
-          <p:cNvPr id="27" name="Text 25"/>
+          <p:cNvPr id="30" name="Text 28"/>
           <p:cNvSpPr/>
           <p:nvPr/>
         </p:nvSpPr>
@@ -31286,7 +32091,7 @@
       </p:sp>
       <p:sp>
         <p:nvSpPr>
-          <p:cNvPr id="28" name="Shape 26"/>
+          <p:cNvPr id="31" name="Shape 29"/>
           <p:cNvSpPr/>
           <p:nvPr/>
         </p:nvSpPr>
@@ -31313,7 +32118,7 @@
       </p:sp>
       <p:sp>
         <p:nvSpPr>
-          <p:cNvPr id="29" name="Text 27"/>
+          <p:cNvPr id="32" name="Text 30"/>
           <p:cNvSpPr/>
           <p:nvPr/>
         </p:nvSpPr>
@@ -31636,7 +32441,7 @@
                 <a:ea typeface="Calibri" pitchFamily="34" charset="-122"/>
                 <a:cs typeface="Calibri" pitchFamily="34" charset="-120"/>
               </a:rPr>
-              <a:t>Word Labs  •  wordlabs.app  •  Root: 'colour' = hue, tint, or shade</a:t>
+              <a:t>Word Labs  •  wordlabs.app  •  Root: 'colour' = the property of light; to add colour</a:t>
             </a:r>
             <a:endParaRPr lang="en-US" sz="800" dirty="0"/>
           </a:p>
@@ -31775,7 +32580,7 @@
                 <a:ea typeface="Trebuchet MS" pitchFamily="34" charset="-122"/>
                 <a:cs typeface="Trebuchet MS" pitchFamily="34" charset="-120"/>
               </a:rPr>
-              <a:t>colourless</a:t>
+              <a:t>multicoloured</a:t>
             </a:r>
             <a:endParaRPr lang="en-US" sz="2800" dirty="0"/>
           </a:p>
@@ -31855,7 +32660,7 @@
         </p:nvSpPr>
         <p:spPr>
           <a:xfrm>
-            <a:off x="2938272" y="2258568"/>
+            <a:off x="2221992" y="2258568"/>
             <a:ext cx="1828800" cy="292608"/>
           </a:xfrm>
           <a:prstGeom prst="rect">
@@ -31864,11 +32669,11 @@
             </a:avLst>
           </a:prstGeom>
           <a:solidFill>
-            <a:srgbClr val="CCFBF1"/>
+            <a:srgbClr val="DDD6FE"/>
           </a:solidFill>
           <a:ln w="19050">
             <a:solidFill>
-              <a:srgbClr val="0D9488"/>
+              <a:srgbClr val="7C3AED"/>
             </a:solidFill>
             <a:prstDash val="solid"/>
           </a:ln>
@@ -31889,7 +32694,7 @@
         </p:nvSpPr>
         <p:spPr>
           <a:xfrm>
-            <a:off x="2938272" y="2258568"/>
+            <a:off x="2221992" y="2258568"/>
             <a:ext cx="1828800" cy="292608"/>
           </a:xfrm>
           <a:prstGeom prst="rect">
@@ -31908,13 +32713,13 @@
             <a:r>
               <a:rPr lang="en-US" sz="1300" b="1" dirty="0">
                 <a:solidFill>
-                  <a:srgbClr val="0F766E"/>
+                  <a:srgbClr val="4C1D95"/>
                 </a:solidFill>
                 <a:latin typeface="Trebuchet MS" pitchFamily="34" charset="0"/>
                 <a:ea typeface="Trebuchet MS" pitchFamily="34" charset="-122"/>
                 <a:cs typeface="Trebuchet MS" pitchFamily="34" charset="-120"/>
               </a:rPr>
-              <a:t>colour</a:t>
+              <a:t>multi</a:t>
             </a:r>
             <a:endParaRPr lang="en-US" sz="1300" dirty="0"/>
           </a:p>
@@ -31928,7 +32733,7 @@
         </p:nvSpPr>
         <p:spPr>
           <a:xfrm>
-            <a:off x="2938272" y="2569464"/>
+            <a:off x="2221992" y="2569464"/>
             <a:ext cx="1828800" cy="201168"/>
           </a:xfrm>
           <a:prstGeom prst="rect">
@@ -31953,7 +32758,7 @@
                 <a:ea typeface="Calibri" pitchFamily="34" charset="-122"/>
                 <a:cs typeface="Calibri" pitchFamily="34" charset="-120"/>
               </a:rPr>
-              <a:t>hue or shade</a:t>
+              <a:t>many</a:t>
             </a:r>
             <a:endParaRPr lang="en-US" sz="850" dirty="0"/>
           </a:p>
@@ -31967,7 +32772,7 @@
         </p:nvSpPr>
         <p:spPr>
           <a:xfrm>
-            <a:off x="5803392" y="2258568"/>
+            <a:off x="4370832" y="2258568"/>
             <a:ext cx="1828800" cy="292608"/>
           </a:xfrm>
           <a:prstGeom prst="rect">
@@ -31976,11 +32781,11 @@
             </a:avLst>
           </a:prstGeom>
           <a:solidFill>
-            <a:srgbClr val="DDD6FE"/>
+            <a:srgbClr val="CCFBF1"/>
           </a:solidFill>
           <a:ln w="19050">
             <a:solidFill>
-              <a:srgbClr val="7C3AED"/>
+              <a:srgbClr val="0D9488"/>
             </a:solidFill>
             <a:prstDash val="solid"/>
           </a:ln>
@@ -32001,7 +32806,7 @@
         </p:nvSpPr>
         <p:spPr>
           <a:xfrm>
-            <a:off x="5803392" y="2258568"/>
+            <a:off x="4370832" y="2258568"/>
             <a:ext cx="1828800" cy="292608"/>
           </a:xfrm>
           <a:prstGeom prst="rect">
@@ -32020,13 +32825,13 @@
             <a:r>
               <a:rPr lang="en-US" sz="1300" b="1" dirty="0">
                 <a:solidFill>
-                  <a:srgbClr val="4C1D95"/>
+                  <a:srgbClr val="0F766E"/>
                 </a:solidFill>
                 <a:latin typeface="Trebuchet MS" pitchFamily="34" charset="0"/>
                 <a:ea typeface="Trebuchet MS" pitchFamily="34" charset="-122"/>
                 <a:cs typeface="Trebuchet MS" pitchFamily="34" charset="-120"/>
               </a:rPr>
-              <a:t>less</a:t>
+              <a:t>colour</a:t>
             </a:r>
             <a:endParaRPr lang="en-US" sz="1300" dirty="0"/>
           </a:p>
@@ -32040,7 +32845,7 @@
         </p:nvSpPr>
         <p:spPr>
           <a:xfrm>
-            <a:off x="5803392" y="2569464"/>
+            <a:off x="4370832" y="2569464"/>
             <a:ext cx="1828800" cy="201168"/>
           </a:xfrm>
           <a:prstGeom prst="rect">
@@ -32065,7 +32870,7 @@
                 <a:ea typeface="Calibri" pitchFamily="34" charset="-122"/>
                 <a:cs typeface="Calibri" pitchFamily="34" charset="-120"/>
               </a:rPr>
-              <a:t>without</a:t>
+              <a:t>the property of light; to add colour</a:t>
             </a:r>
             <a:endParaRPr lang="en-US" sz="850" dirty="0"/>
           </a:p>
@@ -32074,6 +32879,118 @@
       <p:sp>
         <p:nvSpPr>
           <p:cNvPr id="22" name="Shape 20"/>
+          <p:cNvSpPr/>
+          <p:nvPr/>
+        </p:nvSpPr>
+        <p:spPr>
+          <a:xfrm>
+            <a:off x="6519672" y="2258568"/>
+            <a:ext cx="1828800" cy="292608"/>
+          </a:xfrm>
+          <a:prstGeom prst="rect">
+            <a:avLst>
+              <a:gd name="adj" fmla="val 25000"/>
+            </a:avLst>
+          </a:prstGeom>
+          <a:solidFill>
+            <a:srgbClr val="FCE7F3"/>
+          </a:solidFill>
+          <a:ln w="19050">
+            <a:solidFill>
+              <a:srgbClr val="DB2777"/>
+            </a:solidFill>
+            <a:prstDash val="solid"/>
+          </a:ln>
+          <a:effectLst>
+            <a:outerShdw sx="100000" sy="100000" kx="0" ky="0" algn="bl" rotWithShape="0" blurRad="101600" dist="38100" dir="8100000">
+              <a:srgbClr val="000000">
+                <a:alpha val="12000"/>
+              </a:srgbClr>
+            </a:outerShdw>
+          </a:effectLst>
+        </p:spPr>
+      </p:sp>
+      <p:sp>
+        <p:nvSpPr>
+          <p:cNvPr id="23" name="Text 21"/>
+          <p:cNvSpPr/>
+          <p:nvPr/>
+        </p:nvSpPr>
+        <p:spPr>
+          <a:xfrm>
+            <a:off x="6519672" y="2258568"/>
+            <a:ext cx="1828800" cy="292608"/>
+          </a:xfrm>
+          <a:prstGeom prst="rect">
+            <a:avLst/>
+          </a:prstGeom>
+          <a:noFill/>
+          <a:ln/>
+        </p:spPr>
+        <p:txBody>
+          <a:bodyPr wrap="square" lIns="0" tIns="0" rIns="0" bIns="0" rtlCol="0" anchor="ctr"/>
+          <a:lstStyle/>
+          <a:p>
+            <a:pPr algn="ctr" indent="0" marL="0">
+              <a:buNone/>
+            </a:pPr>
+            <a:r>
+              <a:rPr lang="en-US" sz="1300" b="1" dirty="0">
+                <a:solidFill>
+                  <a:srgbClr val="9D174D"/>
+                </a:solidFill>
+                <a:latin typeface="Trebuchet MS" pitchFamily="34" charset="0"/>
+                <a:ea typeface="Trebuchet MS" pitchFamily="34" charset="-122"/>
+                <a:cs typeface="Trebuchet MS" pitchFamily="34" charset="-120"/>
+              </a:rPr>
+              <a:t>ed</a:t>
+            </a:r>
+            <a:endParaRPr lang="en-US" sz="1300" dirty="0"/>
+          </a:p>
+        </p:txBody>
+      </p:sp>
+      <p:sp>
+        <p:nvSpPr>
+          <p:cNvPr id="24" name="Text 22"/>
+          <p:cNvSpPr/>
+          <p:nvPr/>
+        </p:nvSpPr>
+        <p:spPr>
+          <a:xfrm>
+            <a:off x="6519672" y="2569464"/>
+            <a:ext cx="1828800" cy="201168"/>
+          </a:xfrm>
+          <a:prstGeom prst="rect">
+            <a:avLst/>
+          </a:prstGeom>
+          <a:noFill/>
+          <a:ln/>
+        </p:spPr>
+        <p:txBody>
+          <a:bodyPr wrap="square" lIns="0" tIns="0" rIns="0" bIns="0" rtlCol="0" anchor="t"/>
+          <a:lstStyle/>
+          <a:p>
+            <a:pPr algn="ctr" indent="0" marL="0">
+              <a:buNone/>
+            </a:pPr>
+            <a:r>
+              <a:rPr lang="en-US" sz="850" dirty="0">
+                <a:solidFill>
+                  <a:srgbClr val="475569"/>
+                </a:solidFill>
+                <a:latin typeface="Calibri" pitchFamily="34" charset="0"/>
+                <a:ea typeface="Calibri" pitchFamily="34" charset="-122"/>
+                <a:cs typeface="Calibri" pitchFamily="34" charset="-120"/>
+              </a:rPr>
+              <a:t>past tense</a:t>
+            </a:r>
+            <a:endParaRPr lang="en-US" sz="850" dirty="0"/>
+          </a:p>
+        </p:txBody>
+      </p:sp>
+      <p:sp>
+        <p:nvSpPr>
+          <p:cNvPr id="25" name="Shape 23"/>
           <p:cNvSpPr/>
           <p:nvPr/>
         </p:nvSpPr>
@@ -32100,7 +33017,7 @@
       </p:sp>
       <p:sp>
         <p:nvSpPr>
-          <p:cNvPr id="23" name="Text 21"/>
+          <p:cNvPr id="26" name="Text 24"/>
           <p:cNvSpPr/>
           <p:nvPr/>
         </p:nvSpPr>
@@ -32139,7 +33056,7 @@
       </p:sp>
       <p:sp>
         <p:nvSpPr>
-          <p:cNvPr id="24" name="Shape 22"/>
+          <p:cNvPr id="27" name="Shape 25"/>
           <p:cNvSpPr/>
           <p:nvPr/>
         </p:nvSpPr>
@@ -32166,14 +33083,14 @@
       </p:sp>
       <p:sp>
         <p:nvSpPr>
-          <p:cNvPr id="25" name="Shape 23"/>
-          <p:cNvSpPr/>
-          <p:nvPr/>
-        </p:nvSpPr>
-        <p:spPr>
-          <a:xfrm>
-            <a:off x="2313432" y="3364992"/>
-            <a:ext cx="1645920" cy="475488"/>
+          <p:cNvPr id="28" name="Shape 26"/>
+          <p:cNvSpPr/>
+          <p:nvPr/>
+        </p:nvSpPr>
+        <p:spPr>
+          <a:xfrm>
+            <a:off x="1975104" y="3364992"/>
+            <a:ext cx="1554480" cy="475488"/>
           </a:xfrm>
           <a:prstGeom prst="rect">
             <a:avLst>
@@ -32193,14 +33110,14 @@
       </p:sp>
       <p:sp>
         <p:nvSpPr>
-          <p:cNvPr id="26" name="Text 24"/>
-          <p:cNvSpPr/>
-          <p:nvPr/>
-        </p:nvSpPr>
-        <p:spPr>
-          <a:xfrm>
-            <a:off x="2313432" y="3364992"/>
-            <a:ext cx="1645920" cy="475488"/>
+          <p:cNvPr id="29" name="Text 27"/>
+          <p:cNvSpPr/>
+          <p:nvPr/>
+        </p:nvSpPr>
+        <p:spPr>
+          <a:xfrm>
+            <a:off x="1975104" y="3364992"/>
+            <a:ext cx="1554480" cy="475488"/>
           </a:xfrm>
           <a:prstGeom prst="rect">
             <a:avLst/>
@@ -32224,7 +33141,7 @@
                 <a:ea typeface="Trebuchet MS" pitchFamily="34" charset="-122"/>
                 <a:cs typeface="Trebuchet MS" pitchFamily="34" charset="-120"/>
               </a:rPr>
-              <a:t>col</a:t>
+              <a:t>mul</a:t>
             </a:r>
             <a:endParaRPr lang="en-US" sz="1400" dirty="0"/>
           </a:p>
@@ -32232,14 +33149,14 @@
       </p:sp>
       <p:sp>
         <p:nvSpPr>
-          <p:cNvPr id="27" name="Text 25"/>
-          <p:cNvSpPr/>
-          <p:nvPr/>
-        </p:nvSpPr>
-        <p:spPr>
-          <a:xfrm>
-            <a:off x="3959352" y="3364992"/>
-            <a:ext cx="411480" cy="475488"/>
+          <p:cNvPr id="30" name="Text 28"/>
+          <p:cNvSpPr/>
+          <p:nvPr/>
+        </p:nvSpPr>
+        <p:spPr>
+          <a:xfrm>
+            <a:off x="3529584" y="3364992"/>
+            <a:ext cx="73152" cy="475488"/>
           </a:xfrm>
           <a:prstGeom prst="rect">
             <a:avLst/>
@@ -32271,14 +33188,14 @@
       </p:sp>
       <p:sp>
         <p:nvSpPr>
-          <p:cNvPr id="28" name="Shape 26"/>
-          <p:cNvSpPr/>
-          <p:nvPr/>
-        </p:nvSpPr>
-        <p:spPr>
-          <a:xfrm>
-            <a:off x="4370832" y="3364992"/>
-            <a:ext cx="1645920" cy="475488"/>
+          <p:cNvPr id="31" name="Shape 29"/>
+          <p:cNvSpPr/>
+          <p:nvPr/>
+        </p:nvSpPr>
+        <p:spPr>
+          <a:xfrm>
+            <a:off x="3602736" y="3364992"/>
+            <a:ext cx="1554480" cy="475488"/>
           </a:xfrm>
           <a:prstGeom prst="rect">
             <a:avLst>
@@ -32298,14 +33215,14 @@
       </p:sp>
       <p:sp>
         <p:nvSpPr>
-          <p:cNvPr id="29" name="Text 27"/>
-          <p:cNvSpPr/>
-          <p:nvPr/>
-        </p:nvSpPr>
-        <p:spPr>
-          <a:xfrm>
-            <a:off x="4370832" y="3364992"/>
-            <a:ext cx="1645920" cy="475488"/>
+          <p:cNvPr id="32" name="Text 30"/>
+          <p:cNvSpPr/>
+          <p:nvPr/>
+        </p:nvSpPr>
+        <p:spPr>
+          <a:xfrm>
+            <a:off x="3602736" y="3364992"/>
+            <a:ext cx="1554480" cy="475488"/>
           </a:xfrm>
           <a:prstGeom prst="rect">
             <a:avLst/>
@@ -32329,7 +33246,7 @@
                 <a:ea typeface="Trebuchet MS" pitchFamily="34" charset="-122"/>
                 <a:cs typeface="Trebuchet MS" pitchFamily="34" charset="-120"/>
               </a:rPr>
-              <a:t>our</a:t>
+              <a:t>ti</a:t>
             </a:r>
             <a:endParaRPr lang="en-US" sz="1400" dirty="0"/>
           </a:p>
@@ -32337,14 +33254,14 @@
       </p:sp>
       <p:sp>
         <p:nvSpPr>
-          <p:cNvPr id="30" name="Text 28"/>
-          <p:cNvSpPr/>
-          <p:nvPr/>
-        </p:nvSpPr>
-        <p:spPr>
-          <a:xfrm>
-            <a:off x="6016752" y="3364992"/>
-            <a:ext cx="411480" cy="475488"/>
+          <p:cNvPr id="33" name="Text 31"/>
+          <p:cNvSpPr/>
+          <p:nvPr/>
+        </p:nvSpPr>
+        <p:spPr>
+          <a:xfrm>
+            <a:off x="5157216" y="3364992"/>
+            <a:ext cx="73152" cy="475488"/>
           </a:xfrm>
           <a:prstGeom prst="rect">
             <a:avLst/>
@@ -32376,14 +33293,14 @@
       </p:sp>
       <p:sp>
         <p:nvSpPr>
-          <p:cNvPr id="31" name="Shape 29"/>
-          <p:cNvSpPr/>
-          <p:nvPr/>
-        </p:nvSpPr>
-        <p:spPr>
-          <a:xfrm>
-            <a:off x="6428232" y="3364992"/>
-            <a:ext cx="1645920" cy="475488"/>
+          <p:cNvPr id="34" name="Shape 32"/>
+          <p:cNvSpPr/>
+          <p:nvPr/>
+        </p:nvSpPr>
+        <p:spPr>
+          <a:xfrm>
+            <a:off x="5230368" y="3364992"/>
+            <a:ext cx="1554480" cy="475488"/>
           </a:xfrm>
           <a:prstGeom prst="rect">
             <a:avLst>
@@ -32403,14 +33320,14 @@
       </p:sp>
       <p:sp>
         <p:nvSpPr>
-          <p:cNvPr id="32" name="Text 30"/>
-          <p:cNvSpPr/>
-          <p:nvPr/>
-        </p:nvSpPr>
-        <p:spPr>
-          <a:xfrm>
-            <a:off x="6428232" y="3364992"/>
-            <a:ext cx="1645920" cy="475488"/>
+          <p:cNvPr id="35" name="Text 33"/>
+          <p:cNvSpPr/>
+          <p:nvPr/>
+        </p:nvSpPr>
+        <p:spPr>
+          <a:xfrm>
+            <a:off x="5230368" y="3364992"/>
+            <a:ext cx="1554480" cy="475488"/>
           </a:xfrm>
           <a:prstGeom prst="rect">
             <a:avLst/>
@@ -32434,7 +33351,7 @@
                 <a:ea typeface="Trebuchet MS" pitchFamily="34" charset="-122"/>
                 <a:cs typeface="Trebuchet MS" pitchFamily="34" charset="-120"/>
               </a:rPr>
-              <a:t>less</a:t>
+              <a:t>col</a:t>
             </a:r>
             <a:endParaRPr lang="en-US" sz="1400" dirty="0"/>
           </a:p>
@@ -32442,7 +33359,112 @@
       </p:sp>
       <p:sp>
         <p:nvSpPr>
-          <p:cNvPr id="33" name="Shape 31"/>
+          <p:cNvPr id="36" name="Text 34"/>
+          <p:cNvSpPr/>
+          <p:nvPr/>
+        </p:nvSpPr>
+        <p:spPr>
+          <a:xfrm>
+            <a:off x="6784848" y="3364992"/>
+            <a:ext cx="73152" cy="475488"/>
+          </a:xfrm>
+          <a:prstGeom prst="rect">
+            <a:avLst/>
+          </a:prstGeom>
+          <a:noFill/>
+          <a:ln/>
+        </p:spPr>
+        <p:txBody>
+          <a:bodyPr wrap="square" lIns="0" tIns="0" rIns="0" bIns="0" rtlCol="0" anchor="ctr"/>
+          <a:lstStyle/>
+          <a:p>
+            <a:pPr algn="ctr" indent="0" marL="0">
+              <a:buNone/>
+            </a:pPr>
+            <a:r>
+              <a:rPr lang="en-US" sz="1600" b="1" dirty="0">
+                <a:solidFill>
+                  <a:srgbClr val="0D9488"/>
+                </a:solidFill>
+                <a:latin typeface="Trebuchet MS" pitchFamily="34" charset="0"/>
+                <a:ea typeface="Trebuchet MS" pitchFamily="34" charset="-122"/>
+                <a:cs typeface="Trebuchet MS" pitchFamily="34" charset="-120"/>
+              </a:rPr>
+              <a:t>·</a:t>
+            </a:r>
+            <a:endParaRPr lang="en-US" sz="1600" dirty="0"/>
+          </a:p>
+        </p:txBody>
+      </p:sp>
+      <p:sp>
+        <p:nvSpPr>
+          <p:cNvPr id="37" name="Shape 35"/>
+          <p:cNvSpPr/>
+          <p:nvPr/>
+        </p:nvSpPr>
+        <p:spPr>
+          <a:xfrm>
+            <a:off x="6858000" y="3364992"/>
+            <a:ext cx="1554480" cy="475488"/>
+          </a:xfrm>
+          <a:prstGeom prst="rect">
+            <a:avLst>
+              <a:gd name="adj" fmla="val 9615"/>
+            </a:avLst>
+          </a:prstGeom>
+          <a:solidFill>
+            <a:srgbClr val="FFFFFF"/>
+          </a:solidFill>
+          <a:ln w="12700">
+            <a:solidFill>
+              <a:srgbClr val="0D9488"/>
+            </a:solidFill>
+            <a:prstDash val="solid"/>
+          </a:ln>
+        </p:spPr>
+      </p:sp>
+      <p:sp>
+        <p:nvSpPr>
+          <p:cNvPr id="38" name="Text 36"/>
+          <p:cNvSpPr/>
+          <p:nvPr/>
+        </p:nvSpPr>
+        <p:spPr>
+          <a:xfrm>
+            <a:off x="6858000" y="3364992"/>
+            <a:ext cx="1554480" cy="475488"/>
+          </a:xfrm>
+          <a:prstGeom prst="rect">
+            <a:avLst/>
+          </a:prstGeom>
+          <a:noFill/>
+          <a:ln/>
+        </p:spPr>
+        <p:txBody>
+          <a:bodyPr wrap="square" lIns="0" tIns="0" rIns="0" bIns="0" rtlCol="0" anchor="ctr"/>
+          <a:lstStyle/>
+          <a:p>
+            <a:pPr algn="ctr" indent="0" marL="0">
+              <a:buNone/>
+            </a:pPr>
+            <a:r>
+              <a:rPr lang="en-US" sz="1400" b="1" dirty="0">
+                <a:solidFill>
+                  <a:srgbClr val="0D9488"/>
+                </a:solidFill>
+                <a:latin typeface="Trebuchet MS" pitchFamily="34" charset="0"/>
+                <a:ea typeface="Trebuchet MS" pitchFamily="34" charset="-122"/>
+                <a:cs typeface="Trebuchet MS" pitchFamily="34" charset="-120"/>
+              </a:rPr>
+              <a:t>oured</a:t>
+            </a:r>
+            <a:endParaRPr lang="en-US" sz="1400" dirty="0"/>
+          </a:p>
+        </p:txBody>
+      </p:sp>
+      <p:sp>
+        <p:nvSpPr>
+          <p:cNvPr id="39" name="Shape 37"/>
           <p:cNvSpPr/>
           <p:nvPr/>
         </p:nvSpPr>
@@ -32469,7 +33491,7 @@
       </p:sp>
       <p:sp>
         <p:nvSpPr>
-          <p:cNvPr id="34" name="Text 32"/>
+          <p:cNvPr id="40" name="Text 38"/>
           <p:cNvSpPr/>
           <p:nvPr/>
         </p:nvSpPr>
@@ -32508,7 +33530,7 @@
       </p:sp>
       <p:sp>
         <p:nvSpPr>
-          <p:cNvPr id="35" name="Shape 33"/>
+          <p:cNvPr id="41" name="Shape 39"/>
           <p:cNvSpPr/>
           <p:nvPr/>
         </p:nvSpPr>
@@ -32535,7 +33557,7 @@
       </p:sp>
       <p:sp>
         <p:nvSpPr>
-          <p:cNvPr id="36" name="Text 34"/>
+          <p:cNvPr id="42" name="Text 40"/>
           <p:cNvSpPr/>
           <p:nvPr/>
         </p:nvSpPr>
@@ -32858,7 +33880,7 @@
                 <a:ea typeface="Calibri" pitchFamily="34" charset="-122"/>
                 <a:cs typeface="Calibri" pitchFamily="34" charset="-120"/>
               </a:rPr>
-              <a:t>Word Labs  •  wordlabs.app  •  Root: 'colour' = hue, tint, or shade</a:t>
+              <a:t>Word Labs  •  wordlabs.app  •  Root: 'colour' = the property of light; to add colour</a:t>
             </a:r>
             <a:endParaRPr lang="en-US" sz="800" dirty="0"/>
           </a:p>
@@ -32997,7 +34019,7 @@
                 <a:ea typeface="Trebuchet MS" pitchFamily="34" charset="-122"/>
                 <a:cs typeface="Trebuchet MS" pitchFamily="34" charset="-120"/>
               </a:rPr>
-              <a:t>colourless</a:t>
+              <a:t>multicoloured</a:t>
             </a:r>
             <a:endParaRPr lang="en-US" sz="2800" dirty="0"/>
           </a:p>
@@ -33077,7 +34099,7 @@
         </p:nvSpPr>
         <p:spPr>
           <a:xfrm>
-            <a:off x="2938272" y="2258568"/>
+            <a:off x="2221992" y="2258568"/>
             <a:ext cx="1828800" cy="292608"/>
           </a:xfrm>
           <a:prstGeom prst="rect">
@@ -33086,11 +34108,11 @@
             </a:avLst>
           </a:prstGeom>
           <a:solidFill>
-            <a:srgbClr val="CCFBF1"/>
+            <a:srgbClr val="DDD6FE"/>
           </a:solidFill>
           <a:ln w="19050">
             <a:solidFill>
-              <a:srgbClr val="0D9488"/>
+              <a:srgbClr val="7C3AED"/>
             </a:solidFill>
             <a:prstDash val="solid"/>
           </a:ln>
@@ -33111,7 +34133,7 @@
         </p:nvSpPr>
         <p:spPr>
           <a:xfrm>
-            <a:off x="2938272" y="2258568"/>
+            <a:off x="2221992" y="2258568"/>
             <a:ext cx="1828800" cy="292608"/>
           </a:xfrm>
           <a:prstGeom prst="rect">
@@ -33130,13 +34152,13 @@
             <a:r>
               <a:rPr lang="en-US" sz="1300" b="1" dirty="0">
                 <a:solidFill>
-                  <a:srgbClr val="0F766E"/>
+                  <a:srgbClr val="4C1D95"/>
                 </a:solidFill>
                 <a:latin typeface="Trebuchet MS" pitchFamily="34" charset="0"/>
                 <a:ea typeface="Trebuchet MS" pitchFamily="34" charset="-122"/>
                 <a:cs typeface="Trebuchet MS" pitchFamily="34" charset="-120"/>
               </a:rPr>
-              <a:t>colour</a:t>
+              <a:t>multi</a:t>
             </a:r>
             <a:endParaRPr lang="en-US" sz="1300" dirty="0"/>
           </a:p>
@@ -33150,7 +34172,7 @@
         </p:nvSpPr>
         <p:spPr>
           <a:xfrm>
-            <a:off x="2938272" y="2569464"/>
+            <a:off x="2221992" y="2569464"/>
             <a:ext cx="1828800" cy="201168"/>
           </a:xfrm>
           <a:prstGeom prst="rect">
@@ -33175,7 +34197,7 @@
                 <a:ea typeface="Calibri" pitchFamily="34" charset="-122"/>
                 <a:cs typeface="Calibri" pitchFamily="34" charset="-120"/>
               </a:rPr>
-              <a:t>hue or shade</a:t>
+              <a:t>many</a:t>
             </a:r>
             <a:endParaRPr lang="en-US" sz="850" dirty="0"/>
           </a:p>
@@ -33189,7 +34211,7 @@
         </p:nvSpPr>
         <p:spPr>
           <a:xfrm>
-            <a:off x="5803392" y="2258568"/>
+            <a:off x="4370832" y="2258568"/>
             <a:ext cx="1828800" cy="292608"/>
           </a:xfrm>
           <a:prstGeom prst="rect">
@@ -33198,11 +34220,11 @@
             </a:avLst>
           </a:prstGeom>
           <a:solidFill>
-            <a:srgbClr val="DDD6FE"/>
+            <a:srgbClr val="CCFBF1"/>
           </a:solidFill>
           <a:ln w="19050">
             <a:solidFill>
-              <a:srgbClr val="7C3AED"/>
+              <a:srgbClr val="0D9488"/>
             </a:solidFill>
             <a:prstDash val="solid"/>
           </a:ln>
@@ -33223,7 +34245,7 @@
         </p:nvSpPr>
         <p:spPr>
           <a:xfrm>
-            <a:off x="5803392" y="2258568"/>
+            <a:off x="4370832" y="2258568"/>
             <a:ext cx="1828800" cy="292608"/>
           </a:xfrm>
           <a:prstGeom prst="rect">
@@ -33242,13 +34264,13 @@
             <a:r>
               <a:rPr lang="en-US" sz="1300" b="1" dirty="0">
                 <a:solidFill>
-                  <a:srgbClr val="4C1D95"/>
+                  <a:srgbClr val="0F766E"/>
                 </a:solidFill>
                 <a:latin typeface="Trebuchet MS" pitchFamily="34" charset="0"/>
                 <a:ea typeface="Trebuchet MS" pitchFamily="34" charset="-122"/>
                 <a:cs typeface="Trebuchet MS" pitchFamily="34" charset="-120"/>
               </a:rPr>
-              <a:t>less</a:t>
+              <a:t>colour</a:t>
             </a:r>
             <a:endParaRPr lang="en-US" sz="1300" dirty="0"/>
           </a:p>
@@ -33262,7 +34284,7 @@
         </p:nvSpPr>
         <p:spPr>
           <a:xfrm>
-            <a:off x="5803392" y="2569464"/>
+            <a:off x="4370832" y="2569464"/>
             <a:ext cx="1828800" cy="201168"/>
           </a:xfrm>
           <a:prstGeom prst="rect">
@@ -33287,7 +34309,7 @@
                 <a:ea typeface="Calibri" pitchFamily="34" charset="-122"/>
                 <a:cs typeface="Calibri" pitchFamily="34" charset="-120"/>
               </a:rPr>
-              <a:t>without</a:t>
+              <a:t>the property of light; to add colour</a:t>
             </a:r>
             <a:endParaRPr lang="en-US" sz="850" dirty="0"/>
           </a:p>
@@ -33296,6 +34318,118 @@
       <p:sp>
         <p:nvSpPr>
           <p:cNvPr id="22" name="Shape 20"/>
+          <p:cNvSpPr/>
+          <p:nvPr/>
+        </p:nvSpPr>
+        <p:spPr>
+          <a:xfrm>
+            <a:off x="6519672" y="2258568"/>
+            <a:ext cx="1828800" cy="292608"/>
+          </a:xfrm>
+          <a:prstGeom prst="rect">
+            <a:avLst>
+              <a:gd name="adj" fmla="val 25000"/>
+            </a:avLst>
+          </a:prstGeom>
+          <a:solidFill>
+            <a:srgbClr val="FCE7F3"/>
+          </a:solidFill>
+          <a:ln w="19050">
+            <a:solidFill>
+              <a:srgbClr val="DB2777"/>
+            </a:solidFill>
+            <a:prstDash val="solid"/>
+          </a:ln>
+          <a:effectLst>
+            <a:outerShdw sx="100000" sy="100000" kx="0" ky="0" algn="bl" rotWithShape="0" blurRad="101600" dist="38100" dir="8100000">
+              <a:srgbClr val="000000">
+                <a:alpha val="12000"/>
+              </a:srgbClr>
+            </a:outerShdw>
+          </a:effectLst>
+        </p:spPr>
+      </p:sp>
+      <p:sp>
+        <p:nvSpPr>
+          <p:cNvPr id="23" name="Text 21"/>
+          <p:cNvSpPr/>
+          <p:nvPr/>
+        </p:nvSpPr>
+        <p:spPr>
+          <a:xfrm>
+            <a:off x="6519672" y="2258568"/>
+            <a:ext cx="1828800" cy="292608"/>
+          </a:xfrm>
+          <a:prstGeom prst="rect">
+            <a:avLst/>
+          </a:prstGeom>
+          <a:noFill/>
+          <a:ln/>
+        </p:spPr>
+        <p:txBody>
+          <a:bodyPr wrap="square" lIns="0" tIns="0" rIns="0" bIns="0" rtlCol="0" anchor="ctr"/>
+          <a:lstStyle/>
+          <a:p>
+            <a:pPr algn="ctr" indent="0" marL="0">
+              <a:buNone/>
+            </a:pPr>
+            <a:r>
+              <a:rPr lang="en-US" sz="1300" b="1" dirty="0">
+                <a:solidFill>
+                  <a:srgbClr val="9D174D"/>
+                </a:solidFill>
+                <a:latin typeface="Trebuchet MS" pitchFamily="34" charset="0"/>
+                <a:ea typeface="Trebuchet MS" pitchFamily="34" charset="-122"/>
+                <a:cs typeface="Trebuchet MS" pitchFamily="34" charset="-120"/>
+              </a:rPr>
+              <a:t>ed</a:t>
+            </a:r>
+            <a:endParaRPr lang="en-US" sz="1300" dirty="0"/>
+          </a:p>
+        </p:txBody>
+      </p:sp>
+      <p:sp>
+        <p:nvSpPr>
+          <p:cNvPr id="24" name="Text 22"/>
+          <p:cNvSpPr/>
+          <p:nvPr/>
+        </p:nvSpPr>
+        <p:spPr>
+          <a:xfrm>
+            <a:off x="6519672" y="2569464"/>
+            <a:ext cx="1828800" cy="201168"/>
+          </a:xfrm>
+          <a:prstGeom prst="rect">
+            <a:avLst/>
+          </a:prstGeom>
+          <a:noFill/>
+          <a:ln/>
+        </p:spPr>
+        <p:txBody>
+          <a:bodyPr wrap="square" lIns="0" tIns="0" rIns="0" bIns="0" rtlCol="0" anchor="t"/>
+          <a:lstStyle/>
+          <a:p>
+            <a:pPr algn="ctr" indent="0" marL="0">
+              <a:buNone/>
+            </a:pPr>
+            <a:r>
+              <a:rPr lang="en-US" sz="850" dirty="0">
+                <a:solidFill>
+                  <a:srgbClr val="475569"/>
+                </a:solidFill>
+                <a:latin typeface="Calibri" pitchFamily="34" charset="0"/>
+                <a:ea typeface="Calibri" pitchFamily="34" charset="-122"/>
+                <a:cs typeface="Calibri" pitchFamily="34" charset="-120"/>
+              </a:rPr>
+              <a:t>past tense</a:t>
+            </a:r>
+            <a:endParaRPr lang="en-US" sz="850" dirty="0"/>
+          </a:p>
+        </p:txBody>
+      </p:sp>
+      <p:sp>
+        <p:nvSpPr>
+          <p:cNvPr id="25" name="Shape 23"/>
           <p:cNvSpPr/>
           <p:nvPr/>
         </p:nvSpPr>
@@ -33322,7 +34456,7 @@
       </p:sp>
       <p:sp>
         <p:nvSpPr>
-          <p:cNvPr id="23" name="Text 21"/>
+          <p:cNvPr id="26" name="Text 24"/>
           <p:cNvSpPr/>
           <p:nvPr/>
         </p:nvSpPr>
@@ -33361,7 +34495,7 @@
       </p:sp>
       <p:sp>
         <p:nvSpPr>
-          <p:cNvPr id="24" name="Shape 22"/>
+          <p:cNvPr id="27" name="Shape 25"/>
           <p:cNvSpPr/>
           <p:nvPr/>
         </p:nvSpPr>
@@ -33388,14 +34522,14 @@
       </p:sp>
       <p:sp>
         <p:nvSpPr>
-          <p:cNvPr id="25" name="Shape 23"/>
-          <p:cNvSpPr/>
-          <p:nvPr/>
-        </p:nvSpPr>
-        <p:spPr>
-          <a:xfrm>
-            <a:off x="2313432" y="3364992"/>
-            <a:ext cx="1645920" cy="475488"/>
+          <p:cNvPr id="28" name="Shape 26"/>
+          <p:cNvSpPr/>
+          <p:nvPr/>
+        </p:nvSpPr>
+        <p:spPr>
+          <a:xfrm>
+            <a:off x="1975104" y="3364992"/>
+            <a:ext cx="1554480" cy="475488"/>
           </a:xfrm>
           <a:prstGeom prst="rect">
             <a:avLst>
@@ -33415,14 +34549,14 @@
       </p:sp>
       <p:sp>
         <p:nvSpPr>
-          <p:cNvPr id="26" name="Text 24"/>
-          <p:cNvSpPr/>
-          <p:nvPr/>
-        </p:nvSpPr>
-        <p:spPr>
-          <a:xfrm>
-            <a:off x="2313432" y="3364992"/>
-            <a:ext cx="1645920" cy="475488"/>
+          <p:cNvPr id="29" name="Text 27"/>
+          <p:cNvSpPr/>
+          <p:nvPr/>
+        </p:nvSpPr>
+        <p:spPr>
+          <a:xfrm>
+            <a:off x="1975104" y="3364992"/>
+            <a:ext cx="1554480" cy="475488"/>
           </a:xfrm>
           <a:prstGeom prst="rect">
             <a:avLst/>
@@ -33446,7 +34580,7 @@
                 <a:ea typeface="Trebuchet MS" pitchFamily="34" charset="-122"/>
                 <a:cs typeface="Trebuchet MS" pitchFamily="34" charset="-120"/>
               </a:rPr>
-              <a:t>col</a:t>
+              <a:t>mul</a:t>
             </a:r>
             <a:endParaRPr lang="en-US" sz="1400" dirty="0"/>
           </a:p>
@@ -33454,14 +34588,14 @@
       </p:sp>
       <p:sp>
         <p:nvSpPr>
-          <p:cNvPr id="27" name="Text 25"/>
-          <p:cNvSpPr/>
-          <p:nvPr/>
-        </p:nvSpPr>
-        <p:spPr>
-          <a:xfrm>
-            <a:off x="3959352" y="3364992"/>
-            <a:ext cx="411480" cy="475488"/>
+          <p:cNvPr id="30" name="Text 28"/>
+          <p:cNvSpPr/>
+          <p:nvPr/>
+        </p:nvSpPr>
+        <p:spPr>
+          <a:xfrm>
+            <a:off x="3529584" y="3364992"/>
+            <a:ext cx="73152" cy="475488"/>
           </a:xfrm>
           <a:prstGeom prst="rect">
             <a:avLst/>
@@ -33493,14 +34627,14 @@
       </p:sp>
       <p:sp>
         <p:nvSpPr>
-          <p:cNvPr id="28" name="Shape 26"/>
-          <p:cNvSpPr/>
-          <p:nvPr/>
-        </p:nvSpPr>
-        <p:spPr>
-          <a:xfrm>
-            <a:off x="4370832" y="3364992"/>
-            <a:ext cx="1645920" cy="475488"/>
+          <p:cNvPr id="31" name="Shape 29"/>
+          <p:cNvSpPr/>
+          <p:nvPr/>
+        </p:nvSpPr>
+        <p:spPr>
+          <a:xfrm>
+            <a:off x="3602736" y="3364992"/>
+            <a:ext cx="1554480" cy="475488"/>
           </a:xfrm>
           <a:prstGeom prst="rect">
             <a:avLst>
@@ -33520,14 +34654,14 @@
       </p:sp>
       <p:sp>
         <p:nvSpPr>
-          <p:cNvPr id="29" name="Text 27"/>
-          <p:cNvSpPr/>
-          <p:nvPr/>
-        </p:nvSpPr>
-        <p:spPr>
-          <a:xfrm>
-            <a:off x="4370832" y="3364992"/>
-            <a:ext cx="1645920" cy="475488"/>
+          <p:cNvPr id="32" name="Text 30"/>
+          <p:cNvSpPr/>
+          <p:nvPr/>
+        </p:nvSpPr>
+        <p:spPr>
+          <a:xfrm>
+            <a:off x="3602736" y="3364992"/>
+            <a:ext cx="1554480" cy="475488"/>
           </a:xfrm>
           <a:prstGeom prst="rect">
             <a:avLst/>
@@ -33551,7 +34685,7 @@
                 <a:ea typeface="Trebuchet MS" pitchFamily="34" charset="-122"/>
                 <a:cs typeface="Trebuchet MS" pitchFamily="34" charset="-120"/>
               </a:rPr>
-              <a:t>our</a:t>
+              <a:t>ti</a:t>
             </a:r>
             <a:endParaRPr lang="en-US" sz="1400" dirty="0"/>
           </a:p>
@@ -33559,14 +34693,14 @@
       </p:sp>
       <p:sp>
         <p:nvSpPr>
-          <p:cNvPr id="30" name="Text 28"/>
-          <p:cNvSpPr/>
-          <p:nvPr/>
-        </p:nvSpPr>
-        <p:spPr>
-          <a:xfrm>
-            <a:off x="6016752" y="3364992"/>
-            <a:ext cx="411480" cy="475488"/>
+          <p:cNvPr id="33" name="Text 31"/>
+          <p:cNvSpPr/>
+          <p:nvPr/>
+        </p:nvSpPr>
+        <p:spPr>
+          <a:xfrm>
+            <a:off x="5157216" y="3364992"/>
+            <a:ext cx="73152" cy="475488"/>
           </a:xfrm>
           <a:prstGeom prst="rect">
             <a:avLst/>
@@ -33598,14 +34732,14 @@
       </p:sp>
       <p:sp>
         <p:nvSpPr>
-          <p:cNvPr id="31" name="Shape 29"/>
-          <p:cNvSpPr/>
-          <p:nvPr/>
-        </p:nvSpPr>
-        <p:spPr>
-          <a:xfrm>
-            <a:off x="6428232" y="3364992"/>
-            <a:ext cx="1645920" cy="475488"/>
+          <p:cNvPr id="34" name="Shape 32"/>
+          <p:cNvSpPr/>
+          <p:nvPr/>
+        </p:nvSpPr>
+        <p:spPr>
+          <a:xfrm>
+            <a:off x="5230368" y="3364992"/>
+            <a:ext cx="1554480" cy="475488"/>
           </a:xfrm>
           <a:prstGeom prst="rect">
             <a:avLst>
@@ -33625,14 +34759,14 @@
       </p:sp>
       <p:sp>
         <p:nvSpPr>
-          <p:cNvPr id="32" name="Text 30"/>
-          <p:cNvSpPr/>
-          <p:nvPr/>
-        </p:nvSpPr>
-        <p:spPr>
-          <a:xfrm>
-            <a:off x="6428232" y="3364992"/>
-            <a:ext cx="1645920" cy="475488"/>
+          <p:cNvPr id="35" name="Text 33"/>
+          <p:cNvSpPr/>
+          <p:nvPr/>
+        </p:nvSpPr>
+        <p:spPr>
+          <a:xfrm>
+            <a:off x="5230368" y="3364992"/>
+            <a:ext cx="1554480" cy="475488"/>
           </a:xfrm>
           <a:prstGeom prst="rect">
             <a:avLst/>
@@ -33656,7 +34790,7 @@
                 <a:ea typeface="Trebuchet MS" pitchFamily="34" charset="-122"/>
                 <a:cs typeface="Trebuchet MS" pitchFamily="34" charset="-120"/>
               </a:rPr>
-              <a:t>less</a:t>
+              <a:t>col</a:t>
             </a:r>
             <a:endParaRPr lang="en-US" sz="1400" dirty="0"/>
           </a:p>
@@ -33664,7 +34798,112 @@
       </p:sp>
       <p:sp>
         <p:nvSpPr>
-          <p:cNvPr id="33" name="Shape 31"/>
+          <p:cNvPr id="36" name="Text 34"/>
+          <p:cNvSpPr/>
+          <p:nvPr/>
+        </p:nvSpPr>
+        <p:spPr>
+          <a:xfrm>
+            <a:off x="6784848" y="3364992"/>
+            <a:ext cx="73152" cy="475488"/>
+          </a:xfrm>
+          <a:prstGeom prst="rect">
+            <a:avLst/>
+          </a:prstGeom>
+          <a:noFill/>
+          <a:ln/>
+        </p:spPr>
+        <p:txBody>
+          <a:bodyPr wrap="square" lIns="0" tIns="0" rIns="0" bIns="0" rtlCol="0" anchor="ctr"/>
+          <a:lstStyle/>
+          <a:p>
+            <a:pPr algn="ctr" indent="0" marL="0">
+              <a:buNone/>
+            </a:pPr>
+            <a:r>
+              <a:rPr lang="en-US" sz="1600" b="1" dirty="0">
+                <a:solidFill>
+                  <a:srgbClr val="0D9488"/>
+                </a:solidFill>
+                <a:latin typeface="Trebuchet MS" pitchFamily="34" charset="0"/>
+                <a:ea typeface="Trebuchet MS" pitchFamily="34" charset="-122"/>
+                <a:cs typeface="Trebuchet MS" pitchFamily="34" charset="-120"/>
+              </a:rPr>
+              <a:t>·</a:t>
+            </a:r>
+            <a:endParaRPr lang="en-US" sz="1600" dirty="0"/>
+          </a:p>
+        </p:txBody>
+      </p:sp>
+      <p:sp>
+        <p:nvSpPr>
+          <p:cNvPr id="37" name="Shape 35"/>
+          <p:cNvSpPr/>
+          <p:nvPr/>
+        </p:nvSpPr>
+        <p:spPr>
+          <a:xfrm>
+            <a:off x="6858000" y="3364992"/>
+            <a:ext cx="1554480" cy="475488"/>
+          </a:xfrm>
+          <a:prstGeom prst="rect">
+            <a:avLst>
+              <a:gd name="adj" fmla="val 9615"/>
+            </a:avLst>
+          </a:prstGeom>
+          <a:solidFill>
+            <a:srgbClr val="FFFFFF"/>
+          </a:solidFill>
+          <a:ln w="12700">
+            <a:solidFill>
+              <a:srgbClr val="0D9488"/>
+            </a:solidFill>
+            <a:prstDash val="solid"/>
+          </a:ln>
+        </p:spPr>
+      </p:sp>
+      <p:sp>
+        <p:nvSpPr>
+          <p:cNvPr id="38" name="Text 36"/>
+          <p:cNvSpPr/>
+          <p:nvPr/>
+        </p:nvSpPr>
+        <p:spPr>
+          <a:xfrm>
+            <a:off x="6858000" y="3364992"/>
+            <a:ext cx="1554480" cy="475488"/>
+          </a:xfrm>
+          <a:prstGeom prst="rect">
+            <a:avLst/>
+          </a:prstGeom>
+          <a:noFill/>
+          <a:ln/>
+        </p:spPr>
+        <p:txBody>
+          <a:bodyPr wrap="square" lIns="0" tIns="0" rIns="0" bIns="0" rtlCol="0" anchor="ctr"/>
+          <a:lstStyle/>
+          <a:p>
+            <a:pPr algn="ctr" indent="0" marL="0">
+              <a:buNone/>
+            </a:pPr>
+            <a:r>
+              <a:rPr lang="en-US" sz="1400" b="1" dirty="0">
+                <a:solidFill>
+                  <a:srgbClr val="0D9488"/>
+                </a:solidFill>
+                <a:latin typeface="Trebuchet MS" pitchFamily="34" charset="0"/>
+                <a:ea typeface="Trebuchet MS" pitchFamily="34" charset="-122"/>
+                <a:cs typeface="Trebuchet MS" pitchFamily="34" charset="-120"/>
+              </a:rPr>
+              <a:t>oured</a:t>
+            </a:r>
+            <a:endParaRPr lang="en-US" sz="1400" dirty="0"/>
+          </a:p>
+        </p:txBody>
+      </p:sp>
+      <p:sp>
+        <p:nvSpPr>
+          <p:cNvPr id="39" name="Shape 37"/>
           <p:cNvSpPr/>
           <p:nvPr/>
         </p:nvSpPr>
@@ -33691,7 +34930,7 @@
       </p:sp>
       <p:sp>
         <p:nvSpPr>
-          <p:cNvPr id="34" name="Text 32"/>
+          <p:cNvPr id="40" name="Text 38"/>
           <p:cNvSpPr/>
           <p:nvPr/>
         </p:nvSpPr>
@@ -33730,18 +34969,18 @@
       </p:sp>
       <p:sp>
         <p:nvSpPr>
-          <p:cNvPr id="35" name="Shape 33"/>
+          <p:cNvPr id="41" name="Shape 39"/>
           <p:cNvSpPr/>
           <p:nvPr/>
         </p:nvSpPr>
         <p:spPr>
           <a:xfrm>
             <a:off x="1874520" y="4096512"/>
-            <a:ext cx="6903720" cy="804672"/>
+            <a:ext cx="6903720" cy="658368"/>
           </a:xfrm>
           <a:prstGeom prst="rect">
             <a:avLst>
-              <a:gd name="adj" fmla="val 6818"/>
+              <a:gd name="adj" fmla="val 8333"/>
             </a:avLst>
           </a:prstGeom>
           <a:solidFill>
@@ -33757,18 +34996,18 @@
       </p:sp>
       <p:sp>
         <p:nvSpPr>
-          <p:cNvPr id="36" name="Shape 34"/>
-          <p:cNvSpPr/>
-          <p:nvPr/>
-        </p:nvSpPr>
-        <p:spPr>
-          <a:xfrm>
-            <a:off x="2023872" y="4169664"/>
-            <a:ext cx="685800" cy="384048"/>
+          <p:cNvPr id="42" name="Shape 40"/>
+          <p:cNvSpPr/>
+          <p:nvPr/>
+        </p:nvSpPr>
+        <p:spPr>
+          <a:xfrm>
+            <a:off x="1952244" y="4169664"/>
+            <a:ext cx="543652" cy="475488"/>
           </a:xfrm>
           <a:prstGeom prst="rect">
             <a:avLst>
-              <a:gd name="adj" fmla="val 9524"/>
+              <a:gd name="adj" fmla="val 7692"/>
             </a:avLst>
           </a:prstGeom>
           <a:solidFill>
@@ -33784,14 +35023,14 @@
       </p:sp>
       <p:sp>
         <p:nvSpPr>
-          <p:cNvPr id="37" name="Text 35"/>
-          <p:cNvSpPr/>
-          <p:nvPr/>
-        </p:nvSpPr>
-        <p:spPr>
-          <a:xfrm>
-            <a:off x="2023872" y="4169664"/>
-            <a:ext cx="685800" cy="384048"/>
+          <p:cNvPr id="43" name="Text 41"/>
+          <p:cNvSpPr/>
+          <p:nvPr/>
+        </p:nvSpPr>
+        <p:spPr>
+          <a:xfrm>
+            <a:off x="1952244" y="4169664"/>
+            <a:ext cx="543652" cy="475488"/>
           </a:xfrm>
           <a:prstGeom prst="rect">
             <a:avLst/>
@@ -33815,7 +35054,7 @@
                 <a:ea typeface="Trebuchet MS" pitchFamily="34" charset="-122"/>
                 <a:cs typeface="Trebuchet MS" pitchFamily="34" charset="-120"/>
               </a:rPr>
-              <a:t>c</a:t>
+              <a:t>m</a:t>
             </a:r>
             <a:endParaRPr lang="en-US" sz="900" dirty="0"/>
           </a:p>
@@ -33823,57 +35062,18 @@
       </p:sp>
       <p:sp>
         <p:nvSpPr>
-          <p:cNvPr id="38" name="Text 36"/>
-          <p:cNvSpPr/>
-          <p:nvPr/>
-        </p:nvSpPr>
-        <p:spPr>
-          <a:xfrm>
-            <a:off x="2023872" y="4572000"/>
-            <a:ext cx="685800" cy="219456"/>
-          </a:xfrm>
-          <a:prstGeom prst="rect">
-            <a:avLst/>
-          </a:prstGeom>
-          <a:noFill/>
-          <a:ln/>
-        </p:spPr>
-        <p:txBody>
-          <a:bodyPr wrap="square" lIns="0" tIns="0" rIns="0" bIns="0" rtlCol="0" anchor="t"/>
-          <a:lstStyle/>
-          <a:p>
-            <a:pPr algn="ctr" indent="0" marL="0">
-              <a:buNone/>
-            </a:pPr>
-            <a:r>
-              <a:rPr lang="en-US" sz="750" i="1" dirty="0">
-                <a:solidFill>
-                  <a:srgbClr val="94A3B8"/>
-                </a:solidFill>
-                <a:latin typeface="Calibri" pitchFamily="34" charset="0"/>
-                <a:ea typeface="Calibri" pitchFamily="34" charset="-122"/>
-                <a:cs typeface="Calibri" pitchFamily="34" charset="-120"/>
-              </a:rPr>
-              <a:t>/k/</a:t>
-            </a:r>
-            <a:endParaRPr lang="en-US" sz="750" dirty="0"/>
-          </a:p>
-        </p:txBody>
-      </p:sp>
-      <p:sp>
-        <p:nvSpPr>
-          <p:cNvPr id="39" name="Shape 37"/>
-          <p:cNvSpPr/>
-          <p:nvPr/>
-        </p:nvSpPr>
-        <p:spPr>
-          <a:xfrm>
-            <a:off x="2831592" y="4169664"/>
-            <a:ext cx="685800" cy="384048"/>
+          <p:cNvPr id="44" name="Shape 42"/>
+          <p:cNvSpPr/>
+          <p:nvPr/>
+        </p:nvSpPr>
+        <p:spPr>
+          <a:xfrm>
+            <a:off x="2546188" y="4169664"/>
+            <a:ext cx="543652" cy="475488"/>
           </a:xfrm>
           <a:prstGeom prst="rect">
             <a:avLst>
-              <a:gd name="adj" fmla="val 9524"/>
+              <a:gd name="adj" fmla="val 7692"/>
             </a:avLst>
           </a:prstGeom>
           <a:solidFill>
@@ -33889,14 +35089,14 @@
       </p:sp>
       <p:sp>
         <p:nvSpPr>
-          <p:cNvPr id="40" name="Text 38"/>
-          <p:cNvSpPr/>
-          <p:nvPr/>
-        </p:nvSpPr>
-        <p:spPr>
-          <a:xfrm>
-            <a:off x="2831592" y="4169664"/>
-            <a:ext cx="685800" cy="384048"/>
+          <p:cNvPr id="45" name="Text 43"/>
+          <p:cNvSpPr/>
+          <p:nvPr/>
+        </p:nvSpPr>
+        <p:spPr>
+          <a:xfrm>
+            <a:off x="2546188" y="4169664"/>
+            <a:ext cx="543652" cy="475488"/>
           </a:xfrm>
           <a:prstGeom prst="rect">
             <a:avLst/>
@@ -33920,7 +35120,7 @@
                 <a:ea typeface="Trebuchet MS" pitchFamily="34" charset="-122"/>
                 <a:cs typeface="Trebuchet MS" pitchFamily="34" charset="-120"/>
               </a:rPr>
-              <a:t>o</a:t>
+              <a:t>u</a:t>
             </a:r>
             <a:endParaRPr lang="en-US" sz="900" dirty="0"/>
           </a:p>
@@ -33928,18 +35128,18 @@
       </p:sp>
       <p:sp>
         <p:nvSpPr>
-          <p:cNvPr id="41" name="Shape 39"/>
-          <p:cNvSpPr/>
-          <p:nvPr/>
-        </p:nvSpPr>
-        <p:spPr>
-          <a:xfrm>
-            <a:off x="3639312" y="4169664"/>
-            <a:ext cx="685800" cy="384048"/>
+          <p:cNvPr id="46" name="Shape 44"/>
+          <p:cNvSpPr/>
+          <p:nvPr/>
+        </p:nvSpPr>
+        <p:spPr>
+          <a:xfrm>
+            <a:off x="3140133" y="4169664"/>
+            <a:ext cx="543652" cy="475488"/>
           </a:xfrm>
           <a:prstGeom prst="rect">
             <a:avLst>
-              <a:gd name="adj" fmla="val 9524"/>
+              <a:gd name="adj" fmla="val 7692"/>
             </a:avLst>
           </a:prstGeom>
           <a:solidFill>
@@ -33955,14 +35155,14 @@
       </p:sp>
       <p:sp>
         <p:nvSpPr>
-          <p:cNvPr id="42" name="Text 40"/>
-          <p:cNvSpPr/>
-          <p:nvPr/>
-        </p:nvSpPr>
-        <p:spPr>
-          <a:xfrm>
-            <a:off x="3639312" y="4169664"/>
-            <a:ext cx="685800" cy="384048"/>
+          <p:cNvPr id="47" name="Text 45"/>
+          <p:cNvSpPr/>
+          <p:nvPr/>
+        </p:nvSpPr>
+        <p:spPr>
+          <a:xfrm>
+            <a:off x="3140133" y="4169664"/>
+            <a:ext cx="543652" cy="475488"/>
           </a:xfrm>
           <a:prstGeom prst="rect">
             <a:avLst/>
@@ -33994,18 +35194,18 @@
       </p:sp>
       <p:sp>
         <p:nvSpPr>
-          <p:cNvPr id="43" name="Shape 41"/>
-          <p:cNvSpPr/>
-          <p:nvPr/>
-        </p:nvSpPr>
-        <p:spPr>
-          <a:xfrm>
-            <a:off x="4447032" y="4169664"/>
-            <a:ext cx="685800" cy="384048"/>
+          <p:cNvPr id="48" name="Shape 46"/>
+          <p:cNvSpPr/>
+          <p:nvPr/>
+        </p:nvSpPr>
+        <p:spPr>
+          <a:xfrm>
+            <a:off x="3734077" y="4169664"/>
+            <a:ext cx="543652" cy="475488"/>
           </a:xfrm>
           <a:prstGeom prst="rect">
             <a:avLst>
-              <a:gd name="adj" fmla="val 9524"/>
+              <a:gd name="adj" fmla="val 7692"/>
             </a:avLst>
           </a:prstGeom>
           <a:solidFill>
@@ -34021,14 +35221,14 @@
       </p:sp>
       <p:sp>
         <p:nvSpPr>
-          <p:cNvPr id="44" name="Text 42"/>
-          <p:cNvSpPr/>
-          <p:nvPr/>
-        </p:nvSpPr>
-        <p:spPr>
-          <a:xfrm>
-            <a:off x="4447032" y="4169664"/>
-            <a:ext cx="685800" cy="384048"/>
+          <p:cNvPr id="49" name="Text 47"/>
+          <p:cNvSpPr/>
+          <p:nvPr/>
+        </p:nvSpPr>
+        <p:spPr>
+          <a:xfrm>
+            <a:off x="3734077" y="4169664"/>
+            <a:ext cx="543652" cy="475488"/>
           </a:xfrm>
           <a:prstGeom prst="rect">
             <a:avLst/>
@@ -34052,7 +35252,7 @@
                 <a:ea typeface="Trebuchet MS" pitchFamily="34" charset="-122"/>
                 <a:cs typeface="Trebuchet MS" pitchFamily="34" charset="-120"/>
               </a:rPr>
-              <a:t>ou</a:t>
+              <a:t>t</a:t>
             </a:r>
             <a:endParaRPr lang="en-US" sz="900" dirty="0"/>
           </a:p>
@@ -34060,18 +35260,18 @@
       </p:sp>
       <p:sp>
         <p:nvSpPr>
-          <p:cNvPr id="45" name="Shape 43"/>
-          <p:cNvSpPr/>
-          <p:nvPr/>
-        </p:nvSpPr>
-        <p:spPr>
-          <a:xfrm>
-            <a:off x="5254752" y="4169664"/>
-            <a:ext cx="685800" cy="384048"/>
+          <p:cNvPr id="50" name="Shape 48"/>
+          <p:cNvSpPr/>
+          <p:nvPr/>
+        </p:nvSpPr>
+        <p:spPr>
+          <a:xfrm>
+            <a:off x="4328021" y="4169664"/>
+            <a:ext cx="543652" cy="475488"/>
           </a:xfrm>
           <a:prstGeom prst="rect">
             <a:avLst>
-              <a:gd name="adj" fmla="val 9524"/>
+              <a:gd name="adj" fmla="val 7692"/>
             </a:avLst>
           </a:prstGeom>
           <a:solidFill>
@@ -34087,14 +35287,14 @@
       </p:sp>
       <p:sp>
         <p:nvSpPr>
-          <p:cNvPr id="46" name="Text 44"/>
-          <p:cNvSpPr/>
-          <p:nvPr/>
-        </p:nvSpPr>
-        <p:spPr>
-          <a:xfrm>
-            <a:off x="5254752" y="4169664"/>
-            <a:ext cx="685800" cy="384048"/>
+          <p:cNvPr id="51" name="Text 49"/>
+          <p:cNvSpPr/>
+          <p:nvPr/>
+        </p:nvSpPr>
+        <p:spPr>
+          <a:xfrm>
+            <a:off x="4328021" y="4169664"/>
+            <a:ext cx="543652" cy="475488"/>
           </a:xfrm>
           <a:prstGeom prst="rect">
             <a:avLst/>
@@ -34118,7 +35318,7 @@
                 <a:ea typeface="Trebuchet MS" pitchFamily="34" charset="-122"/>
                 <a:cs typeface="Trebuchet MS" pitchFamily="34" charset="-120"/>
               </a:rPr>
-              <a:t>r</a:t>
+              <a:t>i</a:t>
             </a:r>
             <a:endParaRPr lang="en-US" sz="900" dirty="0"/>
           </a:p>
@@ -34126,18 +35326,18 @@
       </p:sp>
       <p:sp>
         <p:nvSpPr>
-          <p:cNvPr id="47" name="Shape 45"/>
-          <p:cNvSpPr/>
-          <p:nvPr/>
-        </p:nvSpPr>
-        <p:spPr>
-          <a:xfrm>
-            <a:off x="6062472" y="4169664"/>
-            <a:ext cx="685800" cy="384048"/>
+          <p:cNvPr id="52" name="Shape 50"/>
+          <p:cNvSpPr/>
+          <p:nvPr/>
+        </p:nvSpPr>
+        <p:spPr>
+          <a:xfrm>
+            <a:off x="4921966" y="4169664"/>
+            <a:ext cx="543652" cy="475488"/>
           </a:xfrm>
           <a:prstGeom prst="rect">
             <a:avLst>
-              <a:gd name="adj" fmla="val 9524"/>
+              <a:gd name="adj" fmla="val 7692"/>
             </a:avLst>
           </a:prstGeom>
           <a:solidFill>
@@ -34153,14 +35353,14 @@
       </p:sp>
       <p:sp>
         <p:nvSpPr>
-          <p:cNvPr id="48" name="Text 46"/>
-          <p:cNvSpPr/>
-          <p:nvPr/>
-        </p:nvSpPr>
-        <p:spPr>
-          <a:xfrm>
-            <a:off x="6062472" y="4169664"/>
-            <a:ext cx="685800" cy="384048"/>
+          <p:cNvPr id="53" name="Text 51"/>
+          <p:cNvSpPr/>
+          <p:nvPr/>
+        </p:nvSpPr>
+        <p:spPr>
+          <a:xfrm>
+            <a:off x="4921966" y="4169664"/>
+            <a:ext cx="543652" cy="475488"/>
           </a:xfrm>
           <a:prstGeom prst="rect">
             <a:avLst/>
@@ -34184,7 +35384,7 @@
                 <a:ea typeface="Trebuchet MS" pitchFamily="34" charset="-122"/>
                 <a:cs typeface="Trebuchet MS" pitchFamily="34" charset="-120"/>
               </a:rPr>
-              <a:t>l</a:t>
+              <a:t>c</a:t>
             </a:r>
             <a:endParaRPr lang="en-US" sz="900" dirty="0"/>
           </a:p>
@@ -34192,18 +35392,18 @@
       </p:sp>
       <p:sp>
         <p:nvSpPr>
-          <p:cNvPr id="49" name="Shape 47"/>
-          <p:cNvSpPr/>
-          <p:nvPr/>
-        </p:nvSpPr>
-        <p:spPr>
-          <a:xfrm>
-            <a:off x="6870192" y="4169664"/>
-            <a:ext cx="685800" cy="384048"/>
+          <p:cNvPr id="54" name="Shape 52"/>
+          <p:cNvSpPr/>
+          <p:nvPr/>
+        </p:nvSpPr>
+        <p:spPr>
+          <a:xfrm>
+            <a:off x="5515910" y="4169664"/>
+            <a:ext cx="543652" cy="475488"/>
           </a:xfrm>
           <a:prstGeom prst="rect">
             <a:avLst>
-              <a:gd name="adj" fmla="val 9524"/>
+              <a:gd name="adj" fmla="val 7692"/>
             </a:avLst>
           </a:prstGeom>
           <a:solidFill>
@@ -34219,14 +35419,14 @@
       </p:sp>
       <p:sp>
         <p:nvSpPr>
-          <p:cNvPr id="50" name="Text 48"/>
-          <p:cNvSpPr/>
-          <p:nvPr/>
-        </p:nvSpPr>
-        <p:spPr>
-          <a:xfrm>
-            <a:off x="6870192" y="4169664"/>
-            <a:ext cx="685800" cy="384048"/>
+          <p:cNvPr id="55" name="Text 53"/>
+          <p:cNvSpPr/>
+          <p:nvPr/>
+        </p:nvSpPr>
+        <p:spPr>
+          <a:xfrm>
+            <a:off x="5515910" y="4169664"/>
+            <a:ext cx="543652" cy="475488"/>
           </a:xfrm>
           <a:prstGeom prst="rect">
             <a:avLst/>
@@ -34250,7 +35450,7 @@
                 <a:ea typeface="Trebuchet MS" pitchFamily="34" charset="-122"/>
                 <a:cs typeface="Trebuchet MS" pitchFamily="34" charset="-120"/>
               </a:rPr>
-              <a:t>e</a:t>
+              <a:t>o</a:t>
             </a:r>
             <a:endParaRPr lang="en-US" sz="900" dirty="0"/>
           </a:p>
@@ -34258,18 +35458,18 @@
       </p:sp>
       <p:sp>
         <p:nvSpPr>
-          <p:cNvPr id="51" name="Shape 49"/>
-          <p:cNvSpPr/>
-          <p:nvPr/>
-        </p:nvSpPr>
-        <p:spPr>
-          <a:xfrm>
-            <a:off x="7677912" y="4169664"/>
-            <a:ext cx="685800" cy="384048"/>
+          <p:cNvPr id="56" name="Shape 54"/>
+          <p:cNvSpPr/>
+          <p:nvPr/>
+        </p:nvSpPr>
+        <p:spPr>
+          <a:xfrm>
+            <a:off x="6109855" y="4169664"/>
+            <a:ext cx="543652" cy="475488"/>
           </a:xfrm>
           <a:prstGeom prst="rect">
             <a:avLst>
-              <a:gd name="adj" fmla="val 9524"/>
+              <a:gd name="adj" fmla="val 7692"/>
             </a:avLst>
           </a:prstGeom>
           <a:solidFill>
@@ -34285,14 +35485,14 @@
       </p:sp>
       <p:sp>
         <p:nvSpPr>
-          <p:cNvPr id="52" name="Text 50"/>
-          <p:cNvSpPr/>
-          <p:nvPr/>
-        </p:nvSpPr>
-        <p:spPr>
-          <a:xfrm>
-            <a:off x="7677912" y="4169664"/>
-            <a:ext cx="685800" cy="384048"/>
+          <p:cNvPr id="57" name="Text 55"/>
+          <p:cNvSpPr/>
+          <p:nvPr/>
+        </p:nvSpPr>
+        <p:spPr>
+          <a:xfrm>
+            <a:off x="6109855" y="4169664"/>
+            <a:ext cx="543652" cy="475488"/>
           </a:xfrm>
           <a:prstGeom prst="rect">
             <a:avLst/>
@@ -34316,7 +35516,205 @@
                 <a:ea typeface="Trebuchet MS" pitchFamily="34" charset="-122"/>
                 <a:cs typeface="Trebuchet MS" pitchFamily="34" charset="-120"/>
               </a:rPr>
-              <a:t>ss</a:t>
+              <a:t>l</a:t>
+            </a:r>
+            <a:endParaRPr lang="en-US" sz="900" dirty="0"/>
+          </a:p>
+        </p:txBody>
+      </p:sp>
+      <p:sp>
+        <p:nvSpPr>
+          <p:cNvPr id="58" name="Shape 56"/>
+          <p:cNvSpPr/>
+          <p:nvPr/>
+        </p:nvSpPr>
+        <p:spPr>
+          <a:xfrm>
+            <a:off x="6703799" y="4169664"/>
+            <a:ext cx="543652" cy="475488"/>
+          </a:xfrm>
+          <a:prstGeom prst="rect">
+            <a:avLst>
+              <a:gd name="adj" fmla="val 7692"/>
+            </a:avLst>
+          </a:prstGeom>
+          <a:solidFill>
+            <a:srgbClr val="FFFFFF"/>
+          </a:solidFill>
+          <a:ln w="12700">
+            <a:solidFill>
+              <a:srgbClr val="DB2777"/>
+            </a:solidFill>
+            <a:prstDash val="solid"/>
+          </a:ln>
+        </p:spPr>
+      </p:sp>
+      <p:sp>
+        <p:nvSpPr>
+          <p:cNvPr id="59" name="Text 57"/>
+          <p:cNvSpPr/>
+          <p:nvPr/>
+        </p:nvSpPr>
+        <p:spPr>
+          <a:xfrm>
+            <a:off x="6703799" y="4169664"/>
+            <a:ext cx="543652" cy="475488"/>
+          </a:xfrm>
+          <a:prstGeom prst="rect">
+            <a:avLst/>
+          </a:prstGeom>
+          <a:noFill/>
+          <a:ln/>
+        </p:spPr>
+        <p:txBody>
+          <a:bodyPr wrap="square" lIns="0" tIns="0" rIns="0" bIns="0" rtlCol="0" anchor="ctr"/>
+          <a:lstStyle/>
+          <a:p>
+            <a:pPr algn="ctr" indent="0" marL="0">
+              <a:buNone/>
+            </a:pPr>
+            <a:r>
+              <a:rPr lang="en-US" sz="900" b="1" dirty="0">
+                <a:solidFill>
+                  <a:srgbClr val="9D174D"/>
+                </a:solidFill>
+                <a:latin typeface="Trebuchet MS" pitchFamily="34" charset="0"/>
+                <a:ea typeface="Trebuchet MS" pitchFamily="34" charset="-122"/>
+                <a:cs typeface="Trebuchet MS" pitchFamily="34" charset="-120"/>
+              </a:rPr>
+              <a:t>our</a:t>
+            </a:r>
+            <a:endParaRPr lang="en-US" sz="900" dirty="0"/>
+          </a:p>
+        </p:txBody>
+      </p:sp>
+      <p:sp>
+        <p:nvSpPr>
+          <p:cNvPr id="60" name="Shape 58"/>
+          <p:cNvSpPr/>
+          <p:nvPr/>
+        </p:nvSpPr>
+        <p:spPr>
+          <a:xfrm>
+            <a:off x="7297743" y="4169664"/>
+            <a:ext cx="543652" cy="475488"/>
+          </a:xfrm>
+          <a:prstGeom prst="rect">
+            <a:avLst>
+              <a:gd name="adj" fmla="val 7692"/>
+            </a:avLst>
+          </a:prstGeom>
+          <a:solidFill>
+            <a:srgbClr val="FFFFFF"/>
+          </a:solidFill>
+          <a:ln w="12700">
+            <a:solidFill>
+              <a:srgbClr val="DB2777"/>
+            </a:solidFill>
+            <a:prstDash val="solid"/>
+          </a:ln>
+        </p:spPr>
+      </p:sp>
+      <p:sp>
+        <p:nvSpPr>
+          <p:cNvPr id="61" name="Text 59"/>
+          <p:cNvSpPr/>
+          <p:nvPr/>
+        </p:nvSpPr>
+        <p:spPr>
+          <a:xfrm>
+            <a:off x="7297743" y="4169664"/>
+            <a:ext cx="543652" cy="475488"/>
+          </a:xfrm>
+          <a:prstGeom prst="rect">
+            <a:avLst/>
+          </a:prstGeom>
+          <a:noFill/>
+          <a:ln/>
+        </p:spPr>
+        <p:txBody>
+          <a:bodyPr wrap="square" lIns="0" tIns="0" rIns="0" bIns="0" rtlCol="0" anchor="ctr"/>
+          <a:lstStyle/>
+          <a:p>
+            <a:pPr algn="ctr" indent="0" marL="0">
+              <a:buNone/>
+            </a:pPr>
+            <a:r>
+              <a:rPr lang="en-US" sz="900" b="1" dirty="0">
+                <a:solidFill>
+                  <a:srgbClr val="9D174D"/>
+                </a:solidFill>
+                <a:latin typeface="Trebuchet MS" pitchFamily="34" charset="0"/>
+                <a:ea typeface="Trebuchet MS" pitchFamily="34" charset="-122"/>
+                <a:cs typeface="Trebuchet MS" pitchFamily="34" charset="-120"/>
+              </a:rPr>
+              <a:t>e</a:t>
+            </a:r>
+            <a:endParaRPr lang="en-US" sz="900" dirty="0"/>
+          </a:p>
+        </p:txBody>
+      </p:sp>
+      <p:sp>
+        <p:nvSpPr>
+          <p:cNvPr id="62" name="Shape 60"/>
+          <p:cNvSpPr/>
+          <p:nvPr/>
+        </p:nvSpPr>
+        <p:spPr>
+          <a:xfrm>
+            <a:off x="7891688" y="4169664"/>
+            <a:ext cx="543652" cy="475488"/>
+          </a:xfrm>
+          <a:prstGeom prst="rect">
+            <a:avLst>
+              <a:gd name="adj" fmla="val 7692"/>
+            </a:avLst>
+          </a:prstGeom>
+          <a:solidFill>
+            <a:srgbClr val="FFFFFF"/>
+          </a:solidFill>
+          <a:ln w="12700">
+            <a:solidFill>
+              <a:srgbClr val="DB2777"/>
+            </a:solidFill>
+            <a:prstDash val="solid"/>
+          </a:ln>
+        </p:spPr>
+      </p:sp>
+      <p:sp>
+        <p:nvSpPr>
+          <p:cNvPr id="63" name="Text 61"/>
+          <p:cNvSpPr/>
+          <p:nvPr/>
+        </p:nvSpPr>
+        <p:spPr>
+          <a:xfrm>
+            <a:off x="7891688" y="4169664"/>
+            <a:ext cx="543652" cy="475488"/>
+          </a:xfrm>
+          <a:prstGeom prst="rect">
+            <a:avLst/>
+          </a:prstGeom>
+          <a:noFill/>
+          <a:ln/>
+        </p:spPr>
+        <p:txBody>
+          <a:bodyPr wrap="square" lIns="0" tIns="0" rIns="0" bIns="0" rtlCol="0" anchor="ctr"/>
+          <a:lstStyle/>
+          <a:p>
+            <a:pPr algn="ctr" indent="0" marL="0">
+              <a:buNone/>
+            </a:pPr>
+            <a:r>
+              <a:rPr lang="en-US" sz="900" b="1" dirty="0">
+                <a:solidFill>
+                  <a:srgbClr val="9D174D"/>
+                </a:solidFill>
+                <a:latin typeface="Trebuchet MS" pitchFamily="34" charset="0"/>
+                <a:ea typeface="Trebuchet MS" pitchFamily="34" charset="-122"/>
+                <a:cs typeface="Trebuchet MS" pitchFamily="34" charset="-120"/>
+              </a:rPr>
+              <a:t>d</a:t>
             </a:r>
             <a:endParaRPr lang="en-US" sz="900" dirty="0"/>
           </a:p>
@@ -34608,7 +36006,7 @@
                 <a:ea typeface="Calibri" pitchFamily="34" charset="-122"/>
                 <a:cs typeface="Calibri" pitchFamily="34" charset="-120"/>
               </a:rPr>
-              <a:t>Word Labs  •  wordlabs.app  •  Root: 'colour' = hue, tint, or shade</a:t>
+              <a:t>Word Labs  •  wordlabs.app  •  Root: 'colour' = the property of light; to add colour</a:t>
             </a:r>
             <a:endParaRPr lang="en-US" sz="800" dirty="0"/>
           </a:p>
@@ -35777,7 +37175,7 @@
                 <a:ea typeface="Calibri" pitchFamily="34" charset="-122"/>
                 <a:cs typeface="Calibri" pitchFamily="34" charset="-120"/>
               </a:rPr>
-              <a:t>Word Labs  •  wordlabs.app  •  Root: 'colour' = hue, tint, or shade</a:t>
+              <a:t>Word Labs  •  wordlabs.app  •  Root: 'colour' = the property of light; to add colour</a:t>
             </a:r>
             <a:endParaRPr lang="en-US" sz="800" dirty="0"/>
           </a:p>
@@ -36206,7 +37604,7 @@
                 <a:ea typeface="Trebuchet MS" pitchFamily="34" charset="-122"/>
                 <a:cs typeface="Trebuchet MS" pitchFamily="34" charset="-120"/>
               </a:rPr>
-              <a:t>-ful</a:t>
+              <a:t>-ed</a:t>
             </a:r>
             <a:endParaRPr lang="en-US" sz="1300" dirty="0"/>
           </a:p>
@@ -36359,7 +37757,7 @@
                 <a:ea typeface="Trebuchet MS" pitchFamily="34" charset="-122"/>
                 <a:cs typeface="Trebuchet MS" pitchFamily="34" charset="-120"/>
               </a:rPr>
-              <a:t>-less</a:t>
+              <a:t>-ful</a:t>
             </a:r>
             <a:endParaRPr lang="en-US" sz="1300" dirty="0"/>
           </a:p>
@@ -36380,7 +37778,7 @@
             <a:avLst/>
           </a:prstGeom>
           <a:solidFill>
-            <a:srgbClr val="DDD6FE"/>
+            <a:srgbClr val="F8FAFC"/>
           </a:solidFill>
           <a:ln w="12700">
             <a:solidFill>
@@ -36392,14 +37790,64 @@
       </p:sp>
       <p:sp>
         <p:nvSpPr>
-          <p:cNvPr id="29" name="Text 27"/>
-          <p:cNvSpPr/>
-          <p:nvPr/>
-        </p:nvSpPr>
-        <p:spPr>
-          <a:xfrm>
-            <a:off x="365760" y="2404872"/>
-            <a:ext cx="2468880" cy="402336"/>
+          <p:cNvPr id="29" name="Shape 27"/>
+          <p:cNvSpPr/>
+          <p:nvPr/>
+        </p:nvSpPr>
+        <p:spPr>
+          <a:xfrm>
+            <a:off x="2971800" y="2404872"/>
+            <a:ext cx="2834640" cy="402336"/>
+          </a:xfrm>
+          <a:prstGeom prst="rect">
+            <a:avLst/>
+          </a:prstGeom>
+          <a:solidFill>
+            <a:srgbClr val="F8FAFC"/>
+          </a:solidFill>
+          <a:ln w="12700">
+            <a:solidFill>
+              <a:srgbClr val="E2E8F0"/>
+            </a:solidFill>
+            <a:prstDash val="solid"/>
+          </a:ln>
+        </p:spPr>
+      </p:sp>
+      <p:sp>
+        <p:nvSpPr>
+          <p:cNvPr id="30" name="Shape 28"/>
+          <p:cNvSpPr/>
+          <p:nvPr/>
+        </p:nvSpPr>
+        <p:spPr>
+          <a:xfrm>
+            <a:off x="5943600" y="2404872"/>
+            <a:ext cx="2834640" cy="402336"/>
+          </a:xfrm>
+          <a:prstGeom prst="rect">
+            <a:avLst/>
+          </a:prstGeom>
+          <a:solidFill>
+            <a:srgbClr val="FCE7F3"/>
+          </a:solidFill>
+          <a:ln w="12700">
+            <a:solidFill>
+              <a:srgbClr val="E2E8F0"/>
+            </a:solidFill>
+            <a:prstDash val="solid"/>
+          </a:ln>
+        </p:spPr>
+      </p:sp>
+      <p:sp>
+        <p:nvSpPr>
+          <p:cNvPr id="31" name="Text 29"/>
+          <p:cNvSpPr/>
+          <p:nvPr/>
+        </p:nvSpPr>
+        <p:spPr>
+          <a:xfrm>
+            <a:off x="5943600" y="2404872"/>
+            <a:ext cx="2834640" cy="402336"/>
           </a:xfrm>
           <a:prstGeom prst="rect">
             <a:avLst/>
@@ -36417,13 +37865,13 @@
             <a:r>
               <a:rPr lang="en-US" sz="1300" b="1" dirty="0">
                 <a:solidFill>
-                  <a:srgbClr val="4C1D95"/>
+                  <a:srgbClr val="9D174D"/>
                 </a:solidFill>
                 <a:latin typeface="Trebuchet MS" pitchFamily="34" charset="0"/>
                 <a:ea typeface="Trebuchet MS" pitchFamily="34" charset="-122"/>
                 <a:cs typeface="Trebuchet MS" pitchFamily="34" charset="-120"/>
               </a:rPr>
-              <a:t>bi-</a:t>
+              <a:t>-ing</a:t>
             </a:r>
             <a:endParaRPr lang="en-US" sz="1300" dirty="0"/>
           </a:p>
@@ -36431,20 +37879,45 @@
       </p:sp>
       <p:sp>
         <p:nvSpPr>
-          <p:cNvPr id="30" name="Shape 28"/>
-          <p:cNvSpPr/>
-          <p:nvPr/>
-        </p:nvSpPr>
-        <p:spPr>
-          <a:xfrm>
-            <a:off x="2971800" y="2404872"/>
+          <p:cNvPr id="32" name="Shape 30"/>
+          <p:cNvSpPr/>
+          <p:nvPr/>
+        </p:nvSpPr>
+        <p:spPr>
+          <a:xfrm>
+            <a:off x="365760" y="2825496"/>
+            <a:ext cx="2468880" cy="402336"/>
+          </a:xfrm>
+          <a:prstGeom prst="rect">
+            <a:avLst/>
+          </a:prstGeom>
+          <a:solidFill>
+            <a:srgbClr val="F1F5F9"/>
+          </a:solidFill>
+          <a:ln w="12700">
+            <a:solidFill>
+              <a:srgbClr val="E2E8F0"/>
+            </a:solidFill>
+            <a:prstDash val="solid"/>
+          </a:ln>
+        </p:spPr>
+      </p:sp>
+      <p:sp>
+        <p:nvSpPr>
+          <p:cNvPr id="33" name="Shape 31"/>
+          <p:cNvSpPr/>
+          <p:nvPr/>
+        </p:nvSpPr>
+        <p:spPr>
+          <a:xfrm>
+            <a:off x="2971800" y="2825496"/>
             <a:ext cx="2834640" cy="402336"/>
           </a:xfrm>
           <a:prstGeom prst="rect">
             <a:avLst/>
           </a:prstGeom>
           <a:solidFill>
-            <a:srgbClr val="F8FAFC"/>
+            <a:srgbClr val="F1F5F9"/>
           </a:solidFill>
           <a:ln w="12700">
             <a:solidFill>
@@ -36456,13 +37929,13 @@
       </p:sp>
       <p:sp>
         <p:nvSpPr>
-          <p:cNvPr id="31" name="Shape 29"/>
-          <p:cNvSpPr/>
-          <p:nvPr/>
-        </p:nvSpPr>
-        <p:spPr>
-          <a:xfrm>
-            <a:off x="5943600" y="2404872"/>
+          <p:cNvPr id="34" name="Shape 32"/>
+          <p:cNvSpPr/>
+          <p:nvPr/>
+        </p:nvSpPr>
+        <p:spPr>
+          <a:xfrm>
+            <a:off x="5943600" y="2825496"/>
             <a:ext cx="2834640" cy="402336"/>
           </a:xfrm>
           <a:prstGeom prst="rect">
@@ -36481,13 +37954,13 @@
       </p:sp>
       <p:sp>
         <p:nvSpPr>
-          <p:cNvPr id="32" name="Text 30"/>
-          <p:cNvSpPr/>
-          <p:nvPr/>
-        </p:nvSpPr>
-        <p:spPr>
-          <a:xfrm>
-            <a:off x="5943600" y="2404872"/>
+          <p:cNvPr id="35" name="Text 33"/>
+          <p:cNvSpPr/>
+          <p:nvPr/>
+        </p:nvSpPr>
+        <p:spPr>
+          <a:xfrm>
+            <a:off x="5943600" y="2825496"/>
             <a:ext cx="2834640" cy="402336"/>
           </a:xfrm>
           <a:prstGeom prst="rect">
@@ -36512,7 +37985,7 @@
                 <a:ea typeface="Trebuchet MS" pitchFamily="34" charset="-122"/>
                 <a:cs typeface="Trebuchet MS" pitchFamily="34" charset="-120"/>
               </a:rPr>
-              <a:t>-ed</a:t>
+              <a:t>-less</a:t>
             </a:r>
             <a:endParaRPr lang="en-US" sz="1300" dirty="0"/>
           </a:p>
@@ -36520,20 +37993,20 @@
       </p:sp>
       <p:sp>
         <p:nvSpPr>
-          <p:cNvPr id="33" name="Shape 31"/>
-          <p:cNvSpPr/>
-          <p:nvPr/>
-        </p:nvSpPr>
-        <p:spPr>
-          <a:xfrm>
-            <a:off x="365760" y="2825496"/>
+          <p:cNvPr id="36" name="Shape 34"/>
+          <p:cNvSpPr/>
+          <p:nvPr/>
+        </p:nvSpPr>
+        <p:spPr>
+          <a:xfrm>
+            <a:off x="365760" y="3246120"/>
             <a:ext cx="2468880" cy="402336"/>
           </a:xfrm>
           <a:prstGeom prst="rect">
             <a:avLst/>
           </a:prstGeom>
           <a:solidFill>
-            <a:srgbClr val="DDD6FE"/>
+            <a:srgbClr val="F8FAFC"/>
           </a:solidFill>
           <a:ln w="12700">
             <a:solidFill>
@@ -36545,14 +38018,64 @@
       </p:sp>
       <p:sp>
         <p:nvSpPr>
-          <p:cNvPr id="34" name="Text 32"/>
-          <p:cNvSpPr/>
-          <p:nvPr/>
-        </p:nvSpPr>
-        <p:spPr>
-          <a:xfrm>
-            <a:off x="365760" y="2825496"/>
-            <a:ext cx="2468880" cy="402336"/>
+          <p:cNvPr id="37" name="Shape 35"/>
+          <p:cNvSpPr/>
+          <p:nvPr/>
+        </p:nvSpPr>
+        <p:spPr>
+          <a:xfrm>
+            <a:off x="2971800" y="3246120"/>
+            <a:ext cx="2834640" cy="402336"/>
+          </a:xfrm>
+          <a:prstGeom prst="rect">
+            <a:avLst/>
+          </a:prstGeom>
+          <a:solidFill>
+            <a:srgbClr val="F8FAFC"/>
+          </a:solidFill>
+          <a:ln w="12700">
+            <a:solidFill>
+              <a:srgbClr val="E2E8F0"/>
+            </a:solidFill>
+            <a:prstDash val="solid"/>
+          </a:ln>
+        </p:spPr>
+      </p:sp>
+      <p:sp>
+        <p:nvSpPr>
+          <p:cNvPr id="38" name="Shape 36"/>
+          <p:cNvSpPr/>
+          <p:nvPr/>
+        </p:nvSpPr>
+        <p:spPr>
+          <a:xfrm>
+            <a:off x="5943600" y="3246120"/>
+            <a:ext cx="2834640" cy="402336"/>
+          </a:xfrm>
+          <a:prstGeom prst="rect">
+            <a:avLst/>
+          </a:prstGeom>
+          <a:solidFill>
+            <a:srgbClr val="FCE7F3"/>
+          </a:solidFill>
+          <a:ln w="12700">
+            <a:solidFill>
+              <a:srgbClr val="E2E8F0"/>
+            </a:solidFill>
+            <a:prstDash val="solid"/>
+          </a:ln>
+        </p:spPr>
+      </p:sp>
+      <p:sp>
+        <p:nvSpPr>
+          <p:cNvPr id="39" name="Text 37"/>
+          <p:cNvSpPr/>
+          <p:nvPr/>
+        </p:nvSpPr>
+        <p:spPr>
+          <a:xfrm>
+            <a:off x="5943600" y="3246120"/>
+            <a:ext cx="2834640" cy="402336"/>
           </a:xfrm>
           <a:prstGeom prst="rect">
             <a:avLst/>
@@ -36570,13 +38093,13 @@
             <a:r>
               <a:rPr lang="en-US" sz="1300" b="1" dirty="0">
                 <a:solidFill>
-                  <a:srgbClr val="4C1D95"/>
+                  <a:srgbClr val="9D174D"/>
                 </a:solidFill>
                 <a:latin typeface="Trebuchet MS" pitchFamily="34" charset="0"/>
                 <a:ea typeface="Trebuchet MS" pitchFamily="34" charset="-122"/>
                 <a:cs typeface="Trebuchet MS" pitchFamily="34" charset="-120"/>
               </a:rPr>
-              <a:t>tri-</a:t>
+              <a:t>-s</a:t>
             </a:r>
             <a:endParaRPr lang="en-US" sz="1300" dirty="0"/>
           </a:p>
@@ -36584,280 +38107,236 @@
       </p:sp>
       <p:sp>
         <p:nvSpPr>
-          <p:cNvPr id="35" name="Shape 33"/>
-          <p:cNvSpPr/>
-          <p:nvPr/>
-        </p:nvSpPr>
-        <p:spPr>
-          <a:xfrm>
-            <a:off x="2971800" y="2825496"/>
-            <a:ext cx="2834640" cy="402336"/>
-          </a:xfrm>
-          <a:prstGeom prst="rect">
-            <a:avLst/>
-          </a:prstGeom>
-          <a:solidFill>
-            <a:srgbClr val="F1F5F9"/>
-          </a:solidFill>
-          <a:ln w="12700">
-            <a:solidFill>
-              <a:srgbClr val="E2E8F0"/>
-            </a:solidFill>
-            <a:prstDash val="solid"/>
-          </a:ln>
-        </p:spPr>
-      </p:sp>
-      <p:sp>
-        <p:nvSpPr>
-          <p:cNvPr id="36" name="Shape 34"/>
-          <p:cNvSpPr/>
-          <p:nvPr/>
-        </p:nvSpPr>
-        <p:spPr>
-          <a:xfrm>
-            <a:off x="5943600" y="2825496"/>
-            <a:ext cx="2834640" cy="402336"/>
-          </a:xfrm>
-          <a:prstGeom prst="rect">
-            <a:avLst/>
-          </a:prstGeom>
-          <a:solidFill>
-            <a:srgbClr val="FCE7F3"/>
-          </a:solidFill>
-          <a:ln w="12700">
-            <a:solidFill>
-              <a:srgbClr val="E2E8F0"/>
-            </a:solidFill>
-            <a:prstDash val="solid"/>
-          </a:ln>
-        </p:spPr>
-      </p:sp>
-      <p:sp>
-        <p:nvSpPr>
-          <p:cNvPr id="37" name="Text 35"/>
-          <p:cNvSpPr/>
-          <p:nvPr/>
-        </p:nvSpPr>
-        <p:spPr>
-          <a:xfrm>
-            <a:off x="5943600" y="2825496"/>
-            <a:ext cx="2834640" cy="402336"/>
-          </a:xfrm>
-          <a:prstGeom prst="rect">
-            <a:avLst/>
-          </a:prstGeom>
-          <a:noFill/>
-          <a:ln/>
-        </p:spPr>
-        <p:txBody>
-          <a:bodyPr wrap="square" lIns="0" tIns="0" rIns="0" bIns="0" rtlCol="0" anchor="ctr"/>
-          <a:lstStyle/>
-          <a:p>
-            <a:pPr algn="ctr" indent="0" marL="0">
-              <a:buNone/>
-            </a:pPr>
-            <a:r>
-              <a:rPr lang="en-US" sz="1300" b="1" dirty="0">
-                <a:solidFill>
-                  <a:srgbClr val="9D174D"/>
+          <p:cNvPr id="40" name="Text 38"/>
+          <p:cNvSpPr/>
+          <p:nvPr/>
+        </p:nvSpPr>
+        <p:spPr>
+          <a:xfrm>
+            <a:off x="365760" y="3611880"/>
+            <a:ext cx="1828800" cy="347472"/>
+          </a:xfrm>
+          <a:prstGeom prst="rect">
+            <a:avLst/>
+          </a:prstGeom>
+          <a:noFill/>
+          <a:ln/>
+        </p:spPr>
+        <p:txBody>
+          <a:bodyPr wrap="square" lIns="0" tIns="0" rIns="0" bIns="0" rtlCol="0" anchor="ctr"/>
+          <a:lstStyle/>
+          <a:p>
+            <a:pPr algn="l" indent="0" marL="0">
+              <a:buNone/>
+            </a:pPr>
+            <a:r>
+              <a:rPr lang="en-US" sz="1200" b="1" dirty="0">
+                <a:solidFill>
+                  <a:srgbClr val="0F172A"/>
                 </a:solidFill>
                 <a:latin typeface="Trebuchet MS" pitchFamily="34" charset="0"/>
                 <a:ea typeface="Trebuchet MS" pitchFamily="34" charset="-122"/>
                 <a:cs typeface="Trebuchet MS" pitchFamily="34" charset="-120"/>
               </a:rPr>
-              <a:t>-ing</a:t>
-            </a:r>
-            <a:endParaRPr lang="en-US" sz="1300" dirty="0"/>
-          </a:p>
-        </p:txBody>
-      </p:sp>
-      <p:sp>
-        <p:nvSpPr>
-          <p:cNvPr id="38" name="Shape 36"/>
-          <p:cNvSpPr/>
-          <p:nvPr/>
-        </p:nvSpPr>
-        <p:spPr>
-          <a:xfrm>
-            <a:off x="365760" y="3246120"/>
-            <a:ext cx="2468880" cy="402336"/>
-          </a:xfrm>
-          <a:prstGeom prst="rect">
-            <a:avLst/>
-          </a:prstGeom>
-          <a:solidFill>
-            <a:srgbClr val="DDD6FE"/>
-          </a:solidFill>
-          <a:ln w="12700">
-            <a:solidFill>
-              <a:srgbClr val="E2E8F0"/>
-            </a:solidFill>
-            <a:prstDash val="solid"/>
-          </a:ln>
-        </p:spPr>
-      </p:sp>
-      <p:sp>
-        <p:nvSpPr>
-          <p:cNvPr id="39" name="Text 37"/>
-          <p:cNvSpPr/>
-          <p:nvPr/>
-        </p:nvSpPr>
-        <p:spPr>
-          <a:xfrm>
-            <a:off x="365760" y="3246120"/>
-            <a:ext cx="2468880" cy="402336"/>
-          </a:xfrm>
-          <a:prstGeom prst="rect">
-            <a:avLst/>
-          </a:prstGeom>
-          <a:noFill/>
-          <a:ln/>
-        </p:spPr>
-        <p:txBody>
-          <a:bodyPr wrap="square" lIns="0" tIns="0" rIns="0" bIns="0" rtlCol="0" anchor="ctr"/>
-          <a:lstStyle/>
-          <a:p>
-            <a:pPr algn="ctr" indent="0" marL="0">
-              <a:buNone/>
-            </a:pPr>
-            <a:r>
-              <a:rPr lang="en-US" sz="1300" b="1" dirty="0">
-                <a:solidFill>
-                  <a:srgbClr val="4C1D95"/>
+              <a:t>Sample words:</a:t>
+            </a:r>
+            <a:endParaRPr lang="en-US" sz="1200" dirty="0"/>
+          </a:p>
+        </p:txBody>
+      </p:sp>
+      <p:sp>
+        <p:nvSpPr>
+          <p:cNvPr id="41" name="Shape 39"/>
+          <p:cNvSpPr/>
+          <p:nvPr/>
+        </p:nvSpPr>
+        <p:spPr>
+          <a:xfrm>
+            <a:off x="365760" y="4023360"/>
+            <a:ext cx="2011680" cy="402336"/>
+          </a:xfrm>
+          <a:prstGeom prst="rect">
+            <a:avLst>
+              <a:gd name="adj" fmla="val 13636"/>
+            </a:avLst>
+          </a:prstGeom>
+          <a:solidFill>
+            <a:srgbClr val="EEF2FF"/>
+          </a:solidFill>
+          <a:ln w="12700">
+            <a:solidFill>
+              <a:srgbClr val="6366F1"/>
+            </a:solidFill>
+            <a:prstDash val="solid"/>
+          </a:ln>
+        </p:spPr>
+      </p:sp>
+      <p:sp>
+        <p:nvSpPr>
+          <p:cNvPr id="42" name="Text 40"/>
+          <p:cNvSpPr/>
+          <p:nvPr/>
+        </p:nvSpPr>
+        <p:spPr>
+          <a:xfrm>
+            <a:off x="365760" y="4023360"/>
+            <a:ext cx="2011680" cy="402336"/>
+          </a:xfrm>
+          <a:prstGeom prst="rect">
+            <a:avLst/>
+          </a:prstGeom>
+          <a:noFill/>
+          <a:ln/>
+        </p:spPr>
+        <p:txBody>
+          <a:bodyPr wrap="square" lIns="0" tIns="0" rIns="0" bIns="0" rtlCol="0" anchor="ctr"/>
+          <a:lstStyle/>
+          <a:p>
+            <a:pPr algn="ctr" indent="0" marL="0">
+              <a:buNone/>
+            </a:pPr>
+            <a:r>
+              <a:rPr lang="en-US" sz="1200" b="1" dirty="0">
+                <a:solidFill>
+                  <a:srgbClr val="4338CA"/>
                 </a:solidFill>
                 <a:latin typeface="Trebuchet MS" pitchFamily="34" charset="0"/>
                 <a:ea typeface="Trebuchet MS" pitchFamily="34" charset="-122"/>
                 <a:cs typeface="Trebuchet MS" pitchFamily="34" charset="-120"/>
               </a:rPr>
-              <a:t>full-</a:t>
-            </a:r>
-            <a:endParaRPr lang="en-US" sz="1300" dirty="0"/>
-          </a:p>
-        </p:txBody>
-      </p:sp>
-      <p:sp>
-        <p:nvSpPr>
-          <p:cNvPr id="40" name="Shape 38"/>
-          <p:cNvSpPr/>
-          <p:nvPr/>
-        </p:nvSpPr>
-        <p:spPr>
-          <a:xfrm>
-            <a:off x="2971800" y="3246120"/>
-            <a:ext cx="2834640" cy="402336"/>
-          </a:xfrm>
-          <a:prstGeom prst="rect">
-            <a:avLst/>
-          </a:prstGeom>
-          <a:solidFill>
-            <a:srgbClr val="F8FAFC"/>
-          </a:solidFill>
-          <a:ln w="12700">
-            <a:solidFill>
-              <a:srgbClr val="E2E8F0"/>
-            </a:solidFill>
-            <a:prstDash val="solid"/>
-          </a:ln>
-        </p:spPr>
-      </p:sp>
-      <p:sp>
-        <p:nvSpPr>
-          <p:cNvPr id="41" name="Shape 39"/>
-          <p:cNvSpPr/>
-          <p:nvPr/>
-        </p:nvSpPr>
-        <p:spPr>
-          <a:xfrm>
-            <a:off x="5943600" y="3246120"/>
-            <a:ext cx="2834640" cy="402336"/>
-          </a:xfrm>
-          <a:prstGeom prst="rect">
-            <a:avLst/>
-          </a:prstGeom>
-          <a:solidFill>
-            <a:srgbClr val="FCE7F3"/>
-          </a:solidFill>
-          <a:ln w="12700">
-            <a:solidFill>
-              <a:srgbClr val="E2E8F0"/>
-            </a:solidFill>
-            <a:prstDash val="solid"/>
-          </a:ln>
-        </p:spPr>
-      </p:sp>
-      <p:sp>
-        <p:nvSpPr>
-          <p:cNvPr id="42" name="Text 40"/>
-          <p:cNvSpPr/>
-          <p:nvPr/>
-        </p:nvSpPr>
-        <p:spPr>
-          <a:xfrm>
-            <a:off x="5943600" y="3246120"/>
-            <a:ext cx="2834640" cy="402336"/>
-          </a:xfrm>
-          <a:prstGeom prst="rect">
-            <a:avLst/>
-          </a:prstGeom>
-          <a:noFill/>
-          <a:ln/>
-        </p:spPr>
-        <p:txBody>
-          <a:bodyPr wrap="square" lIns="0" tIns="0" rIns="0" bIns="0" rtlCol="0" anchor="ctr"/>
-          <a:lstStyle/>
-          <a:p>
-            <a:pPr algn="ctr" indent="0" marL="0">
-              <a:buNone/>
-            </a:pPr>
-            <a:r>
-              <a:rPr lang="en-US" sz="1300" b="1" dirty="0">
-                <a:solidFill>
-                  <a:srgbClr val="9D174D"/>
+              <a:t>colour</a:t>
+            </a:r>
+            <a:endParaRPr lang="en-US" sz="1200" dirty="0"/>
+          </a:p>
+        </p:txBody>
+      </p:sp>
+      <p:sp>
+        <p:nvSpPr>
+          <p:cNvPr id="43" name="Shape 41"/>
+          <p:cNvSpPr/>
+          <p:nvPr/>
+        </p:nvSpPr>
+        <p:spPr>
+          <a:xfrm>
+            <a:off x="2542032" y="4023360"/>
+            <a:ext cx="2011680" cy="402336"/>
+          </a:xfrm>
+          <a:prstGeom prst="rect">
+            <a:avLst>
+              <a:gd name="adj" fmla="val 13636"/>
+            </a:avLst>
+          </a:prstGeom>
+          <a:solidFill>
+            <a:srgbClr val="EEF2FF"/>
+          </a:solidFill>
+          <a:ln w="12700">
+            <a:solidFill>
+              <a:srgbClr val="6366F1"/>
+            </a:solidFill>
+            <a:prstDash val="solid"/>
+          </a:ln>
+        </p:spPr>
+      </p:sp>
+      <p:sp>
+        <p:nvSpPr>
+          <p:cNvPr id="44" name="Text 42"/>
+          <p:cNvSpPr/>
+          <p:nvPr/>
+        </p:nvSpPr>
+        <p:spPr>
+          <a:xfrm>
+            <a:off x="2542032" y="4023360"/>
+            <a:ext cx="2011680" cy="402336"/>
+          </a:xfrm>
+          <a:prstGeom prst="rect">
+            <a:avLst/>
+          </a:prstGeom>
+          <a:noFill/>
+          <a:ln/>
+        </p:spPr>
+        <p:txBody>
+          <a:bodyPr wrap="square" lIns="0" tIns="0" rIns="0" bIns="0" rtlCol="0" anchor="ctr"/>
+          <a:lstStyle/>
+          <a:p>
+            <a:pPr algn="ctr" indent="0" marL="0">
+              <a:buNone/>
+            </a:pPr>
+            <a:r>
+              <a:rPr lang="en-US" sz="1200" b="1" dirty="0">
+                <a:solidFill>
+                  <a:srgbClr val="4338CA"/>
                 </a:solidFill>
                 <a:latin typeface="Trebuchet MS" pitchFamily="34" charset="0"/>
                 <a:ea typeface="Trebuchet MS" pitchFamily="34" charset="-122"/>
                 <a:cs typeface="Trebuchet MS" pitchFamily="34" charset="-120"/>
               </a:rPr>
-              <a:t>-ation</a:t>
-            </a:r>
-            <a:endParaRPr lang="en-US" sz="1300" dirty="0"/>
-          </a:p>
-        </p:txBody>
-      </p:sp>
-      <p:sp>
-        <p:nvSpPr>
-          <p:cNvPr id="43" name="Text 41"/>
-          <p:cNvSpPr/>
-          <p:nvPr/>
-        </p:nvSpPr>
-        <p:spPr>
-          <a:xfrm>
-            <a:off x="365760" y="3611880"/>
-            <a:ext cx="1828800" cy="347472"/>
-          </a:xfrm>
-          <a:prstGeom prst="rect">
-            <a:avLst/>
-          </a:prstGeom>
-          <a:noFill/>
-          <a:ln/>
-        </p:spPr>
-        <p:txBody>
-          <a:bodyPr wrap="square" lIns="0" tIns="0" rIns="0" bIns="0" rtlCol="0" anchor="ctr"/>
-          <a:lstStyle/>
-          <a:p>
-            <a:pPr algn="l" indent="0" marL="0">
+              <a:t>colours</a:t>
+            </a:r>
+            <a:endParaRPr lang="en-US" sz="1200" dirty="0"/>
+          </a:p>
+        </p:txBody>
+      </p:sp>
+      <p:sp>
+        <p:nvSpPr>
+          <p:cNvPr id="45" name="Shape 43"/>
+          <p:cNvSpPr/>
+          <p:nvPr/>
+        </p:nvSpPr>
+        <p:spPr>
+          <a:xfrm>
+            <a:off x="4718304" y="4023360"/>
+            <a:ext cx="2011680" cy="402336"/>
+          </a:xfrm>
+          <a:prstGeom prst="rect">
+            <a:avLst>
+              <a:gd name="adj" fmla="val 13636"/>
+            </a:avLst>
+          </a:prstGeom>
+          <a:solidFill>
+            <a:srgbClr val="EEF2FF"/>
+          </a:solidFill>
+          <a:ln w="12700">
+            <a:solidFill>
+              <a:srgbClr val="6366F1"/>
+            </a:solidFill>
+            <a:prstDash val="solid"/>
+          </a:ln>
+        </p:spPr>
+      </p:sp>
+      <p:sp>
+        <p:nvSpPr>
+          <p:cNvPr id="46" name="Text 44"/>
+          <p:cNvSpPr/>
+          <p:nvPr/>
+        </p:nvSpPr>
+        <p:spPr>
+          <a:xfrm>
+            <a:off x="4718304" y="4023360"/>
+            <a:ext cx="2011680" cy="402336"/>
+          </a:xfrm>
+          <a:prstGeom prst="rect">
+            <a:avLst/>
+          </a:prstGeom>
+          <a:noFill/>
+          <a:ln/>
+        </p:spPr>
+        <p:txBody>
+          <a:bodyPr wrap="square" lIns="0" tIns="0" rIns="0" bIns="0" rtlCol="0" anchor="ctr"/>
+          <a:lstStyle/>
+          <a:p>
+            <a:pPr algn="ctr" indent="0" marL="0">
               <a:buNone/>
             </a:pPr>
             <a:r>
               <a:rPr lang="en-US" sz="1200" b="1" dirty="0">
                 <a:solidFill>
-                  <a:srgbClr val="0F172A"/>
+                  <a:srgbClr val="4338CA"/>
                 </a:solidFill>
                 <a:latin typeface="Trebuchet MS" pitchFamily="34" charset="0"/>
                 <a:ea typeface="Trebuchet MS" pitchFamily="34" charset="-122"/>
                 <a:cs typeface="Trebuchet MS" pitchFamily="34" charset="-120"/>
               </a:rPr>
-              <a:t>Sample words:</a:t>
+              <a:t>coloured</a:t>
             </a:r>
             <a:endParaRPr lang="en-US" sz="1200" dirty="0"/>
           </a:p>
@@ -36865,13 +38344,13 @@
       </p:sp>
       <p:sp>
         <p:nvSpPr>
-          <p:cNvPr id="44" name="Shape 42"/>
-          <p:cNvSpPr/>
-          <p:nvPr/>
-        </p:nvSpPr>
-        <p:spPr>
-          <a:xfrm>
-            <a:off x="365760" y="4023360"/>
+          <p:cNvPr id="47" name="Shape 45"/>
+          <p:cNvSpPr/>
+          <p:nvPr/>
+        </p:nvSpPr>
+        <p:spPr>
+          <a:xfrm>
+            <a:off x="6894576" y="4023360"/>
             <a:ext cx="2011680" cy="402336"/>
           </a:xfrm>
           <a:prstGeom prst="rect">
@@ -36892,13 +38371,13 @@
       </p:sp>
       <p:sp>
         <p:nvSpPr>
-          <p:cNvPr id="45" name="Text 43"/>
-          <p:cNvSpPr/>
-          <p:nvPr/>
-        </p:nvSpPr>
-        <p:spPr>
-          <a:xfrm>
-            <a:off x="365760" y="4023360"/>
+          <p:cNvPr id="48" name="Text 46"/>
+          <p:cNvSpPr/>
+          <p:nvPr/>
+        </p:nvSpPr>
+        <p:spPr>
+          <a:xfrm>
+            <a:off x="6894576" y="4023360"/>
             <a:ext cx="2011680" cy="402336"/>
           </a:xfrm>
           <a:prstGeom prst="rect">
@@ -36931,13 +38410,13 @@
       </p:sp>
       <p:sp>
         <p:nvSpPr>
-          <p:cNvPr id="46" name="Shape 44"/>
-          <p:cNvSpPr/>
-          <p:nvPr/>
-        </p:nvSpPr>
-        <p:spPr>
-          <a:xfrm>
-            <a:off x="2542032" y="4023360"/>
+          <p:cNvPr id="49" name="Shape 47"/>
+          <p:cNvSpPr/>
+          <p:nvPr/>
+        </p:nvSpPr>
+        <p:spPr>
+          <a:xfrm>
+            <a:off x="365760" y="4498848"/>
             <a:ext cx="2011680" cy="402336"/>
           </a:xfrm>
           <a:prstGeom prst="rect">
@@ -36958,13 +38437,13 @@
       </p:sp>
       <p:sp>
         <p:nvSpPr>
-          <p:cNvPr id="47" name="Text 45"/>
-          <p:cNvSpPr/>
-          <p:nvPr/>
-        </p:nvSpPr>
-        <p:spPr>
-          <a:xfrm>
-            <a:off x="2542032" y="4023360"/>
+          <p:cNvPr id="50" name="Text 48"/>
+          <p:cNvSpPr/>
+          <p:nvPr/>
+        </p:nvSpPr>
+        <p:spPr>
+          <a:xfrm>
+            <a:off x="365760" y="4498848"/>
             <a:ext cx="2011680" cy="402336"/>
           </a:xfrm>
           <a:prstGeom prst="rect">
@@ -36989,7 +38468,7 @@
                 <a:ea typeface="Trebuchet MS" pitchFamily="34" charset="-122"/>
                 <a:cs typeface="Trebuchet MS" pitchFamily="34" charset="-120"/>
               </a:rPr>
-              <a:t>colourless</a:t>
+              <a:t>colouring</a:t>
             </a:r>
             <a:endParaRPr lang="en-US" sz="1200" dirty="0"/>
           </a:p>
@@ -36997,13 +38476,13 @@
       </p:sp>
       <p:sp>
         <p:nvSpPr>
-          <p:cNvPr id="48" name="Shape 46"/>
-          <p:cNvSpPr/>
-          <p:nvPr/>
-        </p:nvSpPr>
-        <p:spPr>
-          <a:xfrm>
-            <a:off x="4718304" y="4023360"/>
+          <p:cNvPr id="51" name="Shape 49"/>
+          <p:cNvSpPr/>
+          <p:nvPr/>
+        </p:nvSpPr>
+        <p:spPr>
+          <a:xfrm>
+            <a:off x="2542032" y="4498848"/>
             <a:ext cx="2011680" cy="402336"/>
           </a:xfrm>
           <a:prstGeom prst="rect">
@@ -37024,13 +38503,13 @@
       </p:sp>
       <p:sp>
         <p:nvSpPr>
-          <p:cNvPr id="49" name="Text 47"/>
-          <p:cNvSpPr/>
-          <p:nvPr/>
-        </p:nvSpPr>
-        <p:spPr>
-          <a:xfrm>
-            <a:off x="4718304" y="4023360"/>
+          <p:cNvPr id="52" name="Text 50"/>
+          <p:cNvSpPr/>
+          <p:nvPr/>
+        </p:nvSpPr>
+        <p:spPr>
+          <a:xfrm>
+            <a:off x="2542032" y="4498848"/>
             <a:ext cx="2011680" cy="402336"/>
           </a:xfrm>
           <a:prstGeom prst="rect">
@@ -37063,13 +38542,13 @@
       </p:sp>
       <p:sp>
         <p:nvSpPr>
-          <p:cNvPr id="50" name="Shape 48"/>
-          <p:cNvSpPr/>
-          <p:nvPr/>
-        </p:nvSpPr>
-        <p:spPr>
-          <a:xfrm>
-            <a:off x="6894576" y="4023360"/>
+          <p:cNvPr id="53" name="Shape 51"/>
+          <p:cNvSpPr/>
+          <p:nvPr/>
+        </p:nvSpPr>
+        <p:spPr>
+          <a:xfrm>
+            <a:off x="4718304" y="4498848"/>
             <a:ext cx="2011680" cy="402336"/>
           </a:xfrm>
           <a:prstGeom prst="rect">
@@ -37090,13 +38569,13 @@
       </p:sp>
       <p:sp>
         <p:nvSpPr>
-          <p:cNvPr id="51" name="Text 49"/>
-          <p:cNvSpPr/>
-          <p:nvPr/>
-        </p:nvSpPr>
-        <p:spPr>
-          <a:xfrm>
-            <a:off x="6894576" y="4023360"/>
+          <p:cNvPr id="54" name="Text 52"/>
+          <p:cNvSpPr/>
+          <p:nvPr/>
+        </p:nvSpPr>
+        <p:spPr>
+          <a:xfrm>
+            <a:off x="4718304" y="4498848"/>
             <a:ext cx="2011680" cy="402336"/>
           </a:xfrm>
           <a:prstGeom prst="rect">
@@ -37121,271 +38600,7 @@
                 <a:ea typeface="Trebuchet MS" pitchFamily="34" charset="-122"/>
                 <a:cs typeface="Trebuchet MS" pitchFamily="34" charset="-120"/>
               </a:rPr>
-              <a:t>multicoloured</a:t>
-            </a:r>
-            <a:endParaRPr lang="en-US" sz="1200" dirty="0"/>
-          </a:p>
-        </p:txBody>
-      </p:sp>
-      <p:sp>
-        <p:nvSpPr>
-          <p:cNvPr id="52" name="Shape 50"/>
-          <p:cNvSpPr/>
-          <p:nvPr/>
-        </p:nvSpPr>
-        <p:spPr>
-          <a:xfrm>
-            <a:off x="365760" y="4498848"/>
-            <a:ext cx="2011680" cy="402336"/>
-          </a:xfrm>
-          <a:prstGeom prst="rect">
-            <a:avLst>
-              <a:gd name="adj" fmla="val 13636"/>
-            </a:avLst>
-          </a:prstGeom>
-          <a:solidFill>
-            <a:srgbClr val="EEF2FF"/>
-          </a:solidFill>
-          <a:ln w="12700">
-            <a:solidFill>
-              <a:srgbClr val="6366F1"/>
-            </a:solidFill>
-            <a:prstDash val="solid"/>
-          </a:ln>
-        </p:spPr>
-      </p:sp>
-      <p:sp>
-        <p:nvSpPr>
-          <p:cNvPr id="53" name="Text 51"/>
-          <p:cNvSpPr/>
-          <p:nvPr/>
-        </p:nvSpPr>
-        <p:spPr>
-          <a:xfrm>
-            <a:off x="365760" y="4498848"/>
-            <a:ext cx="2011680" cy="402336"/>
-          </a:xfrm>
-          <a:prstGeom prst="rect">
-            <a:avLst/>
-          </a:prstGeom>
-          <a:noFill/>
-          <a:ln/>
-        </p:spPr>
-        <p:txBody>
-          <a:bodyPr wrap="square" lIns="0" tIns="0" rIns="0" bIns="0" rtlCol="0" anchor="ctr"/>
-          <a:lstStyle/>
-          <a:p>
-            <a:pPr algn="ctr" indent="0" marL="0">
-              <a:buNone/>
-            </a:pPr>
-            <a:r>
-              <a:rPr lang="en-US" sz="1200" b="1" dirty="0">
-                <a:solidFill>
-                  <a:srgbClr val="4338CA"/>
-                </a:solidFill>
-                <a:latin typeface="Trebuchet MS" pitchFamily="34" charset="0"/>
-                <a:ea typeface="Trebuchet MS" pitchFamily="34" charset="-122"/>
-                <a:cs typeface="Trebuchet MS" pitchFamily="34" charset="-120"/>
-              </a:rPr>
-              <a:t>colouring</a:t>
-            </a:r>
-            <a:endParaRPr lang="en-US" sz="1200" dirty="0"/>
-          </a:p>
-        </p:txBody>
-      </p:sp>
-      <p:sp>
-        <p:nvSpPr>
-          <p:cNvPr id="54" name="Shape 52"/>
-          <p:cNvSpPr/>
-          <p:nvPr/>
-        </p:nvSpPr>
-        <p:spPr>
-          <a:xfrm>
-            <a:off x="2542032" y="4498848"/>
-            <a:ext cx="2011680" cy="402336"/>
-          </a:xfrm>
-          <a:prstGeom prst="rect">
-            <a:avLst>
-              <a:gd name="adj" fmla="val 13636"/>
-            </a:avLst>
-          </a:prstGeom>
-          <a:solidFill>
-            <a:srgbClr val="EEF2FF"/>
-          </a:solidFill>
-          <a:ln w="12700">
-            <a:solidFill>
-              <a:srgbClr val="6366F1"/>
-            </a:solidFill>
-            <a:prstDash val="solid"/>
-          </a:ln>
-        </p:spPr>
-      </p:sp>
-      <p:sp>
-        <p:nvSpPr>
-          <p:cNvPr id="55" name="Text 53"/>
-          <p:cNvSpPr/>
-          <p:nvPr/>
-        </p:nvSpPr>
-        <p:spPr>
-          <a:xfrm>
-            <a:off x="2542032" y="4498848"/>
-            <a:ext cx="2011680" cy="402336"/>
-          </a:xfrm>
-          <a:prstGeom prst="rect">
-            <a:avLst/>
-          </a:prstGeom>
-          <a:noFill/>
-          <a:ln/>
-        </p:spPr>
-        <p:txBody>
-          <a:bodyPr wrap="square" lIns="0" tIns="0" rIns="0" bIns="0" rtlCol="0" anchor="ctr"/>
-          <a:lstStyle/>
-          <a:p>
-            <a:pPr algn="ctr" indent="0" marL="0">
-              <a:buNone/>
-            </a:pPr>
-            <a:r>
-              <a:rPr lang="en-US" sz="1200" b="1" dirty="0">
-                <a:solidFill>
-                  <a:srgbClr val="4338CA"/>
-                </a:solidFill>
-                <a:latin typeface="Trebuchet MS" pitchFamily="34" charset="0"/>
-                <a:ea typeface="Trebuchet MS" pitchFamily="34" charset="-122"/>
-                <a:cs typeface="Trebuchet MS" pitchFamily="34" charset="-120"/>
-              </a:rPr>
-              <a:t>coloured</a:t>
-            </a:r>
-            <a:endParaRPr lang="en-US" sz="1200" dirty="0"/>
-          </a:p>
-        </p:txBody>
-      </p:sp>
-      <p:sp>
-        <p:nvSpPr>
-          <p:cNvPr id="56" name="Shape 54"/>
-          <p:cNvSpPr/>
-          <p:nvPr/>
-        </p:nvSpPr>
-        <p:spPr>
-          <a:xfrm>
-            <a:off x="4718304" y="4498848"/>
-            <a:ext cx="2011680" cy="402336"/>
-          </a:xfrm>
-          <a:prstGeom prst="rect">
-            <a:avLst>
-              <a:gd name="adj" fmla="val 13636"/>
-            </a:avLst>
-          </a:prstGeom>
-          <a:solidFill>
-            <a:srgbClr val="EEF2FF"/>
-          </a:solidFill>
-          <a:ln w="12700">
-            <a:solidFill>
-              <a:srgbClr val="6366F1"/>
-            </a:solidFill>
-            <a:prstDash val="solid"/>
-          </a:ln>
-        </p:spPr>
-      </p:sp>
-      <p:sp>
-        <p:nvSpPr>
-          <p:cNvPr id="57" name="Text 55"/>
-          <p:cNvSpPr/>
-          <p:nvPr/>
-        </p:nvSpPr>
-        <p:spPr>
-          <a:xfrm>
-            <a:off x="4718304" y="4498848"/>
-            <a:ext cx="2011680" cy="402336"/>
-          </a:xfrm>
-          <a:prstGeom prst="rect">
-            <a:avLst/>
-          </a:prstGeom>
-          <a:noFill/>
-          <a:ln/>
-        </p:spPr>
-        <p:txBody>
-          <a:bodyPr wrap="square" lIns="0" tIns="0" rIns="0" bIns="0" rtlCol="0" anchor="ctr"/>
-          <a:lstStyle/>
-          <a:p>
-            <a:pPr algn="ctr" indent="0" marL="0">
-              <a:buNone/>
-            </a:pPr>
-            <a:r>
-              <a:rPr lang="en-US" sz="1200" b="1" dirty="0">
-                <a:solidFill>
-                  <a:srgbClr val="4338CA"/>
-                </a:solidFill>
-                <a:latin typeface="Trebuchet MS" pitchFamily="34" charset="0"/>
-                <a:ea typeface="Trebuchet MS" pitchFamily="34" charset="-122"/>
-                <a:cs typeface="Trebuchet MS" pitchFamily="34" charset="-120"/>
-              </a:rPr>
-              <a:t>discolouration</a:t>
-            </a:r>
-            <a:endParaRPr lang="en-US" sz="1200" dirty="0"/>
-          </a:p>
-        </p:txBody>
-      </p:sp>
-      <p:sp>
-        <p:nvSpPr>
-          <p:cNvPr id="58" name="Shape 56"/>
-          <p:cNvSpPr/>
-          <p:nvPr/>
-        </p:nvSpPr>
-        <p:spPr>
-          <a:xfrm>
-            <a:off x="6894576" y="4498848"/>
-            <a:ext cx="2011680" cy="402336"/>
-          </a:xfrm>
-          <a:prstGeom prst="rect">
-            <a:avLst>
-              <a:gd name="adj" fmla="val 13636"/>
-            </a:avLst>
-          </a:prstGeom>
-          <a:solidFill>
-            <a:srgbClr val="EEF2FF"/>
-          </a:solidFill>
-          <a:ln w="12700">
-            <a:solidFill>
-              <a:srgbClr val="6366F1"/>
-            </a:solidFill>
-            <a:prstDash val="solid"/>
-          </a:ln>
-        </p:spPr>
-      </p:sp>
-      <p:sp>
-        <p:nvSpPr>
-          <p:cNvPr id="59" name="Text 57"/>
-          <p:cNvSpPr/>
-          <p:nvPr/>
-        </p:nvSpPr>
-        <p:spPr>
-          <a:xfrm>
-            <a:off x="6894576" y="4498848"/>
-            <a:ext cx="2011680" cy="402336"/>
-          </a:xfrm>
-          <a:prstGeom prst="rect">
-            <a:avLst/>
-          </a:prstGeom>
-          <a:noFill/>
-          <a:ln/>
-        </p:spPr>
-        <p:txBody>
-          <a:bodyPr wrap="square" lIns="0" tIns="0" rIns="0" bIns="0" rtlCol="0" anchor="ctr"/>
-          <a:lstStyle/>
-          <a:p>
-            <a:pPr algn="ctr" indent="0" marL="0">
-              <a:buNone/>
-            </a:pPr>
-            <a:r>
-              <a:rPr lang="en-US" sz="1200" b="1" dirty="0">
-                <a:solidFill>
-                  <a:srgbClr val="4338CA"/>
-                </a:solidFill>
-                <a:latin typeface="Trebuchet MS" pitchFamily="34" charset="0"/>
-                <a:ea typeface="Trebuchet MS" pitchFamily="34" charset="-122"/>
-                <a:cs typeface="Trebuchet MS" pitchFamily="34" charset="-120"/>
-              </a:rPr>
-              <a:t>bicolour</a:t>
+              <a:t>colourless</a:t>
             </a:r>
             <a:endParaRPr lang="en-US" sz="1200" dirty="0"/>
           </a:p>
@@ -37677,7 +38892,7 @@
                 <a:ea typeface="Calibri" pitchFamily="34" charset="-122"/>
                 <a:cs typeface="Calibri" pitchFamily="34" charset="-120"/>
               </a:rPr>
-              <a:t>Word Labs  •  wordlabs.app  •  Root: 'colour' = hue, tint, or shade</a:t>
+              <a:t>Word Labs  •  wordlabs.app  •  Root: 'colour' = the property of light; to add colour</a:t>
             </a:r>
             <a:endParaRPr lang="en-US" sz="800" dirty="0"/>
           </a:p>
@@ -37841,7 +39056,7 @@
                 <a:ea typeface="Calibri" pitchFamily="34" charset="-122"/>
                 <a:cs typeface="Calibri" pitchFamily="34" charset="-120"/>
               </a:rPr>
-              <a:t>The core part of a word carrying its basic meaning. For example, 'colour' means 'hue, tint, or shade'.</a:t>
+              <a:t>The core part of a word carrying its basic meaning. For example, 'colour' means 'the property of light; to add colour'.</a:t>
             </a:r>
             <a:endParaRPr lang="en-US" sz="1350" dirty="0"/>
           </a:p>
@@ -38461,7 +39676,7 @@
                 <a:ea typeface="Calibri" pitchFamily="34" charset="-122"/>
                 <a:cs typeface="Calibri" pitchFamily="34" charset="-120"/>
               </a:rPr>
-              <a:t>Word Labs  •  wordlabs.app  •  Root: 'colour' = hue, tint, or shade</a:t>
+              <a:t>Word Labs  •  wordlabs.app  •  Root: 'colour' = the property of light; to add colour</a:t>
             </a:r>
             <a:endParaRPr lang="en-US" sz="800" dirty="0"/>
           </a:p>
@@ -38573,7 +39788,7 @@
                 <a:ea typeface="Calibri" pitchFamily="34" charset="-122"/>
                 <a:cs typeface="Calibri" pitchFamily="34" charset="-120"/>
               </a:rPr>
-              <a:t>1.  The root 'colour' comes from ancient Greek.</a:t>
+              <a:t>1.  'colour' means 'the property of light; to add colour'.</a:t>
             </a:r>
             <a:endParaRPr lang="en-US" sz="1300" dirty="0"/>
           </a:p>
@@ -38596,11 +39811,11 @@
             </a:avLst>
           </a:prstGeom>
           <a:solidFill>
-            <a:srgbClr val="FEE2E2"/>
-          </a:solidFill>
-          <a:ln w="12700">
-            <a:solidFill>
-              <a:srgbClr val="DC2626"/>
+            <a:srgbClr val="DCFCE7"/>
+          </a:solidFill>
+          <a:ln w="12700">
+            <a:solidFill>
+              <a:srgbClr val="16A34A"/>
             </a:solidFill>
             <a:prstDash val="solid"/>
           </a:ln>
@@ -38633,13 +39848,13 @@
             <a:r>
               <a:rPr lang="en-US" sz="1100" b="1" dirty="0">
                 <a:solidFill>
-                  <a:srgbClr val="DC2626"/>
+                  <a:srgbClr val="16A34A"/>
                 </a:solidFill>
                 <a:latin typeface="Trebuchet MS" pitchFamily="34" charset="0"/>
                 <a:ea typeface="Trebuchet MS" pitchFamily="34" charset="-122"/>
                 <a:cs typeface="Trebuchet MS" pitchFamily="34" charset="-120"/>
               </a:rPr>
-              <a:t>FALSE</a:t>
+              <a:t>TRUE</a:t>
             </a:r>
             <a:endParaRPr lang="en-US" sz="1100" dirty="0"/>
           </a:p>
@@ -38712,7 +39927,7 @@
                 <a:ea typeface="Calibri" pitchFamily="34" charset="-122"/>
                 <a:cs typeface="Calibri" pitchFamily="34" charset="-120"/>
               </a:rPr>
-              <a:t>2.  'Colourless' means having no colour.</a:t>
+              <a:t>2.  'colours' means 'types of fabric used for making tents'.</a:t>
             </a:r>
             <a:endParaRPr lang="en-US" sz="1300" dirty="0"/>
           </a:p>
@@ -38735,11 +39950,11 @@
             </a:avLst>
           </a:prstGeom>
           <a:solidFill>
-            <a:srgbClr val="DCFCE7"/>
-          </a:solidFill>
-          <a:ln w="12700">
-            <a:solidFill>
-              <a:srgbClr val="16A34A"/>
+            <a:srgbClr val="FEE2E2"/>
+          </a:solidFill>
+          <a:ln w="12700">
+            <a:solidFill>
+              <a:srgbClr val="DC2626"/>
             </a:solidFill>
             <a:prstDash val="solid"/>
           </a:ln>
@@ -38772,13 +39987,13 @@
             <a:r>
               <a:rPr lang="en-US" sz="1100" b="1" dirty="0">
                 <a:solidFill>
-                  <a:srgbClr val="16A34A"/>
+                  <a:srgbClr val="DC2626"/>
                 </a:solidFill>
                 <a:latin typeface="Trebuchet MS" pitchFamily="34" charset="0"/>
                 <a:ea typeface="Trebuchet MS" pitchFamily="34" charset="-122"/>
                 <a:cs typeface="Trebuchet MS" pitchFamily="34" charset="-120"/>
               </a:rPr>
-              <a:t>TRUE</a:t>
+              <a:t>FALSE</a:t>
             </a:r>
             <a:endParaRPr lang="en-US" sz="1100" dirty="0"/>
           </a:p>
@@ -38851,7 +40066,7 @@
                 <a:ea typeface="Calibri" pitchFamily="34" charset="-122"/>
                 <a:cs typeface="Calibri" pitchFamily="34" charset="-120"/>
               </a:rPr>
-              <a:t>3.  The word 'colourful' contains the root 'colour'.</a:t>
+              <a:t>3.  'colour' means 'the property of an object that we see, such as red, blue or green'.</a:t>
             </a:r>
             <a:endParaRPr lang="en-US" sz="1300" dirty="0"/>
           </a:p>
@@ -38990,7 +40205,7 @@
                 <a:ea typeface="Calibri" pitchFamily="34" charset="-122"/>
                 <a:cs typeface="Calibri" pitchFamily="34" charset="-120"/>
               </a:rPr>
-              <a:t>4.  The prefix 'dis' in 'discolour' means 'again'.</a:t>
+              <a:t>4.  'colour' means 'the smell of an object'.</a:t>
             </a:r>
             <a:endParaRPr lang="en-US" sz="1300" dirty="0"/>
           </a:p>
@@ -39129,7 +40344,7 @@
                 <a:ea typeface="Calibri" pitchFamily="34" charset="-122"/>
                 <a:cs typeface="Calibri" pitchFamily="34" charset="-120"/>
               </a:rPr>
-              <a:t>5.  'Multicoloured' means having many different colours.</a:t>
+              <a:t>5.  'colours' means 'different hues, such as red, blue and green'.</a:t>
             </a:r>
             <a:endParaRPr lang="en-US" sz="1300" dirty="0"/>
           </a:p>
@@ -39487,7 +40702,7 @@
                 <a:ea typeface="Calibri" pitchFamily="34" charset="-122"/>
                 <a:cs typeface="Calibri" pitchFamily="34" charset="-120"/>
               </a:rPr>
-              <a:t>Word Labs  •  wordlabs.app  •  Root: 'colour' = hue, tint, or shade</a:t>
+              <a:t>Word Labs  •  wordlabs.app  •  Root: 'colour' = the property of light; to add colour</a:t>
             </a:r>
             <a:endParaRPr lang="en-US" sz="800" dirty="0"/>
           </a:p>
@@ -39624,7 +40839,7 @@
                 <a:ea typeface="Trebuchet MS" pitchFamily="34" charset="-122"/>
                 <a:cs typeface="Trebuchet MS" pitchFamily="34" charset="-120"/>
               </a:rPr>
-              <a:t>hue, tint, or shade</a:t>
+              <a:t>the property of light; to add colour</a:t>
             </a:r>
             <a:endParaRPr lang="en-US" sz="2000" dirty="0"/>
           </a:p>
@@ -39663,7 +40878,7 @@
                 <a:ea typeface="Calibri" pitchFamily="34" charset="-122"/>
                 <a:cs typeface="Calibri" pitchFamily="34" charset="-120"/>
               </a:rPr>
-              <a:t>Origin: Latin: color</a:t>
+              <a:t>Origin: Anglo-Saxon (Old English) root</a:t>
             </a:r>
             <a:endParaRPr lang="en-US" sz="1100" dirty="0"/>
           </a:p>
@@ -39768,7 +40983,7 @@
                 <a:ea typeface="Trebuchet MS" pitchFamily="34" charset="-122"/>
                 <a:cs typeface="Trebuchet MS" pitchFamily="34" charset="-120"/>
               </a:rPr>
-              <a:t>colourful</a:t>
+              <a:t>colour</a:t>
             </a:r>
             <a:endParaRPr lang="en-US" sz="1300" dirty="0"/>
           </a:p>
@@ -39834,7 +41049,7 @@
                 <a:ea typeface="Trebuchet MS" pitchFamily="34" charset="-122"/>
                 <a:cs typeface="Trebuchet MS" pitchFamily="34" charset="-120"/>
               </a:rPr>
-              <a:t>colourless</a:t>
+              <a:t>colours</a:t>
             </a:r>
             <a:endParaRPr lang="en-US" sz="1300" dirty="0"/>
           </a:p>
@@ -39900,7 +41115,7 @@
                 <a:ea typeface="Trebuchet MS" pitchFamily="34" charset="-122"/>
                 <a:cs typeface="Trebuchet MS" pitchFamily="34" charset="-120"/>
               </a:rPr>
-              <a:t>discolour</a:t>
+              <a:t>coloured</a:t>
             </a:r>
             <a:endParaRPr lang="en-US" sz="1300" dirty="0"/>
           </a:p>
@@ -39966,7 +41181,7 @@
                 <a:ea typeface="Trebuchet MS" pitchFamily="34" charset="-122"/>
                 <a:cs typeface="Trebuchet MS" pitchFamily="34" charset="-120"/>
               </a:rPr>
-              <a:t>multicoloured</a:t>
+              <a:t>colourful</a:t>
             </a:r>
             <a:endParaRPr lang="en-US" sz="1300" dirty="0"/>
           </a:p>
@@ -40098,7 +41313,7 @@
                 <a:ea typeface="Trebuchet MS" pitchFamily="34" charset="-122"/>
                 <a:cs typeface="Trebuchet MS" pitchFamily="34" charset="-120"/>
               </a:rPr>
-              <a:t>coloured</a:t>
+              <a:t>discolour</a:t>
             </a:r>
             <a:endParaRPr lang="en-US" sz="1300" dirty="0"/>
           </a:p>
@@ -40164,7 +41379,7 @@
                 <a:ea typeface="Trebuchet MS" pitchFamily="34" charset="-122"/>
                 <a:cs typeface="Trebuchet MS" pitchFamily="34" charset="-120"/>
               </a:rPr>
-              <a:t>discolouration</a:t>
+              <a:t>colourless</a:t>
             </a:r>
             <a:endParaRPr lang="en-US" sz="1300" dirty="0"/>
           </a:p>
@@ -40456,7 +41671,7 @@
                 <a:ea typeface="Calibri" pitchFamily="34" charset="-122"/>
                 <a:cs typeface="Calibri" pitchFamily="34" charset="-120"/>
               </a:rPr>
-              <a:t>Word Labs  •  wordlabs.app  •  Root: 'colour' = hue, tint, or shade</a:t>
+              <a:t>Word Labs  •  wordlabs.app  •  Root: 'colour' = the property of light; to add colour</a:t>
             </a:r>
             <a:endParaRPr lang="en-US" sz="800" dirty="0"/>
           </a:p>
@@ -40885,7 +42100,7 @@
                 <a:ea typeface="Trebuchet MS" pitchFamily="34" charset="-122"/>
                 <a:cs typeface="Trebuchet MS" pitchFamily="34" charset="-120"/>
               </a:rPr>
-              <a:t>-ful</a:t>
+              <a:t>-ed</a:t>
             </a:r>
             <a:endParaRPr lang="en-US" sz="1300" dirty="0"/>
           </a:p>
@@ -41038,7 +42253,7 @@
                 <a:ea typeface="Trebuchet MS" pitchFamily="34" charset="-122"/>
                 <a:cs typeface="Trebuchet MS" pitchFamily="34" charset="-120"/>
               </a:rPr>
-              <a:t>-less</a:t>
+              <a:t>-ful</a:t>
             </a:r>
             <a:endParaRPr lang="en-US" sz="1300" dirty="0"/>
           </a:p>
@@ -41059,7 +42274,7 @@
             <a:avLst/>
           </a:prstGeom>
           <a:solidFill>
-            <a:srgbClr val="DDD6FE"/>
+            <a:srgbClr val="F8FAFC"/>
           </a:solidFill>
           <a:ln w="12700">
             <a:solidFill>
@@ -41071,18 +42286,68 @@
       </p:sp>
       <p:sp>
         <p:nvSpPr>
-          <p:cNvPr id="29" name="Text 27"/>
-          <p:cNvSpPr/>
-          <p:nvPr/>
-        </p:nvSpPr>
-        <p:spPr>
-          <a:xfrm>
-            <a:off x="640080" y="2670048"/>
+          <p:cNvPr id="29" name="Shape 27"/>
+          <p:cNvSpPr/>
+          <p:nvPr/>
+        </p:nvSpPr>
+        <p:spPr>
+          <a:xfrm>
+            <a:off x="3291840" y="2670048"/>
+            <a:ext cx="1645920" cy="420624"/>
+          </a:xfrm>
+          <a:prstGeom prst="rect">
+            <a:avLst/>
+          </a:prstGeom>
+          <a:solidFill>
+            <a:srgbClr val="F8FAFC"/>
+          </a:solidFill>
+          <a:ln w="12700">
+            <a:solidFill>
+              <a:srgbClr val="E5E7EB"/>
+            </a:solidFill>
+            <a:prstDash val="solid"/>
+          </a:ln>
+        </p:spPr>
+      </p:sp>
+      <p:sp>
+        <p:nvSpPr>
+          <p:cNvPr id="30" name="Shape 28"/>
+          <p:cNvSpPr/>
+          <p:nvPr/>
+        </p:nvSpPr>
+        <p:spPr>
+          <a:xfrm>
+            <a:off x="5943600" y="2670048"/>
             <a:ext cx="1463040" cy="420624"/>
           </a:xfrm>
           <a:prstGeom prst="rect">
             <a:avLst/>
           </a:prstGeom>
+          <a:solidFill>
+            <a:srgbClr val="FCE7F3"/>
+          </a:solidFill>
+          <a:ln w="12700">
+            <a:solidFill>
+              <a:srgbClr val="E5E7EB"/>
+            </a:solidFill>
+            <a:prstDash val="solid"/>
+          </a:ln>
+        </p:spPr>
+      </p:sp>
+      <p:sp>
+        <p:nvSpPr>
+          <p:cNvPr id="31" name="Text 29"/>
+          <p:cNvSpPr/>
+          <p:nvPr/>
+        </p:nvSpPr>
+        <p:spPr>
+          <a:xfrm>
+            <a:off x="5943600" y="2670048"/>
+            <a:ext cx="1463040" cy="420624"/>
+          </a:xfrm>
+          <a:prstGeom prst="rect">
+            <a:avLst/>
+          </a:prstGeom>
           <a:noFill/>
           <a:ln/>
         </p:spPr>
@@ -41096,13 +42361,13 @@
             <a:r>
               <a:rPr lang="en-US" sz="1300" b="1" dirty="0">
                 <a:solidFill>
-                  <a:srgbClr val="4C1D95"/>
+                  <a:srgbClr val="9D174D"/>
                 </a:solidFill>
                 <a:latin typeface="Trebuchet MS" pitchFamily="34" charset="0"/>
                 <a:ea typeface="Trebuchet MS" pitchFamily="34" charset="-122"/>
                 <a:cs typeface="Trebuchet MS" pitchFamily="34" charset="-120"/>
               </a:rPr>
-              <a:t>bi-</a:t>
+              <a:t>-ing</a:t>
             </a:r>
             <a:endParaRPr lang="en-US" sz="1300" dirty="0"/>
           </a:p>
@@ -41110,20 +42375,45 @@
       </p:sp>
       <p:sp>
         <p:nvSpPr>
-          <p:cNvPr id="30" name="Shape 28"/>
-          <p:cNvSpPr/>
-          <p:nvPr/>
-        </p:nvSpPr>
-        <p:spPr>
-          <a:xfrm>
-            <a:off x="3291840" y="2670048"/>
+          <p:cNvPr id="32" name="Shape 30"/>
+          <p:cNvSpPr/>
+          <p:nvPr/>
+        </p:nvSpPr>
+        <p:spPr>
+          <a:xfrm>
+            <a:off x="640080" y="3127248"/>
+            <a:ext cx="1463040" cy="420624"/>
+          </a:xfrm>
+          <a:prstGeom prst="rect">
+            <a:avLst/>
+          </a:prstGeom>
+          <a:solidFill>
+            <a:srgbClr val="F1F5F9"/>
+          </a:solidFill>
+          <a:ln w="12700">
+            <a:solidFill>
+              <a:srgbClr val="E5E7EB"/>
+            </a:solidFill>
+            <a:prstDash val="solid"/>
+          </a:ln>
+        </p:spPr>
+      </p:sp>
+      <p:sp>
+        <p:nvSpPr>
+          <p:cNvPr id="33" name="Shape 31"/>
+          <p:cNvSpPr/>
+          <p:nvPr/>
+        </p:nvSpPr>
+        <p:spPr>
+          <a:xfrm>
+            <a:off x="3291840" y="3127248"/>
             <a:ext cx="1645920" cy="420624"/>
           </a:xfrm>
           <a:prstGeom prst="rect">
             <a:avLst/>
           </a:prstGeom>
           <a:solidFill>
-            <a:srgbClr val="F8FAFC"/>
+            <a:srgbClr val="F1F5F9"/>
           </a:solidFill>
           <a:ln w="12700">
             <a:solidFill>
@@ -41135,13 +42425,13 @@
       </p:sp>
       <p:sp>
         <p:nvSpPr>
-          <p:cNvPr id="31" name="Shape 29"/>
-          <p:cNvSpPr/>
-          <p:nvPr/>
-        </p:nvSpPr>
-        <p:spPr>
-          <a:xfrm>
-            <a:off x="5943600" y="2670048"/>
+          <p:cNvPr id="34" name="Shape 32"/>
+          <p:cNvSpPr/>
+          <p:nvPr/>
+        </p:nvSpPr>
+        <p:spPr>
+          <a:xfrm>
+            <a:off x="5943600" y="3127248"/>
             <a:ext cx="1463040" cy="420624"/>
           </a:xfrm>
           <a:prstGeom prst="rect">
@@ -41160,13 +42450,13 @@
       </p:sp>
       <p:sp>
         <p:nvSpPr>
-          <p:cNvPr id="32" name="Text 30"/>
-          <p:cNvSpPr/>
-          <p:nvPr/>
-        </p:nvSpPr>
-        <p:spPr>
-          <a:xfrm>
-            <a:off x="5943600" y="2670048"/>
+          <p:cNvPr id="35" name="Text 33"/>
+          <p:cNvSpPr/>
+          <p:nvPr/>
+        </p:nvSpPr>
+        <p:spPr>
+          <a:xfrm>
+            <a:off x="5943600" y="3127248"/>
             <a:ext cx="1463040" cy="420624"/>
           </a:xfrm>
           <a:prstGeom prst="rect">
@@ -41191,7 +42481,7 @@
                 <a:ea typeface="Trebuchet MS" pitchFamily="34" charset="-122"/>
                 <a:cs typeface="Trebuchet MS" pitchFamily="34" charset="-120"/>
               </a:rPr>
-              <a:t>-ed</a:t>
+              <a:t>-less</a:t>
             </a:r>
             <a:endParaRPr lang="en-US" sz="1300" dirty="0"/>
           </a:p>
@@ -41199,20 +42489,20 @@
       </p:sp>
       <p:sp>
         <p:nvSpPr>
-          <p:cNvPr id="33" name="Shape 31"/>
-          <p:cNvSpPr/>
-          <p:nvPr/>
-        </p:nvSpPr>
-        <p:spPr>
-          <a:xfrm>
-            <a:off x="640080" y="3127248"/>
+          <p:cNvPr id="36" name="Shape 34"/>
+          <p:cNvSpPr/>
+          <p:nvPr/>
+        </p:nvSpPr>
+        <p:spPr>
+          <a:xfrm>
+            <a:off x="640080" y="3584448"/>
             <a:ext cx="1463040" cy="420624"/>
           </a:xfrm>
           <a:prstGeom prst="rect">
             <a:avLst/>
           </a:prstGeom>
           <a:solidFill>
-            <a:srgbClr val="DDD6FE"/>
+            <a:srgbClr val="F8FAFC"/>
           </a:solidFill>
           <a:ln w="12700">
             <a:solidFill>
@@ -41224,18 +42514,68 @@
       </p:sp>
       <p:sp>
         <p:nvSpPr>
-          <p:cNvPr id="34" name="Text 32"/>
-          <p:cNvSpPr/>
-          <p:nvPr/>
-        </p:nvSpPr>
-        <p:spPr>
-          <a:xfrm>
-            <a:off x="640080" y="3127248"/>
+          <p:cNvPr id="37" name="Shape 35"/>
+          <p:cNvSpPr/>
+          <p:nvPr/>
+        </p:nvSpPr>
+        <p:spPr>
+          <a:xfrm>
+            <a:off x="3291840" y="3584448"/>
+            <a:ext cx="1645920" cy="420624"/>
+          </a:xfrm>
+          <a:prstGeom prst="rect">
+            <a:avLst/>
+          </a:prstGeom>
+          <a:solidFill>
+            <a:srgbClr val="F8FAFC"/>
+          </a:solidFill>
+          <a:ln w="12700">
+            <a:solidFill>
+              <a:srgbClr val="E5E7EB"/>
+            </a:solidFill>
+            <a:prstDash val="solid"/>
+          </a:ln>
+        </p:spPr>
+      </p:sp>
+      <p:sp>
+        <p:nvSpPr>
+          <p:cNvPr id="38" name="Shape 36"/>
+          <p:cNvSpPr/>
+          <p:nvPr/>
+        </p:nvSpPr>
+        <p:spPr>
+          <a:xfrm>
+            <a:off x="5943600" y="3584448"/>
             <a:ext cx="1463040" cy="420624"/>
           </a:xfrm>
           <a:prstGeom prst="rect">
             <a:avLst/>
           </a:prstGeom>
+          <a:solidFill>
+            <a:srgbClr val="FCE7F3"/>
+          </a:solidFill>
+          <a:ln w="12700">
+            <a:solidFill>
+              <a:srgbClr val="E5E7EB"/>
+            </a:solidFill>
+            <a:prstDash val="solid"/>
+          </a:ln>
+        </p:spPr>
+      </p:sp>
+      <p:sp>
+        <p:nvSpPr>
+          <p:cNvPr id="39" name="Text 37"/>
+          <p:cNvSpPr/>
+          <p:nvPr/>
+        </p:nvSpPr>
+        <p:spPr>
+          <a:xfrm>
+            <a:off x="5943600" y="3584448"/>
+            <a:ext cx="1463040" cy="420624"/>
+          </a:xfrm>
+          <a:prstGeom prst="rect">
+            <a:avLst/>
+          </a:prstGeom>
           <a:noFill/>
           <a:ln/>
         </p:spPr>
@@ -41249,13 +42589,13 @@
             <a:r>
               <a:rPr lang="en-US" sz="1300" b="1" dirty="0">
                 <a:solidFill>
-                  <a:srgbClr val="4C1D95"/>
+                  <a:srgbClr val="9D174D"/>
                 </a:solidFill>
                 <a:latin typeface="Trebuchet MS" pitchFamily="34" charset="0"/>
                 <a:ea typeface="Trebuchet MS" pitchFamily="34" charset="-122"/>
                 <a:cs typeface="Trebuchet MS" pitchFamily="34" charset="-120"/>
               </a:rPr>
-              <a:t>tri-</a:t>
+              <a:t>-s</a:t>
             </a:r>
             <a:endParaRPr lang="en-US" sz="1300" dirty="0"/>
           </a:p>
@@ -41263,249 +42603,7 @@
       </p:sp>
       <p:sp>
         <p:nvSpPr>
-          <p:cNvPr id="35" name="Shape 33"/>
-          <p:cNvSpPr/>
-          <p:nvPr/>
-        </p:nvSpPr>
-        <p:spPr>
-          <a:xfrm>
-            <a:off x="3291840" y="3127248"/>
-            <a:ext cx="1645920" cy="420624"/>
-          </a:xfrm>
-          <a:prstGeom prst="rect">
-            <a:avLst/>
-          </a:prstGeom>
-          <a:solidFill>
-            <a:srgbClr val="F1F5F9"/>
-          </a:solidFill>
-          <a:ln w="12700">
-            <a:solidFill>
-              <a:srgbClr val="E5E7EB"/>
-            </a:solidFill>
-            <a:prstDash val="solid"/>
-          </a:ln>
-        </p:spPr>
-      </p:sp>
-      <p:sp>
-        <p:nvSpPr>
-          <p:cNvPr id="36" name="Shape 34"/>
-          <p:cNvSpPr/>
-          <p:nvPr/>
-        </p:nvSpPr>
-        <p:spPr>
-          <a:xfrm>
-            <a:off x="5943600" y="3127248"/>
-            <a:ext cx="1463040" cy="420624"/>
-          </a:xfrm>
-          <a:prstGeom prst="rect">
-            <a:avLst/>
-          </a:prstGeom>
-          <a:solidFill>
-            <a:srgbClr val="FCE7F3"/>
-          </a:solidFill>
-          <a:ln w="12700">
-            <a:solidFill>
-              <a:srgbClr val="E5E7EB"/>
-            </a:solidFill>
-            <a:prstDash val="solid"/>
-          </a:ln>
-        </p:spPr>
-      </p:sp>
-      <p:sp>
-        <p:nvSpPr>
-          <p:cNvPr id="37" name="Text 35"/>
-          <p:cNvSpPr/>
-          <p:nvPr/>
-        </p:nvSpPr>
-        <p:spPr>
-          <a:xfrm>
-            <a:off x="5943600" y="3127248"/>
-            <a:ext cx="1463040" cy="420624"/>
-          </a:xfrm>
-          <a:prstGeom prst="rect">
-            <a:avLst/>
-          </a:prstGeom>
-          <a:noFill/>
-          <a:ln/>
-        </p:spPr>
-        <p:txBody>
-          <a:bodyPr wrap="square" lIns="0" tIns="0" rIns="0" bIns="0" rtlCol="0" anchor="ctr"/>
-          <a:lstStyle/>
-          <a:p>
-            <a:pPr algn="ctr" indent="0" marL="0">
-              <a:buNone/>
-            </a:pPr>
-            <a:r>
-              <a:rPr lang="en-US" sz="1300" b="1" dirty="0">
-                <a:solidFill>
-                  <a:srgbClr val="9D174D"/>
-                </a:solidFill>
-                <a:latin typeface="Trebuchet MS" pitchFamily="34" charset="0"/>
-                <a:ea typeface="Trebuchet MS" pitchFamily="34" charset="-122"/>
-                <a:cs typeface="Trebuchet MS" pitchFamily="34" charset="-120"/>
-              </a:rPr>
-              <a:t>-ing</a:t>
-            </a:r>
-            <a:endParaRPr lang="en-US" sz="1300" dirty="0"/>
-          </a:p>
-        </p:txBody>
-      </p:sp>
-      <p:sp>
-        <p:nvSpPr>
-          <p:cNvPr id="38" name="Shape 36"/>
-          <p:cNvSpPr/>
-          <p:nvPr/>
-        </p:nvSpPr>
-        <p:spPr>
-          <a:xfrm>
-            <a:off x="640080" y="3584448"/>
-            <a:ext cx="1463040" cy="420624"/>
-          </a:xfrm>
-          <a:prstGeom prst="rect">
-            <a:avLst/>
-          </a:prstGeom>
-          <a:solidFill>
-            <a:srgbClr val="DDD6FE"/>
-          </a:solidFill>
-          <a:ln w="12700">
-            <a:solidFill>
-              <a:srgbClr val="E5E7EB"/>
-            </a:solidFill>
-            <a:prstDash val="solid"/>
-          </a:ln>
-        </p:spPr>
-      </p:sp>
-      <p:sp>
-        <p:nvSpPr>
-          <p:cNvPr id="39" name="Text 37"/>
-          <p:cNvSpPr/>
-          <p:nvPr/>
-        </p:nvSpPr>
-        <p:spPr>
-          <a:xfrm>
-            <a:off x="640080" y="3584448"/>
-            <a:ext cx="1463040" cy="420624"/>
-          </a:xfrm>
-          <a:prstGeom prst="rect">
-            <a:avLst/>
-          </a:prstGeom>
-          <a:noFill/>
-          <a:ln/>
-        </p:spPr>
-        <p:txBody>
-          <a:bodyPr wrap="square" lIns="0" tIns="0" rIns="0" bIns="0" rtlCol="0" anchor="ctr"/>
-          <a:lstStyle/>
-          <a:p>
-            <a:pPr algn="ctr" indent="0" marL="0">
-              <a:buNone/>
-            </a:pPr>
-            <a:r>
-              <a:rPr lang="en-US" sz="1300" b="1" dirty="0">
-                <a:solidFill>
-                  <a:srgbClr val="4C1D95"/>
-                </a:solidFill>
-                <a:latin typeface="Trebuchet MS" pitchFamily="34" charset="0"/>
-                <a:ea typeface="Trebuchet MS" pitchFamily="34" charset="-122"/>
-                <a:cs typeface="Trebuchet MS" pitchFamily="34" charset="-120"/>
-              </a:rPr>
-              <a:t>full-</a:t>
-            </a:r>
-            <a:endParaRPr lang="en-US" sz="1300" dirty="0"/>
-          </a:p>
-        </p:txBody>
-      </p:sp>
-      <p:sp>
-        <p:nvSpPr>
-          <p:cNvPr id="40" name="Shape 38"/>
-          <p:cNvSpPr/>
-          <p:nvPr/>
-        </p:nvSpPr>
-        <p:spPr>
-          <a:xfrm>
-            <a:off x="3291840" y="3584448"/>
-            <a:ext cx="1645920" cy="420624"/>
-          </a:xfrm>
-          <a:prstGeom prst="rect">
-            <a:avLst/>
-          </a:prstGeom>
-          <a:solidFill>
-            <a:srgbClr val="F8FAFC"/>
-          </a:solidFill>
-          <a:ln w="12700">
-            <a:solidFill>
-              <a:srgbClr val="E5E7EB"/>
-            </a:solidFill>
-            <a:prstDash val="solid"/>
-          </a:ln>
-        </p:spPr>
-      </p:sp>
-      <p:sp>
-        <p:nvSpPr>
-          <p:cNvPr id="41" name="Shape 39"/>
-          <p:cNvSpPr/>
-          <p:nvPr/>
-        </p:nvSpPr>
-        <p:spPr>
-          <a:xfrm>
-            <a:off x="5943600" y="3584448"/>
-            <a:ext cx="1463040" cy="420624"/>
-          </a:xfrm>
-          <a:prstGeom prst="rect">
-            <a:avLst/>
-          </a:prstGeom>
-          <a:solidFill>
-            <a:srgbClr val="FCE7F3"/>
-          </a:solidFill>
-          <a:ln w="12700">
-            <a:solidFill>
-              <a:srgbClr val="E5E7EB"/>
-            </a:solidFill>
-            <a:prstDash val="solid"/>
-          </a:ln>
-        </p:spPr>
-      </p:sp>
-      <p:sp>
-        <p:nvSpPr>
-          <p:cNvPr id="42" name="Text 40"/>
-          <p:cNvSpPr/>
-          <p:nvPr/>
-        </p:nvSpPr>
-        <p:spPr>
-          <a:xfrm>
-            <a:off x="5943600" y="3584448"/>
-            <a:ext cx="1463040" cy="420624"/>
-          </a:xfrm>
-          <a:prstGeom prst="rect">
-            <a:avLst/>
-          </a:prstGeom>
-          <a:noFill/>
-          <a:ln/>
-        </p:spPr>
-        <p:txBody>
-          <a:bodyPr wrap="square" lIns="0" tIns="0" rIns="0" bIns="0" rtlCol="0" anchor="ctr"/>
-          <a:lstStyle/>
-          <a:p>
-            <a:pPr algn="ctr" indent="0" marL="0">
-              <a:buNone/>
-            </a:pPr>
-            <a:r>
-              <a:rPr lang="en-US" sz="1300" b="1" dirty="0">
-                <a:solidFill>
-                  <a:srgbClr val="9D174D"/>
-                </a:solidFill>
-                <a:latin typeface="Trebuchet MS" pitchFamily="34" charset="0"/>
-                <a:ea typeface="Trebuchet MS" pitchFamily="34" charset="-122"/>
-                <a:cs typeface="Trebuchet MS" pitchFamily="34" charset="-120"/>
-              </a:rPr>
-              <a:t>-ation</a:t>
-            </a:r>
-            <a:endParaRPr lang="en-US" sz="1300" dirty="0"/>
-          </a:p>
-        </p:txBody>
-      </p:sp>
-      <p:sp>
-        <p:nvSpPr>
-          <p:cNvPr id="43" name="Text 41"/>
+          <p:cNvPr id="40" name="Text 38"/>
           <p:cNvSpPr/>
           <p:nvPr/>
         </p:nvSpPr>
@@ -41544,7 +42642,7 @@
       </p:sp>
       <p:sp>
         <p:nvSpPr>
-          <p:cNvPr id="44" name="Shape 42"/>
+          <p:cNvPr id="41" name="Shape 39"/>
           <p:cNvSpPr/>
           <p:nvPr/>
         </p:nvSpPr>
@@ -41578,7 +42676,7 @@
       </p:sp>
       <p:sp>
         <p:nvSpPr>
-          <p:cNvPr id="45" name="Text 43"/>
+          <p:cNvPr id="42" name="Text 40"/>
           <p:cNvSpPr/>
           <p:nvPr/>
         </p:nvSpPr>
@@ -41617,7 +42715,7 @@
       </p:sp>
       <p:sp>
         <p:nvSpPr>
-          <p:cNvPr id="46" name="Text 44"/>
+          <p:cNvPr id="43" name="Text 41"/>
           <p:cNvSpPr/>
           <p:nvPr/>
         </p:nvSpPr>
@@ -41656,7 +42754,7 @@
       </p:sp>
       <p:sp>
         <p:nvSpPr>
-          <p:cNvPr id="47" name="Shape 45"/>
+          <p:cNvPr id="44" name="Shape 42"/>
           <p:cNvSpPr/>
           <p:nvPr/>
         </p:nvSpPr>
@@ -41690,7 +42788,7 @@
       </p:sp>
       <p:sp>
         <p:nvSpPr>
-          <p:cNvPr id="48" name="Text 46"/>
+          <p:cNvPr id="45" name="Text 43"/>
           <p:cNvSpPr/>
           <p:nvPr/>
         </p:nvSpPr>
@@ -41729,7 +42827,7 @@
       </p:sp>
       <p:sp>
         <p:nvSpPr>
-          <p:cNvPr id="49" name="Text 47"/>
+          <p:cNvPr id="46" name="Text 44"/>
           <p:cNvSpPr/>
           <p:nvPr/>
         </p:nvSpPr>
@@ -41768,14 +42866,14 @@
       </p:sp>
       <p:sp>
         <p:nvSpPr>
-          <p:cNvPr id="50" name="Shape 48"/>
+          <p:cNvPr id="47" name="Shape 45"/>
           <p:cNvSpPr/>
           <p:nvPr/>
         </p:nvSpPr>
         <p:spPr>
           <a:xfrm>
             <a:off x="4745736" y="4178808"/>
-            <a:ext cx="950976" cy="420624"/>
+            <a:ext cx="822960" cy="420624"/>
           </a:xfrm>
           <a:prstGeom prst="rect">
             <a:avLst>
@@ -41802,14 +42900,14 @@
       </p:sp>
       <p:sp>
         <p:nvSpPr>
-          <p:cNvPr id="51" name="Text 49"/>
+          <p:cNvPr id="48" name="Text 46"/>
           <p:cNvSpPr/>
           <p:nvPr/>
         </p:nvSpPr>
         <p:spPr>
           <a:xfrm>
             <a:off x="4745736" y="4178808"/>
-            <a:ext cx="950976" cy="420624"/>
+            <a:ext cx="822960" cy="420624"/>
           </a:xfrm>
           <a:prstGeom prst="rect">
             <a:avLst/>
@@ -41833,7 +42931,7 @@
                 <a:ea typeface="Trebuchet MS" pitchFamily="34" charset="-122"/>
                 <a:cs typeface="Trebuchet MS" pitchFamily="34" charset="-120"/>
               </a:rPr>
-              <a:t>-ful</a:t>
+              <a:t>-ed</a:t>
             </a:r>
             <a:endParaRPr lang="en-US" sz="1300" dirty="0"/>
           </a:p>
@@ -41841,13 +42939,13 @@
       </p:sp>
       <p:sp>
         <p:nvSpPr>
-          <p:cNvPr id="52" name="Text 50"/>
-          <p:cNvSpPr/>
-          <p:nvPr/>
-        </p:nvSpPr>
-        <p:spPr>
-          <a:xfrm>
-            <a:off x="5769864" y="4178808"/>
+          <p:cNvPr id="49" name="Text 47"/>
+          <p:cNvSpPr/>
+          <p:nvPr/>
+        </p:nvSpPr>
+        <p:spPr>
+          <a:xfrm>
+            <a:off x="5641848" y="4178808"/>
             <a:ext cx="365760" cy="420624"/>
           </a:xfrm>
           <a:prstGeom prst="rect">
@@ -41880,13 +42978,13 @@
       </p:sp>
       <p:sp>
         <p:nvSpPr>
-          <p:cNvPr id="53" name="Shape 51"/>
-          <p:cNvSpPr/>
-          <p:nvPr/>
-        </p:nvSpPr>
-        <p:spPr>
-          <a:xfrm>
-            <a:off x="6181344" y="4178808"/>
+          <p:cNvPr id="50" name="Shape 48"/>
+          <p:cNvSpPr/>
+          <p:nvPr/>
+        </p:nvSpPr>
+        <p:spPr>
+          <a:xfrm>
+            <a:off x="6053328" y="4178808"/>
             <a:ext cx="2194560" cy="420624"/>
           </a:xfrm>
           <a:prstGeom prst="rect">
@@ -41907,13 +43005,13 @@
       </p:sp>
       <p:sp>
         <p:nvSpPr>
-          <p:cNvPr id="54" name="Text 52"/>
-          <p:cNvSpPr/>
-          <p:nvPr/>
-        </p:nvSpPr>
-        <p:spPr>
-          <a:xfrm>
-            <a:off x="6181344" y="4178808"/>
+          <p:cNvPr id="51" name="Text 49"/>
+          <p:cNvSpPr/>
+          <p:nvPr/>
+        </p:nvSpPr>
+        <p:spPr>
+          <a:xfrm>
+            <a:off x="6053328" y="4178808"/>
             <a:ext cx="2194560" cy="420624"/>
           </a:xfrm>
           <a:prstGeom prst="rect">
@@ -41938,7 +43036,7 @@
                 <a:ea typeface="Trebuchet MS" pitchFamily="34" charset="-122"/>
                 <a:cs typeface="Trebuchet MS" pitchFamily="34" charset="-120"/>
               </a:rPr>
-              <a:t>colourful</a:t>
+              <a:t>colour</a:t>
             </a:r>
             <a:endParaRPr lang="en-US" sz="1400" dirty="0"/>
           </a:p>
@@ -42230,7 +43328,7 @@
                 <a:ea typeface="Calibri" pitchFamily="34" charset="-122"/>
                 <a:cs typeface="Calibri" pitchFamily="34" charset="-120"/>
               </a:rPr>
-              <a:t>Word Labs  •  wordlabs.app  •  Root: 'colour' = hue, tint, or shade</a:t>
+              <a:t>Word Labs  •  wordlabs.app  •  Root: 'colour' = the property of light; to add colour</a:t>
             </a:r>
             <a:endParaRPr lang="en-US" sz="800" dirty="0"/>
           </a:p>
@@ -42342,7 +43440,7 @@
                 <a:ea typeface="Trebuchet MS" pitchFamily="34" charset="-122"/>
                 <a:cs typeface="Trebuchet MS" pitchFamily="34" charset="-120"/>
               </a:rPr>
-              <a:t>colourful</a:t>
+              <a:t>colour</a:t>
             </a:r>
             <a:endParaRPr lang="en-US" sz="1200" dirty="0"/>
           </a:p>
@@ -42408,7 +43506,7 @@
                 <a:ea typeface="Calibri" pitchFamily="34" charset="-122"/>
                 <a:cs typeface="Calibri" pitchFamily="34" charset="-120"/>
               </a:rPr>
-              <a:t>A stain or patch where something has changed to an unwanted colour.</a:t>
+              <a:t>having no colour at all</a:t>
             </a:r>
             <a:endParaRPr lang="en-US" sz="1200" dirty="0"/>
           </a:p>
@@ -42481,7 +43579,7 @@
                 <a:ea typeface="Trebuchet MS" pitchFamily="34" charset="-122"/>
                 <a:cs typeface="Trebuchet MS" pitchFamily="34" charset="-120"/>
               </a:rPr>
-              <a:t>colourless</a:t>
+              <a:t>colours</a:t>
             </a:r>
             <a:endParaRPr lang="en-US" sz="1200" dirty="0"/>
           </a:p>
@@ -42547,7 +43645,7 @@
                 <a:ea typeface="Calibri" pitchFamily="34" charset="-122"/>
                 <a:cs typeface="Calibri" pitchFamily="34" charset="-120"/>
               </a:rPr>
-              <a:t>Having many different colours all at once.</a:t>
+              <a:t>full of bright colours</a:t>
             </a:r>
             <a:endParaRPr lang="en-US" sz="1200" dirty="0"/>
           </a:p>
@@ -42620,7 +43718,7 @@
                 <a:ea typeface="Trebuchet MS" pitchFamily="34" charset="-122"/>
                 <a:cs typeface="Trebuchet MS" pitchFamily="34" charset="-120"/>
               </a:rPr>
-              <a:t>discolour</a:t>
+              <a:t>coloured</a:t>
             </a:r>
             <a:endParaRPr lang="en-US" sz="1200" dirty="0"/>
           </a:p>
@@ -42686,7 +43784,7 @@
                 <a:ea typeface="Calibri" pitchFamily="34" charset="-122"/>
                 <a:cs typeface="Calibri" pitchFamily="34" charset="-120"/>
               </a:rPr>
-              <a:t>Having had colour added or applied to it.</a:t>
+              <a:t>to change or spoil the natural colour of something</a:t>
             </a:r>
             <a:endParaRPr lang="en-US" sz="1200" dirty="0"/>
           </a:p>
@@ -42759,7 +43857,7 @@
                 <a:ea typeface="Trebuchet MS" pitchFamily="34" charset="-122"/>
                 <a:cs typeface="Trebuchet MS" pitchFamily="34" charset="-120"/>
               </a:rPr>
-              <a:t>multicoloured</a:t>
+              <a:t>colourful</a:t>
             </a:r>
             <a:endParaRPr lang="en-US" sz="1200" dirty="0"/>
           </a:p>
@@ -42825,7 +43923,7 @@
                 <a:ea typeface="Calibri" pitchFamily="34" charset="-122"/>
                 <a:cs typeface="Calibri" pitchFamily="34" charset="-120"/>
               </a:rPr>
-              <a:t>The act of adding colour to something, like a drawing.</a:t>
+              <a:t>the act of adding colour to something, or the colours something has</a:t>
             </a:r>
             <a:endParaRPr lang="en-US" sz="1200" dirty="0"/>
           </a:p>
@@ -42964,7 +44062,7 @@
                 <a:ea typeface="Calibri" pitchFamily="34" charset="-122"/>
                 <a:cs typeface="Calibri" pitchFamily="34" charset="-120"/>
               </a:rPr>
-              <a:t>Having lots of bright and vivid colours.</a:t>
+              <a:t>the property of an object that we see, such as red, blue or green</a:t>
             </a:r>
             <a:endParaRPr lang="en-US" sz="1200" dirty="0"/>
           </a:p>
@@ -43037,7 +44135,7 @@
                 <a:ea typeface="Trebuchet MS" pitchFamily="34" charset="-122"/>
                 <a:cs typeface="Trebuchet MS" pitchFamily="34" charset="-120"/>
               </a:rPr>
-              <a:t>coloured</a:t>
+              <a:t>discolour</a:t>
             </a:r>
             <a:endParaRPr lang="en-US" sz="1200" dirty="0"/>
           </a:p>
@@ -43103,7 +44201,7 @@
                 <a:ea typeface="Calibri" pitchFamily="34" charset="-122"/>
                 <a:cs typeface="Calibri" pitchFamily="34" charset="-120"/>
               </a:rPr>
-              <a:t>To change something's colour, usually making it look stained or faded.</a:t>
+              <a:t>having a particular colour, or filled in with colour</a:t>
             </a:r>
             <a:endParaRPr lang="en-US" sz="1200" dirty="0"/>
           </a:p>
@@ -43176,7 +44274,7 @@
                 <a:ea typeface="Trebuchet MS" pitchFamily="34" charset="-122"/>
                 <a:cs typeface="Trebuchet MS" pitchFamily="34" charset="-120"/>
               </a:rPr>
-              <a:t>discolouration</a:t>
+              <a:t>colourless</a:t>
             </a:r>
             <a:endParaRPr lang="en-US" sz="1200" dirty="0"/>
           </a:p>
@@ -43242,7 +44340,7 @@
                 <a:ea typeface="Calibri" pitchFamily="34" charset="-122"/>
                 <a:cs typeface="Calibri" pitchFamily="34" charset="-120"/>
               </a:rPr>
-              <a:t>Having no colour at all; appearing clear or dull.</a:t>
+              <a:t>different hues, such as red, blue and green</a:t>
             </a:r>
             <a:endParaRPr lang="en-US" sz="1200" dirty="0"/>
           </a:p>
@@ -43534,7 +44632,7 @@
                 <a:ea typeface="Calibri" pitchFamily="34" charset="-122"/>
                 <a:cs typeface="Calibri" pitchFamily="34" charset="-120"/>
               </a:rPr>
-              <a:t>Word Labs  •  wordlabs.app  •  Root: 'colour' = hue, tint, or shade</a:t>
+              <a:t>Word Labs  •  wordlabs.app  •  Root: 'colour' = the property of light; to add colour</a:t>
             </a:r>
             <a:endParaRPr lang="en-US" sz="800" dirty="0"/>
           </a:p>
@@ -43737,7 +44835,7 @@
                 <a:ea typeface="Calibri" pitchFamily="34" charset="-122"/>
                 <a:cs typeface="Calibri" pitchFamily="34" charset="-120"/>
               </a:rPr>
-              <a:t>The artist painted a colourful mural on the school wall that everyone admired.</a:t>
+              <a:t>Her favourite colour is turquoise.</a:t>
             </a:r>
             <a:endParaRPr lang="en-US" sz="1500" dirty="0"/>
           </a:p>
@@ -43901,7 +44999,7 @@
                 <a:ea typeface="Calibri" pitchFamily="34" charset="-122"/>
                 <a:cs typeface="Calibri" pitchFamily="34" charset="-120"/>
               </a:rPr>
-              <a:t>The old photograph had become discoloured and faded after sitting in the sun for years.</a:t>
+              <a:t>The rainbow had seven beautiful colours.</a:t>
             </a:r>
             <a:endParaRPr lang="en-US" sz="1500" dirty="0"/>
           </a:p>
@@ -44065,7 +45163,7 @@
                 <a:ea typeface="Calibri" pitchFamily="34" charset="-122"/>
                 <a:cs typeface="Calibri" pitchFamily="34" charset="-120"/>
               </a:rPr>
-              <a:t>She loved colouring in detailed patterns with her set of pencils.</a:t>
+              <a:t>She coloured the picture with bright crayons.</a:t>
             </a:r>
             <a:endParaRPr lang="en-US" sz="1500" dirty="0"/>
           </a:p>
